--- a/docs/apresentacoes/05-apps-fiori.pptx
+++ b/docs/apresentacoes/05-apps-fiori.pptx
@@ -120,13 +120,13 @@
   <p:extLst>
     <p:ext uri="{521415D9-36F7-43E2-AB2F-B90AF26B5E84}">
       <p14:sectionLst xmlns:p14="http://schemas.microsoft.com/office/powerpoint/2010/main">
-        <p14:section name="Abertura" id="{89303d4e-3643-9c5b-f320-4e355a3b121f}">
+        <p14:section name="Abertura" id="{7bdcec3f-c6a5-b67e-428f-ca76a991cdfe}">
           <p14:sldIdLst>
             <p14:sldId id="256"/>
             <p14:sldId id="257"/>
           </p14:sldIdLst>
         </p14:section>
-        <p14:section name="Fiori Elements" id="{f75b95aa-a234-84e5-c7a9-b3a86d8e0276}">
+        <p14:section name="Fiori Elements" id="{6dc25c47-41cb-75bb-5932-d4a585bfb5d9}">
           <p14:sldIdLst>
             <p14:sldId id="258"/>
             <p14:sldId id="259"/>
@@ -134,13 +134,13 @@
             <p14:sldId id="261"/>
           </p14:sldIdLst>
         </p14:section>
-        <p14:section name="Análises" id="{4ad9e6d8-c0ae-f0e1-f74b-a3c6e17ca7cd}">
+        <p14:section name="Análises" id="{c3f89920-05e9-7481-1dcd-ecbdc5039da4}">
           <p14:sldIdLst>
             <p14:sldId id="262"/>
             <p14:sldId id="263"/>
           </p14:sldIdLst>
         </p14:section>
-        <p14:section name="Launchpad e deploy" id="{f9e2ac4d-7f0d-2c00-d922-6790d448587b}">
+        <p14:section name="Launchpad e deploy" id="{dc8b314f-d1a9-c59f-3750-5fb4bfc5614d}">
           <p14:sldIdLst>
             <p14:sldId id="264"/>
             <p14:sldId id="265"/>
@@ -148,7 +148,7 @@
             <p14:sldId id="267"/>
           </p14:sldIdLst>
         </p14:section>
-        <p14:section name="Encerramento" id="{882b48d9-7d12-bb26-be6d-058c7be8977c}">
+        <p14:section name="Encerramento" id="{c7a41d33-0026-6044-b2e7-d75b50cf8e5b}">
           <p14:sldIdLst>
             <p14:sldId id="268"/>
             <p14:sldId id="269"/>
@@ -4481,7 +4481,7 @@
       </p:sp>
       <p:sp>
         <p:nvSpPr>
-          <p:cNvPr id="5" name="Código"/>
+          <p:cNvPr id="5" name="Editor"/>
           <p:cNvSpPr/>
           <p:nvPr/>
         </p:nvSpPr>
@@ -4496,9 +4496,14 @@
             </a:avLst>
           </a:prstGeom>
           <a:solidFill>
-            <a:srgbClr val="12171C"/>
+            <a:srgbClr val="181818"/>
           </a:solidFill>
-          <a:ln/>
+          <a:ln w="9525">
+            <a:solidFill>
+              <a:srgbClr val="2B2B2B"/>
+            </a:solidFill>
+            <a:prstDash val="solid"/>
+          </a:ln>
           <a:effectLst>
             <a:outerShdw sx="100000" sy="100000" kx="0" ky="0" algn="bl" rotWithShape="0" blurRad="101600" dist="25400" dir="5400000">
               <a:srgbClr val="223548">
@@ -4510,42 +4515,25 @@
       </p:sp>
       <p:sp>
         <p:nvSpPr>
-          <p:cNvPr id="6" name="Text 3"/>
-          <p:cNvSpPr txBox="1"/>
-          <p:nvPr/>
-        </p:nvSpPr>
-        <p:spPr>
-          <a:xfrm>
-            <a:off x="777240" y="1755648"/>
-            <a:ext cx="5303520" cy="256032"/>
-          </a:xfrm>
-          <a:prstGeom prst="rect">
-            <a:avLst/>
-          </a:prstGeom>
-          <a:noFill/>
-          <a:ln/>
-        </p:spPr>
-        <p:txBody>
-          <a:bodyPr wrap="square" lIns="0" tIns="0" rIns="0" bIns="0" rtlCol="0" anchor="ctr"/>
-          <a:lstStyle/>
-          <a:p>
-            <a:pPr indent="0" marL="0">
-              <a:buNone/>
-            </a:pPr>
-            <a:r>
-              <a:rPr lang="en-US" sz="1000" dirty="0">
-                <a:solidFill>
-                  <a:srgbClr val="A9B4BE"/>
-                </a:solidFill>
-                <a:latin typeface="Courier New" pitchFamily="34" charset="0"/>
-                <a:ea typeface="Courier New" pitchFamily="34" charset="-122"/>
-                <a:cs typeface="Courier New" pitchFamily="34" charset="-120"/>
-              </a:rPr>
-              <a:t>ui5/pedidos-compras/ui5-deploy.yaml</a:t>
-            </a:r>
-            <a:endParaRPr lang="en-US" sz="1000" dirty="0"/>
-          </a:p>
-        </p:txBody>
+          <p:cNvPr id="6" name="Área do editor"/>
+          <p:cNvSpPr/>
+          <p:nvPr/>
+        </p:nvSpPr>
+        <p:spPr>
+          <a:xfrm>
+            <a:off x="548640" y="1993392"/>
+            <a:ext cx="5760720" cy="4178808"/>
+          </a:xfrm>
+          <a:prstGeom prst="roundRect">
+            <a:avLst>
+              <a:gd name="adj" fmla="val 2188"/>
+            </a:avLst>
+          </a:prstGeom>
+          <a:solidFill>
+            <a:srgbClr val="1F1F1F"/>
+          </a:solidFill>
+          <a:ln/>
+        </p:spPr>
       </p:sp>
       <p:sp>
         <p:nvSpPr>
@@ -4555,16 +4543,36 @@
         </p:nvSpPr>
         <p:spPr>
           <a:xfrm>
-            <a:off x="777240" y="2066544"/>
-            <a:ext cx="5303520" cy="0"/>
+            <a:off x="557784" y="1993392"/>
+            <a:ext cx="5742432" cy="137160"/>
+          </a:xfrm>
+          <a:prstGeom prst="rect">
+            <a:avLst/>
+          </a:prstGeom>
+          <a:solidFill>
+            <a:srgbClr val="1F1F1F"/>
+          </a:solidFill>
+          <a:ln/>
+        </p:spPr>
+      </p:sp>
+      <p:sp>
+        <p:nvSpPr>
+          <p:cNvPr id="8" name="Shape 5"/>
+          <p:cNvSpPr/>
+          <p:nvPr/>
+        </p:nvSpPr>
+        <p:spPr>
+          <a:xfrm>
+            <a:off x="557784" y="1993392"/>
+            <a:ext cx="5742432" cy="0"/>
           </a:xfrm>
           <a:prstGeom prst="line">
             <a:avLst/>
           </a:prstGeom>
           <a:noFill/>
-          <a:ln w="12700">
+          <a:ln w="9525">
             <a:solidFill>
-              <a:srgbClr val="2E3A46"/>
+              <a:srgbClr val="2B2B2B"/>
             </a:solidFill>
             <a:prstDash val="solid"/>
           </a:ln>
@@ -4572,14 +4580,75 @@
       </p:sp>
       <p:sp>
         <p:nvSpPr>
-          <p:cNvPr id="8" name="Trecho de código"/>
+          <p:cNvPr id="9" name="Aba ui5-deploy.yaml"/>
+          <p:cNvSpPr/>
+          <p:nvPr/>
+        </p:nvSpPr>
+        <p:spPr>
+          <a:xfrm>
+            <a:off x="640080" y="1719072"/>
+            <a:ext cx="1531620" cy="274320"/>
+          </a:xfrm>
+          <a:prstGeom prst="rect">
+            <a:avLst/>
+          </a:prstGeom>
+          <a:solidFill>
+            <a:srgbClr val="1F1F1F"/>
+          </a:solidFill>
+          <a:ln/>
+        </p:spPr>
+        <p:txBody>
+          <a:bodyPr wrap="square" lIns="0" tIns="0" rIns="0" bIns="0" rtlCol="0" anchor="ctr"/>
+          <a:lstStyle/>
+          <a:p>
+            <a:pPr algn="ctr" indent="0" marL="0">
+              <a:buNone/>
+            </a:pPr>
+            <a:r>
+              <a:rPr lang="en-US" sz="1000" dirty="0">
+                <a:solidFill>
+                  <a:srgbClr val="FFFFFF"/>
+                </a:solidFill>
+              </a:rPr>
+              <a:t>ui5-deploy.yaml</a:t>
+            </a:r>
+            <a:endParaRPr lang="en-US" sz="1000" dirty="0"/>
+          </a:p>
+        </p:txBody>
+      </p:sp>
+      <p:sp>
+        <p:nvSpPr>
+          <p:cNvPr id="10" name="Shape 7"/>
+          <p:cNvSpPr/>
+          <p:nvPr/>
+        </p:nvSpPr>
+        <p:spPr>
+          <a:xfrm>
+            <a:off x="640080" y="1719072"/>
+            <a:ext cx="1531620" cy="0"/>
+          </a:xfrm>
+          <a:prstGeom prst="line">
+            <a:avLst/>
+          </a:prstGeom>
+          <a:noFill/>
+          <a:ln w="19050">
+            <a:solidFill>
+              <a:srgbClr val="0078D4"/>
+            </a:solidFill>
+            <a:prstDash val="solid"/>
+          </a:ln>
+        </p:spPr>
+      </p:sp>
+      <p:sp>
+        <p:nvSpPr>
+          <p:cNvPr id="11" name="Breadcrumb"/>
           <p:cNvSpPr txBox="1"/>
           <p:nvPr/>
         </p:nvSpPr>
         <p:spPr>
           <a:xfrm>
-            <a:off x="777240" y="2157984"/>
-            <a:ext cx="5303520" cy="3904488"/>
+            <a:off x="777240" y="2103120"/>
+            <a:ext cx="5303520" cy="219456"/>
           </a:xfrm>
           <a:prstGeom prst="rect">
             <a:avLst/>
@@ -4588,6 +4657,86 @@
           <a:ln/>
         </p:spPr>
         <p:txBody>
+          <a:bodyPr wrap="square" lIns="0" tIns="0" rIns="0" bIns="0" rtlCol="0" anchor="ctr"/>
+          <a:lstStyle/>
+          <a:p>
+            <a:pPr indent="0" marL="0">
+              <a:buNone/>
+            </a:pPr>
+            <a:r>
+              <a:rPr lang="en-US" sz="900" dirty="0">
+                <a:solidFill>
+                  <a:srgbClr val="A9A9A9"/>
+                </a:solidFill>
+              </a:rPr>
+              <a:t>ui5</a:t>
+            </a:r>
+            <a:pPr indent="0" marL="0">
+              <a:buNone/>
+            </a:pPr>
+            <a:r>
+              <a:rPr lang="en-US" sz="900" dirty="0">
+                <a:solidFill>
+                  <a:srgbClr val="6E7681"/>
+                </a:solidFill>
+              </a:rPr>
+              <a:t>  ›  </a:t>
+            </a:r>
+            <a:pPr indent="0" marL="0">
+              <a:buNone/>
+            </a:pPr>
+            <a:r>
+              <a:rPr lang="en-US" sz="900" dirty="0">
+                <a:solidFill>
+                  <a:srgbClr val="A9A9A9"/>
+                </a:solidFill>
+              </a:rPr>
+              <a:t>pedidos-compras</a:t>
+            </a:r>
+            <a:pPr indent="0" marL="0">
+              <a:buNone/>
+            </a:pPr>
+            <a:r>
+              <a:rPr lang="en-US" sz="900" dirty="0">
+                <a:solidFill>
+                  <a:srgbClr val="6E7681"/>
+                </a:solidFill>
+              </a:rPr>
+              <a:t>  ›  </a:t>
+            </a:r>
+            <a:pPr indent="0" marL="0">
+              <a:buNone/>
+            </a:pPr>
+            <a:r>
+              <a:rPr lang="en-US" sz="900" dirty="0">
+                <a:solidFill>
+                  <a:srgbClr val="A9A9A9"/>
+                </a:solidFill>
+              </a:rPr>
+              <a:t>ui5-deploy.yaml</a:t>
+            </a:r>
+            <a:endParaRPr lang="en-US" sz="900" dirty="0"/>
+          </a:p>
+        </p:txBody>
+      </p:sp>
+      <p:sp>
+        <p:nvSpPr>
+          <p:cNvPr id="12" name="Trecho de código"/>
+          <p:cNvSpPr txBox="1"/>
+          <p:nvPr/>
+        </p:nvSpPr>
+        <p:spPr>
+          <a:xfrm>
+            <a:off x="731520" y="2414016"/>
+            <a:ext cx="5440680" cy="3666744"/>
+          </a:xfrm>
+          <a:prstGeom prst="rect">
+            <a:avLst/>
+          </a:prstGeom>
+          <a:noFill/>
+          <a:ln/>
+        </p:spPr>
+        <p:txBody>
           <a:bodyPr wrap="square" lIns="0" tIns="0" rIns="0" bIns="0" rtlCol="0" anchor="t"/>
           <a:lstStyle/>
           <a:p>
@@ -4600,7 +4749,24 @@
             <a:r>
               <a:rPr lang="en-US" sz="1150" dirty="0">
                 <a:solidFill>
-                  <a:srgbClr val="4DB1FF"/>
+                  <a:srgbClr val="6E7681"/>
+                </a:solidFill>
+                <a:latin typeface="Courier New" pitchFamily="34" charset="0"/>
+                <a:ea typeface="Courier New" pitchFamily="34" charset="-122"/>
+                <a:cs typeface="Courier New" pitchFamily="34" charset="-120"/>
+              </a:rPr>
+              <a:t> 1  </a:t>
+            </a:r>
+            <a:pPr indent="0" marL="0">
+              <a:lnSpc>
+                <a:spcPct val="105000"/>
+              </a:lnSpc>
+              <a:buNone/>
+            </a:pPr>
+            <a:r>
+              <a:rPr lang="en-US" sz="1150" dirty="0">
+                <a:solidFill>
+                  <a:srgbClr val="569CD6"/>
                 </a:solidFill>
                 <a:latin typeface="Courier New" pitchFamily="34" charset="0"/>
                 <a:ea typeface="Courier New" pitchFamily="34" charset="-122"/>
@@ -4617,7 +4783,7 @@
             <a:r>
               <a:rPr lang="en-US" sz="1150" dirty="0">
                 <a:solidFill>
-                  <a:srgbClr val="E8ECEF"/>
+                  <a:srgbClr val="CCCCCC"/>
                 </a:solidFill>
                 <a:latin typeface="Courier New" pitchFamily="34" charset="0"/>
                 <a:ea typeface="Courier New" pitchFamily="34" charset="-122"/>
@@ -4637,13 +4803,13 @@
             <a:r>
               <a:rPr lang="en-US" sz="1150" dirty="0">
                 <a:solidFill>
-                  <a:srgbClr val="E8ECEF"/>
-                </a:solidFill>
-                <a:latin typeface="Courier New" pitchFamily="34" charset="0"/>
-                <a:ea typeface="Courier New" pitchFamily="34" charset="-122"/>
-                <a:cs typeface="Courier New" pitchFamily="34" charset="-120"/>
-              </a:rPr>
-              <a:t>  - </a:t>
+                  <a:srgbClr val="6E7681"/>
+                </a:solidFill>
+                <a:latin typeface="Courier New" pitchFamily="34" charset="0"/>
+                <a:ea typeface="Courier New" pitchFamily="34" charset="-122"/>
+                <a:cs typeface="Courier New" pitchFamily="34" charset="-120"/>
+              </a:rPr>
+              <a:t> 2  </a:t>
             </a:r>
             <a:pPr indent="0" marL="0">
               <a:lnSpc>
@@ -4654,7 +4820,58 @@
             <a:r>
               <a:rPr lang="en-US" sz="1150" dirty="0">
                 <a:solidFill>
-                  <a:srgbClr val="4DB1FF"/>
+                  <a:srgbClr val="CCCCCC"/>
+                </a:solidFill>
+                <a:latin typeface="Courier New" pitchFamily="34" charset="0"/>
+                <a:ea typeface="Courier New" pitchFamily="34" charset="-122"/>
+                <a:cs typeface="Courier New" pitchFamily="34" charset="-120"/>
+              </a:rPr>
+              <a:t>  </a:t>
+            </a:r>
+            <a:pPr indent="0" marL="0">
+              <a:lnSpc>
+                <a:spcPct val="105000"/>
+              </a:lnSpc>
+              <a:buNone/>
+            </a:pPr>
+            <a:r>
+              <a:rPr lang="en-US" sz="1150" dirty="0">
+                <a:solidFill>
+                  <a:srgbClr val="CCCCCC"/>
+                </a:solidFill>
+                <a:latin typeface="Courier New" pitchFamily="34" charset="0"/>
+                <a:ea typeface="Courier New" pitchFamily="34" charset="-122"/>
+                <a:cs typeface="Courier New" pitchFamily="34" charset="-120"/>
+              </a:rPr>
+              <a:t>-</a:t>
+            </a:r>
+            <a:pPr indent="0" marL="0">
+              <a:lnSpc>
+                <a:spcPct val="105000"/>
+              </a:lnSpc>
+              <a:buNone/>
+            </a:pPr>
+            <a:r>
+              <a:rPr lang="en-US" sz="1150" dirty="0">
+                <a:solidFill>
+                  <a:srgbClr val="CCCCCC"/>
+                </a:solidFill>
+                <a:latin typeface="Courier New" pitchFamily="34" charset="0"/>
+                <a:ea typeface="Courier New" pitchFamily="34" charset="-122"/>
+                <a:cs typeface="Courier New" pitchFamily="34" charset="-120"/>
+              </a:rPr>
+              <a:t> </a:t>
+            </a:r>
+            <a:pPr indent="0" marL="0">
+              <a:lnSpc>
+                <a:spcPct val="105000"/>
+              </a:lnSpc>
+              <a:buNone/>
+            </a:pPr>
+            <a:r>
+              <a:rPr lang="en-US" sz="1150" dirty="0">
+                <a:solidFill>
+                  <a:srgbClr val="569CD6"/>
                 </a:solidFill>
                 <a:latin typeface="Courier New" pitchFamily="34" charset="0"/>
                 <a:ea typeface="Courier New" pitchFamily="34" charset="-122"/>
@@ -4671,7 +4888,7 @@
             <a:r>
               <a:rPr lang="en-US" sz="1150" dirty="0">
                 <a:solidFill>
-                  <a:srgbClr val="E8ECEF"/>
+                  <a:srgbClr val="CCCCCC"/>
                 </a:solidFill>
                 <a:latin typeface="Courier New" pitchFamily="34" charset="0"/>
                 <a:ea typeface="Courier New" pitchFamily="34" charset="-122"/>
@@ -4688,7 +4905,7 @@
             <a:r>
               <a:rPr lang="en-US" sz="1150" dirty="0">
                 <a:solidFill>
-                  <a:srgbClr val="E8ECEF"/>
+                  <a:srgbClr val="CCCCCC"/>
                 </a:solidFill>
                 <a:latin typeface="Courier New" pitchFamily="34" charset="0"/>
                 <a:ea typeface="Courier New" pitchFamily="34" charset="-122"/>
@@ -4705,7 +4922,7 @@
             <a:r>
               <a:rPr lang="en-US" sz="1150" dirty="0">
                 <a:solidFill>
-                  <a:srgbClr val="E8ECEF"/>
+                  <a:srgbClr val="CE9178"/>
                 </a:solidFill>
                 <a:latin typeface="Courier New" pitchFamily="34" charset="0"/>
                 <a:ea typeface="Courier New" pitchFamily="34" charset="-122"/>
@@ -4725,7 +4942,24 @@
             <a:r>
               <a:rPr lang="en-US" sz="1150" dirty="0">
                 <a:solidFill>
-                  <a:srgbClr val="E8ECEF"/>
+                  <a:srgbClr val="6E7681"/>
+                </a:solidFill>
+                <a:latin typeface="Courier New" pitchFamily="34" charset="0"/>
+                <a:ea typeface="Courier New" pitchFamily="34" charset="-122"/>
+                <a:cs typeface="Courier New" pitchFamily="34" charset="-120"/>
+              </a:rPr>
+              <a:t> 3  </a:t>
+            </a:r>
+            <a:pPr indent="0" marL="0">
+              <a:lnSpc>
+                <a:spcPct val="105000"/>
+              </a:lnSpc>
+              <a:buNone/>
+            </a:pPr>
+            <a:r>
+              <a:rPr lang="en-US" sz="1150" dirty="0">
+                <a:solidFill>
+                  <a:srgbClr val="CCCCCC"/>
                 </a:solidFill>
                 <a:latin typeface="Courier New" pitchFamily="34" charset="0"/>
                 <a:ea typeface="Courier New" pitchFamily="34" charset="-122"/>
@@ -4742,7 +4976,7 @@
             <a:r>
               <a:rPr lang="en-US" sz="1150" dirty="0">
                 <a:solidFill>
-                  <a:srgbClr val="4DB1FF"/>
+                  <a:srgbClr val="569CD6"/>
                 </a:solidFill>
                 <a:latin typeface="Courier New" pitchFamily="34" charset="0"/>
                 <a:ea typeface="Courier New" pitchFamily="34" charset="-122"/>
@@ -4759,7 +4993,7 @@
             <a:r>
               <a:rPr lang="en-US" sz="1150" dirty="0">
                 <a:solidFill>
-                  <a:srgbClr val="E8ECEF"/>
+                  <a:srgbClr val="CCCCCC"/>
                 </a:solidFill>
                 <a:latin typeface="Courier New" pitchFamily="34" charset="0"/>
                 <a:ea typeface="Courier New" pitchFamily="34" charset="-122"/>
@@ -4776,7 +5010,7 @@
             <a:r>
               <a:rPr lang="en-US" sz="1150" dirty="0">
                 <a:solidFill>
-                  <a:srgbClr val="E8ECEF"/>
+                  <a:srgbClr val="CCCCCC"/>
                 </a:solidFill>
                 <a:latin typeface="Courier New" pitchFamily="34" charset="0"/>
                 <a:ea typeface="Courier New" pitchFamily="34" charset="-122"/>
@@ -4793,7 +5027,7 @@
             <a:r>
               <a:rPr lang="en-US" sz="1150" dirty="0">
                 <a:solidFill>
-                  <a:srgbClr val="E8ECEF"/>
+                  <a:srgbClr val="CE9178"/>
                 </a:solidFill>
                 <a:latin typeface="Courier New" pitchFamily="34" charset="0"/>
                 <a:ea typeface="Courier New" pitchFamily="34" charset="-122"/>
@@ -4813,7 +5047,24 @@
             <a:r>
               <a:rPr lang="en-US" sz="1150" dirty="0">
                 <a:solidFill>
-                  <a:srgbClr val="E8ECEF"/>
+                  <a:srgbClr val="6E7681"/>
+                </a:solidFill>
+                <a:latin typeface="Courier New" pitchFamily="34" charset="0"/>
+                <a:ea typeface="Courier New" pitchFamily="34" charset="-122"/>
+                <a:cs typeface="Courier New" pitchFamily="34" charset="-120"/>
+              </a:rPr>
+              <a:t> 4  </a:t>
+            </a:r>
+            <a:pPr indent="0" marL="0">
+              <a:lnSpc>
+                <a:spcPct val="105000"/>
+              </a:lnSpc>
+              <a:buNone/>
+            </a:pPr>
+            <a:r>
+              <a:rPr lang="en-US" sz="1150" dirty="0">
+                <a:solidFill>
+                  <a:srgbClr val="CCCCCC"/>
                 </a:solidFill>
                 <a:latin typeface="Courier New" pitchFamily="34" charset="0"/>
                 <a:ea typeface="Courier New" pitchFamily="34" charset="-122"/>
@@ -4830,7 +5081,7 @@
             <a:r>
               <a:rPr lang="en-US" sz="1150" dirty="0">
                 <a:solidFill>
-                  <a:srgbClr val="4DB1FF"/>
+                  <a:srgbClr val="569CD6"/>
                 </a:solidFill>
                 <a:latin typeface="Courier New" pitchFamily="34" charset="0"/>
                 <a:ea typeface="Courier New" pitchFamily="34" charset="-122"/>
@@ -4847,7 +5098,7 @@
             <a:r>
               <a:rPr lang="en-US" sz="1150" dirty="0">
                 <a:solidFill>
-                  <a:srgbClr val="E8ECEF"/>
+                  <a:srgbClr val="CCCCCC"/>
                 </a:solidFill>
                 <a:latin typeface="Courier New" pitchFamily="34" charset="0"/>
                 <a:ea typeface="Courier New" pitchFamily="34" charset="-122"/>
@@ -4867,7 +5118,24 @@
             <a:r>
               <a:rPr lang="en-US" sz="1150" dirty="0">
                 <a:solidFill>
-                  <a:srgbClr val="E8ECEF"/>
+                  <a:srgbClr val="6E7681"/>
+                </a:solidFill>
+                <a:latin typeface="Courier New" pitchFamily="34" charset="0"/>
+                <a:ea typeface="Courier New" pitchFamily="34" charset="-122"/>
+                <a:cs typeface="Courier New" pitchFamily="34" charset="-120"/>
+              </a:rPr>
+              <a:t> 5  </a:t>
+            </a:r>
+            <a:pPr indent="0" marL="0">
+              <a:lnSpc>
+                <a:spcPct val="105000"/>
+              </a:lnSpc>
+              <a:buNone/>
+            </a:pPr>
+            <a:r>
+              <a:rPr lang="en-US" sz="1150" dirty="0">
+                <a:solidFill>
+                  <a:srgbClr val="CCCCCC"/>
                 </a:solidFill>
                 <a:latin typeface="Courier New" pitchFamily="34" charset="0"/>
                 <a:ea typeface="Courier New" pitchFamily="34" charset="-122"/>
@@ -4884,7 +5152,7 @@
             <a:r>
               <a:rPr lang="en-US" sz="1150" dirty="0">
                 <a:solidFill>
-                  <a:srgbClr val="4DB1FF"/>
+                  <a:srgbClr val="569CD6"/>
                 </a:solidFill>
                 <a:latin typeface="Courier New" pitchFamily="34" charset="0"/>
                 <a:ea typeface="Courier New" pitchFamily="34" charset="-122"/>
@@ -4901,7 +5169,7 @@
             <a:r>
               <a:rPr lang="en-US" sz="1150" dirty="0">
                 <a:solidFill>
-                  <a:srgbClr val="E8ECEF"/>
+                  <a:srgbClr val="CCCCCC"/>
                 </a:solidFill>
                 <a:latin typeface="Courier New" pitchFamily="34" charset="0"/>
                 <a:ea typeface="Courier New" pitchFamily="34" charset="-122"/>
@@ -4921,7 +5189,24 @@
             <a:r>
               <a:rPr lang="en-US" sz="1150" dirty="0">
                 <a:solidFill>
-                  <a:srgbClr val="E8ECEF"/>
+                  <a:srgbClr val="6E7681"/>
+                </a:solidFill>
+                <a:latin typeface="Courier New" pitchFamily="34" charset="0"/>
+                <a:ea typeface="Courier New" pitchFamily="34" charset="-122"/>
+                <a:cs typeface="Courier New" pitchFamily="34" charset="-120"/>
+              </a:rPr>
+              <a:t> 6  </a:t>
+            </a:r>
+            <a:pPr indent="0" marL="0">
+              <a:lnSpc>
+                <a:spcPct val="105000"/>
+              </a:lnSpc>
+              <a:buNone/>
+            </a:pPr>
+            <a:r>
+              <a:rPr lang="en-US" sz="1150" dirty="0">
+                <a:solidFill>
+                  <a:srgbClr val="CCCCCC"/>
                 </a:solidFill>
                 <a:latin typeface="Courier New" pitchFamily="34" charset="0"/>
                 <a:ea typeface="Courier New" pitchFamily="34" charset="-122"/>
@@ -4938,7 +5223,7 @@
             <a:r>
               <a:rPr lang="en-US" sz="1150" dirty="0">
                 <a:solidFill>
-                  <a:srgbClr val="4DB1FF"/>
+                  <a:srgbClr val="569CD6"/>
                 </a:solidFill>
                 <a:latin typeface="Courier New" pitchFamily="34" charset="0"/>
                 <a:ea typeface="Courier New" pitchFamily="34" charset="-122"/>
@@ -4955,7 +5240,7 @@
             <a:r>
               <a:rPr lang="en-US" sz="1150" dirty="0">
                 <a:solidFill>
-                  <a:srgbClr val="E8ECEF"/>
+                  <a:srgbClr val="CCCCCC"/>
                 </a:solidFill>
                 <a:latin typeface="Courier New" pitchFamily="34" charset="0"/>
                 <a:ea typeface="Courier New" pitchFamily="34" charset="-122"/>
@@ -4972,7 +5257,7 @@
             <a:r>
               <a:rPr lang="en-US" sz="1150" dirty="0">
                 <a:solidFill>
-                  <a:srgbClr val="E8ECEF"/>
+                  <a:srgbClr val="CCCCCC"/>
                 </a:solidFill>
                 <a:latin typeface="Courier New" pitchFamily="34" charset="0"/>
                 <a:ea typeface="Courier New" pitchFamily="34" charset="-122"/>
@@ -4989,14 +5274,17 @@
             <a:r>
               <a:rPr lang="en-US" sz="1150" dirty="0">
                 <a:solidFill>
-                  <a:srgbClr val="4DB1FF"/>
-                </a:solidFill>
-                <a:latin typeface="Courier New" pitchFamily="34" charset="0"/>
-                <a:ea typeface="Courier New" pitchFamily="34" charset="-122"/>
-                <a:cs typeface="Courier New" pitchFamily="34" charset="-120"/>
-              </a:rPr>
-              <a:t>https</a:t>
-            </a:r>
+                  <a:srgbClr val="CE9178"/>
+                </a:solidFill>
+                <a:latin typeface="Courier New" pitchFamily="34" charset="0"/>
+                <a:ea typeface="Courier New" pitchFamily="34" charset="-122"/>
+                <a:cs typeface="Courier New" pitchFamily="34" charset="-120"/>
+              </a:rPr>
+              <a:t>https://&lt;id&gt;.abap.us10.hana.ondemand.com</a:t>
+            </a:r>
+            <a:endParaRPr lang="en-US" sz="1150" dirty="0"/>
+          </a:p>
+          <a:p>
             <a:pPr indent="0" marL="0">
               <a:lnSpc>
                 <a:spcPct val="105000"/>
@@ -5006,7 +5294,58 @@
             <a:r>
               <a:rPr lang="en-US" sz="1150" dirty="0">
                 <a:solidFill>
-                  <a:srgbClr val="E8ECEF"/>
+                  <a:srgbClr val="6E7681"/>
+                </a:solidFill>
+                <a:latin typeface="Courier New" pitchFamily="34" charset="0"/>
+                <a:ea typeface="Courier New" pitchFamily="34" charset="-122"/>
+                <a:cs typeface="Courier New" pitchFamily="34" charset="-120"/>
+              </a:rPr>
+              <a:t> 7  </a:t>
+            </a:r>
+            <a:pPr indent="0" marL="0">
+              <a:lnSpc>
+                <a:spcPct val="105000"/>
+              </a:lnSpc>
+              <a:buNone/>
+            </a:pPr>
+            <a:r>
+              <a:rPr lang="en-US" sz="1150" dirty="0">
+                <a:solidFill>
+                  <a:srgbClr val="CCCCCC"/>
+                </a:solidFill>
+                <a:latin typeface="Courier New" pitchFamily="34" charset="0"/>
+                <a:ea typeface="Courier New" pitchFamily="34" charset="-122"/>
+                <a:cs typeface="Courier New" pitchFamily="34" charset="-120"/>
+              </a:rPr>
+              <a:t>        </a:t>
+            </a:r>
+            <a:pPr indent="0" marL="0">
+              <a:lnSpc>
+                <a:spcPct val="105000"/>
+              </a:lnSpc>
+              <a:buNone/>
+            </a:pPr>
+            <a:r>
+              <a:rPr lang="en-US" sz="1150" dirty="0">
+                <a:solidFill>
+                  <a:srgbClr val="569CD6"/>
+                </a:solidFill>
+                <a:latin typeface="Courier New" pitchFamily="34" charset="0"/>
+                <a:ea typeface="Courier New" pitchFamily="34" charset="-122"/>
+                <a:cs typeface="Courier New" pitchFamily="34" charset="-120"/>
+              </a:rPr>
+              <a:t>client</a:t>
+            </a:r>
+            <a:pPr indent="0" marL="0">
+              <a:lnSpc>
+                <a:spcPct val="105000"/>
+              </a:lnSpc>
+              <a:buNone/>
+            </a:pPr>
+            <a:r>
+              <a:rPr lang="en-US" sz="1150" dirty="0">
+                <a:solidFill>
+                  <a:srgbClr val="CCCCCC"/>
                 </a:solidFill>
                 <a:latin typeface="Courier New" pitchFamily="34" charset="0"/>
                 <a:ea typeface="Courier New" pitchFamily="34" charset="-122"/>
@@ -5021,15 +5360,32 @@
               <a:buNone/>
             </a:pPr>
             <a:r>
-              <a:rPr lang="en-US" sz="1150" i="1" dirty="0">
-                <a:solidFill>
-                  <a:srgbClr val="8396A8"/>
-                </a:solidFill>
-                <a:latin typeface="Courier New" pitchFamily="34" charset="0"/>
-                <a:ea typeface="Courier New" pitchFamily="34" charset="-122"/>
-                <a:cs typeface="Courier New" pitchFamily="34" charset="-120"/>
-              </a:rPr>
-              <a:t>//&lt;id&gt;.abap.us10.hana.ondemand.com</a:t>
+              <a:rPr lang="en-US" sz="1150" dirty="0">
+                <a:solidFill>
+                  <a:srgbClr val="CCCCCC"/>
+                </a:solidFill>
+                <a:latin typeface="Courier New" pitchFamily="34" charset="0"/>
+                <a:ea typeface="Courier New" pitchFamily="34" charset="-122"/>
+                <a:cs typeface="Courier New" pitchFamily="34" charset="-120"/>
+              </a:rPr>
+              <a:t> </a:t>
+            </a:r>
+            <a:pPr indent="0" marL="0">
+              <a:lnSpc>
+                <a:spcPct val="105000"/>
+              </a:lnSpc>
+              <a:buNone/>
+            </a:pPr>
+            <a:r>
+              <a:rPr lang="en-US" sz="1150" dirty="0">
+                <a:solidFill>
+                  <a:srgbClr val="CE9178"/>
+                </a:solidFill>
+                <a:latin typeface="Courier New" pitchFamily="34" charset="0"/>
+                <a:ea typeface="Courier New" pitchFamily="34" charset="-122"/>
+                <a:cs typeface="Courier New" pitchFamily="34" charset="-120"/>
+              </a:rPr>
+              <a:t>"100"</a:t>
             </a:r>
             <a:endParaRPr lang="en-US" sz="1150" dirty="0"/>
           </a:p>
@@ -5043,7 +5399,24 @@
             <a:r>
               <a:rPr lang="en-US" sz="1150" dirty="0">
                 <a:solidFill>
-                  <a:srgbClr val="E8ECEF"/>
+                  <a:srgbClr val="6E7681"/>
+                </a:solidFill>
+                <a:latin typeface="Courier New" pitchFamily="34" charset="0"/>
+                <a:ea typeface="Courier New" pitchFamily="34" charset="-122"/>
+                <a:cs typeface="Courier New" pitchFamily="34" charset="-120"/>
+              </a:rPr>
+              <a:t> 8  </a:t>
+            </a:r>
+            <a:pPr indent="0" marL="0">
+              <a:lnSpc>
+                <a:spcPct val="105000"/>
+              </a:lnSpc>
+              <a:buNone/>
+            </a:pPr>
+            <a:r>
+              <a:rPr lang="en-US" sz="1150" dirty="0">
+                <a:solidFill>
+                  <a:srgbClr val="CCCCCC"/>
                 </a:solidFill>
                 <a:latin typeface="Courier New" pitchFamily="34" charset="0"/>
                 <a:ea typeface="Courier New" pitchFamily="34" charset="-122"/>
@@ -5060,13 +5433,13 @@
             <a:r>
               <a:rPr lang="en-US" sz="1150" dirty="0">
                 <a:solidFill>
-                  <a:srgbClr val="4DB1FF"/>
-                </a:solidFill>
-                <a:latin typeface="Courier New" pitchFamily="34" charset="0"/>
-                <a:ea typeface="Courier New" pitchFamily="34" charset="-122"/>
-                <a:cs typeface="Courier New" pitchFamily="34" charset="-120"/>
-              </a:rPr>
-              <a:t>client</a:t>
+                  <a:srgbClr val="569CD6"/>
+                </a:solidFill>
+                <a:latin typeface="Courier New" pitchFamily="34" charset="0"/>
+                <a:ea typeface="Courier New" pitchFamily="34" charset="-122"/>
+                <a:cs typeface="Courier New" pitchFamily="34" charset="-120"/>
+              </a:rPr>
+              <a:t>authenticationType</a:t>
             </a:r>
             <a:pPr indent="0" marL="0">
               <a:lnSpc>
@@ -5077,7 +5450,7 @@
             <a:r>
               <a:rPr lang="en-US" sz="1150" dirty="0">
                 <a:solidFill>
-                  <a:srgbClr val="E8ECEF"/>
+                  <a:srgbClr val="CCCCCC"/>
                 </a:solidFill>
                 <a:latin typeface="Courier New" pitchFamily="34" charset="0"/>
                 <a:ea typeface="Courier New" pitchFamily="34" charset="-122"/>
@@ -5094,7 +5467,7 @@
             <a:r>
               <a:rPr lang="en-US" sz="1150" dirty="0">
                 <a:solidFill>
-                  <a:srgbClr val="E8ECEF"/>
+                  <a:srgbClr val="CCCCCC"/>
                 </a:solidFill>
                 <a:latin typeface="Courier New" pitchFamily="34" charset="0"/>
                 <a:ea typeface="Courier New" pitchFamily="34" charset="-122"/>
@@ -5111,13 +5484,13 @@
             <a:r>
               <a:rPr lang="en-US" sz="1150" dirty="0">
                 <a:solidFill>
-                  <a:srgbClr val="8FD694"/>
-                </a:solidFill>
-                <a:latin typeface="Courier New" pitchFamily="34" charset="0"/>
-                <a:ea typeface="Courier New" pitchFamily="34" charset="-122"/>
-                <a:cs typeface="Courier New" pitchFamily="34" charset="-120"/>
-              </a:rPr>
-              <a:t>"100"</a:t>
+                  <a:srgbClr val="CE9178"/>
+                </a:solidFill>
+                <a:latin typeface="Courier New" pitchFamily="34" charset="0"/>
+                <a:ea typeface="Courier New" pitchFamily="34" charset="-122"/>
+                <a:cs typeface="Courier New" pitchFamily="34" charset="-120"/>
+              </a:rPr>
+              <a:t>reentranceTicket</a:t>
             </a:r>
             <a:endParaRPr lang="en-US" sz="1150" dirty="0"/>
           </a:p>
@@ -5131,7 +5504,95 @@
             <a:r>
               <a:rPr lang="en-US" sz="1150" dirty="0">
                 <a:solidFill>
-                  <a:srgbClr val="E8ECEF"/>
+                  <a:srgbClr val="6E7681"/>
+                </a:solidFill>
+                <a:latin typeface="Courier New" pitchFamily="34" charset="0"/>
+                <a:ea typeface="Courier New" pitchFamily="34" charset="-122"/>
+                <a:cs typeface="Courier New" pitchFamily="34" charset="-120"/>
+              </a:rPr>
+              <a:t> 9  </a:t>
+            </a:r>
+            <a:pPr indent="0" marL="0">
+              <a:lnSpc>
+                <a:spcPct val="105000"/>
+              </a:lnSpc>
+              <a:buNone/>
+            </a:pPr>
+            <a:r>
+              <a:rPr lang="en-US" sz="1150" dirty="0">
+                <a:solidFill>
+                  <a:srgbClr val="CCCCCC"/>
+                </a:solidFill>
+                <a:latin typeface="Courier New" pitchFamily="34" charset="0"/>
+                <a:ea typeface="Courier New" pitchFamily="34" charset="-122"/>
+                <a:cs typeface="Courier New" pitchFamily="34" charset="-120"/>
+              </a:rPr>
+              <a:t>      </a:t>
+            </a:r>
+            <a:pPr indent="0" marL="0">
+              <a:lnSpc>
+                <a:spcPct val="105000"/>
+              </a:lnSpc>
+              <a:buNone/>
+            </a:pPr>
+            <a:r>
+              <a:rPr lang="en-US" sz="1150" dirty="0">
+                <a:solidFill>
+                  <a:srgbClr val="569CD6"/>
+                </a:solidFill>
+                <a:latin typeface="Courier New" pitchFamily="34" charset="0"/>
+                <a:ea typeface="Courier New" pitchFamily="34" charset="-122"/>
+                <a:cs typeface="Courier New" pitchFamily="34" charset="-120"/>
+              </a:rPr>
+              <a:t>app</a:t>
+            </a:r>
+            <a:pPr indent="0" marL="0">
+              <a:lnSpc>
+                <a:spcPct val="105000"/>
+              </a:lnSpc>
+              <a:buNone/>
+            </a:pPr>
+            <a:r>
+              <a:rPr lang="en-US" sz="1150" dirty="0">
+                <a:solidFill>
+                  <a:srgbClr val="CCCCCC"/>
+                </a:solidFill>
+                <a:latin typeface="Courier New" pitchFamily="34" charset="0"/>
+                <a:ea typeface="Courier New" pitchFamily="34" charset="-122"/>
+                <a:cs typeface="Courier New" pitchFamily="34" charset="-120"/>
+              </a:rPr>
+              <a:t>:</a:t>
+            </a:r>
+            <a:endParaRPr lang="en-US" sz="1150" dirty="0"/>
+          </a:p>
+          <a:p>
+            <a:pPr indent="0" marL="0">
+              <a:lnSpc>
+                <a:spcPct val="105000"/>
+              </a:lnSpc>
+              <a:buNone/>
+            </a:pPr>
+            <a:r>
+              <a:rPr lang="en-US" sz="1150" dirty="0">
+                <a:solidFill>
+                  <a:srgbClr val="6E7681"/>
+                </a:solidFill>
+                <a:latin typeface="Courier New" pitchFamily="34" charset="0"/>
+                <a:ea typeface="Courier New" pitchFamily="34" charset="-122"/>
+                <a:cs typeface="Courier New" pitchFamily="34" charset="-120"/>
+              </a:rPr>
+              <a:t>10  </a:t>
+            </a:r>
+            <a:pPr indent="0" marL="0">
+              <a:lnSpc>
+                <a:spcPct val="105000"/>
+              </a:lnSpc>
+              <a:buNone/>
+            </a:pPr>
+            <a:r>
+              <a:rPr lang="en-US" sz="1150" dirty="0">
+                <a:solidFill>
+                  <a:srgbClr val="CCCCCC"/>
                 </a:solidFill>
                 <a:latin typeface="Courier New" pitchFamily="34" charset="0"/>
                 <a:ea typeface="Courier New" pitchFamily="34" charset="-122"/>
@@ -5148,13 +5609,13 @@
             <a:r>
               <a:rPr lang="en-US" sz="1150" dirty="0">
                 <a:solidFill>
-                  <a:srgbClr val="4DB1FF"/>
-                </a:solidFill>
-                <a:latin typeface="Courier New" pitchFamily="34" charset="0"/>
-                <a:ea typeface="Courier New" pitchFamily="34" charset="-122"/>
-                <a:cs typeface="Courier New" pitchFamily="34" charset="-120"/>
-              </a:rPr>
-              <a:t>authenticationType</a:t>
+                  <a:srgbClr val="569CD6"/>
+                </a:solidFill>
+                <a:latin typeface="Courier New" pitchFamily="34" charset="0"/>
+                <a:ea typeface="Courier New" pitchFamily="34" charset="-122"/>
+                <a:cs typeface="Courier New" pitchFamily="34" charset="-120"/>
+              </a:rPr>
+              <a:t>name</a:t>
             </a:r>
             <a:pPr indent="0" marL="0">
               <a:lnSpc>
@@ -5165,7 +5626,7 @@
             <a:r>
               <a:rPr lang="en-US" sz="1150" dirty="0">
                 <a:solidFill>
-                  <a:srgbClr val="E8ECEF"/>
+                  <a:srgbClr val="CCCCCC"/>
                 </a:solidFill>
                 <a:latin typeface="Courier New" pitchFamily="34" charset="0"/>
                 <a:ea typeface="Courier New" pitchFamily="34" charset="-122"/>
@@ -5182,7 +5643,7 @@
             <a:r>
               <a:rPr lang="en-US" sz="1150" dirty="0">
                 <a:solidFill>
-                  <a:srgbClr val="E8ECEF"/>
+                  <a:srgbClr val="CCCCCC"/>
                 </a:solidFill>
                 <a:latin typeface="Courier New" pitchFamily="34" charset="0"/>
                 <a:ea typeface="Courier New" pitchFamily="34" charset="-122"/>
@@ -5199,13 +5660,13 @@
             <a:r>
               <a:rPr lang="en-US" sz="1150" dirty="0">
                 <a:solidFill>
-                  <a:srgbClr val="E8ECEF"/>
-                </a:solidFill>
-                <a:latin typeface="Courier New" pitchFamily="34" charset="0"/>
-                <a:ea typeface="Courier New" pitchFamily="34" charset="-122"/>
-                <a:cs typeface="Courier New" pitchFamily="34" charset="-120"/>
-              </a:rPr>
-              <a:t>reentranceTicket</a:t>
+                  <a:srgbClr val="CE9178"/>
+                </a:solidFill>
+                <a:latin typeface="Courier New" pitchFamily="34" charset="0"/>
+                <a:ea typeface="Courier New" pitchFamily="34" charset="-122"/>
+                <a:cs typeface="Courier New" pitchFamily="34" charset="-120"/>
+              </a:rPr>
+              <a:t>ZPC_PEDIDOS</a:t>
             </a:r>
             <a:endParaRPr lang="en-US" sz="1150" dirty="0"/>
           </a:p>
@@ -5219,13 +5680,13 @@
             <a:r>
               <a:rPr lang="en-US" sz="1150" dirty="0">
                 <a:solidFill>
-                  <a:srgbClr val="E8ECEF"/>
-                </a:solidFill>
-                <a:latin typeface="Courier New" pitchFamily="34" charset="0"/>
-                <a:ea typeface="Courier New" pitchFamily="34" charset="-122"/>
-                <a:cs typeface="Courier New" pitchFamily="34" charset="-120"/>
-              </a:rPr>
-              <a:t>      </a:t>
+                  <a:srgbClr val="6E7681"/>
+                </a:solidFill>
+                <a:latin typeface="Courier New" pitchFamily="34" charset="0"/>
+                <a:ea typeface="Courier New" pitchFamily="34" charset="-122"/>
+                <a:cs typeface="Courier New" pitchFamily="34" charset="-120"/>
+              </a:rPr>
+              <a:t>11  </a:t>
             </a:r>
             <a:pPr indent="0" marL="0">
               <a:lnSpc>
@@ -5236,13 +5697,13 @@
             <a:r>
               <a:rPr lang="en-US" sz="1150" dirty="0">
                 <a:solidFill>
-                  <a:srgbClr val="4DB1FF"/>
-                </a:solidFill>
-                <a:latin typeface="Courier New" pitchFamily="34" charset="0"/>
-                <a:ea typeface="Courier New" pitchFamily="34" charset="-122"/>
-                <a:cs typeface="Courier New" pitchFamily="34" charset="-120"/>
-              </a:rPr>
-              <a:t>app</a:t>
+                  <a:srgbClr val="CCCCCC"/>
+                </a:solidFill>
+                <a:latin typeface="Courier New" pitchFamily="34" charset="0"/>
+                <a:ea typeface="Courier New" pitchFamily="34" charset="-122"/>
+                <a:cs typeface="Courier New" pitchFamily="34" charset="-120"/>
+              </a:rPr>
+              <a:t>        </a:t>
             </a:r>
             <a:pPr indent="0" marL="0">
               <a:lnSpc>
@@ -5253,7 +5714,24 @@
             <a:r>
               <a:rPr lang="en-US" sz="1150" dirty="0">
                 <a:solidFill>
-                  <a:srgbClr val="E8ECEF"/>
+                  <a:srgbClr val="569CD6"/>
+                </a:solidFill>
+                <a:latin typeface="Courier New" pitchFamily="34" charset="0"/>
+                <a:ea typeface="Courier New" pitchFamily="34" charset="-122"/>
+                <a:cs typeface="Courier New" pitchFamily="34" charset="-120"/>
+              </a:rPr>
+              <a:t>description</a:t>
+            </a:r>
+            <a:pPr indent="0" marL="0">
+              <a:lnSpc>
+                <a:spcPct val="105000"/>
+              </a:lnSpc>
+              <a:buNone/>
+            </a:pPr>
+            <a:r>
+              <a:rPr lang="en-US" sz="1150" dirty="0">
+                <a:solidFill>
+                  <a:srgbClr val="CCCCCC"/>
                 </a:solidFill>
                 <a:latin typeface="Courier New" pitchFamily="34" charset="0"/>
                 <a:ea typeface="Courier New" pitchFamily="34" charset="-122"/>
@@ -5261,6 +5739,40 @@
               </a:rPr>
               <a:t>:</a:t>
             </a:r>
+            <a:pPr indent="0" marL="0">
+              <a:lnSpc>
+                <a:spcPct val="105000"/>
+              </a:lnSpc>
+              <a:buNone/>
+            </a:pPr>
+            <a:r>
+              <a:rPr lang="en-US" sz="1150" dirty="0">
+                <a:solidFill>
+                  <a:srgbClr val="CCCCCC"/>
+                </a:solidFill>
+                <a:latin typeface="Courier New" pitchFamily="34" charset="0"/>
+                <a:ea typeface="Courier New" pitchFamily="34" charset="-122"/>
+                <a:cs typeface="Courier New" pitchFamily="34" charset="-120"/>
+              </a:rPr>
+              <a:t> </a:t>
+            </a:r>
+            <a:pPr indent="0" marL="0">
+              <a:lnSpc>
+                <a:spcPct val="105000"/>
+              </a:lnSpc>
+              <a:buNone/>
+            </a:pPr>
+            <a:r>
+              <a:rPr lang="en-US" sz="1150" dirty="0">
+                <a:solidFill>
+                  <a:srgbClr val="CE9178"/>
+                </a:solidFill>
+                <a:latin typeface="Courier New" pitchFamily="34" charset="0"/>
+                <a:ea typeface="Courier New" pitchFamily="34" charset="-122"/>
+                <a:cs typeface="Courier New" pitchFamily="34" charset="-120"/>
+              </a:rPr>
+              <a:t>Pedidos de Compras</a:t>
+            </a:r>
             <a:endParaRPr lang="en-US" sz="1150" dirty="0"/>
           </a:p>
           <a:p>
@@ -5273,7 +5785,24 @@
             <a:r>
               <a:rPr lang="en-US" sz="1150" dirty="0">
                 <a:solidFill>
-                  <a:srgbClr val="E8ECEF"/>
+                  <a:srgbClr val="6E7681"/>
+                </a:solidFill>
+                <a:latin typeface="Courier New" pitchFamily="34" charset="0"/>
+                <a:ea typeface="Courier New" pitchFamily="34" charset="-122"/>
+                <a:cs typeface="Courier New" pitchFamily="34" charset="-120"/>
+              </a:rPr>
+              <a:t>12  </a:t>
+            </a:r>
+            <a:pPr indent="0" marL="0">
+              <a:lnSpc>
+                <a:spcPct val="105000"/>
+              </a:lnSpc>
+              <a:buNone/>
+            </a:pPr>
+            <a:r>
+              <a:rPr lang="en-US" sz="1150" dirty="0">
+                <a:solidFill>
+                  <a:srgbClr val="CCCCCC"/>
                 </a:solidFill>
                 <a:latin typeface="Courier New" pitchFamily="34" charset="0"/>
                 <a:ea typeface="Courier New" pitchFamily="34" charset="-122"/>
@@ -5290,13 +5819,13 @@
             <a:r>
               <a:rPr lang="en-US" sz="1150" dirty="0">
                 <a:solidFill>
-                  <a:srgbClr val="4DB1FF"/>
-                </a:solidFill>
-                <a:latin typeface="Courier New" pitchFamily="34" charset="0"/>
-                <a:ea typeface="Courier New" pitchFamily="34" charset="-122"/>
-                <a:cs typeface="Courier New" pitchFamily="34" charset="-120"/>
-              </a:rPr>
-              <a:t>name</a:t>
+                  <a:srgbClr val="569CD6"/>
+                </a:solidFill>
+                <a:latin typeface="Courier New" pitchFamily="34" charset="0"/>
+                <a:ea typeface="Courier New" pitchFamily="34" charset="-122"/>
+                <a:cs typeface="Courier New" pitchFamily="34" charset="-120"/>
+              </a:rPr>
+              <a:t>package</a:t>
             </a:r>
             <a:pPr indent="0" marL="0">
               <a:lnSpc>
@@ -5307,7 +5836,7 @@
             <a:r>
               <a:rPr lang="en-US" sz="1150" dirty="0">
                 <a:solidFill>
-                  <a:srgbClr val="E8ECEF"/>
+                  <a:srgbClr val="CCCCCC"/>
                 </a:solidFill>
                 <a:latin typeface="Courier New" pitchFamily="34" charset="0"/>
                 <a:ea typeface="Courier New" pitchFamily="34" charset="-122"/>
@@ -5324,7 +5853,7 @@
             <a:r>
               <a:rPr lang="en-US" sz="1150" dirty="0">
                 <a:solidFill>
-                  <a:srgbClr val="E8ECEF"/>
+                  <a:srgbClr val="CCCCCC"/>
                 </a:solidFill>
                 <a:latin typeface="Courier New" pitchFamily="34" charset="0"/>
                 <a:ea typeface="Courier New" pitchFamily="34" charset="-122"/>
@@ -5341,13 +5870,13 @@
             <a:r>
               <a:rPr lang="en-US" sz="1150" dirty="0">
                 <a:solidFill>
-                  <a:srgbClr val="E8ECEF"/>
-                </a:solidFill>
-                <a:latin typeface="Courier New" pitchFamily="34" charset="0"/>
-                <a:ea typeface="Courier New" pitchFamily="34" charset="-122"/>
-                <a:cs typeface="Courier New" pitchFamily="34" charset="-120"/>
-              </a:rPr>
-              <a:t>ZPC_PEDIDOS</a:t>
+                  <a:srgbClr val="CE9178"/>
+                </a:solidFill>
+                <a:latin typeface="Courier New" pitchFamily="34" charset="0"/>
+                <a:ea typeface="Courier New" pitchFamily="34" charset="-122"/>
+                <a:cs typeface="Courier New" pitchFamily="34" charset="-120"/>
+              </a:rPr>
+              <a:t>ZAVBS_PC_PEDIDOS</a:t>
             </a:r>
             <a:endParaRPr lang="en-US" sz="1150" dirty="0"/>
           </a:p>
@@ -5361,7 +5890,24 @@
             <a:r>
               <a:rPr lang="en-US" sz="1150" dirty="0">
                 <a:solidFill>
-                  <a:srgbClr val="E8ECEF"/>
+                  <a:srgbClr val="6E7681"/>
+                </a:solidFill>
+                <a:latin typeface="Courier New" pitchFamily="34" charset="0"/>
+                <a:ea typeface="Courier New" pitchFamily="34" charset="-122"/>
+                <a:cs typeface="Courier New" pitchFamily="34" charset="-120"/>
+              </a:rPr>
+              <a:t>13  </a:t>
+            </a:r>
+            <a:pPr indent="0" marL="0">
+              <a:lnSpc>
+                <a:spcPct val="105000"/>
+              </a:lnSpc>
+              <a:buNone/>
+            </a:pPr>
+            <a:r>
+              <a:rPr lang="en-US" sz="1150" dirty="0">
+                <a:solidFill>
+                  <a:srgbClr val="CCCCCC"/>
                 </a:solidFill>
                 <a:latin typeface="Courier New" pitchFamily="34" charset="0"/>
                 <a:ea typeface="Courier New" pitchFamily="34" charset="-122"/>
@@ -5378,13 +5924,13 @@
             <a:r>
               <a:rPr lang="en-US" sz="1150" dirty="0">
                 <a:solidFill>
-                  <a:srgbClr val="4DB1FF"/>
-                </a:solidFill>
-                <a:latin typeface="Courier New" pitchFamily="34" charset="0"/>
-                <a:ea typeface="Courier New" pitchFamily="34" charset="-122"/>
-                <a:cs typeface="Courier New" pitchFamily="34" charset="-120"/>
-              </a:rPr>
-              <a:t>description</a:t>
+                  <a:srgbClr val="569CD6"/>
+                </a:solidFill>
+                <a:latin typeface="Courier New" pitchFamily="34" charset="0"/>
+                <a:ea typeface="Courier New" pitchFamily="34" charset="-122"/>
+                <a:cs typeface="Courier New" pitchFamily="34" charset="-120"/>
+              </a:rPr>
+              <a:t>transport</a:t>
             </a:r>
             <a:pPr indent="0" marL="0">
               <a:lnSpc>
@@ -5395,7 +5941,7 @@
             <a:r>
               <a:rPr lang="en-US" sz="1150" dirty="0">
                 <a:solidFill>
-                  <a:srgbClr val="E8ECEF"/>
+                  <a:srgbClr val="CCCCCC"/>
                 </a:solidFill>
                 <a:latin typeface="Courier New" pitchFamily="34" charset="0"/>
                 <a:ea typeface="Courier New" pitchFamily="34" charset="-122"/>
@@ -5412,7 +5958,7 @@
             <a:r>
               <a:rPr lang="en-US" sz="1150" dirty="0">
                 <a:solidFill>
-                  <a:srgbClr val="E8ECEF"/>
+                  <a:srgbClr val="CCCCCC"/>
                 </a:solidFill>
                 <a:latin typeface="Courier New" pitchFamily="34" charset="0"/>
                 <a:ea typeface="Courier New" pitchFamily="34" charset="-122"/>
@@ -5429,265 +5975,21 @@
             <a:r>
               <a:rPr lang="en-US" sz="1150" dirty="0">
                 <a:solidFill>
-                  <a:srgbClr val="E8ECEF"/>
-                </a:solidFill>
-                <a:latin typeface="Courier New" pitchFamily="34" charset="0"/>
-                <a:ea typeface="Courier New" pitchFamily="34" charset="-122"/>
-                <a:cs typeface="Courier New" pitchFamily="34" charset="-120"/>
-              </a:rPr>
-              <a:t>Pedidos</a:t>
-            </a:r>
-            <a:pPr indent="0" marL="0">
-              <a:lnSpc>
-                <a:spcPct val="105000"/>
-              </a:lnSpc>
-              <a:buNone/>
-            </a:pPr>
-            <a:r>
-              <a:rPr lang="en-US" sz="1150" dirty="0">
-                <a:solidFill>
-                  <a:srgbClr val="E8ECEF"/>
-                </a:solidFill>
-                <a:latin typeface="Courier New" pitchFamily="34" charset="0"/>
-                <a:ea typeface="Courier New" pitchFamily="34" charset="-122"/>
-                <a:cs typeface="Courier New" pitchFamily="34" charset="-120"/>
-              </a:rPr>
-              <a:t> </a:t>
-            </a:r>
-            <a:pPr indent="0" marL="0">
-              <a:lnSpc>
-                <a:spcPct val="105000"/>
-              </a:lnSpc>
-              <a:buNone/>
-            </a:pPr>
-            <a:r>
-              <a:rPr lang="en-US" sz="1150" dirty="0">
-                <a:solidFill>
-                  <a:srgbClr val="E8ECEF"/>
-                </a:solidFill>
-                <a:latin typeface="Courier New" pitchFamily="34" charset="0"/>
-                <a:ea typeface="Courier New" pitchFamily="34" charset="-122"/>
-                <a:cs typeface="Courier New" pitchFamily="34" charset="-120"/>
-              </a:rPr>
-              <a:t>de</a:t>
-            </a:r>
-            <a:pPr indent="0" marL="0">
-              <a:lnSpc>
-                <a:spcPct val="105000"/>
-              </a:lnSpc>
-              <a:buNone/>
-            </a:pPr>
-            <a:r>
-              <a:rPr lang="en-US" sz="1150" dirty="0">
-                <a:solidFill>
-                  <a:srgbClr val="E8ECEF"/>
-                </a:solidFill>
-                <a:latin typeface="Courier New" pitchFamily="34" charset="0"/>
-                <a:ea typeface="Courier New" pitchFamily="34" charset="-122"/>
-                <a:cs typeface="Courier New" pitchFamily="34" charset="-120"/>
-              </a:rPr>
-              <a:t> </a:t>
-            </a:r>
-            <a:pPr indent="0" marL="0">
-              <a:lnSpc>
-                <a:spcPct val="105000"/>
-              </a:lnSpc>
-              <a:buNone/>
-            </a:pPr>
-            <a:r>
-              <a:rPr lang="en-US" sz="1150" dirty="0">
-                <a:solidFill>
-                  <a:srgbClr val="E8ECEF"/>
-                </a:solidFill>
-                <a:latin typeface="Courier New" pitchFamily="34" charset="0"/>
-                <a:ea typeface="Courier New" pitchFamily="34" charset="-122"/>
-                <a:cs typeface="Courier New" pitchFamily="34" charset="-120"/>
-              </a:rPr>
-              <a:t>Compras</a:t>
+                  <a:srgbClr val="CE9178"/>
+                </a:solidFill>
+                <a:latin typeface="Courier New" pitchFamily="34" charset="0"/>
+                <a:ea typeface="Courier New" pitchFamily="34" charset="-122"/>
+                <a:cs typeface="Courier New" pitchFamily="34" charset="-120"/>
+              </a:rPr>
+              <a:t>""</a:t>
             </a:r>
             <a:endParaRPr lang="en-US" sz="1150" dirty="0"/>
           </a:p>
-          <a:p>
-            <a:pPr indent="0" marL="0">
-              <a:lnSpc>
-                <a:spcPct val="105000"/>
-              </a:lnSpc>
-              <a:buNone/>
-            </a:pPr>
-            <a:r>
-              <a:rPr lang="en-US" sz="1150" dirty="0">
-                <a:solidFill>
-                  <a:srgbClr val="E8ECEF"/>
-                </a:solidFill>
-                <a:latin typeface="Courier New" pitchFamily="34" charset="0"/>
-                <a:ea typeface="Courier New" pitchFamily="34" charset="-122"/>
-                <a:cs typeface="Courier New" pitchFamily="34" charset="-120"/>
-              </a:rPr>
-              <a:t>        </a:t>
-            </a:r>
-            <a:pPr indent="0" marL="0">
-              <a:lnSpc>
-                <a:spcPct val="105000"/>
-              </a:lnSpc>
-              <a:buNone/>
-            </a:pPr>
-            <a:r>
-              <a:rPr lang="en-US" sz="1150" dirty="0">
-                <a:solidFill>
-                  <a:srgbClr val="4DB1FF"/>
-                </a:solidFill>
-                <a:latin typeface="Courier New" pitchFamily="34" charset="0"/>
-                <a:ea typeface="Courier New" pitchFamily="34" charset="-122"/>
-                <a:cs typeface="Courier New" pitchFamily="34" charset="-120"/>
-              </a:rPr>
-              <a:t>package</a:t>
-            </a:r>
-            <a:pPr indent="0" marL="0">
-              <a:lnSpc>
-                <a:spcPct val="105000"/>
-              </a:lnSpc>
-              <a:buNone/>
-            </a:pPr>
-            <a:r>
-              <a:rPr lang="en-US" sz="1150" dirty="0">
-                <a:solidFill>
-                  <a:srgbClr val="E8ECEF"/>
-                </a:solidFill>
-                <a:latin typeface="Courier New" pitchFamily="34" charset="0"/>
-                <a:ea typeface="Courier New" pitchFamily="34" charset="-122"/>
-                <a:cs typeface="Courier New" pitchFamily="34" charset="-120"/>
-              </a:rPr>
-              <a:t>:</a:t>
-            </a:r>
-            <a:pPr indent="0" marL="0">
-              <a:lnSpc>
-                <a:spcPct val="105000"/>
-              </a:lnSpc>
-              <a:buNone/>
-            </a:pPr>
-            <a:r>
-              <a:rPr lang="en-US" sz="1150" dirty="0">
-                <a:solidFill>
-                  <a:srgbClr val="E8ECEF"/>
-                </a:solidFill>
-                <a:latin typeface="Courier New" pitchFamily="34" charset="0"/>
-                <a:ea typeface="Courier New" pitchFamily="34" charset="-122"/>
-                <a:cs typeface="Courier New" pitchFamily="34" charset="-120"/>
-              </a:rPr>
-              <a:t> </a:t>
-            </a:r>
-            <a:pPr indent="0" marL="0">
-              <a:lnSpc>
-                <a:spcPct val="105000"/>
-              </a:lnSpc>
-              <a:buNone/>
-            </a:pPr>
-            <a:r>
-              <a:rPr lang="en-US" sz="1150" dirty="0">
-                <a:solidFill>
-                  <a:srgbClr val="E8ECEF"/>
-                </a:solidFill>
-                <a:latin typeface="Courier New" pitchFamily="34" charset="0"/>
-                <a:ea typeface="Courier New" pitchFamily="34" charset="-122"/>
-                <a:cs typeface="Courier New" pitchFamily="34" charset="-120"/>
-              </a:rPr>
-              <a:t>ZAVBS_PC_PEDIDOS</a:t>
-            </a:r>
-            <a:endParaRPr lang="en-US" sz="1150" dirty="0"/>
-          </a:p>
-          <a:p>
-            <a:pPr indent="0" marL="0">
-              <a:lnSpc>
-                <a:spcPct val="105000"/>
-              </a:lnSpc>
-              <a:buNone/>
-            </a:pPr>
-            <a:r>
-              <a:rPr lang="en-US" sz="1150" dirty="0">
-                <a:solidFill>
-                  <a:srgbClr val="E8ECEF"/>
-                </a:solidFill>
-                <a:latin typeface="Courier New" pitchFamily="34" charset="0"/>
-                <a:ea typeface="Courier New" pitchFamily="34" charset="-122"/>
-                <a:cs typeface="Courier New" pitchFamily="34" charset="-120"/>
-              </a:rPr>
-              <a:t>        </a:t>
-            </a:r>
-            <a:pPr indent="0" marL="0">
-              <a:lnSpc>
-                <a:spcPct val="105000"/>
-              </a:lnSpc>
-              <a:buNone/>
-            </a:pPr>
-            <a:r>
-              <a:rPr lang="en-US" sz="1150" dirty="0">
-                <a:solidFill>
-                  <a:srgbClr val="4DB1FF"/>
-                </a:solidFill>
-                <a:latin typeface="Courier New" pitchFamily="34" charset="0"/>
-                <a:ea typeface="Courier New" pitchFamily="34" charset="-122"/>
-                <a:cs typeface="Courier New" pitchFamily="34" charset="-120"/>
-              </a:rPr>
-              <a:t>transport</a:t>
-            </a:r>
-            <a:pPr indent="0" marL="0">
-              <a:lnSpc>
-                <a:spcPct val="105000"/>
-              </a:lnSpc>
-              <a:buNone/>
-            </a:pPr>
-            <a:r>
-              <a:rPr lang="en-US" sz="1150" dirty="0">
-                <a:solidFill>
-                  <a:srgbClr val="E8ECEF"/>
-                </a:solidFill>
-                <a:latin typeface="Courier New" pitchFamily="34" charset="0"/>
-                <a:ea typeface="Courier New" pitchFamily="34" charset="-122"/>
-                <a:cs typeface="Courier New" pitchFamily="34" charset="-120"/>
-              </a:rPr>
-              <a:t>:</a:t>
-            </a:r>
-            <a:pPr indent="0" marL="0">
-              <a:lnSpc>
-                <a:spcPct val="105000"/>
-              </a:lnSpc>
-              <a:buNone/>
-            </a:pPr>
-            <a:r>
-              <a:rPr lang="en-US" sz="1150" dirty="0">
-                <a:solidFill>
-                  <a:srgbClr val="E8ECEF"/>
-                </a:solidFill>
-                <a:latin typeface="Courier New" pitchFamily="34" charset="0"/>
-                <a:ea typeface="Courier New" pitchFamily="34" charset="-122"/>
-                <a:cs typeface="Courier New" pitchFamily="34" charset="-120"/>
-              </a:rPr>
-              <a:t> </a:t>
-            </a:r>
-            <a:pPr indent="0" marL="0">
-              <a:lnSpc>
-                <a:spcPct val="105000"/>
-              </a:lnSpc>
-              <a:buNone/>
-            </a:pPr>
-            <a:r>
-              <a:rPr lang="en-US" sz="1150" dirty="0">
-                <a:solidFill>
-                  <a:srgbClr val="8FD694"/>
-                </a:solidFill>
-                <a:latin typeface="Courier New" pitchFamily="34" charset="0"/>
-                <a:ea typeface="Courier New" pitchFamily="34" charset="-122"/>
-                <a:cs typeface="Courier New" pitchFamily="34" charset="-120"/>
-              </a:rPr>
-              <a:t>""</a:t>
-            </a:r>
-            <a:endParaRPr lang="en-US" sz="1150" dirty="0"/>
-          </a:p>
-        </p:txBody>
-      </p:sp>
-      <p:sp>
-        <p:nvSpPr>
-          <p:cNvPr id="9" name="Cartão"/>
+        </p:txBody>
+      </p:sp>
+      <p:sp>
+        <p:nvSpPr>
+          <p:cNvPr id="13" name="Cartão"/>
           <p:cNvSpPr/>
           <p:nvPr/>
         </p:nvSpPr>
@@ -5716,7 +6018,7 @@
       </p:sp>
       <p:sp>
         <p:nvSpPr>
-          <p:cNvPr id="10" name="Ícone upload-to-cloud"/>
+          <p:cNvPr id="14" name="Ícone upload-to-cloud"/>
           <p:cNvSpPr/>
           <p:nvPr/>
         </p:nvSpPr>
@@ -5738,7 +6040,7 @@
       </p:sp>
       <p:pic>
         <p:nvPicPr>
-          <p:cNvPr id="11" name="Image 0" descr="upload-to-cloud">    </p:cNvPr>
+          <p:cNvPr id="15" name="Image 0" descr="upload-to-cloud">    </p:cNvPr>
           <p:cNvPicPr>
             <a:picLocks noChangeAspect="1"/>
           </p:cNvPicPr>
@@ -5762,7 +6064,7 @@
       </p:pic>
       <p:sp>
         <p:nvSpPr>
-          <p:cNvPr id="12" name="Text 8"/>
+          <p:cNvPr id="16" name="Text 12"/>
           <p:cNvSpPr txBox="1"/>
           <p:nvPr/>
         </p:nvSpPr>
@@ -5798,7 +6100,7 @@
       </p:sp>
       <p:sp>
         <p:nvSpPr>
-          <p:cNvPr id="13" name="Text 9"/>
+          <p:cNvPr id="17" name="Text 13"/>
           <p:cNvSpPr txBox="1"/>
           <p:nvPr/>
         </p:nvSpPr>
@@ -5834,7 +6136,7 @@
       </p:sp>
       <p:sp>
         <p:nvSpPr>
-          <p:cNvPr id="14" name="Shape 10"/>
+          <p:cNvPr id="18" name="Shape 14"/>
           <p:cNvSpPr/>
           <p:nvPr/>
         </p:nvSpPr>
@@ -5858,7 +6160,7 @@
       </p:sp>
       <p:sp>
         <p:nvSpPr>
-          <p:cNvPr id="15" name="Cartão"/>
+          <p:cNvPr id="19" name="Cartão"/>
           <p:cNvSpPr/>
           <p:nvPr/>
         </p:nvSpPr>
@@ -5887,7 +6189,7 @@
       </p:sp>
       <p:sp>
         <p:nvSpPr>
-          <p:cNvPr id="16" name="Ícone sap-box"/>
+          <p:cNvPr id="20" name="Ícone sap-box"/>
           <p:cNvSpPr/>
           <p:nvPr/>
         </p:nvSpPr>
@@ -5909,7 +6211,7 @@
       </p:sp>
       <p:pic>
         <p:nvPicPr>
-          <p:cNvPr id="17" name="Image 1" descr="sap-box">    </p:cNvPr>
+          <p:cNvPr id="21" name="Image 1" descr="sap-box">    </p:cNvPr>
           <p:cNvPicPr>
             <a:picLocks noChangeAspect="1"/>
           </p:cNvPicPr>
@@ -5933,7 +6235,7 @@
       </p:pic>
       <p:sp>
         <p:nvSpPr>
-          <p:cNvPr id="18" name="Text 13"/>
+          <p:cNvPr id="22" name="Text 17"/>
           <p:cNvSpPr txBox="1"/>
           <p:nvPr/>
         </p:nvSpPr>
@@ -5969,7 +6271,7 @@
       </p:sp>
       <p:sp>
         <p:nvSpPr>
-          <p:cNvPr id="19" name="Text 14"/>
+          <p:cNvPr id="23" name="Text 18"/>
           <p:cNvSpPr txBox="1"/>
           <p:nvPr/>
         </p:nvSpPr>
@@ -6005,7 +6307,7 @@
       </p:sp>
       <p:sp>
         <p:nvSpPr>
-          <p:cNvPr id="20" name="Shape 15"/>
+          <p:cNvPr id="24" name="Shape 19"/>
           <p:cNvSpPr/>
           <p:nvPr/>
         </p:nvSpPr>
@@ -6029,7 +6331,7 @@
       </p:sp>
       <p:sp>
         <p:nvSpPr>
-          <p:cNvPr id="21" name="Cartão"/>
+          <p:cNvPr id="25" name="Cartão"/>
           <p:cNvSpPr/>
           <p:nvPr/>
         </p:nvSpPr>
@@ -6058,7 +6360,7 @@
       </p:sp>
       <p:sp>
         <p:nvSpPr>
-          <p:cNvPr id="22" name="Ícone list"/>
+          <p:cNvPr id="26" name="Ícone list"/>
           <p:cNvSpPr/>
           <p:nvPr/>
         </p:nvSpPr>
@@ -6080,7 +6382,7 @@
       </p:sp>
       <p:pic>
         <p:nvPicPr>
-          <p:cNvPr id="23" name="Image 2" descr="list">    </p:cNvPr>
+          <p:cNvPr id="27" name="Image 2" descr="list">    </p:cNvPr>
           <p:cNvPicPr>
             <a:picLocks noChangeAspect="1"/>
           </p:cNvPicPr>
@@ -6104,7 +6406,7 @@
       </p:pic>
       <p:sp>
         <p:nvSpPr>
-          <p:cNvPr id="24" name="Text 18"/>
+          <p:cNvPr id="28" name="Text 22"/>
           <p:cNvSpPr txBox="1"/>
           <p:nvPr/>
         </p:nvSpPr>
@@ -6140,7 +6442,7 @@
       </p:sp>
       <p:sp>
         <p:nvSpPr>
-          <p:cNvPr id="25" name="Text 19"/>
+          <p:cNvPr id="29" name="Text 23"/>
           <p:cNvSpPr txBox="1"/>
           <p:nvPr/>
         </p:nvSpPr>
@@ -6176,7 +6478,7 @@
       </p:sp>
       <p:sp>
         <p:nvSpPr>
-          <p:cNvPr id="26" name="Shape 20"/>
+          <p:cNvPr id="30" name="Shape 24"/>
           <p:cNvSpPr/>
           <p:nvPr/>
         </p:nvSpPr>
@@ -6200,7 +6502,7 @@
       </p:sp>
       <p:sp>
         <p:nvSpPr>
-          <p:cNvPr id="27" name="Cartão"/>
+          <p:cNvPr id="31" name="Cartão"/>
           <p:cNvSpPr/>
           <p:nvPr/>
         </p:nvSpPr>
@@ -6229,7 +6531,7 @@
       </p:sp>
       <p:sp>
         <p:nvSpPr>
-          <p:cNvPr id="28" name="Ícone home"/>
+          <p:cNvPr id="32" name="Ícone home"/>
           <p:cNvSpPr/>
           <p:nvPr/>
         </p:nvSpPr>
@@ -6251,7 +6553,7 @@
       </p:sp>
       <p:pic>
         <p:nvPicPr>
-          <p:cNvPr id="29" name="Image 3" descr="home">    </p:cNvPr>
+          <p:cNvPr id="33" name="Image 3" descr="home">    </p:cNvPr>
           <p:cNvPicPr>
             <a:picLocks noChangeAspect="1"/>
           </p:cNvPicPr>
@@ -6275,7 +6577,7 @@
       </p:pic>
       <p:sp>
         <p:nvSpPr>
-          <p:cNvPr id="30" name="Text 23"/>
+          <p:cNvPr id="34" name="Text 27"/>
           <p:cNvSpPr txBox="1"/>
           <p:nvPr/>
         </p:nvSpPr>
@@ -6311,7 +6613,7 @@
       </p:sp>
       <p:sp>
         <p:nvSpPr>
-          <p:cNvPr id="31" name="Text 24"/>
+          <p:cNvPr id="35" name="Text 28"/>
           <p:cNvSpPr txBox="1"/>
           <p:nvPr/>
         </p:nvSpPr>
@@ -11320,7 +11622,7 @@
       </p:sp>
       <p:sp>
         <p:nvSpPr>
-          <p:cNvPr id="25" name="Código"/>
+          <p:cNvPr id="25" name="Editor"/>
           <p:cNvSpPr/>
           <p:nvPr/>
         </p:nvSpPr>
@@ -11335,9 +11637,14 @@
             </a:avLst>
           </a:prstGeom>
           <a:solidFill>
-            <a:srgbClr val="12171C"/>
+            <a:srgbClr val="181818"/>
           </a:solidFill>
-          <a:ln/>
+          <a:ln w="9525">
+            <a:solidFill>
+              <a:srgbClr val="2B2B2B"/>
+            </a:solidFill>
+            <a:prstDash val="solid"/>
+          </a:ln>
           <a:effectLst>
             <a:outerShdw sx="100000" sy="100000" kx="0" ky="0" algn="bl" rotWithShape="0" blurRad="101600" dist="25400" dir="5400000">
               <a:srgbClr val="223548">
@@ -11349,42 +11656,25 @@
       </p:sp>
       <p:sp>
         <p:nvSpPr>
-          <p:cNvPr id="26" name="Text 23"/>
-          <p:cNvSpPr txBox="1"/>
-          <p:nvPr/>
-        </p:nvSpPr>
-        <p:spPr>
-          <a:xfrm>
-            <a:off x="5852160" y="1755648"/>
-            <a:ext cx="5562295" cy="256032"/>
-          </a:xfrm>
-          <a:prstGeom prst="rect">
-            <a:avLst/>
-          </a:prstGeom>
-          <a:noFill/>
-          <a:ln/>
-        </p:spPr>
-        <p:txBody>
-          <a:bodyPr wrap="square" lIns="0" tIns="0" rIns="0" bIns="0" rtlCol="0" anchor="ctr"/>
-          <a:lstStyle/>
-          <a:p>
-            <a:pPr indent="0" marL="0">
-              <a:buNone/>
-            </a:pPr>
-            <a:r>
-              <a:rPr lang="en-US" sz="1000" dirty="0">
-                <a:solidFill>
-                  <a:srgbClr val="A9B4BE"/>
-                </a:solidFill>
-                <a:latin typeface="Courier New" pitchFamily="34" charset="0"/>
-                <a:ea typeface="Courier New" pitchFamily="34" charset="-122"/>
-                <a:cs typeface="Courier New" pitchFamily="34" charset="-120"/>
-              </a:rPr>
-              <a:t>ui5/pedidos-compras/webapp/manifest.json</a:t>
-            </a:r>
-            <a:endParaRPr lang="en-US" sz="1000" dirty="0"/>
-          </a:p>
-        </p:txBody>
+          <p:cNvPr id="26" name="Área do editor"/>
+          <p:cNvSpPr/>
+          <p:nvPr/>
+        </p:nvSpPr>
+        <p:spPr>
+          <a:xfrm>
+            <a:off x="5623560" y="1993392"/>
+            <a:ext cx="6019495" cy="4178808"/>
+          </a:xfrm>
+          <a:prstGeom prst="roundRect">
+            <a:avLst>
+              <a:gd name="adj" fmla="val 2188"/>
+            </a:avLst>
+          </a:prstGeom>
+          <a:solidFill>
+            <a:srgbClr val="1F1F1F"/>
+          </a:solidFill>
+          <a:ln/>
+        </p:spPr>
       </p:sp>
       <p:sp>
         <p:nvSpPr>
@@ -11394,16 +11684,36 @@
         </p:nvSpPr>
         <p:spPr>
           <a:xfrm>
-            <a:off x="5852160" y="2066544"/>
-            <a:ext cx="5562295" cy="0"/>
+            <a:off x="5632704" y="1993392"/>
+            <a:ext cx="6001207" cy="137160"/>
+          </a:xfrm>
+          <a:prstGeom prst="rect">
+            <a:avLst/>
+          </a:prstGeom>
+          <a:solidFill>
+            <a:srgbClr val="1F1F1F"/>
+          </a:solidFill>
+          <a:ln/>
+        </p:spPr>
+      </p:sp>
+      <p:sp>
+        <p:nvSpPr>
+          <p:cNvPr id="28" name="Shape 25"/>
+          <p:cNvSpPr/>
+          <p:nvPr/>
+        </p:nvSpPr>
+        <p:spPr>
+          <a:xfrm>
+            <a:off x="5632704" y="1993392"/>
+            <a:ext cx="6001207" cy="0"/>
           </a:xfrm>
           <a:prstGeom prst="line">
             <a:avLst/>
           </a:prstGeom>
           <a:noFill/>
-          <a:ln w="12700">
+          <a:ln w="9525">
             <a:solidFill>
-              <a:srgbClr val="2E3A46"/>
+              <a:srgbClr val="2B2B2B"/>
             </a:solidFill>
             <a:prstDash val="solid"/>
           </a:ln>
@@ -11411,14 +11721,75 @@
       </p:sp>
       <p:sp>
         <p:nvSpPr>
-          <p:cNvPr id="28" name="Trecho de código"/>
+          <p:cNvPr id="29" name="Aba manifest.json"/>
+          <p:cNvSpPr/>
+          <p:nvPr/>
+        </p:nvSpPr>
+        <p:spPr>
+          <a:xfrm>
+            <a:off x="5715000" y="1719072"/>
+            <a:ext cx="1394460" cy="274320"/>
+          </a:xfrm>
+          <a:prstGeom prst="rect">
+            <a:avLst/>
+          </a:prstGeom>
+          <a:solidFill>
+            <a:srgbClr val="1F1F1F"/>
+          </a:solidFill>
+          <a:ln/>
+        </p:spPr>
+        <p:txBody>
+          <a:bodyPr wrap="square" lIns="0" tIns="0" rIns="0" bIns="0" rtlCol="0" anchor="ctr"/>
+          <a:lstStyle/>
+          <a:p>
+            <a:pPr algn="ctr" indent="0" marL="0">
+              <a:buNone/>
+            </a:pPr>
+            <a:r>
+              <a:rPr lang="en-US" sz="1000" dirty="0">
+                <a:solidFill>
+                  <a:srgbClr val="FFFFFF"/>
+                </a:solidFill>
+              </a:rPr>
+              <a:t>manifest.json</a:t>
+            </a:r>
+            <a:endParaRPr lang="en-US" sz="1000" dirty="0"/>
+          </a:p>
+        </p:txBody>
+      </p:sp>
+      <p:sp>
+        <p:nvSpPr>
+          <p:cNvPr id="30" name="Shape 27"/>
+          <p:cNvSpPr/>
+          <p:nvPr/>
+        </p:nvSpPr>
+        <p:spPr>
+          <a:xfrm>
+            <a:off x="5715000" y="1719072"/>
+            <a:ext cx="1394460" cy="0"/>
+          </a:xfrm>
+          <a:prstGeom prst="line">
+            <a:avLst/>
+          </a:prstGeom>
+          <a:noFill/>
+          <a:ln w="19050">
+            <a:solidFill>
+              <a:srgbClr val="0078D4"/>
+            </a:solidFill>
+            <a:prstDash val="solid"/>
+          </a:ln>
+        </p:spPr>
+      </p:sp>
+      <p:sp>
+        <p:nvSpPr>
+          <p:cNvPr id="31" name="Breadcrumb"/>
           <p:cNvSpPr txBox="1"/>
           <p:nvPr/>
         </p:nvSpPr>
         <p:spPr>
           <a:xfrm>
-            <a:off x="5852160" y="2157984"/>
-            <a:ext cx="5562295" cy="3904488"/>
+            <a:off x="5852160" y="2103120"/>
+            <a:ext cx="5562295" cy="219456"/>
           </a:xfrm>
           <a:prstGeom prst="rect">
             <a:avLst/>
@@ -11427,6 +11798,108 @@
           <a:ln/>
         </p:spPr>
         <p:txBody>
+          <a:bodyPr wrap="square" lIns="0" tIns="0" rIns="0" bIns="0" rtlCol="0" anchor="ctr"/>
+          <a:lstStyle/>
+          <a:p>
+            <a:pPr indent="0" marL="0">
+              <a:buNone/>
+            </a:pPr>
+            <a:r>
+              <a:rPr lang="en-US" sz="900" dirty="0">
+                <a:solidFill>
+                  <a:srgbClr val="A9A9A9"/>
+                </a:solidFill>
+              </a:rPr>
+              <a:t>ui5</a:t>
+            </a:r>
+            <a:pPr indent="0" marL="0">
+              <a:buNone/>
+            </a:pPr>
+            <a:r>
+              <a:rPr lang="en-US" sz="900" dirty="0">
+                <a:solidFill>
+                  <a:srgbClr val="6E7681"/>
+                </a:solidFill>
+              </a:rPr>
+              <a:t>  ›  </a:t>
+            </a:r>
+            <a:pPr indent="0" marL="0">
+              <a:buNone/>
+            </a:pPr>
+            <a:r>
+              <a:rPr lang="en-US" sz="900" dirty="0">
+                <a:solidFill>
+                  <a:srgbClr val="A9A9A9"/>
+                </a:solidFill>
+              </a:rPr>
+              <a:t>pedidos-compras</a:t>
+            </a:r>
+            <a:pPr indent="0" marL="0">
+              <a:buNone/>
+            </a:pPr>
+            <a:r>
+              <a:rPr lang="en-US" sz="900" dirty="0">
+                <a:solidFill>
+                  <a:srgbClr val="6E7681"/>
+                </a:solidFill>
+              </a:rPr>
+              <a:t>  ›  </a:t>
+            </a:r>
+            <a:pPr indent="0" marL="0">
+              <a:buNone/>
+            </a:pPr>
+            <a:r>
+              <a:rPr lang="en-US" sz="900" dirty="0">
+                <a:solidFill>
+                  <a:srgbClr val="A9A9A9"/>
+                </a:solidFill>
+              </a:rPr>
+              <a:t>webapp</a:t>
+            </a:r>
+            <a:pPr indent="0" marL="0">
+              <a:buNone/>
+            </a:pPr>
+            <a:r>
+              <a:rPr lang="en-US" sz="900" dirty="0">
+                <a:solidFill>
+                  <a:srgbClr val="6E7681"/>
+                </a:solidFill>
+              </a:rPr>
+              <a:t>  ›  </a:t>
+            </a:r>
+            <a:pPr indent="0" marL="0">
+              <a:buNone/>
+            </a:pPr>
+            <a:r>
+              <a:rPr lang="en-US" sz="900" dirty="0">
+                <a:solidFill>
+                  <a:srgbClr val="A9A9A9"/>
+                </a:solidFill>
+              </a:rPr>
+              <a:t>manifest.json</a:t>
+            </a:r>
+            <a:endParaRPr lang="en-US" sz="900" dirty="0"/>
+          </a:p>
+        </p:txBody>
+      </p:sp>
+      <p:sp>
+        <p:nvSpPr>
+          <p:cNvPr id="32" name="Trecho de código"/>
+          <p:cNvSpPr txBox="1"/>
+          <p:nvPr/>
+        </p:nvSpPr>
+        <p:spPr>
+          <a:xfrm>
+            <a:off x="5806440" y="2414016"/>
+            <a:ext cx="5699455" cy="3666744"/>
+          </a:xfrm>
+          <a:prstGeom prst="rect">
+            <a:avLst/>
+          </a:prstGeom>
+          <a:noFill/>
+          <a:ln/>
+        </p:spPr>
+        <p:txBody>
           <a:bodyPr wrap="square" lIns="0" tIns="0" rIns="0" bIns="0" rtlCol="0" anchor="t"/>
           <a:lstStyle/>
           <a:p>
@@ -11439,7 +11912,24 @@
             <a:r>
               <a:rPr lang="en-US" sz="1050" dirty="0">
                 <a:solidFill>
-                  <a:srgbClr val="4DB1FF"/>
+                  <a:srgbClr val="6E7681"/>
+                </a:solidFill>
+                <a:latin typeface="Courier New" pitchFamily="34" charset="0"/>
+                <a:ea typeface="Courier New" pitchFamily="34" charset="-122"/>
+                <a:cs typeface="Courier New" pitchFamily="34" charset="-120"/>
+              </a:rPr>
+              <a:t> 1  </a:t>
+            </a:r>
+            <a:pPr indent="0" marL="0">
+              <a:lnSpc>
+                <a:spcPct val="105000"/>
+              </a:lnSpc>
+              <a:buNone/>
+            </a:pPr>
+            <a:r>
+              <a:rPr lang="en-US" sz="1050" dirty="0">
+                <a:solidFill>
+                  <a:srgbClr val="9CDCFE"/>
                 </a:solidFill>
                 <a:latin typeface="Courier New" pitchFamily="34" charset="0"/>
                 <a:ea typeface="Courier New" pitchFamily="34" charset="-122"/>
@@ -11456,13 +11946,47 @@
             <a:r>
               <a:rPr lang="en-US" sz="1050" dirty="0">
                 <a:solidFill>
-                  <a:srgbClr val="E8ECEF"/>
-                </a:solidFill>
-                <a:latin typeface="Courier New" pitchFamily="34" charset="0"/>
-                <a:ea typeface="Courier New" pitchFamily="34" charset="-122"/>
-                <a:cs typeface="Courier New" pitchFamily="34" charset="-120"/>
-              </a:rPr>
-              <a:t>: {</a:t>
+                  <a:srgbClr val="CCCCCC"/>
+                </a:solidFill>
+                <a:latin typeface="Courier New" pitchFamily="34" charset="0"/>
+                <a:ea typeface="Courier New" pitchFamily="34" charset="-122"/>
+                <a:cs typeface="Courier New" pitchFamily="34" charset="-120"/>
+              </a:rPr>
+              <a:t>:</a:t>
+            </a:r>
+            <a:pPr indent="0" marL="0">
+              <a:lnSpc>
+                <a:spcPct val="105000"/>
+              </a:lnSpc>
+              <a:buNone/>
+            </a:pPr>
+            <a:r>
+              <a:rPr lang="en-US" sz="1050" dirty="0">
+                <a:solidFill>
+                  <a:srgbClr val="CCCCCC"/>
+                </a:solidFill>
+                <a:latin typeface="Courier New" pitchFamily="34" charset="0"/>
+                <a:ea typeface="Courier New" pitchFamily="34" charset="-122"/>
+                <a:cs typeface="Courier New" pitchFamily="34" charset="-120"/>
+              </a:rPr>
+              <a:t> </a:t>
+            </a:r>
+            <a:pPr indent="0" marL="0">
+              <a:lnSpc>
+                <a:spcPct val="105000"/>
+              </a:lnSpc>
+              <a:buNone/>
+            </a:pPr>
+            <a:r>
+              <a:rPr lang="en-US" sz="1050" dirty="0">
+                <a:solidFill>
+                  <a:srgbClr val="CCCCCC"/>
+                </a:solidFill>
+                <a:latin typeface="Courier New" pitchFamily="34" charset="0"/>
+                <a:ea typeface="Courier New" pitchFamily="34" charset="-122"/>
+                <a:cs typeface="Courier New" pitchFamily="34" charset="-120"/>
+              </a:rPr>
+              <a:t>{</a:t>
             </a:r>
             <a:endParaRPr lang="en-US" sz="1050" dirty="0"/>
           </a:p>
@@ -11476,7 +12000,24 @@
             <a:r>
               <a:rPr lang="en-US" sz="1050" dirty="0">
                 <a:solidFill>
-                  <a:srgbClr val="E8ECEF"/>
+                  <a:srgbClr val="6E7681"/>
+                </a:solidFill>
+                <a:latin typeface="Courier New" pitchFamily="34" charset="0"/>
+                <a:ea typeface="Courier New" pitchFamily="34" charset="-122"/>
+                <a:cs typeface="Courier New" pitchFamily="34" charset="-120"/>
+              </a:rPr>
+              <a:t> 2  </a:t>
+            </a:r>
+            <a:pPr indent="0" marL="0">
+              <a:lnSpc>
+                <a:spcPct val="105000"/>
+              </a:lnSpc>
+              <a:buNone/>
+            </a:pPr>
+            <a:r>
+              <a:rPr lang="en-US" sz="1050" dirty="0">
+                <a:solidFill>
+                  <a:srgbClr val="CCCCCC"/>
                 </a:solidFill>
                 <a:latin typeface="Courier New" pitchFamily="34" charset="0"/>
                 <a:ea typeface="Courier New" pitchFamily="34" charset="-122"/>
@@ -11493,7 +12034,7 @@
             <a:r>
               <a:rPr lang="en-US" sz="1050" dirty="0">
                 <a:solidFill>
-                  <a:srgbClr val="4DB1FF"/>
+                  <a:srgbClr val="9CDCFE"/>
                 </a:solidFill>
                 <a:latin typeface="Courier New" pitchFamily="34" charset="0"/>
                 <a:ea typeface="Courier New" pitchFamily="34" charset="-122"/>
@@ -11510,13 +12051,47 @@
             <a:r>
               <a:rPr lang="en-US" sz="1050" dirty="0">
                 <a:solidFill>
-                  <a:srgbClr val="E8ECEF"/>
-                </a:solidFill>
-                <a:latin typeface="Courier New" pitchFamily="34" charset="0"/>
-                <a:ea typeface="Courier New" pitchFamily="34" charset="-122"/>
-                <a:cs typeface="Courier New" pitchFamily="34" charset="-120"/>
-              </a:rPr>
-              <a:t>: {</a:t>
+                  <a:srgbClr val="CCCCCC"/>
+                </a:solidFill>
+                <a:latin typeface="Courier New" pitchFamily="34" charset="0"/>
+                <a:ea typeface="Courier New" pitchFamily="34" charset="-122"/>
+                <a:cs typeface="Courier New" pitchFamily="34" charset="-120"/>
+              </a:rPr>
+              <a:t>:</a:t>
+            </a:r>
+            <a:pPr indent="0" marL="0">
+              <a:lnSpc>
+                <a:spcPct val="105000"/>
+              </a:lnSpc>
+              <a:buNone/>
+            </a:pPr>
+            <a:r>
+              <a:rPr lang="en-US" sz="1050" dirty="0">
+                <a:solidFill>
+                  <a:srgbClr val="CCCCCC"/>
+                </a:solidFill>
+                <a:latin typeface="Courier New" pitchFamily="34" charset="0"/>
+                <a:ea typeface="Courier New" pitchFamily="34" charset="-122"/>
+                <a:cs typeface="Courier New" pitchFamily="34" charset="-120"/>
+              </a:rPr>
+              <a:t> </a:t>
+            </a:r>
+            <a:pPr indent="0" marL="0">
+              <a:lnSpc>
+                <a:spcPct val="105000"/>
+              </a:lnSpc>
+              <a:buNone/>
+            </a:pPr>
+            <a:r>
+              <a:rPr lang="en-US" sz="1050" dirty="0">
+                <a:solidFill>
+                  <a:srgbClr val="CCCCCC"/>
+                </a:solidFill>
+                <a:latin typeface="Courier New" pitchFamily="34" charset="0"/>
+                <a:ea typeface="Courier New" pitchFamily="34" charset="-122"/>
+                <a:cs typeface="Courier New" pitchFamily="34" charset="-120"/>
+              </a:rPr>
+              <a:t>{</a:t>
             </a:r>
             <a:endParaRPr lang="en-US" sz="1050" dirty="0"/>
           </a:p>
@@ -11530,7 +12105,24 @@
             <a:r>
               <a:rPr lang="en-US" sz="1050" dirty="0">
                 <a:solidFill>
-                  <a:srgbClr val="E8ECEF"/>
+                  <a:srgbClr val="6E7681"/>
+                </a:solidFill>
+                <a:latin typeface="Courier New" pitchFamily="34" charset="0"/>
+                <a:ea typeface="Courier New" pitchFamily="34" charset="-122"/>
+                <a:cs typeface="Courier New" pitchFamily="34" charset="-120"/>
+              </a:rPr>
+              <a:t> 3  </a:t>
+            </a:r>
+            <a:pPr indent="0" marL="0">
+              <a:lnSpc>
+                <a:spcPct val="105000"/>
+              </a:lnSpc>
+              <a:buNone/>
+            </a:pPr>
+            <a:r>
+              <a:rPr lang="en-US" sz="1050" dirty="0">
+                <a:solidFill>
+                  <a:srgbClr val="CCCCCC"/>
                 </a:solidFill>
                 <a:latin typeface="Courier New" pitchFamily="34" charset="0"/>
                 <a:ea typeface="Courier New" pitchFamily="34" charset="-122"/>
@@ -11547,7 +12139,7 @@
             <a:r>
               <a:rPr lang="en-US" sz="1050" dirty="0">
                 <a:solidFill>
-                  <a:srgbClr val="4DB1FF"/>
+                  <a:srgbClr val="9CDCFE"/>
                 </a:solidFill>
                 <a:latin typeface="Courier New" pitchFamily="34" charset="0"/>
                 <a:ea typeface="Courier New" pitchFamily="34" charset="-122"/>
@@ -11564,13 +12156,47 @@
             <a:r>
               <a:rPr lang="en-US" sz="1050" dirty="0">
                 <a:solidFill>
-                  <a:srgbClr val="E8ECEF"/>
-                </a:solidFill>
-                <a:latin typeface="Courier New" pitchFamily="34" charset="0"/>
-                <a:ea typeface="Courier New" pitchFamily="34" charset="-122"/>
-                <a:cs typeface="Courier New" pitchFamily="34" charset="-120"/>
-              </a:rPr>
-              <a:t>: {</a:t>
+                  <a:srgbClr val="CCCCCC"/>
+                </a:solidFill>
+                <a:latin typeface="Courier New" pitchFamily="34" charset="0"/>
+                <a:ea typeface="Courier New" pitchFamily="34" charset="-122"/>
+                <a:cs typeface="Courier New" pitchFamily="34" charset="-120"/>
+              </a:rPr>
+              <a:t>:</a:t>
+            </a:r>
+            <a:pPr indent="0" marL="0">
+              <a:lnSpc>
+                <a:spcPct val="105000"/>
+              </a:lnSpc>
+              <a:buNone/>
+            </a:pPr>
+            <a:r>
+              <a:rPr lang="en-US" sz="1050" dirty="0">
+                <a:solidFill>
+                  <a:srgbClr val="CCCCCC"/>
+                </a:solidFill>
+                <a:latin typeface="Courier New" pitchFamily="34" charset="0"/>
+                <a:ea typeface="Courier New" pitchFamily="34" charset="-122"/>
+                <a:cs typeface="Courier New" pitchFamily="34" charset="-120"/>
+              </a:rPr>
+              <a:t> </a:t>
+            </a:r>
+            <a:pPr indent="0" marL="0">
+              <a:lnSpc>
+                <a:spcPct val="105000"/>
+              </a:lnSpc>
+              <a:buNone/>
+            </a:pPr>
+            <a:r>
+              <a:rPr lang="en-US" sz="1050" dirty="0">
+                <a:solidFill>
+                  <a:srgbClr val="CCCCCC"/>
+                </a:solidFill>
+                <a:latin typeface="Courier New" pitchFamily="34" charset="0"/>
+                <a:ea typeface="Courier New" pitchFamily="34" charset="-122"/>
+                <a:cs typeface="Courier New" pitchFamily="34" charset="-120"/>
+              </a:rPr>
+              <a:t>{</a:t>
             </a:r>
             <a:endParaRPr lang="en-US" sz="1050" dirty="0"/>
           </a:p>
@@ -11584,7 +12210,24 @@
             <a:r>
               <a:rPr lang="en-US" sz="1050" dirty="0">
                 <a:solidFill>
-                  <a:srgbClr val="E8ECEF"/>
+                  <a:srgbClr val="6E7681"/>
+                </a:solidFill>
+                <a:latin typeface="Courier New" pitchFamily="34" charset="0"/>
+                <a:ea typeface="Courier New" pitchFamily="34" charset="-122"/>
+                <a:cs typeface="Courier New" pitchFamily="34" charset="-120"/>
+              </a:rPr>
+              <a:t> 4  </a:t>
+            </a:r>
+            <a:pPr indent="0" marL="0">
+              <a:lnSpc>
+                <a:spcPct val="105000"/>
+              </a:lnSpc>
+              <a:buNone/>
+            </a:pPr>
+            <a:r>
+              <a:rPr lang="en-US" sz="1050" dirty="0">
+                <a:solidFill>
+                  <a:srgbClr val="CCCCCC"/>
                 </a:solidFill>
                 <a:latin typeface="Courier New" pitchFamily="34" charset="0"/>
                 <a:ea typeface="Courier New" pitchFamily="34" charset="-122"/>
@@ -11601,7 +12244,7 @@
             <a:r>
               <a:rPr lang="en-US" sz="1050" dirty="0">
                 <a:solidFill>
-                  <a:srgbClr val="4DB1FF"/>
+                  <a:srgbClr val="9CDCFE"/>
                 </a:solidFill>
                 <a:latin typeface="Courier New" pitchFamily="34" charset="0"/>
                 <a:ea typeface="Courier New" pitchFamily="34" charset="-122"/>
@@ -11618,13 +12261,13 @@
             <a:r>
               <a:rPr lang="en-US" sz="1050" dirty="0">
                 <a:solidFill>
-                  <a:srgbClr val="E8ECEF"/>
-                </a:solidFill>
-                <a:latin typeface="Courier New" pitchFamily="34" charset="0"/>
-                <a:ea typeface="Courier New" pitchFamily="34" charset="-122"/>
-                <a:cs typeface="Courier New" pitchFamily="34" charset="-120"/>
-              </a:rPr>
-              <a:t>: </a:t>
+                  <a:srgbClr val="CCCCCC"/>
+                </a:solidFill>
+                <a:latin typeface="Courier New" pitchFamily="34" charset="0"/>
+                <a:ea typeface="Courier New" pitchFamily="34" charset="-122"/>
+                <a:cs typeface="Courier New" pitchFamily="34" charset="-120"/>
+              </a:rPr>
+              <a:t>:</a:t>
             </a:r>
             <a:pPr indent="0" marL="0">
               <a:lnSpc>
@@ -11635,7 +12278,24 @@
             <a:r>
               <a:rPr lang="en-US" sz="1050" dirty="0">
                 <a:solidFill>
-                  <a:srgbClr val="8FD694"/>
+                  <a:srgbClr val="CCCCCC"/>
+                </a:solidFill>
+                <a:latin typeface="Courier New" pitchFamily="34" charset="0"/>
+                <a:ea typeface="Courier New" pitchFamily="34" charset="-122"/>
+                <a:cs typeface="Courier New" pitchFamily="34" charset="-120"/>
+              </a:rPr>
+              <a:t> </a:t>
+            </a:r>
+            <a:pPr indent="0" marL="0">
+              <a:lnSpc>
+                <a:spcPct val="105000"/>
+              </a:lnSpc>
+              <a:buNone/>
+            </a:pPr>
+            <a:r>
+              <a:rPr lang="en-US" sz="1050" dirty="0">
+                <a:solidFill>
+                  <a:srgbClr val="CE9178"/>
                 </a:solidFill>
                 <a:latin typeface="Courier New" pitchFamily="34" charset="0"/>
                 <a:ea typeface="Courier New" pitchFamily="34" charset="-122"/>
@@ -11652,7 +12312,7 @@
             <a:r>
               <a:rPr lang="en-US" sz="1050" dirty="0">
                 <a:solidFill>
-                  <a:srgbClr val="E8ECEF"/>
+                  <a:srgbClr val="CCCCCC"/>
                 </a:solidFill>
                 <a:latin typeface="Courier New" pitchFamily="34" charset="0"/>
                 <a:ea typeface="Courier New" pitchFamily="34" charset="-122"/>
@@ -11672,7 +12332,24 @@
             <a:r>
               <a:rPr lang="en-US" sz="1050" dirty="0">
                 <a:solidFill>
-                  <a:srgbClr val="E8ECEF"/>
+                  <a:srgbClr val="6E7681"/>
+                </a:solidFill>
+                <a:latin typeface="Courier New" pitchFamily="34" charset="0"/>
+                <a:ea typeface="Courier New" pitchFamily="34" charset="-122"/>
+                <a:cs typeface="Courier New" pitchFamily="34" charset="-120"/>
+              </a:rPr>
+              <a:t> 5  </a:t>
+            </a:r>
+            <a:pPr indent="0" marL="0">
+              <a:lnSpc>
+                <a:spcPct val="105000"/>
+              </a:lnSpc>
+              <a:buNone/>
+            </a:pPr>
+            <a:r>
+              <a:rPr lang="en-US" sz="1050" dirty="0">
+                <a:solidFill>
+                  <a:srgbClr val="CCCCCC"/>
                 </a:solidFill>
                 <a:latin typeface="Courier New" pitchFamily="34" charset="0"/>
                 <a:ea typeface="Courier New" pitchFamily="34" charset="-122"/>
@@ -11689,7 +12366,7 @@
             <a:r>
               <a:rPr lang="en-US" sz="1050" dirty="0">
                 <a:solidFill>
-                  <a:srgbClr val="4DB1FF"/>
+                  <a:srgbClr val="9CDCFE"/>
                 </a:solidFill>
                 <a:latin typeface="Courier New" pitchFamily="34" charset="0"/>
                 <a:ea typeface="Courier New" pitchFamily="34" charset="-122"/>
@@ -11706,13 +12383,13 @@
             <a:r>
               <a:rPr lang="en-US" sz="1050" dirty="0">
                 <a:solidFill>
-                  <a:srgbClr val="E8ECEF"/>
-                </a:solidFill>
-                <a:latin typeface="Courier New" pitchFamily="34" charset="0"/>
-                <a:ea typeface="Courier New" pitchFamily="34" charset="-122"/>
-                <a:cs typeface="Courier New" pitchFamily="34" charset="-120"/>
-              </a:rPr>
-              <a:t>: </a:t>
+                  <a:srgbClr val="CCCCCC"/>
+                </a:solidFill>
+                <a:latin typeface="Courier New" pitchFamily="34" charset="0"/>
+                <a:ea typeface="Courier New" pitchFamily="34" charset="-122"/>
+                <a:cs typeface="Courier New" pitchFamily="34" charset="-120"/>
+              </a:rPr>
+              <a:t>:</a:t>
             </a:r>
             <a:pPr indent="0" marL="0">
               <a:lnSpc>
@@ -11723,7 +12400,24 @@
             <a:r>
               <a:rPr lang="en-US" sz="1050" dirty="0">
                 <a:solidFill>
-                  <a:srgbClr val="8FD694"/>
+                  <a:srgbClr val="CCCCCC"/>
+                </a:solidFill>
+                <a:latin typeface="Courier New" pitchFamily="34" charset="0"/>
+                <a:ea typeface="Courier New" pitchFamily="34" charset="-122"/>
+                <a:cs typeface="Courier New" pitchFamily="34" charset="-120"/>
+              </a:rPr>
+              <a:t> </a:t>
+            </a:r>
+            <a:pPr indent="0" marL="0">
+              <a:lnSpc>
+                <a:spcPct val="105000"/>
+              </a:lnSpc>
+              <a:buNone/>
+            </a:pPr>
+            <a:r>
+              <a:rPr lang="en-US" sz="1050" dirty="0">
+                <a:solidFill>
+                  <a:srgbClr val="CE9178"/>
                 </a:solidFill>
                 <a:latin typeface="Courier New" pitchFamily="34" charset="0"/>
                 <a:ea typeface="Courier New" pitchFamily="34" charset="-122"/>
@@ -11740,7 +12434,7 @@
             <a:r>
               <a:rPr lang="en-US" sz="1050" dirty="0">
                 <a:solidFill>
-                  <a:srgbClr val="E8ECEF"/>
+                  <a:srgbClr val="CCCCCC"/>
                 </a:solidFill>
                 <a:latin typeface="Courier New" pitchFamily="34" charset="0"/>
                 <a:ea typeface="Courier New" pitchFamily="34" charset="-122"/>
@@ -11760,7 +12454,24 @@
             <a:r>
               <a:rPr lang="en-US" sz="1050" dirty="0">
                 <a:solidFill>
-                  <a:srgbClr val="E8ECEF"/>
+                  <a:srgbClr val="6E7681"/>
+                </a:solidFill>
+                <a:latin typeface="Courier New" pitchFamily="34" charset="0"/>
+                <a:ea typeface="Courier New" pitchFamily="34" charset="-122"/>
+                <a:cs typeface="Courier New" pitchFamily="34" charset="-120"/>
+              </a:rPr>
+              <a:t> 6  </a:t>
+            </a:r>
+            <a:pPr indent="0" marL="0">
+              <a:lnSpc>
+                <a:spcPct val="105000"/>
+              </a:lnSpc>
+              <a:buNone/>
+            </a:pPr>
+            <a:r>
+              <a:rPr lang="en-US" sz="1050" dirty="0">
+                <a:solidFill>
+                  <a:srgbClr val="CCCCCC"/>
                 </a:solidFill>
                 <a:latin typeface="Courier New" pitchFamily="34" charset="0"/>
                 <a:ea typeface="Courier New" pitchFamily="34" charset="-122"/>
@@ -11777,7 +12488,7 @@
             <a:r>
               <a:rPr lang="en-US" sz="1050" dirty="0">
                 <a:solidFill>
-                  <a:srgbClr val="4DB1FF"/>
+                  <a:srgbClr val="9CDCFE"/>
                 </a:solidFill>
                 <a:latin typeface="Courier New" pitchFamily="34" charset="0"/>
                 <a:ea typeface="Courier New" pitchFamily="34" charset="-122"/>
@@ -11794,13 +12505,13 @@
             <a:r>
               <a:rPr lang="en-US" sz="1050" dirty="0">
                 <a:solidFill>
-                  <a:srgbClr val="E8ECEF"/>
-                </a:solidFill>
-                <a:latin typeface="Courier New" pitchFamily="34" charset="0"/>
-                <a:ea typeface="Courier New" pitchFamily="34" charset="-122"/>
-                <a:cs typeface="Courier New" pitchFamily="34" charset="-120"/>
-              </a:rPr>
-              <a:t>: { </a:t>
+                  <a:srgbClr val="CCCCCC"/>
+                </a:solidFill>
+                <a:latin typeface="Courier New" pitchFamily="34" charset="0"/>
+                <a:ea typeface="Courier New" pitchFamily="34" charset="-122"/>
+                <a:cs typeface="Courier New" pitchFamily="34" charset="-120"/>
+              </a:rPr>
+              <a:t>:</a:t>
             </a:r>
             <a:pPr indent="0" marL="0">
               <a:lnSpc>
@@ -11811,7 +12522,58 @@
             <a:r>
               <a:rPr lang="en-US" sz="1050" dirty="0">
                 <a:solidFill>
-                  <a:srgbClr val="4DB1FF"/>
+                  <a:srgbClr val="CCCCCC"/>
+                </a:solidFill>
+                <a:latin typeface="Courier New" pitchFamily="34" charset="0"/>
+                <a:ea typeface="Courier New" pitchFamily="34" charset="-122"/>
+                <a:cs typeface="Courier New" pitchFamily="34" charset="-120"/>
+              </a:rPr>
+              <a:t> </a:t>
+            </a:r>
+            <a:pPr indent="0" marL="0">
+              <a:lnSpc>
+                <a:spcPct val="105000"/>
+              </a:lnSpc>
+              <a:buNone/>
+            </a:pPr>
+            <a:r>
+              <a:rPr lang="en-US" sz="1050" dirty="0">
+                <a:solidFill>
+                  <a:srgbClr val="CCCCCC"/>
+                </a:solidFill>
+                <a:latin typeface="Courier New" pitchFamily="34" charset="0"/>
+                <a:ea typeface="Courier New" pitchFamily="34" charset="-122"/>
+                <a:cs typeface="Courier New" pitchFamily="34" charset="-120"/>
+              </a:rPr>
+              <a:t>{</a:t>
+            </a:r>
+            <a:pPr indent="0" marL="0">
+              <a:lnSpc>
+                <a:spcPct val="105000"/>
+              </a:lnSpc>
+              <a:buNone/>
+            </a:pPr>
+            <a:r>
+              <a:rPr lang="en-US" sz="1050" dirty="0">
+                <a:solidFill>
+                  <a:srgbClr val="CCCCCC"/>
+                </a:solidFill>
+                <a:latin typeface="Courier New" pitchFamily="34" charset="0"/>
+                <a:ea typeface="Courier New" pitchFamily="34" charset="-122"/>
+                <a:cs typeface="Courier New" pitchFamily="34" charset="-120"/>
+              </a:rPr>
+              <a:t> </a:t>
+            </a:r>
+            <a:pPr indent="0" marL="0">
+              <a:lnSpc>
+                <a:spcPct val="105000"/>
+              </a:lnSpc>
+              <a:buNone/>
+            </a:pPr>
+            <a:r>
+              <a:rPr lang="en-US" sz="1050" dirty="0">
+                <a:solidFill>
+                  <a:srgbClr val="9CDCFE"/>
                 </a:solidFill>
                 <a:latin typeface="Courier New" pitchFamily="34" charset="0"/>
                 <a:ea typeface="Courier New" pitchFamily="34" charset="-122"/>
@@ -11828,13 +12590,47 @@
             <a:r>
               <a:rPr lang="en-US" sz="1050" dirty="0">
                 <a:solidFill>
-                  <a:srgbClr val="E8ECEF"/>
-                </a:solidFill>
-                <a:latin typeface="Courier New" pitchFamily="34" charset="0"/>
-                <a:ea typeface="Courier New" pitchFamily="34" charset="-122"/>
-                <a:cs typeface="Courier New" pitchFamily="34" charset="-120"/>
-              </a:rPr>
-              <a:t>: {</a:t>
+                  <a:srgbClr val="CCCCCC"/>
+                </a:solidFill>
+                <a:latin typeface="Courier New" pitchFamily="34" charset="0"/>
+                <a:ea typeface="Courier New" pitchFamily="34" charset="-122"/>
+                <a:cs typeface="Courier New" pitchFamily="34" charset="-120"/>
+              </a:rPr>
+              <a:t>:</a:t>
+            </a:r>
+            <a:pPr indent="0" marL="0">
+              <a:lnSpc>
+                <a:spcPct val="105000"/>
+              </a:lnSpc>
+              <a:buNone/>
+            </a:pPr>
+            <a:r>
+              <a:rPr lang="en-US" sz="1050" dirty="0">
+                <a:solidFill>
+                  <a:srgbClr val="CCCCCC"/>
+                </a:solidFill>
+                <a:latin typeface="Courier New" pitchFamily="34" charset="0"/>
+                <a:ea typeface="Courier New" pitchFamily="34" charset="-122"/>
+                <a:cs typeface="Courier New" pitchFamily="34" charset="-120"/>
+              </a:rPr>
+              <a:t> </a:t>
+            </a:r>
+            <a:pPr indent="0" marL="0">
+              <a:lnSpc>
+                <a:spcPct val="105000"/>
+              </a:lnSpc>
+              <a:buNone/>
+            </a:pPr>
+            <a:r>
+              <a:rPr lang="en-US" sz="1050" dirty="0">
+                <a:solidFill>
+                  <a:srgbClr val="CCCCCC"/>
+                </a:solidFill>
+                <a:latin typeface="Courier New" pitchFamily="34" charset="0"/>
+                <a:ea typeface="Courier New" pitchFamily="34" charset="-122"/>
+                <a:cs typeface="Courier New" pitchFamily="34" charset="-120"/>
+              </a:rPr>
+              <a:t>{</a:t>
             </a:r>
             <a:endParaRPr lang="en-US" sz="1050" dirty="0"/>
           </a:p>
@@ -11848,7 +12644,24 @@
             <a:r>
               <a:rPr lang="en-US" sz="1050" dirty="0">
                 <a:solidFill>
-                  <a:srgbClr val="E8ECEF"/>
+                  <a:srgbClr val="6E7681"/>
+                </a:solidFill>
+                <a:latin typeface="Courier New" pitchFamily="34" charset="0"/>
+                <a:ea typeface="Courier New" pitchFamily="34" charset="-122"/>
+                <a:cs typeface="Courier New" pitchFamily="34" charset="-120"/>
+              </a:rPr>
+              <a:t> 7  </a:t>
+            </a:r>
+            <a:pPr indent="0" marL="0">
+              <a:lnSpc>
+                <a:spcPct val="105000"/>
+              </a:lnSpc>
+              <a:buNone/>
+            </a:pPr>
+            <a:r>
+              <a:rPr lang="en-US" sz="1050" dirty="0">
+                <a:solidFill>
+                  <a:srgbClr val="CCCCCC"/>
                 </a:solidFill>
                 <a:latin typeface="Courier New" pitchFamily="34" charset="0"/>
                 <a:ea typeface="Courier New" pitchFamily="34" charset="-122"/>
@@ -11865,7 +12678,7 @@
             <a:r>
               <a:rPr lang="en-US" sz="1050" dirty="0">
                 <a:solidFill>
-                  <a:srgbClr val="4DB1FF"/>
+                  <a:srgbClr val="9CDCFE"/>
                 </a:solidFill>
                 <a:latin typeface="Courier New" pitchFamily="34" charset="0"/>
                 <a:ea typeface="Courier New" pitchFamily="34" charset="-122"/>
@@ -11882,13 +12695,13 @@
             <a:r>
               <a:rPr lang="en-US" sz="1050" dirty="0">
                 <a:solidFill>
-                  <a:srgbClr val="E8ECEF"/>
-                </a:solidFill>
-                <a:latin typeface="Courier New" pitchFamily="34" charset="0"/>
-                <a:ea typeface="Courier New" pitchFamily="34" charset="-122"/>
-                <a:cs typeface="Courier New" pitchFamily="34" charset="-120"/>
-              </a:rPr>
-              <a:t>: </a:t>
+                  <a:srgbClr val="CCCCCC"/>
+                </a:solidFill>
+                <a:latin typeface="Courier New" pitchFamily="34" charset="0"/>
+                <a:ea typeface="Courier New" pitchFamily="34" charset="-122"/>
+                <a:cs typeface="Courier New" pitchFamily="34" charset="-120"/>
+              </a:rPr>
+              <a:t>:</a:t>
             </a:r>
             <a:pPr indent="0" marL="0">
               <a:lnSpc>
@@ -11899,7 +12712,24 @@
             <a:r>
               <a:rPr lang="en-US" sz="1050" dirty="0">
                 <a:solidFill>
-                  <a:srgbClr val="8FD694"/>
+                  <a:srgbClr val="CCCCCC"/>
+                </a:solidFill>
+                <a:latin typeface="Courier New" pitchFamily="34" charset="0"/>
+                <a:ea typeface="Courier New" pitchFamily="34" charset="-122"/>
+                <a:cs typeface="Courier New" pitchFamily="34" charset="-120"/>
+              </a:rPr>
+              <a:t> </a:t>
+            </a:r>
+            <a:pPr indent="0" marL="0">
+              <a:lnSpc>
+                <a:spcPct val="105000"/>
+              </a:lnSpc>
+              <a:buNone/>
+            </a:pPr>
+            <a:r>
+              <a:rPr lang="en-US" sz="1050" dirty="0">
+                <a:solidFill>
+                  <a:srgbClr val="CE9178"/>
                 </a:solidFill>
                 <a:latin typeface="Courier New" pitchFamily="34" charset="0"/>
                 <a:ea typeface="Courier New" pitchFamily="34" charset="-122"/>
@@ -11916,7 +12746,7 @@
             <a:r>
               <a:rPr lang="en-US" sz="1050" dirty="0">
                 <a:solidFill>
-                  <a:srgbClr val="E8ECEF"/>
+                  <a:srgbClr val="CCCCCC"/>
                 </a:solidFill>
                 <a:latin typeface="Courier New" pitchFamily="34" charset="0"/>
                 <a:ea typeface="Courier New" pitchFamily="34" charset="-122"/>
@@ -11936,7 +12766,24 @@
             <a:r>
               <a:rPr lang="en-US" sz="1050" dirty="0">
                 <a:solidFill>
-                  <a:srgbClr val="E8ECEF"/>
+                  <a:srgbClr val="6E7681"/>
+                </a:solidFill>
+                <a:latin typeface="Courier New" pitchFamily="34" charset="0"/>
+                <a:ea typeface="Courier New" pitchFamily="34" charset="-122"/>
+                <a:cs typeface="Courier New" pitchFamily="34" charset="-120"/>
+              </a:rPr>
+              <a:t> 8  </a:t>
+            </a:r>
+            <a:pPr indent="0" marL="0">
+              <a:lnSpc>
+                <a:spcPct val="105000"/>
+              </a:lnSpc>
+              <a:buNone/>
+            </a:pPr>
+            <a:r>
+              <a:rPr lang="en-US" sz="1050" dirty="0">
+                <a:solidFill>
+                  <a:srgbClr val="CCCCCC"/>
                 </a:solidFill>
                 <a:latin typeface="Courier New" pitchFamily="34" charset="0"/>
                 <a:ea typeface="Courier New" pitchFamily="34" charset="-122"/>
@@ -11953,7 +12800,7 @@
             <a:r>
               <a:rPr lang="en-US" sz="1050" dirty="0">
                 <a:solidFill>
-                  <a:srgbClr val="4DB1FF"/>
+                  <a:srgbClr val="9CDCFE"/>
                 </a:solidFill>
                 <a:latin typeface="Courier New" pitchFamily="34" charset="0"/>
                 <a:ea typeface="Courier New" pitchFamily="34" charset="-122"/>
@@ -11970,13 +12817,13 @@
             <a:r>
               <a:rPr lang="en-US" sz="1050" dirty="0">
                 <a:solidFill>
-                  <a:srgbClr val="E8ECEF"/>
-                </a:solidFill>
-                <a:latin typeface="Courier New" pitchFamily="34" charset="0"/>
-                <a:ea typeface="Courier New" pitchFamily="34" charset="-122"/>
-                <a:cs typeface="Courier New" pitchFamily="34" charset="-120"/>
-              </a:rPr>
-              <a:t>: </a:t>
+                  <a:srgbClr val="CCCCCC"/>
+                </a:solidFill>
+                <a:latin typeface="Courier New" pitchFamily="34" charset="0"/>
+                <a:ea typeface="Courier New" pitchFamily="34" charset="-122"/>
+                <a:cs typeface="Courier New" pitchFamily="34" charset="-120"/>
+              </a:rPr>
+              <a:t>:</a:t>
             </a:r>
             <a:pPr indent="0" marL="0">
               <a:lnSpc>
@@ -11987,7 +12834,24 @@
             <a:r>
               <a:rPr lang="en-US" sz="1050" dirty="0">
                 <a:solidFill>
-                  <a:srgbClr val="8FD694"/>
+                  <a:srgbClr val="CCCCCC"/>
+                </a:solidFill>
+                <a:latin typeface="Courier New" pitchFamily="34" charset="0"/>
+                <a:ea typeface="Courier New" pitchFamily="34" charset="-122"/>
+                <a:cs typeface="Courier New" pitchFamily="34" charset="-120"/>
+              </a:rPr>
+              <a:t> </a:t>
+            </a:r>
+            <a:pPr indent="0" marL="0">
+              <a:lnSpc>
+                <a:spcPct val="105000"/>
+              </a:lnSpc>
+              <a:buNone/>
+            </a:pPr>
+            <a:r>
+              <a:rPr lang="en-US" sz="1050" dirty="0">
+                <a:solidFill>
+                  <a:srgbClr val="CE9178"/>
                 </a:solidFill>
                 <a:latin typeface="Courier New" pitchFamily="34" charset="0"/>
                 <a:ea typeface="Courier New" pitchFamily="34" charset="-122"/>
@@ -12004,7 +12868,7 @@
             <a:r>
               <a:rPr lang="en-US" sz="1050" dirty="0">
                 <a:solidFill>
-                  <a:srgbClr val="E8ECEF"/>
+                  <a:srgbClr val="CCCCCC"/>
                 </a:solidFill>
                 <a:latin typeface="Courier New" pitchFamily="34" charset="0"/>
                 <a:ea typeface="Courier New" pitchFamily="34" charset="-122"/>
@@ -12024,7 +12888,24 @@
             <a:r>
               <a:rPr lang="en-US" sz="1050" dirty="0">
                 <a:solidFill>
-                  <a:srgbClr val="E8ECEF"/>
+                  <a:srgbClr val="6E7681"/>
+                </a:solidFill>
+                <a:latin typeface="Courier New" pitchFamily="34" charset="0"/>
+                <a:ea typeface="Courier New" pitchFamily="34" charset="-122"/>
+                <a:cs typeface="Courier New" pitchFamily="34" charset="-120"/>
+              </a:rPr>
+              <a:t> 9  </a:t>
+            </a:r>
+            <a:pPr indent="0" marL="0">
+              <a:lnSpc>
+                <a:spcPct val="105000"/>
+              </a:lnSpc>
+              <a:buNone/>
+            </a:pPr>
+            <a:r>
+              <a:rPr lang="en-US" sz="1050" dirty="0">
+                <a:solidFill>
+                  <a:srgbClr val="CCCCCC"/>
                 </a:solidFill>
                 <a:latin typeface="Courier New" pitchFamily="34" charset="0"/>
                 <a:ea typeface="Courier New" pitchFamily="34" charset="-122"/>
@@ -12041,7 +12922,7 @@
             <a:r>
               <a:rPr lang="en-US" sz="1050" dirty="0">
                 <a:solidFill>
-                  <a:srgbClr val="4DB1FF"/>
+                  <a:srgbClr val="9CDCFE"/>
                 </a:solidFill>
                 <a:latin typeface="Courier New" pitchFamily="34" charset="0"/>
                 <a:ea typeface="Courier New" pitchFamily="34" charset="-122"/>
@@ -12058,13 +12939,13 @@
             <a:r>
               <a:rPr lang="en-US" sz="1050" dirty="0">
                 <a:solidFill>
-                  <a:srgbClr val="E8ECEF"/>
-                </a:solidFill>
-                <a:latin typeface="Courier New" pitchFamily="34" charset="0"/>
-                <a:ea typeface="Courier New" pitchFamily="34" charset="-122"/>
-                <a:cs typeface="Courier New" pitchFamily="34" charset="-120"/>
-              </a:rPr>
-              <a:t>: { </a:t>
+                  <a:srgbClr val="CCCCCC"/>
+                </a:solidFill>
+                <a:latin typeface="Courier New" pitchFamily="34" charset="0"/>
+                <a:ea typeface="Courier New" pitchFamily="34" charset="-122"/>
+                <a:cs typeface="Courier New" pitchFamily="34" charset="-120"/>
+              </a:rPr>
+              <a:t>:</a:t>
             </a:r>
             <a:pPr indent="0" marL="0">
               <a:lnSpc>
@@ -12075,7 +12956,58 @@
             <a:r>
               <a:rPr lang="en-US" sz="1050" dirty="0">
                 <a:solidFill>
-                  <a:srgbClr val="4DB1FF"/>
+                  <a:srgbClr val="CCCCCC"/>
+                </a:solidFill>
+                <a:latin typeface="Courier New" pitchFamily="34" charset="0"/>
+                <a:ea typeface="Courier New" pitchFamily="34" charset="-122"/>
+                <a:cs typeface="Courier New" pitchFamily="34" charset="-120"/>
+              </a:rPr>
+              <a:t> </a:t>
+            </a:r>
+            <a:pPr indent="0" marL="0">
+              <a:lnSpc>
+                <a:spcPct val="105000"/>
+              </a:lnSpc>
+              <a:buNone/>
+            </a:pPr>
+            <a:r>
+              <a:rPr lang="en-US" sz="1050" dirty="0">
+                <a:solidFill>
+                  <a:srgbClr val="CCCCCC"/>
+                </a:solidFill>
+                <a:latin typeface="Courier New" pitchFamily="34" charset="0"/>
+                <a:ea typeface="Courier New" pitchFamily="34" charset="-122"/>
+                <a:cs typeface="Courier New" pitchFamily="34" charset="-120"/>
+              </a:rPr>
+              <a:t>{</a:t>
+            </a:r>
+            <a:pPr indent="0" marL="0">
+              <a:lnSpc>
+                <a:spcPct val="105000"/>
+              </a:lnSpc>
+              <a:buNone/>
+            </a:pPr>
+            <a:r>
+              <a:rPr lang="en-US" sz="1050" dirty="0">
+                <a:solidFill>
+                  <a:srgbClr val="CCCCCC"/>
+                </a:solidFill>
+                <a:latin typeface="Courier New" pitchFamily="34" charset="0"/>
+                <a:ea typeface="Courier New" pitchFamily="34" charset="-122"/>
+                <a:cs typeface="Courier New" pitchFamily="34" charset="-120"/>
+              </a:rPr>
+              <a:t> </a:t>
+            </a:r>
+            <a:pPr indent="0" marL="0">
+              <a:lnSpc>
+                <a:spcPct val="105000"/>
+              </a:lnSpc>
+              <a:buNone/>
+            </a:pPr>
+            <a:r>
+              <a:rPr lang="en-US" sz="1050" dirty="0">
+                <a:solidFill>
+                  <a:srgbClr val="9CDCFE"/>
                 </a:solidFill>
                 <a:latin typeface="Courier New" pitchFamily="34" charset="0"/>
                 <a:ea typeface="Courier New" pitchFamily="34" charset="-122"/>
@@ -12092,13 +13024,47 @@
             <a:r>
               <a:rPr lang="en-US" sz="1050" dirty="0">
                 <a:solidFill>
-                  <a:srgbClr val="E8ECEF"/>
-                </a:solidFill>
-                <a:latin typeface="Courier New" pitchFamily="34" charset="0"/>
-                <a:ea typeface="Courier New" pitchFamily="34" charset="-122"/>
-                <a:cs typeface="Courier New" pitchFamily="34" charset="-120"/>
-              </a:rPr>
-              <a:t>: {</a:t>
+                  <a:srgbClr val="CCCCCC"/>
+                </a:solidFill>
+                <a:latin typeface="Courier New" pitchFamily="34" charset="0"/>
+                <a:ea typeface="Courier New" pitchFamily="34" charset="-122"/>
+                <a:cs typeface="Courier New" pitchFamily="34" charset="-120"/>
+              </a:rPr>
+              <a:t>:</a:t>
+            </a:r>
+            <a:pPr indent="0" marL="0">
+              <a:lnSpc>
+                <a:spcPct val="105000"/>
+              </a:lnSpc>
+              <a:buNone/>
+            </a:pPr>
+            <a:r>
+              <a:rPr lang="en-US" sz="1050" dirty="0">
+                <a:solidFill>
+                  <a:srgbClr val="CCCCCC"/>
+                </a:solidFill>
+                <a:latin typeface="Courier New" pitchFamily="34" charset="0"/>
+                <a:ea typeface="Courier New" pitchFamily="34" charset="-122"/>
+                <a:cs typeface="Courier New" pitchFamily="34" charset="-120"/>
+              </a:rPr>
+              <a:t> </a:t>
+            </a:r>
+            <a:pPr indent="0" marL="0">
+              <a:lnSpc>
+                <a:spcPct val="105000"/>
+              </a:lnSpc>
+              <a:buNone/>
+            </a:pPr>
+            <a:r>
+              <a:rPr lang="en-US" sz="1050" dirty="0">
+                <a:solidFill>
+                  <a:srgbClr val="CCCCCC"/>
+                </a:solidFill>
+                <a:latin typeface="Courier New" pitchFamily="34" charset="0"/>
+                <a:ea typeface="Courier New" pitchFamily="34" charset="-122"/>
+                <a:cs typeface="Courier New" pitchFamily="34" charset="-120"/>
+              </a:rPr>
+              <a:t>{</a:t>
             </a:r>
             <a:endParaRPr lang="en-US" sz="1050" dirty="0"/>
           </a:p>
@@ -12112,7 +13078,24 @@
             <a:r>
               <a:rPr lang="en-US" sz="1050" dirty="0">
                 <a:solidFill>
-                  <a:srgbClr val="E8ECEF"/>
+                  <a:srgbClr val="6E7681"/>
+                </a:solidFill>
+                <a:latin typeface="Courier New" pitchFamily="34" charset="0"/>
+                <a:ea typeface="Courier New" pitchFamily="34" charset="-122"/>
+                <a:cs typeface="Courier New" pitchFamily="34" charset="-120"/>
+              </a:rPr>
+              <a:t>10  </a:t>
+            </a:r>
+            <a:pPr indent="0" marL="0">
+              <a:lnSpc>
+                <a:spcPct val="105000"/>
+              </a:lnSpc>
+              <a:buNone/>
+            </a:pPr>
+            <a:r>
+              <a:rPr lang="en-US" sz="1050" dirty="0">
+                <a:solidFill>
+                  <a:srgbClr val="CCCCCC"/>
                 </a:solidFill>
                 <a:latin typeface="Courier New" pitchFamily="34" charset="0"/>
                 <a:ea typeface="Courier New" pitchFamily="34" charset="-122"/>
@@ -12129,7 +13112,7 @@
             <a:r>
               <a:rPr lang="en-US" sz="1050" dirty="0">
                 <a:solidFill>
-                  <a:srgbClr val="4DB1FF"/>
+                  <a:srgbClr val="9CDCFE"/>
                 </a:solidFill>
                 <a:latin typeface="Courier New" pitchFamily="34" charset="0"/>
                 <a:ea typeface="Courier New" pitchFamily="34" charset="-122"/>
@@ -12146,13 +13129,13 @@
             <a:r>
               <a:rPr lang="en-US" sz="1050" dirty="0">
                 <a:solidFill>
-                  <a:srgbClr val="E8ECEF"/>
-                </a:solidFill>
-                <a:latin typeface="Courier New" pitchFamily="34" charset="0"/>
-                <a:ea typeface="Courier New" pitchFamily="34" charset="-122"/>
-                <a:cs typeface="Courier New" pitchFamily="34" charset="-120"/>
-              </a:rPr>
-              <a:t>: { </a:t>
+                  <a:srgbClr val="CCCCCC"/>
+                </a:solidFill>
+                <a:latin typeface="Courier New" pitchFamily="34" charset="0"/>
+                <a:ea typeface="Courier New" pitchFamily="34" charset="-122"/>
+                <a:cs typeface="Courier New" pitchFamily="34" charset="-120"/>
+              </a:rPr>
+              <a:t>:</a:t>
             </a:r>
             <a:pPr indent="0" marL="0">
               <a:lnSpc>
@@ -12163,7 +13146,58 @@
             <a:r>
               <a:rPr lang="en-US" sz="1050" dirty="0">
                 <a:solidFill>
-                  <a:srgbClr val="4DB1FF"/>
+                  <a:srgbClr val="CCCCCC"/>
+                </a:solidFill>
+                <a:latin typeface="Courier New" pitchFamily="34" charset="0"/>
+                <a:ea typeface="Courier New" pitchFamily="34" charset="-122"/>
+                <a:cs typeface="Courier New" pitchFamily="34" charset="-120"/>
+              </a:rPr>
+              <a:t> </a:t>
+            </a:r>
+            <a:pPr indent="0" marL="0">
+              <a:lnSpc>
+                <a:spcPct val="105000"/>
+              </a:lnSpc>
+              <a:buNone/>
+            </a:pPr>
+            <a:r>
+              <a:rPr lang="en-US" sz="1050" dirty="0">
+                <a:solidFill>
+                  <a:srgbClr val="CCCCCC"/>
+                </a:solidFill>
+                <a:latin typeface="Courier New" pitchFamily="34" charset="0"/>
+                <a:ea typeface="Courier New" pitchFamily="34" charset="-122"/>
+                <a:cs typeface="Courier New" pitchFamily="34" charset="-120"/>
+              </a:rPr>
+              <a:t>{</a:t>
+            </a:r>
+            <a:pPr indent="0" marL="0">
+              <a:lnSpc>
+                <a:spcPct val="105000"/>
+              </a:lnSpc>
+              <a:buNone/>
+            </a:pPr>
+            <a:r>
+              <a:rPr lang="en-US" sz="1050" dirty="0">
+                <a:solidFill>
+                  <a:srgbClr val="CCCCCC"/>
+                </a:solidFill>
+                <a:latin typeface="Courier New" pitchFamily="34" charset="0"/>
+                <a:ea typeface="Courier New" pitchFamily="34" charset="-122"/>
+                <a:cs typeface="Courier New" pitchFamily="34" charset="-120"/>
+              </a:rPr>
+              <a:t> </a:t>
+            </a:r>
+            <a:pPr indent="0" marL="0">
+              <a:lnSpc>
+                <a:spcPct val="105000"/>
+              </a:lnSpc>
+              <a:buNone/>
+            </a:pPr>
+            <a:r>
+              <a:rPr lang="en-US" sz="1050" dirty="0">
+                <a:solidFill>
+                  <a:srgbClr val="9CDCFE"/>
                 </a:solidFill>
                 <a:latin typeface="Courier New" pitchFamily="34" charset="0"/>
                 <a:ea typeface="Courier New" pitchFamily="34" charset="-122"/>
@@ -12180,13 +13214,13 @@
             <a:r>
               <a:rPr lang="en-US" sz="1050" dirty="0">
                 <a:solidFill>
-                  <a:srgbClr val="E8ECEF"/>
-                </a:solidFill>
-                <a:latin typeface="Courier New" pitchFamily="34" charset="0"/>
-                <a:ea typeface="Courier New" pitchFamily="34" charset="-122"/>
-                <a:cs typeface="Courier New" pitchFamily="34" charset="-120"/>
-              </a:rPr>
-              <a:t>: </a:t>
+                  <a:srgbClr val="CCCCCC"/>
+                </a:solidFill>
+                <a:latin typeface="Courier New" pitchFamily="34" charset="0"/>
+                <a:ea typeface="Courier New" pitchFamily="34" charset="-122"/>
+                <a:cs typeface="Courier New" pitchFamily="34" charset="-120"/>
+              </a:rPr>
+              <a:t>:</a:t>
             </a:r>
             <a:pPr indent="0" marL="0">
               <a:lnSpc>
@@ -12197,7 +13231,24 @@
             <a:r>
               <a:rPr lang="en-US" sz="1050" dirty="0">
                 <a:solidFill>
-                  <a:srgbClr val="8FD694"/>
+                  <a:srgbClr val="CCCCCC"/>
+                </a:solidFill>
+                <a:latin typeface="Courier New" pitchFamily="34" charset="0"/>
+                <a:ea typeface="Courier New" pitchFamily="34" charset="-122"/>
+                <a:cs typeface="Courier New" pitchFamily="34" charset="-120"/>
+              </a:rPr>
+              <a:t> </a:t>
+            </a:r>
+            <a:pPr indent="0" marL="0">
+              <a:lnSpc>
+                <a:spcPct val="105000"/>
+              </a:lnSpc>
+              <a:buNone/>
+            </a:pPr>
+            <a:r>
+              <a:rPr lang="en-US" sz="1050" dirty="0">
+                <a:solidFill>
+                  <a:srgbClr val="CE9178"/>
                 </a:solidFill>
                 <a:latin typeface="Courier New" pitchFamily="34" charset="0"/>
                 <a:ea typeface="Courier New" pitchFamily="34" charset="-122"/>
@@ -12214,13 +13265,98 @@
             <a:r>
               <a:rPr lang="en-US" sz="1050" dirty="0">
                 <a:solidFill>
-                  <a:srgbClr val="E8ECEF"/>
-                </a:solidFill>
-                <a:latin typeface="Courier New" pitchFamily="34" charset="0"/>
-                <a:ea typeface="Courier New" pitchFamily="34" charset="-122"/>
-                <a:cs typeface="Courier New" pitchFamily="34" charset="-120"/>
-              </a:rPr>
-              <a:t> } } },</a:t>
+                  <a:srgbClr val="CCCCCC"/>
+                </a:solidFill>
+                <a:latin typeface="Courier New" pitchFamily="34" charset="0"/>
+                <a:ea typeface="Courier New" pitchFamily="34" charset="-122"/>
+                <a:cs typeface="Courier New" pitchFamily="34" charset="-120"/>
+              </a:rPr>
+              <a:t> </a:t>
+            </a:r>
+            <a:pPr indent="0" marL="0">
+              <a:lnSpc>
+                <a:spcPct val="105000"/>
+              </a:lnSpc>
+              <a:buNone/>
+            </a:pPr>
+            <a:r>
+              <a:rPr lang="en-US" sz="1050" dirty="0">
+                <a:solidFill>
+                  <a:srgbClr val="CCCCCC"/>
+                </a:solidFill>
+                <a:latin typeface="Courier New" pitchFamily="34" charset="0"/>
+                <a:ea typeface="Courier New" pitchFamily="34" charset="-122"/>
+                <a:cs typeface="Courier New" pitchFamily="34" charset="-120"/>
+              </a:rPr>
+              <a:t>}</a:t>
+            </a:r>
+            <a:pPr indent="0" marL="0">
+              <a:lnSpc>
+                <a:spcPct val="105000"/>
+              </a:lnSpc>
+              <a:buNone/>
+            </a:pPr>
+            <a:r>
+              <a:rPr lang="en-US" sz="1050" dirty="0">
+                <a:solidFill>
+                  <a:srgbClr val="CCCCCC"/>
+                </a:solidFill>
+                <a:latin typeface="Courier New" pitchFamily="34" charset="0"/>
+                <a:ea typeface="Courier New" pitchFamily="34" charset="-122"/>
+                <a:cs typeface="Courier New" pitchFamily="34" charset="-120"/>
+              </a:rPr>
+              <a:t> </a:t>
+            </a:r>
+            <a:pPr indent="0" marL="0">
+              <a:lnSpc>
+                <a:spcPct val="105000"/>
+              </a:lnSpc>
+              <a:buNone/>
+            </a:pPr>
+            <a:r>
+              <a:rPr lang="en-US" sz="1050" dirty="0">
+                <a:solidFill>
+                  <a:srgbClr val="CCCCCC"/>
+                </a:solidFill>
+                <a:latin typeface="Courier New" pitchFamily="34" charset="0"/>
+                <a:ea typeface="Courier New" pitchFamily="34" charset="-122"/>
+                <a:cs typeface="Courier New" pitchFamily="34" charset="-120"/>
+              </a:rPr>
+              <a:t>}</a:t>
+            </a:r>
+            <a:pPr indent="0" marL="0">
+              <a:lnSpc>
+                <a:spcPct val="105000"/>
+              </a:lnSpc>
+              <a:buNone/>
+            </a:pPr>
+            <a:r>
+              <a:rPr lang="en-US" sz="1050" dirty="0">
+                <a:solidFill>
+                  <a:srgbClr val="CCCCCC"/>
+                </a:solidFill>
+                <a:latin typeface="Courier New" pitchFamily="34" charset="0"/>
+                <a:ea typeface="Courier New" pitchFamily="34" charset="-122"/>
+                <a:cs typeface="Courier New" pitchFamily="34" charset="-120"/>
+              </a:rPr>
+              <a:t> </a:t>
+            </a:r>
+            <a:pPr indent="0" marL="0">
+              <a:lnSpc>
+                <a:spcPct val="105000"/>
+              </a:lnSpc>
+              <a:buNone/>
+            </a:pPr>
+            <a:r>
+              <a:rPr lang="en-US" sz="1050" dirty="0">
+                <a:solidFill>
+                  <a:srgbClr val="CCCCCC"/>
+                </a:solidFill>
+                <a:latin typeface="Courier New" pitchFamily="34" charset="0"/>
+                <a:ea typeface="Courier New" pitchFamily="34" charset="-122"/>
+                <a:cs typeface="Courier New" pitchFamily="34" charset="-120"/>
+              </a:rPr>
+              <a:t>},</a:t>
             </a:r>
             <a:endParaRPr lang="en-US" sz="1050" dirty="0"/>
           </a:p>
@@ -12234,7 +13370,24 @@
             <a:r>
               <a:rPr lang="en-US" sz="1050" dirty="0">
                 <a:solidFill>
-                  <a:srgbClr val="E8ECEF"/>
+                  <a:srgbClr val="6E7681"/>
+                </a:solidFill>
+                <a:latin typeface="Courier New" pitchFamily="34" charset="0"/>
+                <a:ea typeface="Courier New" pitchFamily="34" charset="-122"/>
+                <a:cs typeface="Courier New" pitchFamily="34" charset="-120"/>
+              </a:rPr>
+              <a:t>11  </a:t>
+            </a:r>
+            <a:pPr indent="0" marL="0">
+              <a:lnSpc>
+                <a:spcPct val="105000"/>
+              </a:lnSpc>
+              <a:buNone/>
+            </a:pPr>
+            <a:r>
+              <a:rPr lang="en-US" sz="1050" dirty="0">
+                <a:solidFill>
+                  <a:srgbClr val="CCCCCC"/>
                 </a:solidFill>
                 <a:latin typeface="Courier New" pitchFamily="34" charset="0"/>
                 <a:ea typeface="Courier New" pitchFamily="34" charset="-122"/>
@@ -12251,7 +13404,7 @@
             <a:r>
               <a:rPr lang="en-US" sz="1050" dirty="0">
                 <a:solidFill>
-                  <a:srgbClr val="4DB1FF"/>
+                  <a:srgbClr val="9CDCFE"/>
                 </a:solidFill>
                 <a:latin typeface="Courier New" pitchFamily="34" charset="0"/>
                 <a:ea typeface="Courier New" pitchFamily="34" charset="-122"/>
@@ -12268,13 +13421,13 @@
             <a:r>
               <a:rPr lang="en-US" sz="1050" dirty="0">
                 <a:solidFill>
-                  <a:srgbClr val="E8ECEF"/>
-                </a:solidFill>
-                <a:latin typeface="Courier New" pitchFamily="34" charset="0"/>
-                <a:ea typeface="Courier New" pitchFamily="34" charset="-122"/>
-                <a:cs typeface="Courier New" pitchFamily="34" charset="-120"/>
-              </a:rPr>
-              <a:t>: </a:t>
+                  <a:srgbClr val="CCCCCC"/>
+                </a:solidFill>
+                <a:latin typeface="Courier New" pitchFamily="34" charset="0"/>
+                <a:ea typeface="Courier New" pitchFamily="34" charset="-122"/>
+                <a:cs typeface="Courier New" pitchFamily="34" charset="-120"/>
+              </a:rPr>
+              <a:t>:</a:t>
             </a:r>
             <a:pPr indent="0" marL="0">
               <a:lnSpc>
@@ -12285,7 +13438,24 @@
             <a:r>
               <a:rPr lang="en-US" sz="1050" dirty="0">
                 <a:solidFill>
-                  <a:srgbClr val="8FD694"/>
+                  <a:srgbClr val="CCCCCC"/>
+                </a:solidFill>
+                <a:latin typeface="Courier New" pitchFamily="34" charset="0"/>
+                <a:ea typeface="Courier New" pitchFamily="34" charset="-122"/>
+                <a:cs typeface="Courier New" pitchFamily="34" charset="-120"/>
+              </a:rPr>
+              <a:t> </a:t>
+            </a:r>
+            <a:pPr indent="0" marL="0">
+              <a:lnSpc>
+                <a:spcPct val="105000"/>
+              </a:lnSpc>
+              <a:buNone/>
+            </a:pPr>
+            <a:r>
+              <a:rPr lang="en-US" sz="1050" dirty="0">
+                <a:solidFill>
+                  <a:srgbClr val="CE9178"/>
                 </a:solidFill>
                 <a:latin typeface="Courier New" pitchFamily="34" charset="0"/>
                 <a:ea typeface="Courier New" pitchFamily="34" charset="-122"/>
@@ -12305,13 +13475,81 @@
             <a:r>
               <a:rPr lang="en-US" sz="1050" dirty="0">
                 <a:solidFill>
-                  <a:srgbClr val="E8ECEF"/>
-                </a:solidFill>
-                <a:latin typeface="Courier New" pitchFamily="34" charset="0"/>
-                <a:ea typeface="Courier New" pitchFamily="34" charset="-122"/>
-                <a:cs typeface="Courier New" pitchFamily="34" charset="-120"/>
-              </a:rPr>
-              <a:t>      } }</a:t>
+                  <a:srgbClr val="6E7681"/>
+                </a:solidFill>
+                <a:latin typeface="Courier New" pitchFamily="34" charset="0"/>
+                <a:ea typeface="Courier New" pitchFamily="34" charset="-122"/>
+                <a:cs typeface="Courier New" pitchFamily="34" charset="-120"/>
+              </a:rPr>
+              <a:t>12  </a:t>
+            </a:r>
+            <a:pPr indent="0" marL="0">
+              <a:lnSpc>
+                <a:spcPct val="105000"/>
+              </a:lnSpc>
+              <a:buNone/>
+            </a:pPr>
+            <a:r>
+              <a:rPr lang="en-US" sz="1050" dirty="0">
+                <a:solidFill>
+                  <a:srgbClr val="CCCCCC"/>
+                </a:solidFill>
+                <a:latin typeface="Courier New" pitchFamily="34" charset="0"/>
+                <a:ea typeface="Courier New" pitchFamily="34" charset="-122"/>
+                <a:cs typeface="Courier New" pitchFamily="34" charset="-120"/>
+              </a:rPr>
+              <a:t>      </a:t>
+            </a:r>
+            <a:pPr indent="0" marL="0">
+              <a:lnSpc>
+                <a:spcPct val="105000"/>
+              </a:lnSpc>
+              <a:buNone/>
+            </a:pPr>
+            <a:r>
+              <a:rPr lang="en-US" sz="1050" dirty="0">
+                <a:solidFill>
+                  <a:srgbClr val="CCCCCC"/>
+                </a:solidFill>
+                <a:latin typeface="Courier New" pitchFamily="34" charset="0"/>
+                <a:ea typeface="Courier New" pitchFamily="34" charset="-122"/>
+                <a:cs typeface="Courier New" pitchFamily="34" charset="-120"/>
+              </a:rPr>
+              <a:t>}</a:t>
+            </a:r>
+            <a:pPr indent="0" marL="0">
+              <a:lnSpc>
+                <a:spcPct val="105000"/>
+              </a:lnSpc>
+              <a:buNone/>
+            </a:pPr>
+            <a:r>
+              <a:rPr lang="en-US" sz="1050" dirty="0">
+                <a:solidFill>
+                  <a:srgbClr val="CCCCCC"/>
+                </a:solidFill>
+                <a:latin typeface="Courier New" pitchFamily="34" charset="0"/>
+                <a:ea typeface="Courier New" pitchFamily="34" charset="-122"/>
+                <a:cs typeface="Courier New" pitchFamily="34" charset="-120"/>
+              </a:rPr>
+              <a:t> </a:t>
+            </a:r>
+            <a:pPr indent="0" marL="0">
+              <a:lnSpc>
+                <a:spcPct val="105000"/>
+              </a:lnSpc>
+              <a:buNone/>
+            </a:pPr>
+            <a:r>
+              <a:rPr lang="en-US" sz="1050" dirty="0">
+                <a:solidFill>
+                  <a:srgbClr val="CCCCCC"/>
+                </a:solidFill>
+                <a:latin typeface="Courier New" pitchFamily="34" charset="0"/>
+                <a:ea typeface="Courier New" pitchFamily="34" charset="-122"/>
+                <a:cs typeface="Courier New" pitchFamily="34" charset="-120"/>
+              </a:rPr>
+              <a:t>}</a:t>
             </a:r>
             <a:endParaRPr lang="en-US" sz="1050" dirty="0"/>
           </a:p>
@@ -12325,13 +13563,47 @@
             <a:r>
               <a:rPr lang="en-US" sz="1050" dirty="0">
                 <a:solidFill>
-                  <a:srgbClr val="E8ECEF"/>
-                </a:solidFill>
-                <a:latin typeface="Courier New" pitchFamily="34" charset="0"/>
-                <a:ea typeface="Courier New" pitchFamily="34" charset="-122"/>
-                <a:cs typeface="Courier New" pitchFamily="34" charset="-120"/>
-              </a:rPr>
-              <a:t>    },</a:t>
+                  <a:srgbClr val="6E7681"/>
+                </a:solidFill>
+                <a:latin typeface="Courier New" pitchFamily="34" charset="0"/>
+                <a:ea typeface="Courier New" pitchFamily="34" charset="-122"/>
+                <a:cs typeface="Courier New" pitchFamily="34" charset="-120"/>
+              </a:rPr>
+              <a:t>13  </a:t>
+            </a:r>
+            <a:pPr indent="0" marL="0">
+              <a:lnSpc>
+                <a:spcPct val="105000"/>
+              </a:lnSpc>
+              <a:buNone/>
+            </a:pPr>
+            <a:r>
+              <a:rPr lang="en-US" sz="1050" dirty="0">
+                <a:solidFill>
+                  <a:srgbClr val="CCCCCC"/>
+                </a:solidFill>
+                <a:latin typeface="Courier New" pitchFamily="34" charset="0"/>
+                <a:ea typeface="Courier New" pitchFamily="34" charset="-122"/>
+                <a:cs typeface="Courier New" pitchFamily="34" charset="-120"/>
+              </a:rPr>
+              <a:t>    </a:t>
+            </a:r>
+            <a:pPr indent="0" marL="0">
+              <a:lnSpc>
+                <a:spcPct val="105000"/>
+              </a:lnSpc>
+              <a:buNone/>
+            </a:pPr>
+            <a:r>
+              <a:rPr lang="en-US" sz="1050" dirty="0">
+                <a:solidFill>
+                  <a:srgbClr val="CCCCCC"/>
+                </a:solidFill>
+                <a:latin typeface="Courier New" pitchFamily="34" charset="0"/>
+                <a:ea typeface="Courier New" pitchFamily="34" charset="-122"/>
+                <a:cs typeface="Courier New" pitchFamily="34" charset="-120"/>
+              </a:rPr>
+              <a:t>},</a:t>
             </a:r>
             <a:endParaRPr lang="en-US" sz="1050" dirty="0"/>
           </a:p>
@@ -12345,7 +13617,24 @@
             <a:r>
               <a:rPr lang="en-US" sz="1050" dirty="0">
                 <a:solidFill>
-                  <a:srgbClr val="E8ECEF"/>
+                  <a:srgbClr val="6E7681"/>
+                </a:solidFill>
+                <a:latin typeface="Courier New" pitchFamily="34" charset="0"/>
+                <a:ea typeface="Courier New" pitchFamily="34" charset="-122"/>
+                <a:cs typeface="Courier New" pitchFamily="34" charset="-120"/>
+              </a:rPr>
+              <a:t>14  </a:t>
+            </a:r>
+            <a:pPr indent="0" marL="0">
+              <a:lnSpc>
+                <a:spcPct val="105000"/>
+              </a:lnSpc>
+              <a:buNone/>
+            </a:pPr>
+            <a:r>
+              <a:rPr lang="en-US" sz="1050" dirty="0">
+                <a:solidFill>
+                  <a:srgbClr val="CCCCCC"/>
                 </a:solidFill>
                 <a:latin typeface="Courier New" pitchFamily="34" charset="0"/>
                 <a:ea typeface="Courier New" pitchFamily="34" charset="-122"/>
@@ -12362,7 +13651,7 @@
             <a:r>
               <a:rPr lang="en-US" sz="1050" dirty="0">
                 <a:solidFill>
-                  <a:srgbClr val="4DB1FF"/>
+                  <a:srgbClr val="9CDCFE"/>
                 </a:solidFill>
                 <a:latin typeface="Courier New" pitchFamily="34" charset="0"/>
                 <a:ea typeface="Courier New" pitchFamily="34" charset="-122"/>
@@ -12379,13 +13668,47 @@
             <a:r>
               <a:rPr lang="en-US" sz="1050" dirty="0">
                 <a:solidFill>
-                  <a:srgbClr val="E8ECEF"/>
-                </a:solidFill>
-                <a:latin typeface="Courier New" pitchFamily="34" charset="0"/>
-                <a:ea typeface="Courier New" pitchFamily="34" charset="-122"/>
-                <a:cs typeface="Courier New" pitchFamily="34" charset="-120"/>
-              </a:rPr>
-              <a:t>: {</a:t>
+                  <a:srgbClr val="CCCCCC"/>
+                </a:solidFill>
+                <a:latin typeface="Courier New" pitchFamily="34" charset="0"/>
+                <a:ea typeface="Courier New" pitchFamily="34" charset="-122"/>
+                <a:cs typeface="Courier New" pitchFamily="34" charset="-120"/>
+              </a:rPr>
+              <a:t>:</a:t>
+            </a:r>
+            <a:pPr indent="0" marL="0">
+              <a:lnSpc>
+                <a:spcPct val="105000"/>
+              </a:lnSpc>
+              <a:buNone/>
+            </a:pPr>
+            <a:r>
+              <a:rPr lang="en-US" sz="1050" dirty="0">
+                <a:solidFill>
+                  <a:srgbClr val="CCCCCC"/>
+                </a:solidFill>
+                <a:latin typeface="Courier New" pitchFamily="34" charset="0"/>
+                <a:ea typeface="Courier New" pitchFamily="34" charset="-122"/>
+                <a:cs typeface="Courier New" pitchFamily="34" charset="-120"/>
+              </a:rPr>
+              <a:t> </a:t>
+            </a:r>
+            <a:pPr indent="0" marL="0">
+              <a:lnSpc>
+                <a:spcPct val="105000"/>
+              </a:lnSpc>
+              <a:buNone/>
+            </a:pPr>
+            <a:r>
+              <a:rPr lang="en-US" sz="1050" dirty="0">
+                <a:solidFill>
+                  <a:srgbClr val="CCCCCC"/>
+                </a:solidFill>
+                <a:latin typeface="Courier New" pitchFamily="34" charset="0"/>
+                <a:ea typeface="Courier New" pitchFamily="34" charset="-122"/>
+                <a:cs typeface="Courier New" pitchFamily="34" charset="-120"/>
+              </a:rPr>
+              <a:t>{</a:t>
             </a:r>
             <a:endParaRPr lang="en-US" sz="1050" dirty="0"/>
           </a:p>
@@ -12399,7 +13722,24 @@
             <a:r>
               <a:rPr lang="en-US" sz="1050" dirty="0">
                 <a:solidFill>
-                  <a:srgbClr val="E8ECEF"/>
+                  <a:srgbClr val="6E7681"/>
+                </a:solidFill>
+                <a:latin typeface="Courier New" pitchFamily="34" charset="0"/>
+                <a:ea typeface="Courier New" pitchFamily="34" charset="-122"/>
+                <a:cs typeface="Courier New" pitchFamily="34" charset="-120"/>
+              </a:rPr>
+              <a:t>15  </a:t>
+            </a:r>
+            <a:pPr indent="0" marL="0">
+              <a:lnSpc>
+                <a:spcPct val="105000"/>
+              </a:lnSpc>
+              <a:buNone/>
+            </a:pPr>
+            <a:r>
+              <a:rPr lang="en-US" sz="1050" dirty="0">
+                <a:solidFill>
+                  <a:srgbClr val="CCCCCC"/>
                 </a:solidFill>
                 <a:latin typeface="Courier New" pitchFamily="34" charset="0"/>
                 <a:ea typeface="Courier New" pitchFamily="34" charset="-122"/>
@@ -12416,7 +13756,7 @@
             <a:r>
               <a:rPr lang="en-US" sz="1050" dirty="0">
                 <a:solidFill>
-                  <a:srgbClr val="4DB1FF"/>
+                  <a:srgbClr val="9CDCFE"/>
                 </a:solidFill>
                 <a:latin typeface="Courier New" pitchFamily="34" charset="0"/>
                 <a:ea typeface="Courier New" pitchFamily="34" charset="-122"/>
@@ -12433,13 +13773,13 @@
             <a:r>
               <a:rPr lang="en-US" sz="1050" dirty="0">
                 <a:solidFill>
-                  <a:srgbClr val="E8ECEF"/>
-                </a:solidFill>
-                <a:latin typeface="Courier New" pitchFamily="34" charset="0"/>
-                <a:ea typeface="Courier New" pitchFamily="34" charset="-122"/>
-                <a:cs typeface="Courier New" pitchFamily="34" charset="-120"/>
-              </a:rPr>
-              <a:t>: </a:t>
+                  <a:srgbClr val="CCCCCC"/>
+                </a:solidFill>
+                <a:latin typeface="Courier New" pitchFamily="34" charset="0"/>
+                <a:ea typeface="Courier New" pitchFamily="34" charset="-122"/>
+                <a:cs typeface="Courier New" pitchFamily="34" charset="-120"/>
+              </a:rPr>
+              <a:t>:</a:t>
             </a:r>
             <a:pPr indent="0" marL="0">
               <a:lnSpc>
@@ -12450,7 +13790,24 @@
             <a:r>
               <a:rPr lang="en-US" sz="1050" dirty="0">
                 <a:solidFill>
-                  <a:srgbClr val="8FD694"/>
+                  <a:srgbClr val="CCCCCC"/>
+                </a:solidFill>
+                <a:latin typeface="Courier New" pitchFamily="34" charset="0"/>
+                <a:ea typeface="Courier New" pitchFamily="34" charset="-122"/>
+                <a:cs typeface="Courier New" pitchFamily="34" charset="-120"/>
+              </a:rPr>
+              <a:t> </a:t>
+            </a:r>
+            <a:pPr indent="0" marL="0">
+              <a:lnSpc>
+                <a:spcPct val="105000"/>
+              </a:lnSpc>
+              <a:buNone/>
+            </a:pPr>
+            <a:r>
+              <a:rPr lang="en-US" sz="1050" dirty="0">
+                <a:solidFill>
+                  <a:srgbClr val="CE9178"/>
                 </a:solidFill>
                 <a:latin typeface="Courier New" pitchFamily="34" charset="0"/>
                 <a:ea typeface="Courier New" pitchFamily="34" charset="-122"/>
@@ -12467,13 +13824,47 @@
             <a:r>
               <a:rPr lang="en-US" sz="1050" dirty="0">
                 <a:solidFill>
-                  <a:srgbClr val="E8ECEF"/>
-                </a:solidFill>
-                <a:latin typeface="Courier New" pitchFamily="34" charset="0"/>
-                <a:ea typeface="Courier New" pitchFamily="34" charset="-122"/>
-                <a:cs typeface="Courier New" pitchFamily="34" charset="-120"/>
-              </a:rPr>
-              <a:t>, ...</a:t>
+                  <a:srgbClr val="CCCCCC"/>
+                </a:solidFill>
+                <a:latin typeface="Courier New" pitchFamily="34" charset="0"/>
+                <a:ea typeface="Courier New" pitchFamily="34" charset="-122"/>
+                <a:cs typeface="Courier New" pitchFamily="34" charset="-120"/>
+              </a:rPr>
+              <a:t>,</a:t>
+            </a:r>
+            <a:pPr indent="0" marL="0">
+              <a:lnSpc>
+                <a:spcPct val="105000"/>
+              </a:lnSpc>
+              <a:buNone/>
+            </a:pPr>
+            <a:r>
+              <a:rPr lang="en-US" sz="1050" dirty="0">
+                <a:solidFill>
+                  <a:srgbClr val="CCCCCC"/>
+                </a:solidFill>
+                <a:latin typeface="Courier New" pitchFamily="34" charset="0"/>
+                <a:ea typeface="Courier New" pitchFamily="34" charset="-122"/>
+                <a:cs typeface="Courier New" pitchFamily="34" charset="-120"/>
+              </a:rPr>
+              <a:t> </a:t>
+            </a:r>
+            <a:pPr indent="0" marL="0">
+              <a:lnSpc>
+                <a:spcPct val="105000"/>
+              </a:lnSpc>
+              <a:buNone/>
+            </a:pPr>
+            <a:r>
+              <a:rPr lang="en-US" sz="1050" dirty="0">
+                <a:solidFill>
+                  <a:srgbClr val="CCCCCC"/>
+                </a:solidFill>
+                <a:latin typeface="Courier New" pitchFamily="34" charset="0"/>
+                <a:ea typeface="Courier New" pitchFamily="34" charset="-122"/>
+                <a:cs typeface="Courier New" pitchFamily="34" charset="-120"/>
+              </a:rPr>
+              <a:t>...</a:t>
             </a:r>
             <a:endParaRPr lang="en-US" sz="1050" dirty="0"/>
           </a:p>
@@ -15445,7 +16836,7 @@
       </p:pic>
       <p:sp>
         <p:nvSpPr>
-          <p:cNvPr id="7" name="Código"/>
+          <p:cNvPr id="7" name="Editor"/>
           <p:cNvSpPr/>
           <p:nvPr/>
         </p:nvSpPr>
@@ -15460,9 +16851,14 @@
             </a:avLst>
           </a:prstGeom>
           <a:solidFill>
-            <a:srgbClr val="12171C"/>
+            <a:srgbClr val="1F1F1F"/>
           </a:solidFill>
-          <a:ln/>
+          <a:ln w="9525">
+            <a:solidFill>
+              <a:srgbClr val="2B2B2B"/>
+            </a:solidFill>
+            <a:prstDash val="solid"/>
+          </a:ln>
           <a:effectLst>
             <a:outerShdw sx="100000" sy="100000" kx="0" ky="0" algn="bl" rotWithShape="0" blurRad="101600" dist="25400" dir="5400000">
               <a:srgbClr val="223548">
@@ -15480,8 +16876,8 @@
         </p:nvSpPr>
         <p:spPr>
           <a:xfrm>
-            <a:off x="777240" y="5586984"/>
-            <a:ext cx="5449824" cy="475488"/>
+            <a:off x="731520" y="5586984"/>
+            <a:ext cx="5586984" cy="493776"/>
           </a:xfrm>
           <a:prstGeom prst="rect">
             <a:avLst/>
@@ -15500,9 +16896,26 @@
               <a:buNone/>
             </a:pPr>
             <a:r>
-              <a:rPr lang="en-US" sz="1100" dirty="0">
-                <a:solidFill>
-                  <a:srgbClr val="E8ECEF"/>
+              <a:rPr lang="en-US" sz="1000" dirty="0">
+                <a:solidFill>
+                  <a:srgbClr val="6E7681"/>
+                </a:solidFill>
+                <a:latin typeface="Courier New" pitchFamily="34" charset="0"/>
+                <a:ea typeface="Courier New" pitchFamily="34" charset="-122"/>
+                <a:cs typeface="Courier New" pitchFamily="34" charset="-120"/>
+              </a:rPr>
+              <a:t> 1  </a:t>
+            </a:r>
+            <a:pPr indent="0" marL="0">
+              <a:lnSpc>
+                <a:spcPct val="105000"/>
+              </a:lnSpc>
+              <a:buNone/>
+            </a:pPr>
+            <a:r>
+              <a:rPr lang="en-US" sz="1000" dirty="0">
+                <a:solidFill>
+                  <a:srgbClr val="DCDCAA"/>
                 </a:solidFill>
                 <a:latin typeface="Courier New" pitchFamily="34" charset="0"/>
                 <a:ea typeface="Courier New" pitchFamily="34" charset="-122"/>
@@ -15517,253 +16930,117 @@
               <a:buNone/>
             </a:pPr>
             <a:r>
-              <a:rPr lang="en-US" sz="1100" dirty="0">
-                <a:solidFill>
-                  <a:srgbClr val="E8ECEF"/>
-                </a:solidFill>
-                <a:latin typeface="Courier New" pitchFamily="34" charset="0"/>
-                <a:ea typeface="Courier New" pitchFamily="34" charset="-122"/>
-                <a:cs typeface="Courier New" pitchFamily="34" charset="-120"/>
-              </a:rPr>
-              <a:t> ...</a:t>
-            </a:r>
-            <a:pPr indent="0" marL="0">
-              <a:lnSpc>
-                <a:spcPct val="105000"/>
-              </a:lnSpc>
-              <a:buNone/>
-            </a:pPr>
-            <a:r>
-              <a:rPr lang="en-US" sz="1100" dirty="0">
-                <a:solidFill>
-                  <a:srgbClr val="E8ECEF"/>
-                </a:solidFill>
-                <a:latin typeface="Courier New" pitchFamily="34" charset="0"/>
-                <a:ea typeface="Courier New" pitchFamily="34" charset="-122"/>
-                <a:cs typeface="Courier New" pitchFamily="34" charset="-120"/>
-              </a:rPr>
-              <a:t>/</a:t>
-            </a:r>
-            <a:pPr indent="0" marL="0">
-              <a:lnSpc>
-                <a:spcPct val="105000"/>
-              </a:lnSpc>
-              <a:buNone/>
-            </a:pPr>
-            <a:r>
-              <a:rPr lang="en-US" sz="1100" dirty="0">
-                <a:solidFill>
-                  <a:srgbClr val="E8ECEF"/>
-                </a:solidFill>
-                <a:latin typeface="Courier New" pitchFamily="34" charset="0"/>
-                <a:ea typeface="Courier New" pitchFamily="34" charset="-122"/>
-                <a:cs typeface="Courier New" pitchFamily="34" charset="-120"/>
-              </a:rPr>
-              <a:t>zui_pc_analitico</a:t>
-            </a:r>
-            <a:pPr indent="0" marL="0">
-              <a:lnSpc>
-                <a:spcPct val="105000"/>
-              </a:lnSpc>
-              <a:buNone/>
-            </a:pPr>
-            <a:r>
-              <a:rPr lang="en-US" sz="1100" dirty="0">
-                <a:solidFill>
-                  <a:srgbClr val="E8ECEF"/>
-                </a:solidFill>
-                <a:latin typeface="Courier New" pitchFamily="34" charset="0"/>
-                <a:ea typeface="Courier New" pitchFamily="34" charset="-122"/>
-                <a:cs typeface="Courier New" pitchFamily="34" charset="-120"/>
-              </a:rPr>
-              <a:t>/</a:t>
-            </a:r>
-            <a:pPr indent="0" marL="0">
-              <a:lnSpc>
-                <a:spcPct val="105000"/>
-              </a:lnSpc>
-              <a:buNone/>
-            </a:pPr>
-            <a:r>
-              <a:rPr lang="en-US" sz="1100" dirty="0">
-                <a:solidFill>
-                  <a:srgbClr val="FF9F80"/>
-                </a:solidFill>
-                <a:latin typeface="Courier New" pitchFamily="34" charset="0"/>
-                <a:ea typeface="Courier New" pitchFamily="34" charset="-122"/>
-                <a:cs typeface="Courier New" pitchFamily="34" charset="-120"/>
-              </a:rPr>
-              <a:t>0001</a:t>
-            </a:r>
-            <a:pPr indent="0" marL="0">
-              <a:lnSpc>
-                <a:spcPct val="105000"/>
-              </a:lnSpc>
-              <a:buNone/>
-            </a:pPr>
-            <a:r>
-              <a:rPr lang="en-US" sz="1100" dirty="0">
-                <a:solidFill>
-                  <a:srgbClr val="E8ECEF"/>
-                </a:solidFill>
-                <a:latin typeface="Courier New" pitchFamily="34" charset="0"/>
-                <a:ea typeface="Courier New" pitchFamily="34" charset="-122"/>
-                <a:cs typeface="Courier New" pitchFamily="34" charset="-120"/>
-              </a:rPr>
-              <a:t>/</a:t>
-            </a:r>
-            <a:pPr indent="0" marL="0">
-              <a:lnSpc>
-                <a:spcPct val="105000"/>
-              </a:lnSpc>
-              <a:buNone/>
-            </a:pPr>
-            <a:r>
-              <a:rPr lang="en-US" sz="1100" dirty="0">
-                <a:solidFill>
-                  <a:srgbClr val="E8ECEF"/>
-                </a:solidFill>
-                <a:latin typeface="Courier New" pitchFamily="34" charset="0"/>
-                <a:ea typeface="Courier New" pitchFamily="34" charset="-122"/>
-                <a:cs typeface="Courier New" pitchFamily="34" charset="-120"/>
-              </a:rPr>
-              <a:t>ClienteAnalise</a:t>
-            </a:r>
-            <a:endParaRPr lang="en-US" sz="1100" dirty="0"/>
-          </a:p>
-          <a:p>
-            <a:pPr indent="0" marL="0">
-              <a:lnSpc>
-                <a:spcPct val="105000"/>
-              </a:lnSpc>
-              <a:buNone/>
-            </a:pPr>
-            <a:r>
-              <a:rPr lang="en-US" sz="1100" dirty="0">
-                <a:solidFill>
-                  <a:srgbClr val="E8ECEF"/>
-                </a:solidFill>
-                <a:latin typeface="Courier New" pitchFamily="34" charset="0"/>
-                <a:ea typeface="Courier New" pitchFamily="34" charset="-122"/>
-                <a:cs typeface="Courier New" pitchFamily="34" charset="-120"/>
-              </a:rPr>
-              <a:t>    ?$</a:t>
-            </a:r>
-            <a:pPr indent="0" marL="0">
-              <a:lnSpc>
-                <a:spcPct val="105000"/>
-              </a:lnSpc>
-              <a:buNone/>
-            </a:pPr>
-            <a:r>
-              <a:rPr lang="en-US" sz="1100" dirty="0">
-                <a:solidFill>
-                  <a:srgbClr val="E8ECEF"/>
-                </a:solidFill>
-                <a:latin typeface="Courier New" pitchFamily="34" charset="0"/>
-                <a:ea typeface="Courier New" pitchFamily="34" charset="-122"/>
-                <a:cs typeface="Courier New" pitchFamily="34" charset="-120"/>
-              </a:rPr>
-              <a:t>apply</a:t>
-            </a:r>
-            <a:pPr indent="0" marL="0">
-              <a:lnSpc>
-                <a:spcPct val="105000"/>
-              </a:lnSpc>
-              <a:buNone/>
-            </a:pPr>
-            <a:r>
-              <a:rPr lang="en-US" sz="1100" dirty="0">
-                <a:solidFill>
-                  <a:srgbClr val="E8ECEF"/>
-                </a:solidFill>
-                <a:latin typeface="Courier New" pitchFamily="34" charset="0"/>
-                <a:ea typeface="Courier New" pitchFamily="34" charset="-122"/>
-                <a:cs typeface="Courier New" pitchFamily="34" charset="-120"/>
-              </a:rPr>
-              <a:t>=</a:t>
-            </a:r>
-            <a:pPr indent="0" marL="0">
-              <a:lnSpc>
-                <a:spcPct val="105000"/>
-              </a:lnSpc>
-              <a:buNone/>
-            </a:pPr>
-            <a:r>
-              <a:rPr lang="en-US" sz="1100" dirty="0">
-                <a:solidFill>
-                  <a:srgbClr val="E8ECEF"/>
-                </a:solidFill>
-                <a:latin typeface="Courier New" pitchFamily="34" charset="0"/>
-                <a:ea typeface="Courier New" pitchFamily="34" charset="-122"/>
-                <a:cs typeface="Courier New" pitchFamily="34" charset="-120"/>
-              </a:rPr>
-              <a:t>groupby</a:t>
-            </a:r>
-            <a:pPr indent="0" marL="0">
-              <a:lnSpc>
-                <a:spcPct val="105000"/>
-              </a:lnSpc>
-              <a:buNone/>
-            </a:pPr>
-            <a:r>
-              <a:rPr lang="en-US" sz="1100" dirty="0">
-                <a:solidFill>
-                  <a:srgbClr val="E8ECEF"/>
-                </a:solidFill>
-                <a:latin typeface="Courier New" pitchFamily="34" charset="0"/>
-                <a:ea typeface="Courier New" pitchFamily="34" charset="-122"/>
-                <a:cs typeface="Courier New" pitchFamily="34" charset="-120"/>
-              </a:rPr>
-              <a:t>((</a:t>
-            </a:r>
-            <a:pPr indent="0" marL="0">
-              <a:lnSpc>
-                <a:spcPct val="105000"/>
-              </a:lnSpc>
-              <a:buNone/>
-            </a:pPr>
-            <a:r>
-              <a:rPr lang="en-US" sz="1100" dirty="0">
-                <a:solidFill>
-                  <a:srgbClr val="E8ECEF"/>
-                </a:solidFill>
-                <a:latin typeface="Courier New" pitchFamily="34" charset="0"/>
-                <a:ea typeface="Courier New" pitchFamily="34" charset="-122"/>
-                <a:cs typeface="Courier New" pitchFamily="34" charset="-120"/>
-              </a:rPr>
-              <a:t>Genero</a:t>
-            </a:r>
-            <a:pPr indent="0" marL="0">
-              <a:lnSpc>
-                <a:spcPct val="105000"/>
-              </a:lnSpc>
-              <a:buNone/>
-            </a:pPr>
-            <a:r>
-              <a:rPr lang="en-US" sz="1100" dirty="0">
-                <a:solidFill>
-                  <a:srgbClr val="E8ECEF"/>
-                </a:solidFill>
-                <a:latin typeface="Courier New" pitchFamily="34" charset="0"/>
-                <a:ea typeface="Courier New" pitchFamily="34" charset="-122"/>
-                <a:cs typeface="Courier New" pitchFamily="34" charset="-120"/>
-              </a:rPr>
-              <a:t>),</a:t>
-            </a:r>
-            <a:endParaRPr lang="en-US" sz="1100" dirty="0"/>
-          </a:p>
-          <a:p>
-            <a:pPr indent="0" marL="0">
-              <a:lnSpc>
-                <a:spcPct val="105000"/>
-              </a:lnSpc>
-              <a:buNone/>
-            </a:pPr>
-            <a:r>
-              <a:rPr lang="en-US" sz="1100" dirty="0">
-                <a:solidFill>
-                  <a:srgbClr val="E8ECEF"/>
+              <a:rPr lang="en-US" sz="1000" dirty="0">
+                <a:solidFill>
+                  <a:srgbClr val="CCCCCC"/>
+                </a:solidFill>
+                <a:latin typeface="Courier New" pitchFamily="34" charset="0"/>
+                <a:ea typeface="Courier New" pitchFamily="34" charset="-122"/>
+                <a:cs typeface="Courier New" pitchFamily="34" charset="-120"/>
+              </a:rPr>
+              <a:t> </a:t>
+            </a:r>
+            <a:pPr indent="0" marL="0">
+              <a:lnSpc>
+                <a:spcPct val="105000"/>
+              </a:lnSpc>
+              <a:buNone/>
+            </a:pPr>
+            <a:r>
+              <a:rPr lang="en-US" sz="1000" dirty="0">
+                <a:solidFill>
+                  <a:srgbClr val="CCCCCC"/>
+                </a:solidFill>
+                <a:latin typeface="Courier New" pitchFamily="34" charset="0"/>
+                <a:ea typeface="Courier New" pitchFamily="34" charset="-122"/>
+                <a:cs typeface="Courier New" pitchFamily="34" charset="-120"/>
+              </a:rPr>
+              <a:t>.../zui_pc_analitico/0001/ClienteAnalise</a:t>
+            </a:r>
+            <a:endParaRPr lang="en-US" sz="1000" dirty="0"/>
+          </a:p>
+          <a:p>
+            <a:pPr indent="0" marL="0">
+              <a:lnSpc>
+                <a:spcPct val="105000"/>
+              </a:lnSpc>
+              <a:buNone/>
+            </a:pPr>
+            <a:r>
+              <a:rPr lang="en-US" sz="1000" dirty="0">
+                <a:solidFill>
+                  <a:srgbClr val="6E7681"/>
+                </a:solidFill>
+                <a:latin typeface="Courier New" pitchFamily="34" charset="0"/>
+                <a:ea typeface="Courier New" pitchFamily="34" charset="-122"/>
+                <a:cs typeface="Courier New" pitchFamily="34" charset="-120"/>
+              </a:rPr>
+              <a:t> 2  </a:t>
+            </a:r>
+            <a:pPr indent="0" marL="0">
+              <a:lnSpc>
+                <a:spcPct val="105000"/>
+              </a:lnSpc>
+              <a:buNone/>
+            </a:pPr>
+            <a:r>
+              <a:rPr lang="en-US" sz="1000" dirty="0">
+                <a:solidFill>
+                  <a:srgbClr val="CCCCCC"/>
+                </a:solidFill>
+                <a:latin typeface="Courier New" pitchFamily="34" charset="0"/>
+                <a:ea typeface="Courier New" pitchFamily="34" charset="-122"/>
+                <a:cs typeface="Courier New" pitchFamily="34" charset="-120"/>
+              </a:rPr>
+              <a:t>    </a:t>
+            </a:r>
+            <a:pPr indent="0" marL="0">
+              <a:lnSpc>
+                <a:spcPct val="105000"/>
+              </a:lnSpc>
+              <a:buNone/>
+            </a:pPr>
+            <a:r>
+              <a:rPr lang="en-US" sz="1000" dirty="0">
+                <a:solidFill>
+                  <a:srgbClr val="DCDCAA"/>
+                </a:solidFill>
+                <a:latin typeface="Courier New" pitchFamily="34" charset="0"/>
+                <a:ea typeface="Courier New" pitchFamily="34" charset="-122"/>
+                <a:cs typeface="Courier New" pitchFamily="34" charset="-120"/>
+              </a:rPr>
+              <a:t>?$apply=groupby((Genero),</a:t>
+            </a:r>
+            <a:endParaRPr lang="en-US" sz="1000" dirty="0"/>
+          </a:p>
+          <a:p>
+            <a:pPr indent="0" marL="0">
+              <a:lnSpc>
+                <a:spcPct val="105000"/>
+              </a:lnSpc>
+              <a:buNone/>
+            </a:pPr>
+            <a:r>
+              <a:rPr lang="en-US" sz="1000" dirty="0">
+                <a:solidFill>
+                  <a:srgbClr val="6E7681"/>
+                </a:solidFill>
+                <a:latin typeface="Courier New" pitchFamily="34" charset="0"/>
+                <a:ea typeface="Courier New" pitchFamily="34" charset="-122"/>
+                <a:cs typeface="Courier New" pitchFamily="34" charset="-120"/>
+              </a:rPr>
+              <a:t> 3  </a:t>
+            </a:r>
+            <a:pPr indent="0" marL="0">
+              <a:lnSpc>
+                <a:spcPct val="105000"/>
+              </a:lnSpc>
+              <a:buNone/>
+            </a:pPr>
+            <a:r>
+              <a:rPr lang="en-US" sz="1000" dirty="0">
+                <a:solidFill>
+                  <a:srgbClr val="CCCCCC"/>
                 </a:solidFill>
                 <a:latin typeface="Courier New" pitchFamily="34" charset="0"/>
                 <a:ea typeface="Courier New" pitchFamily="34" charset="-122"/>
@@ -15778,68 +17055,17 @@
               <a:buNone/>
             </a:pPr>
             <a:r>
-              <a:rPr lang="en-US" sz="1100" dirty="0">
-                <a:solidFill>
-                  <a:srgbClr val="E8ECEF"/>
-                </a:solidFill>
-                <a:latin typeface="Courier New" pitchFamily="34" charset="0"/>
-                <a:ea typeface="Courier New" pitchFamily="34" charset="-122"/>
-                <a:cs typeface="Courier New" pitchFamily="34" charset="-120"/>
-              </a:rPr>
-              <a:t>aggregate</a:t>
-            </a:r>
-            <a:pPr indent="0" marL="0">
-              <a:lnSpc>
-                <a:spcPct val="105000"/>
-              </a:lnSpc>
-              <a:buNone/>
-            </a:pPr>
-            <a:r>
-              <a:rPr lang="en-US" sz="1100" dirty="0">
-                <a:solidFill>
-                  <a:srgbClr val="E8ECEF"/>
-                </a:solidFill>
-                <a:latin typeface="Courier New" pitchFamily="34" charset="0"/>
-                <a:ea typeface="Courier New" pitchFamily="34" charset="-122"/>
-                <a:cs typeface="Courier New" pitchFamily="34" charset="-120"/>
-              </a:rPr>
-              <a:t>(</a:t>
-            </a:r>
-            <a:pPr indent="0" marL="0">
-              <a:lnSpc>
-                <a:spcPct val="105000"/>
-              </a:lnSpc>
-              <a:buNone/>
-            </a:pPr>
-            <a:r>
-              <a:rPr lang="en-US" sz="1100" dirty="0">
-                <a:solidFill>
-                  <a:srgbClr val="E8ECEF"/>
-                </a:solidFill>
-                <a:latin typeface="Courier New" pitchFamily="34" charset="0"/>
-                <a:ea typeface="Courier New" pitchFamily="34" charset="-122"/>
-                <a:cs typeface="Courier New" pitchFamily="34" charset="-120"/>
-              </a:rPr>
-              <a:t>QtdeClientes</a:t>
-            </a:r>
-            <a:pPr indent="0" marL="0">
-              <a:lnSpc>
-                <a:spcPct val="105000"/>
-              </a:lnSpc>
-              <a:buNone/>
-            </a:pPr>
-            <a:r>
-              <a:rPr lang="en-US" sz="1100" dirty="0">
-                <a:solidFill>
-                  <a:srgbClr val="E8ECEF"/>
-                </a:solidFill>
-                <a:latin typeface="Courier New" pitchFamily="34" charset="0"/>
-                <a:ea typeface="Courier New" pitchFamily="34" charset="-122"/>
-                <a:cs typeface="Courier New" pitchFamily="34" charset="-120"/>
-              </a:rPr>
-              <a:t>))</a:t>
-            </a:r>
-            <a:endParaRPr lang="en-US" sz="1100" dirty="0"/>
+              <a:rPr lang="en-US" sz="1000" dirty="0">
+                <a:solidFill>
+                  <a:srgbClr val="DCDCAA"/>
+                </a:solidFill>
+                <a:latin typeface="Courier New" pitchFamily="34" charset="0"/>
+                <a:ea typeface="Courier New" pitchFamily="34" charset="-122"/>
+                <a:cs typeface="Courier New" pitchFamily="34" charset="-120"/>
+              </a:rPr>
+              <a:t>aggregate(QtdeClientes))</a:t>
+            </a:r>
+            <a:endParaRPr lang="en-US" sz="1000" dirty="0"/>
           </a:p>
         </p:txBody>
       </p:sp>
@@ -17666,7 +18892,7 @@
       </p:pic>
       <p:sp>
         <p:nvSpPr>
-          <p:cNvPr id="7" name="Código"/>
+          <p:cNvPr id="7" name="Editor"/>
           <p:cNvSpPr/>
           <p:nvPr/>
         </p:nvSpPr>
@@ -17681,9 +18907,14 @@
             </a:avLst>
           </a:prstGeom>
           <a:solidFill>
-            <a:srgbClr val="12171C"/>
+            <a:srgbClr val="1F1F1F"/>
           </a:solidFill>
-          <a:ln/>
+          <a:ln w="9525">
+            <a:solidFill>
+              <a:srgbClr val="2B2B2B"/>
+            </a:solidFill>
+            <a:prstDash val="solid"/>
+          </a:ln>
           <a:effectLst>
             <a:outerShdw sx="100000" sy="100000" kx="0" ky="0" algn="bl" rotWithShape="0" blurRad="101600" dist="25400" dir="5400000">
               <a:srgbClr val="223548">
@@ -17701,8 +18932,8 @@
         </p:nvSpPr>
         <p:spPr>
           <a:xfrm>
-            <a:off x="8138160" y="1792224"/>
-            <a:ext cx="3276295" cy="2487168"/>
+            <a:off x="8092440" y="1792224"/>
+            <a:ext cx="3413455" cy="2505456"/>
           </a:xfrm>
           <a:prstGeom prst="rect">
             <a:avLst/>
@@ -17723,7 +18954,24 @@
             <a:r>
               <a:rPr lang="en-US" sz="1150" dirty="0">
                 <a:solidFill>
-                  <a:srgbClr val="E8ECEF"/>
+                  <a:srgbClr val="6E7681"/>
+                </a:solidFill>
+                <a:latin typeface="Courier New" pitchFamily="34" charset="0"/>
+                <a:ea typeface="Courier New" pitchFamily="34" charset="-122"/>
+                <a:cs typeface="Courier New" pitchFamily="34" charset="-120"/>
+              </a:rPr>
+              <a:t> 1  </a:t>
+            </a:r>
+            <a:pPr indent="0" marL="0">
+              <a:lnSpc>
+                <a:spcPct val="105000"/>
+              </a:lnSpc>
+              <a:buNone/>
+            </a:pPr>
+            <a:r>
+              <a:rPr lang="en-US" sz="1150" dirty="0">
+                <a:solidFill>
+                  <a:srgbClr val="DCDCAA"/>
                 </a:solidFill>
                 <a:latin typeface="Courier New" pitchFamily="34" charset="0"/>
                 <a:ea typeface="Courier New" pitchFamily="34" charset="-122"/>
@@ -17740,7 +18988,7 @@
             <a:r>
               <a:rPr lang="en-US" sz="1150" dirty="0">
                 <a:solidFill>
-                  <a:srgbClr val="E8ECEF"/>
+                  <a:srgbClr val="CCCCCC"/>
                 </a:solidFill>
                 <a:latin typeface="Courier New" pitchFamily="34" charset="0"/>
                 <a:ea typeface="Courier New" pitchFamily="34" charset="-122"/>
@@ -17757,14 +19005,17 @@
             <a:r>
               <a:rPr lang="en-US" sz="1150" dirty="0">
                 <a:solidFill>
-                  <a:srgbClr val="E8ECEF"/>
-                </a:solidFill>
-                <a:latin typeface="Courier New" pitchFamily="34" charset="0"/>
-                <a:ea typeface="Courier New" pitchFamily="34" charset="-122"/>
-                <a:cs typeface="Courier New" pitchFamily="34" charset="-120"/>
-              </a:rPr>
-              <a:t>ui5</a:t>
-            </a:r>
+                  <a:srgbClr val="CCCCCC"/>
+                </a:solidFill>
+                <a:latin typeface="Courier New" pitchFamily="34" charset="0"/>
+                <a:ea typeface="Courier New" pitchFamily="34" charset="-122"/>
+                <a:cs typeface="Courier New" pitchFamily="34" charset="-120"/>
+              </a:rPr>
+              <a:t>ui5/launchpad</a:t>
+            </a:r>
+            <a:endParaRPr lang="en-US" sz="1150" dirty="0"/>
+          </a:p>
+          <a:p>
             <a:pPr indent="0" marL="0">
               <a:lnSpc>
                 <a:spcPct val="105000"/>
@@ -17774,13 +19025,13 @@
             <a:r>
               <a:rPr lang="en-US" sz="1150" dirty="0">
                 <a:solidFill>
-                  <a:srgbClr val="E8ECEF"/>
-                </a:solidFill>
-                <a:latin typeface="Courier New" pitchFamily="34" charset="0"/>
-                <a:ea typeface="Courier New" pitchFamily="34" charset="-122"/>
-                <a:cs typeface="Courier New" pitchFamily="34" charset="-120"/>
-              </a:rPr>
-              <a:t>/</a:t>
+                  <a:srgbClr val="6E7681"/>
+                </a:solidFill>
+                <a:latin typeface="Courier New" pitchFamily="34" charset="0"/>
+                <a:ea typeface="Courier New" pitchFamily="34" charset="-122"/>
+                <a:cs typeface="Courier New" pitchFamily="34" charset="-120"/>
+              </a:rPr>
+              <a:t> 2  </a:t>
             </a:r>
             <a:pPr indent="0" marL="0">
               <a:lnSpc>
@@ -17791,13 +19042,47 @@
             <a:r>
               <a:rPr lang="en-US" sz="1150" dirty="0">
                 <a:solidFill>
-                  <a:srgbClr val="E8ECEF"/>
-                </a:solidFill>
-                <a:latin typeface="Courier New" pitchFamily="34" charset="0"/>
-                <a:ea typeface="Courier New" pitchFamily="34" charset="-122"/>
-                <a:cs typeface="Courier New" pitchFamily="34" charset="-120"/>
-              </a:rPr>
-              <a:t>launchpad</a:t>
+                  <a:srgbClr val="DCDCAA"/>
+                </a:solidFill>
+                <a:latin typeface="Courier New" pitchFamily="34" charset="0"/>
+                <a:ea typeface="Courier New" pitchFamily="34" charset="-122"/>
+                <a:cs typeface="Courier New" pitchFamily="34" charset="-120"/>
+              </a:rPr>
+              <a:t>npm</a:t>
+            </a:r>
+            <a:pPr indent="0" marL="0">
+              <a:lnSpc>
+                <a:spcPct val="105000"/>
+              </a:lnSpc>
+              <a:buNone/>
+            </a:pPr>
+            <a:r>
+              <a:rPr lang="en-US" sz="1150" dirty="0">
+                <a:solidFill>
+                  <a:srgbClr val="CCCCCC"/>
+                </a:solidFill>
+                <a:latin typeface="Courier New" pitchFamily="34" charset="0"/>
+                <a:ea typeface="Courier New" pitchFamily="34" charset="-122"/>
+                <a:cs typeface="Courier New" pitchFamily="34" charset="-120"/>
+              </a:rPr>
+              <a:t> </a:t>
+            </a:r>
+            <a:pPr indent="0" marL="0">
+              <a:lnSpc>
+                <a:spcPct val="105000"/>
+              </a:lnSpc>
+              <a:buNone/>
+            </a:pPr>
+            <a:r>
+              <a:rPr lang="en-US" sz="1150" dirty="0">
+                <a:solidFill>
+                  <a:srgbClr val="CCCCCC"/>
+                </a:solidFill>
+                <a:latin typeface="Courier New" pitchFamily="34" charset="0"/>
+                <a:ea typeface="Courier New" pitchFamily="34" charset="-122"/>
+                <a:cs typeface="Courier New" pitchFamily="34" charset="-120"/>
+              </a:rPr>
+              <a:t>install</a:t>
             </a:r>
             <a:endParaRPr lang="en-US" sz="1150" dirty="0"/>
           </a:p>
@@ -17811,7 +19096,118 @@
             <a:r>
               <a:rPr lang="en-US" sz="1150" dirty="0">
                 <a:solidFill>
-                  <a:srgbClr val="E8ECEF"/>
+                  <a:srgbClr val="6E7681"/>
+                </a:solidFill>
+                <a:latin typeface="Courier New" pitchFamily="34" charset="0"/>
+                <a:ea typeface="Courier New" pitchFamily="34" charset="-122"/>
+                <a:cs typeface="Courier New" pitchFamily="34" charset="-120"/>
+              </a:rPr>
+              <a:t> 3  </a:t>
+            </a:r>
+            <a:endParaRPr lang="en-US" sz="1150" dirty="0"/>
+          </a:p>
+          <a:p>
+            <a:pPr indent="0" marL="0">
+              <a:lnSpc>
+                <a:spcPct val="105000"/>
+              </a:lnSpc>
+              <a:buNone/>
+            </a:pPr>
+            <a:r>
+              <a:rPr lang="en-US" sz="1150" dirty="0">
+                <a:solidFill>
+                  <a:srgbClr val="6E7681"/>
+                </a:solidFill>
+                <a:latin typeface="Courier New" pitchFamily="34" charset="0"/>
+                <a:ea typeface="Courier New" pitchFamily="34" charset="-122"/>
+                <a:cs typeface="Courier New" pitchFamily="34" charset="-120"/>
+              </a:rPr>
+              <a:t> 4  </a:t>
+            </a:r>
+            <a:pPr indent="0" marL="0">
+              <a:lnSpc>
+                <a:spcPct val="105000"/>
+              </a:lnSpc>
+              <a:buNone/>
+            </a:pPr>
+            <a:r>
+              <a:rPr lang="en-US" sz="1150" dirty="0">
+                <a:solidFill>
+                  <a:srgbClr val="6A9955"/>
+                </a:solidFill>
+                <a:latin typeface="Courier New" pitchFamily="34" charset="0"/>
+                <a:ea typeface="Courier New" pitchFamily="34" charset="-122"/>
+                <a:cs typeface="Courier New" pitchFamily="34" charset="-120"/>
+              </a:rPr>
+              <a:t># dados reais do BTP ABAP</a:t>
+            </a:r>
+            <a:endParaRPr lang="en-US" sz="1150" dirty="0"/>
+          </a:p>
+          <a:p>
+            <a:pPr indent="0" marL="0">
+              <a:lnSpc>
+                <a:spcPct val="105000"/>
+              </a:lnSpc>
+              <a:buNone/>
+            </a:pPr>
+            <a:r>
+              <a:rPr lang="en-US" sz="1150" dirty="0">
+                <a:solidFill>
+                  <a:srgbClr val="6E7681"/>
+                </a:solidFill>
+                <a:latin typeface="Courier New" pitchFamily="34" charset="0"/>
+                <a:ea typeface="Courier New" pitchFamily="34" charset="-122"/>
+                <a:cs typeface="Courier New" pitchFamily="34" charset="-120"/>
+              </a:rPr>
+              <a:t> 5  </a:t>
+            </a:r>
+            <a:pPr indent="0" marL="0">
+              <a:lnSpc>
+                <a:spcPct val="105000"/>
+              </a:lnSpc>
+              <a:buNone/>
+            </a:pPr>
+            <a:r>
+              <a:rPr lang="en-US" sz="1150" dirty="0">
+                <a:solidFill>
+                  <a:srgbClr val="6A9955"/>
+                </a:solidFill>
+                <a:latin typeface="Courier New" pitchFamily="34" charset="0"/>
+                <a:ea typeface="Courier New" pitchFamily="34" charset="-122"/>
+                <a:cs typeface="Courier New" pitchFamily="34" charset="-120"/>
+              </a:rPr>
+              <a:t># (login no navegador)</a:t>
+            </a:r>
+            <a:endParaRPr lang="en-US" sz="1150" dirty="0"/>
+          </a:p>
+          <a:p>
+            <a:pPr indent="0" marL="0">
+              <a:lnSpc>
+                <a:spcPct val="105000"/>
+              </a:lnSpc>
+              <a:buNone/>
+            </a:pPr>
+            <a:r>
+              <a:rPr lang="en-US" sz="1150" dirty="0">
+                <a:solidFill>
+                  <a:srgbClr val="6E7681"/>
+                </a:solidFill>
+                <a:latin typeface="Courier New" pitchFamily="34" charset="0"/>
+                <a:ea typeface="Courier New" pitchFamily="34" charset="-122"/>
+                <a:cs typeface="Courier New" pitchFamily="34" charset="-120"/>
+              </a:rPr>
+              <a:t> 6  </a:t>
+            </a:r>
+            <a:pPr indent="0" marL="0">
+              <a:lnSpc>
+                <a:spcPct val="105000"/>
+              </a:lnSpc>
+              <a:buNone/>
+            </a:pPr>
+            <a:r>
+              <a:rPr lang="en-US" sz="1150" dirty="0">
+                <a:solidFill>
+                  <a:srgbClr val="DCDCAA"/>
                 </a:solidFill>
                 <a:latin typeface="Courier New" pitchFamily="34" charset="0"/>
                 <a:ea typeface="Courier New" pitchFamily="34" charset="-122"/>
@@ -17828,7 +19224,7 @@
             <a:r>
               <a:rPr lang="en-US" sz="1150" dirty="0">
                 <a:solidFill>
-                  <a:srgbClr val="E8ECEF"/>
+                  <a:srgbClr val="CCCCCC"/>
                 </a:solidFill>
                 <a:latin typeface="Courier New" pitchFamily="34" charset="0"/>
                 <a:ea typeface="Courier New" pitchFamily="34" charset="-122"/>
@@ -17845,13 +19241,13 @@
             <a:r>
               <a:rPr lang="en-US" sz="1150" dirty="0">
                 <a:solidFill>
-                  <a:srgbClr val="E8ECEF"/>
-                </a:solidFill>
-                <a:latin typeface="Courier New" pitchFamily="34" charset="0"/>
-                <a:ea typeface="Courier New" pitchFamily="34" charset="-122"/>
-                <a:cs typeface="Courier New" pitchFamily="34" charset="-120"/>
-              </a:rPr>
-              <a:t>install</a:t>
+                  <a:srgbClr val="CCCCCC"/>
+                </a:solidFill>
+                <a:latin typeface="Courier New" pitchFamily="34" charset="0"/>
+                <a:ea typeface="Courier New" pitchFamily="34" charset="-122"/>
+                <a:cs typeface="Courier New" pitchFamily="34" charset="-120"/>
+              </a:rPr>
+              <a:t>start</a:t>
             </a:r>
             <a:endParaRPr lang="en-US" sz="1150" dirty="0"/>
           </a:p>
@@ -17865,7 +19261,98 @@
             <a:r>
               <a:rPr lang="en-US" sz="1150" dirty="0">
                 <a:solidFill>
-                  <a:srgbClr val="E8ECEF"/>
+                  <a:srgbClr val="6E7681"/>
+                </a:solidFill>
+                <a:latin typeface="Courier New" pitchFamily="34" charset="0"/>
+                <a:ea typeface="Courier New" pitchFamily="34" charset="-122"/>
+                <a:cs typeface="Courier New" pitchFamily="34" charset="-120"/>
+              </a:rPr>
+              <a:t> 7  </a:t>
+            </a:r>
+            <a:endParaRPr lang="en-US" sz="1150" dirty="0"/>
+          </a:p>
+          <a:p>
+            <a:pPr indent="0" marL="0">
+              <a:lnSpc>
+                <a:spcPct val="105000"/>
+              </a:lnSpc>
+              <a:buNone/>
+            </a:pPr>
+            <a:r>
+              <a:rPr lang="en-US" sz="1150" dirty="0">
+                <a:solidFill>
+                  <a:srgbClr val="6E7681"/>
+                </a:solidFill>
+                <a:latin typeface="Courier New" pitchFamily="34" charset="0"/>
+                <a:ea typeface="Courier New" pitchFamily="34" charset="-122"/>
+                <a:cs typeface="Courier New" pitchFamily="34" charset="-120"/>
+              </a:rPr>
+              <a:t> 8  </a:t>
+            </a:r>
+            <a:pPr indent="0" marL="0">
+              <a:lnSpc>
+                <a:spcPct val="105000"/>
+              </a:lnSpc>
+              <a:buNone/>
+            </a:pPr>
+            <a:r>
+              <a:rPr lang="en-US" sz="1150" dirty="0">
+                <a:solidFill>
+                  <a:srgbClr val="6A9955"/>
+                </a:solidFill>
+                <a:latin typeface="Courier New" pitchFamily="34" charset="0"/>
+                <a:ea typeface="Courier New" pitchFamily="34" charset="-122"/>
+                <a:cs typeface="Courier New" pitchFamily="34" charset="-120"/>
+              </a:rPr>
+              <a:t># sem backend: mock server</a:t>
+            </a:r>
+            <a:endParaRPr lang="en-US" sz="1150" dirty="0"/>
+          </a:p>
+          <a:p>
+            <a:pPr indent="0" marL="0">
+              <a:lnSpc>
+                <a:spcPct val="105000"/>
+              </a:lnSpc>
+              <a:buNone/>
+            </a:pPr>
+            <a:r>
+              <a:rPr lang="en-US" sz="1150" dirty="0">
+                <a:solidFill>
+                  <a:srgbClr val="6E7681"/>
+                </a:solidFill>
+                <a:latin typeface="Courier New" pitchFamily="34" charset="0"/>
+                <a:ea typeface="Courier New" pitchFamily="34" charset="-122"/>
+                <a:cs typeface="Courier New" pitchFamily="34" charset="-120"/>
+              </a:rPr>
+              <a:t> 9  </a:t>
+            </a:r>
+            <a:pPr indent="0" marL="0">
+              <a:lnSpc>
+                <a:spcPct val="105000"/>
+              </a:lnSpc>
+              <a:buNone/>
+            </a:pPr>
+            <a:r>
+              <a:rPr lang="en-US" sz="1150" dirty="0">
+                <a:solidFill>
+                  <a:srgbClr val="DCDCAA"/>
+                </a:solidFill>
+                <a:latin typeface="Courier New" pitchFamily="34" charset="0"/>
+                <a:ea typeface="Courier New" pitchFamily="34" charset="-122"/>
+                <a:cs typeface="Courier New" pitchFamily="34" charset="-120"/>
+              </a:rPr>
+              <a:t>npm</a:t>
+            </a:r>
+            <a:pPr indent="0" marL="0">
+              <a:lnSpc>
+                <a:spcPct val="105000"/>
+              </a:lnSpc>
+              <a:buNone/>
+            </a:pPr>
+            <a:r>
+              <a:rPr lang="en-US" sz="1150" dirty="0">
+                <a:solidFill>
+                  <a:srgbClr val="CCCCCC"/>
                 </a:solidFill>
                 <a:latin typeface="Courier New" pitchFamily="34" charset="0"/>
                 <a:ea typeface="Courier New" pitchFamily="34" charset="-122"/>
@@ -17873,49 +19360,6 @@
               </a:rPr>
               <a:t> </a:t>
             </a:r>
-            <a:endParaRPr lang="en-US" sz="1150" dirty="0"/>
-          </a:p>
-          <a:p>
-            <a:pPr indent="0" marL="0">
-              <a:lnSpc>
-                <a:spcPct val="105000"/>
-              </a:lnSpc>
-              <a:buNone/>
-            </a:pPr>
-            <a:r>
-              <a:rPr lang="en-US" sz="1150" i="1" dirty="0">
-                <a:solidFill>
-                  <a:srgbClr val="8396A8"/>
-                </a:solidFill>
-                <a:latin typeface="Courier New" pitchFamily="34" charset="0"/>
-                <a:ea typeface="Courier New" pitchFamily="34" charset="-122"/>
-                <a:cs typeface="Courier New" pitchFamily="34" charset="-120"/>
-              </a:rPr>
-              <a:t># dados reais do BTP ABAP</a:t>
-            </a:r>
-            <a:endParaRPr lang="en-US" sz="1150" dirty="0"/>
-          </a:p>
-          <a:p>
-            <a:pPr indent="0" marL="0">
-              <a:lnSpc>
-                <a:spcPct val="105000"/>
-              </a:lnSpc>
-              <a:buNone/>
-            </a:pPr>
-            <a:r>
-              <a:rPr lang="en-US" sz="1150" i="1" dirty="0">
-                <a:solidFill>
-                  <a:srgbClr val="8396A8"/>
-                </a:solidFill>
-                <a:latin typeface="Courier New" pitchFamily="34" charset="0"/>
-                <a:ea typeface="Courier New" pitchFamily="34" charset="-122"/>
-                <a:cs typeface="Courier New" pitchFamily="34" charset="-120"/>
-              </a:rPr>
-              <a:t># (login no navegador)</a:t>
-            </a:r>
-            <a:endParaRPr lang="en-US" sz="1150" dirty="0"/>
-          </a:p>
-          <a:p>
             <a:pPr indent="0" marL="0">
               <a:lnSpc>
                 <a:spcPct val="105000"/>
@@ -17925,13 +19369,13 @@
             <a:r>
               <a:rPr lang="en-US" sz="1150" dirty="0">
                 <a:solidFill>
-                  <a:srgbClr val="E8ECEF"/>
-                </a:solidFill>
-                <a:latin typeface="Courier New" pitchFamily="34" charset="0"/>
-                <a:ea typeface="Courier New" pitchFamily="34" charset="-122"/>
-                <a:cs typeface="Courier New" pitchFamily="34" charset="-120"/>
-              </a:rPr>
-              <a:t>npm</a:t>
+                  <a:srgbClr val="CCCCCC"/>
+                </a:solidFill>
+                <a:latin typeface="Courier New" pitchFamily="34" charset="0"/>
+                <a:ea typeface="Courier New" pitchFamily="34" charset="-122"/>
+                <a:cs typeface="Courier New" pitchFamily="34" charset="-120"/>
+              </a:rPr>
+              <a:t>run</a:t>
             </a:r>
             <a:pPr indent="0" marL="0">
               <a:lnSpc>
@@ -17942,7 +19386,7 @@
             <a:r>
               <a:rPr lang="en-US" sz="1150" dirty="0">
                 <a:solidFill>
-                  <a:srgbClr val="E8ECEF"/>
+                  <a:srgbClr val="CCCCCC"/>
                 </a:solidFill>
                 <a:latin typeface="Courier New" pitchFamily="34" charset="0"/>
                 <a:ea typeface="Courier New" pitchFamily="34" charset="-122"/>
@@ -17959,135 +19403,7 @@
             <a:r>
               <a:rPr lang="en-US" sz="1150" dirty="0">
                 <a:solidFill>
-                  <a:srgbClr val="E8ECEF"/>
-                </a:solidFill>
-                <a:latin typeface="Courier New" pitchFamily="34" charset="0"/>
-                <a:ea typeface="Courier New" pitchFamily="34" charset="-122"/>
-                <a:cs typeface="Courier New" pitchFamily="34" charset="-120"/>
-              </a:rPr>
-              <a:t>start</a:t>
-            </a:r>
-            <a:endParaRPr lang="en-US" sz="1150" dirty="0"/>
-          </a:p>
-          <a:p>
-            <a:pPr indent="0" marL="0">
-              <a:lnSpc>
-                <a:spcPct val="105000"/>
-              </a:lnSpc>
-              <a:buNone/>
-            </a:pPr>
-            <a:r>
-              <a:rPr lang="en-US" sz="1150" dirty="0">
-                <a:solidFill>
-                  <a:srgbClr val="E8ECEF"/>
-                </a:solidFill>
-                <a:latin typeface="Courier New" pitchFamily="34" charset="0"/>
-                <a:ea typeface="Courier New" pitchFamily="34" charset="-122"/>
-                <a:cs typeface="Courier New" pitchFamily="34" charset="-120"/>
-              </a:rPr>
-              <a:t> </a:t>
-            </a:r>
-            <a:endParaRPr lang="en-US" sz="1150" dirty="0"/>
-          </a:p>
-          <a:p>
-            <a:pPr indent="0" marL="0">
-              <a:lnSpc>
-                <a:spcPct val="105000"/>
-              </a:lnSpc>
-              <a:buNone/>
-            </a:pPr>
-            <a:r>
-              <a:rPr lang="en-US" sz="1150" i="1" dirty="0">
-                <a:solidFill>
-                  <a:srgbClr val="8396A8"/>
-                </a:solidFill>
-                <a:latin typeface="Courier New" pitchFamily="34" charset="0"/>
-                <a:ea typeface="Courier New" pitchFamily="34" charset="-122"/>
-                <a:cs typeface="Courier New" pitchFamily="34" charset="-120"/>
-              </a:rPr>
-              <a:t># sem backend: mock server</a:t>
-            </a:r>
-            <a:endParaRPr lang="en-US" sz="1150" dirty="0"/>
-          </a:p>
-          <a:p>
-            <a:pPr indent="0" marL="0">
-              <a:lnSpc>
-                <a:spcPct val="105000"/>
-              </a:lnSpc>
-              <a:buNone/>
-            </a:pPr>
-            <a:r>
-              <a:rPr lang="en-US" sz="1150" dirty="0">
-                <a:solidFill>
-                  <a:srgbClr val="E8ECEF"/>
-                </a:solidFill>
-                <a:latin typeface="Courier New" pitchFamily="34" charset="0"/>
-                <a:ea typeface="Courier New" pitchFamily="34" charset="-122"/>
-                <a:cs typeface="Courier New" pitchFamily="34" charset="-120"/>
-              </a:rPr>
-              <a:t>npm</a:t>
-            </a:r>
-            <a:pPr indent="0" marL="0">
-              <a:lnSpc>
-                <a:spcPct val="105000"/>
-              </a:lnSpc>
-              <a:buNone/>
-            </a:pPr>
-            <a:r>
-              <a:rPr lang="en-US" sz="1150" dirty="0">
-                <a:solidFill>
-                  <a:srgbClr val="E8ECEF"/>
-                </a:solidFill>
-                <a:latin typeface="Courier New" pitchFamily="34" charset="0"/>
-                <a:ea typeface="Courier New" pitchFamily="34" charset="-122"/>
-                <a:cs typeface="Courier New" pitchFamily="34" charset="-120"/>
-              </a:rPr>
-              <a:t> </a:t>
-            </a:r>
-            <a:pPr indent="0" marL="0">
-              <a:lnSpc>
-                <a:spcPct val="105000"/>
-              </a:lnSpc>
-              <a:buNone/>
-            </a:pPr>
-            <a:r>
-              <a:rPr lang="en-US" sz="1150" dirty="0">
-                <a:solidFill>
-                  <a:srgbClr val="E8ECEF"/>
-                </a:solidFill>
-                <a:latin typeface="Courier New" pitchFamily="34" charset="0"/>
-                <a:ea typeface="Courier New" pitchFamily="34" charset="-122"/>
-                <a:cs typeface="Courier New" pitchFamily="34" charset="-120"/>
-              </a:rPr>
-              <a:t>run</a:t>
-            </a:r>
-            <a:pPr indent="0" marL="0">
-              <a:lnSpc>
-                <a:spcPct val="105000"/>
-              </a:lnSpc>
-              <a:buNone/>
-            </a:pPr>
-            <a:r>
-              <a:rPr lang="en-US" sz="1150" dirty="0">
-                <a:solidFill>
-                  <a:srgbClr val="E8ECEF"/>
-                </a:solidFill>
-                <a:latin typeface="Courier New" pitchFamily="34" charset="0"/>
-                <a:ea typeface="Courier New" pitchFamily="34" charset="-122"/>
-                <a:cs typeface="Courier New" pitchFamily="34" charset="-120"/>
-              </a:rPr>
-              <a:t> </a:t>
-            </a:r>
-            <a:pPr indent="0" marL="0">
-              <a:lnSpc>
-                <a:spcPct val="105000"/>
-              </a:lnSpc>
-              <a:buNone/>
-            </a:pPr>
-            <a:r>
-              <a:rPr lang="en-US" sz="1150" dirty="0">
-                <a:solidFill>
-                  <a:srgbClr val="E8ECEF"/>
+                  <a:srgbClr val="CCCCCC"/>
                 </a:solidFill>
                 <a:latin typeface="Courier New" pitchFamily="34" charset="0"/>
                 <a:ea typeface="Courier New" pitchFamily="34" charset="-122"/>

--- a/docs/apresentacoes/05-apps-fiori.pptx
+++ b/docs/apresentacoes/05-apps-fiori.pptx
@@ -2268,7 +2268,7 @@
           <a:p>
             <a:r>
               <a:rPr lang="en-US" dirty="0"/>
-              <a:t>Encerramento da série. Do modelo de dados às apps publicadas, tudo em ABAP Cloud no SAP BTP ABAP Environment.</a:t>
+              <a:t>Encerramento da série. Do modelo de dados às apps publicadas, com o mesmo código RAP no SAP BTP, ABAP environment ou num SAP S/4HANA On-Premise.</a:t>
             </a:r>
             <a:endParaRPr lang="en-US" dirty="0"/>
           </a:p>
@@ -2532,7 +2532,7 @@
           <a:p>
             <a:r>
               <a:rPr lang="en-US" dirty="0"/>
-              <a:t>Cada pasta em ui5/ tem package.json, node_modules e configuração próprios. O ui5.yaml sobe o servidor local com proxy para o BTP (login por reentranceTicket); o ui5-mock.yaml usa o metadata salvo em localService para rodar sem backend.</a:t>
+              <a:t>Cada pasta em ui5/ tem package.json, node_modules e configuração próprios. O ui5.yaml sobe o servidor local com proxy para o sistema ABAP (no BTP, login por reentranceTicket); o ui5-mock.yaml usa o metadata salvo em localService para rodar sem backend.</a:t>
             </a:r>
             <a:endParaRPr lang="en-US" dirty="0"/>
           </a:p>
@@ -3386,7 +3386,7 @@
                   <a:srgbClr val="556B82"/>
                 </a:solidFill>
               </a:rPr>
-              <a:t>Pedidos de Compras · SAP RAP / ABAP Cloud  ·  Etapa 5 de 5 — Apps Fiori</a:t>
+              <a:t>Pedidos de Compras · SAP RAP no BTP e On-Premise  ·  Etapa 5 de 5 — Apps Fiori</a:t>
             </a:r>
             <a:endParaRPr lang="en-US" sz="900" dirty="0"/>
           </a:p>
@@ -3975,7 +3975,7 @@
                   <a:schemeClr val="accent1"/>
                 </a:solidFill>
               </a:rPr>
-              <a:t>ETAPA 5 DE 5 · PEDIDOS DE COMPRAS NO SAP BTP</a:t>
+              <a:t>ETAPA 5 DE 5 · SAP RAP NO BTP OU ON-PREMISE</a:t>
             </a:r>
             <a:endParaRPr lang="en-US" sz="1400" dirty="0"/>
           </a:p>
@@ -26002,7 +26002,7 @@
                   <a:schemeClr val="accent1"/>
                 </a:solidFill>
               </a:rPr>
-              <a:t>DEPLOY</a:t>
+              <a:t>DEPLOY · SAP BTP</a:t>
             </a:r>
             <a:endParaRPr lang="en-US" sz="1100" dirty="0"/>
           </a:p>
@@ -30678,7 +30678,7 @@
                   <a:srgbClr val="A9B4BE"/>
                 </a:solidFill>
               </a:rPr>
-              <a:t>5 serviços OData V4 publicados, IAM e roles</a:t>
+              <a:t>5 serviços OData V4, IAM ou PFCG</a:t>
             </a:r>
             <a:endParaRPr lang="en-US" sz="1250" dirty="0"/>
           </a:p>
@@ -30870,7 +30870,7 @@
                   <a:srgbClr val="A9B4BE"/>
                 </a:solidFill>
               </a:rPr>
-              <a:t>Arquivos: docs/apresentacoes/01 a 05 · fontes em abap/ e ui5/ · diagramas em docs/diagramas/</a:t>
+              <a:t>Arquivos: docs/apresentacoes/01 a 05 · fontes em abap/ e ui5/ · diagramas em diagramas/</a:t>
             </a:r>
             <a:endParaRPr lang="en-US" sz="1200" dirty="0"/>
           </a:p>
@@ -31605,7 +31605,7 @@
                   <a:srgbClr val="FFFFFF"/>
                 </a:solidFill>
               </a:rPr>
-              <a:t>Modelagem, CDS, RAP, OData e Fiori em ABAP Cloud</a:t>
+              <a:t>CDS, RAP, OData e Fiori no BTP ou On-Premise</a:t>
             </a:r>
             <a:endParaRPr lang="en-US" sz="1800" dirty="0"/>
           </a:p>
@@ -32042,7 +32042,7 @@
                   <a:srgbClr val="A9B4BE"/>
                 </a:solidFill>
               </a:rPr>
-              <a:t>  proxy /sap → BTP</a:t>
+              <a:t>  proxy /sap → ABAP</a:t>
             </a:r>
             <a:endParaRPr lang="en-US" sz="1100" dirty="0"/>
           </a:p>
@@ -36360,7 +36360,7 @@
                 <a:ea typeface="Courier New" pitchFamily="34" charset="-122"/>
                 <a:cs typeface="Courier New" pitchFamily="34" charset="-120"/>
               </a:rPr>
-              <a:t>BTP,</a:t>
+              <a:t>ABAP,</a:t>
             </a:r>
             <a:pPr indent="0" marL="0">
               <a:lnSpc>
@@ -36998,6 +36998,108 @@
                 <a:ea typeface="Courier New" pitchFamily="34" charset="-122"/>
                 <a:cs typeface="Courier New" pitchFamily="34" charset="-120"/>
               </a:rPr>
+              <a:t/>
+            </a:r>
+            <a:pPr indent="0" marL="0">
+              <a:lnSpc>
+                <a:spcPct val="105000"/>
+              </a:lnSpc>
+              <a:buNone/>
+            </a:pPr>
+            <a:r>
+              <a:rPr lang="en-US" sz="1050" dirty="0">
+                <a:solidFill>
+                  <a:srgbClr val="CCCCCC"/>
+                </a:solidFill>
+                <a:latin typeface="Courier New" pitchFamily="34" charset="0"/>
+                <a:ea typeface="Courier New" pitchFamily="34" charset="-122"/>
+                <a:cs typeface="Courier New" pitchFamily="34" charset="-120"/>
+              </a:rPr>
+              <a:t/>
+            </a:r>
+            <a:pPr indent="0" marL="0">
+              <a:lnSpc>
+                <a:spcPct val="105000"/>
+              </a:lnSpc>
+              <a:buNone/>
+            </a:pPr>
+            <a:r>
+              <a:rPr lang="en-US" sz="1050" dirty="0">
+                <a:solidFill>
+                  <a:srgbClr val="CCCCCC"/>
+                </a:solidFill>
+                <a:latin typeface="Courier New" pitchFamily="34" charset="0"/>
+                <a:ea typeface="Courier New" pitchFamily="34" charset="-122"/>
+                <a:cs typeface="Courier New" pitchFamily="34" charset="-120"/>
+              </a:rPr>
+              <a:t/>
+            </a:r>
+            <a:pPr indent="0" marL="0">
+              <a:lnSpc>
+                <a:spcPct val="105000"/>
+              </a:lnSpc>
+              <a:buNone/>
+            </a:pPr>
+            <a:r>
+              <a:rPr lang="en-US" sz="1050" dirty="0">
+                <a:solidFill>
+                  <a:srgbClr val="CCCCCC"/>
+                </a:solidFill>
+                <a:latin typeface="Courier New" pitchFamily="34" charset="0"/>
+                <a:ea typeface="Courier New" pitchFamily="34" charset="-122"/>
+                <a:cs typeface="Courier New" pitchFamily="34" charset="-120"/>
+              </a:rPr>
+              <a:t/>
+            </a:r>
+            <a:pPr indent="0" marL="0">
+              <a:lnSpc>
+                <a:spcPct val="105000"/>
+              </a:lnSpc>
+              <a:buNone/>
+            </a:pPr>
+            <a:r>
+              <a:rPr lang="en-US" sz="1050" dirty="0">
+                <a:solidFill>
+                  <a:srgbClr val="CCCCCC"/>
+                </a:solidFill>
+                <a:latin typeface="Courier New" pitchFamily="34" charset="0"/>
+                <a:ea typeface="Courier New" pitchFamily="34" charset="-122"/>
+                <a:cs typeface="Courier New" pitchFamily="34" charset="-120"/>
+              </a:rPr>
+              <a:t/>
+            </a:r>
+            <a:pPr indent="0" marL="0">
+              <a:lnSpc>
+                <a:spcPct val="105000"/>
+              </a:lnSpc>
+              <a:buNone/>
+            </a:pPr>
+            <a:r>
+              <a:rPr lang="en-US" sz="1050" dirty="0">
+                <a:solidFill>
+                  <a:srgbClr val="CCCCCC"/>
+                </a:solidFill>
+                <a:latin typeface="Courier New" pitchFamily="34" charset="0"/>
+                <a:ea typeface="Courier New" pitchFamily="34" charset="-122"/>
+                <a:cs typeface="Courier New" pitchFamily="34" charset="-120"/>
+              </a:rPr>
+              <a:t/>
+            </a:r>
+            <a:pPr indent="0" marL="0">
+              <a:lnSpc>
+                <a:spcPct val="105000"/>
+              </a:lnSpc>
+              <a:buNone/>
+            </a:pPr>
+            <a:r>
+              <a:rPr lang="en-US" sz="1050" dirty="0">
+                <a:solidFill>
+                  <a:srgbClr val="CCCCCC"/>
+                </a:solidFill>
+                <a:latin typeface="Courier New" pitchFamily="34" charset="0"/>
+                <a:ea typeface="Courier New" pitchFamily="34" charset="-122"/>
+                <a:cs typeface="Courier New" pitchFamily="34" charset="-120"/>
+              </a:rPr>
               <a:t> </a:t>
             </a:r>
             <a:pPr indent="0" marL="0">
@@ -37015,7 +37117,7 @@
                 <a:ea typeface="Courier New" pitchFamily="34" charset="-122"/>
                 <a:cs typeface="Courier New" pitchFamily="34" charset="-120"/>
               </a:rPr>
-              <a:t>+</a:t>
+              <a:t>no</a:t>
             </a:r>
             <a:pPr indent="0" marL="0">
               <a:lnSpc>
@@ -37049,109 +37151,7 @@
                 <a:ea typeface="Courier New" pitchFamily="34" charset="-122"/>
                 <a:cs typeface="Courier New" pitchFamily="34" charset="-120"/>
               </a:rPr>
-              <a:t>IAM</a:t>
-            </a:r>
-            <a:pPr indent="0" marL="0">
-              <a:lnSpc>
-                <a:spcPct val="105000"/>
-              </a:lnSpc>
-              <a:buNone/>
-            </a:pPr>
-            <a:r>
-              <a:rPr lang="en-US" sz="1050" dirty="0">
-                <a:solidFill>
-                  <a:srgbClr val="CCCCCC"/>
-                </a:solidFill>
-                <a:latin typeface="Courier New" pitchFamily="34" charset="0"/>
-                <a:ea typeface="Courier New" pitchFamily="34" charset="-122"/>
-                <a:cs typeface="Courier New" pitchFamily="34" charset="-120"/>
-              </a:rPr>
-              <a:t> </a:t>
-            </a:r>
-            <a:pPr indent="0" marL="0">
-              <a:lnSpc>
-                <a:spcPct val="105000"/>
-              </a:lnSpc>
-              <a:buNone/>
-            </a:pPr>
-            <a:r>
-              <a:rPr lang="en-US" sz="1050" dirty="0">
-                <a:solidFill>
-                  <a:srgbClr val="CCCCCC"/>
-                </a:solidFill>
-                <a:latin typeface="Courier New" pitchFamily="34" charset="0"/>
-                <a:ea typeface="Courier New" pitchFamily="34" charset="-122"/>
-                <a:cs typeface="Courier New" pitchFamily="34" charset="-120"/>
-              </a:rPr>
-              <a:t>App</a:t>
-            </a:r>
-            <a:pPr indent="0" marL="0">
-              <a:lnSpc>
-                <a:spcPct val="105000"/>
-              </a:lnSpc>
-              <a:buNone/>
-            </a:pPr>
-            <a:r>
-              <a:rPr lang="en-US" sz="1050" dirty="0">
-                <a:solidFill>
-                  <a:srgbClr val="CCCCCC"/>
-                </a:solidFill>
-                <a:latin typeface="Courier New" pitchFamily="34" charset="0"/>
-                <a:ea typeface="Courier New" pitchFamily="34" charset="-122"/>
-                <a:cs typeface="Courier New" pitchFamily="34" charset="-120"/>
-              </a:rPr>
-              <a:t> </a:t>
-            </a:r>
-            <a:pPr indent="0" marL="0">
-              <a:lnSpc>
-                <a:spcPct val="105000"/>
-              </a:lnSpc>
-              <a:buNone/>
-            </a:pPr>
-            <a:r>
-              <a:rPr lang="en-US" sz="1050" dirty="0">
-                <a:solidFill>
-                  <a:srgbClr val="CCCCCC"/>
-                </a:solidFill>
-                <a:latin typeface="Courier New" pitchFamily="34" charset="0"/>
-                <a:ea typeface="Courier New" pitchFamily="34" charset="-122"/>
-                <a:cs typeface="Courier New" pitchFamily="34" charset="-120"/>
-              </a:rPr>
-              <a:t>no</a:t>
-            </a:r>
-            <a:pPr indent="0" marL="0">
-              <a:lnSpc>
-                <a:spcPct val="105000"/>
-              </a:lnSpc>
-              <a:buNone/>
-            </a:pPr>
-            <a:r>
-              <a:rPr lang="en-US" sz="1050" dirty="0">
-                <a:solidFill>
-                  <a:srgbClr val="CCCCCC"/>
-                </a:solidFill>
-                <a:latin typeface="Courier New" pitchFamily="34" charset="0"/>
-                <a:ea typeface="Courier New" pitchFamily="34" charset="-122"/>
-                <a:cs typeface="Courier New" pitchFamily="34" charset="-120"/>
-              </a:rPr>
-              <a:t> </a:t>
-            </a:r>
-            <a:pPr indent="0" marL="0">
-              <a:lnSpc>
-                <a:spcPct val="105000"/>
-              </a:lnSpc>
-              <a:buNone/>
-            </a:pPr>
-            <a:r>
-              <a:rPr lang="en-US" sz="1050" dirty="0">
-                <a:solidFill>
-                  <a:srgbClr val="CCCCCC"/>
-                </a:solidFill>
-                <a:latin typeface="Courier New" pitchFamily="34" charset="0"/>
-                <a:ea typeface="Courier New" pitchFamily="34" charset="-122"/>
-                <a:cs typeface="Courier New" pitchFamily="34" charset="-120"/>
-              </a:rPr>
-              <a:t>ABAP</a:t>
+              <a:t>ABAP (+ IAM App no BTP)</a:t>
             </a:r>
             <a:endParaRPr lang="en-US" sz="1050" dirty="0"/>
           </a:p>
@@ -45033,7 +45033,7 @@
                 <a:ea typeface="Courier New" pitchFamily="34" charset="-122"/>
                 <a:cs typeface="Courier New" pitchFamily="34" charset="-120"/>
               </a:rPr>
-              <a:t># dados reais do BTP ABAP</a:t>
+              <a:t># dados reais do sistema ABAP</a:t>
             </a:r>
             <a:endParaRPr lang="en-US" sz="1050" dirty="0"/>
           </a:p>

--- a/docs/apresentacoes/05-apps-fiori.pptx
+++ b/docs/apresentacoes/05-apps-fiori.pptx
@@ -30,6 +30,10 @@
     <p:sldId id="278" r:id="rId24"/>
     <p:sldId id="279" r:id="rId25"/>
     <p:sldId id="280" r:id="rId26"/>
+    <p:sldId id="283" r:id="rId34"/>
+    <p:sldId id="284" r:id="rId35"/>
+    <p:sldId id="285" r:id="rId36"/>
+    <p:sldId id="286" r:id="rId37"/>
     <p:sldId id="281" r:id="rId27"/>
     <p:sldId id="282" r:id="rId28"/>
   </p:sldIdLst>
@@ -2310,6 +2314,182 @@
 </p:notes>
 </file>
 
+<file path=ppt/notesSlides/notesSlide28.xml><?xml version="1.0" encoding="utf-8"?>
+<p:notes xmlns:a="http://schemas.openxmlformats.org/drawingml/2006/main" xmlns:r="http://schemas.openxmlformats.org/officeDocument/2006/relationships" xmlns:p="http://schemas.openxmlformats.org/presentationml/2006/main">
+  <p:cSld>
+    <p:spTree>
+      <p:nvGrpSpPr>
+        <p:cNvPr id="1" name=""/>
+        <p:cNvGrpSpPr/>
+        <p:nvPr/>
+      </p:nvGrpSpPr>
+      <p:grpSpPr>
+        <a:xfrm>
+          <a:off x="0" y="0"/>
+          <a:ext cx="0" cy="0"/>
+          <a:chOff x="0" y="0"/>
+          <a:chExt cx="0" cy="0"/>
+        </a:xfrm>
+      </p:grpSpPr>
+      <p:sp>
+        <p:nvSpPr>
+          <p:cNvPr id="2" name="Slide Image Placeholder 1"/>
+          <p:cNvSpPr>
+            <a:spLocks noGrp="1" noRot="1" noChangeAspect="1"/>
+          </p:cNvSpPr>
+          <p:nvPr>
+            <p:ph type="sldImg"/>
+          </p:nvPr>
+        </p:nvSpPr>
+        <p:spPr/>
+      </p:sp>
+      <p:sp>
+        <p:nvSpPr>
+          <p:cNvPr id="3" name="Notes Placeholder 2"/>
+          <p:cNvSpPr>
+            <a:spLocks noGrp="1"/>
+          </p:cNvSpPr>
+          <p:nvPr>
+            <p:ph type="body" idx="1"/>
+          </p:nvPr>
+        </p:nvSpPr>
+        <p:spPr/>
+        <p:txBody>
+          <a:bodyPr/>
+          <a:lstStyle/>
+          <a:p>
+            <a:r>
+              <a:rPr lang="en-US" dirty="0"/>
+              <a:t>Para quem estuda num SAP S/4HANA On-Premise: as mesmas oito apps, sem mudar código. Muda o destino do deploy, que exige ordem de transporte, e o caminho até o usuário: catálogo e espaço do SAP Fiori launchpad e roles PFCG, no lugar de IAM Apps, Business Catalogs e Work Zone.</a:t>
+            </a:r>
+            <a:endParaRPr lang="en-US" dirty="0"/>
+          </a:p>
+        </p:txBody>
+      </p:sp>
+      <p:sp>
+        <p:nvSpPr>
+          <p:cNvPr id="4" name="Slide Number Placeholder 3"/>
+          <p:cNvSpPr>
+            <a:spLocks noGrp="1"/>
+          </p:cNvSpPr>
+          <p:nvPr>
+            <p:ph type="sldNum" sz="quarter" idx="10"/>
+          </p:nvPr>
+        </p:nvSpPr>
+        <p:spPr/>
+        <p:txBody>
+          <a:bodyPr/>
+          <a:lstStyle/>
+          <a:p>
+            <a:fld id="{F7021451-1387-4CA6-816F-3879F97B5CBC}" type="slidenum">
+              <a:rPr lang="en-US"/>
+              <a:t>3</a:t>
+            </a:fld>
+            <a:endParaRPr lang="en-US"/>
+          </a:p>
+        </p:txBody>
+      </p:sp>
+    </p:spTree>
+    <p:extLst>
+      <p:ext uri="{BB962C8B-B14F-4D97-AF65-F5344CB8AC3E}">
+        <p14:creationId xmlns:p14="http://schemas.microsoft.com/office/powerpoint/2010/main" val="1024086991"/>
+      </p:ext>
+    </p:extLst>
+  </p:cSld>
+  <p:clrMapOvr>
+    <a:masterClrMapping/>
+  </p:clrMapOvr>
+</p:notes>
+</file>
+
+<file path=ppt/notesSlides/notesSlide29.xml><?xml version="1.0" encoding="utf-8"?>
+<p:notes xmlns:a="http://schemas.openxmlformats.org/drawingml/2006/main" xmlns:r="http://schemas.openxmlformats.org/officeDocument/2006/relationships" xmlns:p="http://schemas.openxmlformats.org/presentationml/2006/main">
+  <p:cSld>
+    <p:spTree>
+      <p:nvGrpSpPr>
+        <p:cNvPr id="1" name=""/>
+        <p:cNvGrpSpPr/>
+        <p:nvPr/>
+      </p:nvGrpSpPr>
+      <p:grpSpPr>
+        <a:xfrm>
+          <a:off x="0" y="0"/>
+          <a:ext cx="0" cy="0"/>
+          <a:chOff x="0" y="0"/>
+          <a:chExt cx="0" cy="0"/>
+        </a:xfrm>
+      </p:grpSpPr>
+      <p:sp>
+        <p:nvSpPr>
+          <p:cNvPr id="2" name="Slide Image Placeholder 1"/>
+          <p:cNvSpPr>
+            <a:spLocks noGrp="1" noRot="1" noChangeAspect="1"/>
+          </p:cNvSpPr>
+          <p:nvPr>
+            <p:ph type="sldImg"/>
+          </p:nvPr>
+        </p:nvSpPr>
+        <p:spPr/>
+      </p:sp>
+      <p:sp>
+        <p:nvSpPr>
+          <p:cNvPr id="3" name="Notes Placeholder 2"/>
+          <p:cNvSpPr>
+            <a:spLocks noGrp="1"/>
+          </p:cNvSpPr>
+          <p:nvPr>
+            <p:ph type="body" idx="1"/>
+          </p:nvPr>
+        </p:nvSpPr>
+        <p:spPr/>
+        <p:txBody>
+          <a:bodyPr/>
+          <a:lstStyle/>
+          <a:p>
+            <a:r>
+              <a:rPr lang="en-US" dirty="0"/>
+              <a:t>Versão de deploy no On-Premise: os manifests pedem SAPUI5 1.136 ou superior (minUI5Version 1.136.7 nas apps de gestão e 1.136.0 nas análises). No sistema de referência, SAP S/4HANA 2025 FPS01 com ABAP Platform 2025, o front-end server 2025 embarcado (SAP_UI 816) entrega o SAPUI5 1.136; confira em Sobre, no launchpad. O deploy usa o serviço /UI5/ABAP_REPOSITORY_SRV, grava só a BSP (não há IAM App) e exige uma ordem Workbench. Usuário e senha vêm de variáveis de ambiente, nunca do arquivo.</a:t>
+            </a:r>
+            <a:endParaRPr lang="en-US" dirty="0"/>
+          </a:p>
+        </p:txBody>
+      </p:sp>
+      <p:sp>
+        <p:nvSpPr>
+          <p:cNvPr id="4" name="Slide Number Placeholder 3"/>
+          <p:cNvSpPr>
+            <a:spLocks noGrp="1"/>
+          </p:cNvSpPr>
+          <p:nvPr>
+            <p:ph type="sldNum" sz="quarter" idx="10"/>
+          </p:nvPr>
+        </p:nvSpPr>
+        <p:spPr/>
+        <p:txBody>
+          <a:bodyPr/>
+          <a:lstStyle/>
+          <a:p>
+            <a:fld id="{F7021451-1387-4CA6-816F-3879F97B5CBC}" type="slidenum">
+              <a:rPr lang="en-US"/>
+              <a:t>24</a:t>
+            </a:fld>
+            <a:endParaRPr lang="en-US"/>
+          </a:p>
+        </p:txBody>
+      </p:sp>
+    </p:spTree>
+    <p:extLst>
+      <p:ext uri="{BB962C8B-B14F-4D97-AF65-F5344CB8AC3E}">
+        <p14:creationId xmlns:p14="http://schemas.microsoft.com/office/powerpoint/2010/main" val="1024086991"/>
+      </p:ext>
+    </p:extLst>
+  </p:cSld>
+  <p:clrMapOvr>
+    <a:masterClrMapping/>
+  </p:clrMapOvr>
+</p:notes>
+</file>
+
 <file path=ppt/notesSlides/notesSlide3.xml><?xml version="1.0" encoding="utf-8"?>
 <p:notes xmlns:a="http://schemas.openxmlformats.org/drawingml/2006/main" xmlns:r="http://schemas.openxmlformats.org/officeDocument/2006/relationships" xmlns:p="http://schemas.openxmlformats.org/presentationml/2006/main">
   <p:cSld>
@@ -2380,6 +2560,182 @@
             <a:fld id="{F7021451-1387-4CA6-816F-3879F97B5CBC}" type="slidenum">
               <a:rPr lang="en-US"/>
               <a:t>3</a:t>
+            </a:fld>
+            <a:endParaRPr lang="en-US"/>
+          </a:p>
+        </p:txBody>
+      </p:sp>
+    </p:spTree>
+    <p:extLst>
+      <p:ext uri="{BB962C8B-B14F-4D97-AF65-F5344CB8AC3E}">
+        <p14:creationId xmlns:p14="http://schemas.microsoft.com/office/powerpoint/2010/main" val="1024086991"/>
+      </p:ext>
+    </p:extLst>
+  </p:cSld>
+  <p:clrMapOvr>
+    <a:masterClrMapping/>
+  </p:clrMapOvr>
+</p:notes>
+</file>
+
+<file path=ppt/notesSlides/notesSlide30.xml><?xml version="1.0" encoding="utf-8"?>
+<p:notes xmlns:a="http://schemas.openxmlformats.org/drawingml/2006/main" xmlns:r="http://schemas.openxmlformats.org/officeDocument/2006/relationships" xmlns:p="http://schemas.openxmlformats.org/presentationml/2006/main">
+  <p:cSld>
+    <p:spTree>
+      <p:nvGrpSpPr>
+        <p:cNvPr id="1" name=""/>
+        <p:cNvGrpSpPr/>
+        <p:nvPr/>
+      </p:nvGrpSpPr>
+      <p:grpSpPr>
+        <a:xfrm>
+          <a:off x="0" y="0"/>
+          <a:ext cx="0" cy="0"/>
+          <a:chOff x="0" y="0"/>
+          <a:chExt cx="0" cy="0"/>
+        </a:xfrm>
+      </p:grpSpPr>
+      <p:sp>
+        <p:nvSpPr>
+          <p:cNvPr id="2" name="Slide Image Placeholder 1"/>
+          <p:cNvSpPr>
+            <a:spLocks noGrp="1" noRot="1" noChangeAspect="1"/>
+          </p:cNvSpPr>
+          <p:nvPr>
+            <p:ph type="sldImg"/>
+          </p:nvPr>
+        </p:nvSpPr>
+        <p:spPr/>
+      </p:sp>
+      <p:sp>
+        <p:nvSpPr>
+          <p:cNvPr id="3" name="Notes Placeholder 2"/>
+          <p:cNvSpPr>
+            <a:spLocks noGrp="1"/>
+          </p:cNvSpPr>
+          <p:nvPr>
+            <p:ph type="body" idx="1"/>
+          </p:nvPr>
+        </p:nvSpPr>
+        <p:spPr/>
+        <p:txBody>
+          <a:bodyPr/>
+          <a:lstStyle/>
+          <a:p>
+            <a:r>
+              <a:rPr lang="en-US" dirty="0"/>
+              <a:t>No On-Premise o launchpad é o do próprio sistema, então a navegação entre apps funciona como no launchpad local. Em /UI2/FLPAM cria-se o catálogo técnico com um tile e um target mapping por app; em /UI2/FLPCM_CUST, os catálogos de negócio, o espaço e a página. O catálogo e o espaço entram no menu das roles PFCG, junto com os grupos de serviços.</a:t>
+            </a:r>
+            <a:endParaRPr lang="en-US" dirty="0"/>
+          </a:p>
+        </p:txBody>
+      </p:sp>
+      <p:sp>
+        <p:nvSpPr>
+          <p:cNvPr id="4" name="Slide Number Placeholder 3"/>
+          <p:cNvSpPr>
+            <a:spLocks noGrp="1"/>
+          </p:cNvSpPr>
+          <p:nvPr>
+            <p:ph type="sldNum" sz="quarter" idx="10"/>
+          </p:nvPr>
+        </p:nvSpPr>
+        <p:spPr/>
+        <p:txBody>
+          <a:bodyPr/>
+          <a:lstStyle/>
+          <a:p>
+            <a:fld id="{F7021451-1387-4CA6-816F-3879F97B5CBC}" type="slidenum">
+              <a:rPr lang="en-US"/>
+              <a:t>25</a:t>
+            </a:fld>
+            <a:endParaRPr lang="en-US"/>
+          </a:p>
+        </p:txBody>
+      </p:sp>
+    </p:spTree>
+    <p:extLst>
+      <p:ext uri="{BB962C8B-B14F-4D97-AF65-F5344CB8AC3E}">
+        <p14:creationId xmlns:p14="http://schemas.microsoft.com/office/powerpoint/2010/main" val="1024086991"/>
+      </p:ext>
+    </p:extLst>
+  </p:cSld>
+  <p:clrMapOvr>
+    <a:masterClrMapping/>
+  </p:clrMapOvr>
+</p:notes>
+</file>
+
+<file path=ppt/notesSlides/notesSlide31.xml><?xml version="1.0" encoding="utf-8"?>
+<p:notes xmlns:a="http://schemas.openxmlformats.org/drawingml/2006/main" xmlns:r="http://schemas.openxmlformats.org/officeDocument/2006/relationships" xmlns:p="http://schemas.openxmlformats.org/presentationml/2006/main">
+  <p:cSld>
+    <p:spTree>
+      <p:nvGrpSpPr>
+        <p:cNvPr id="1" name=""/>
+        <p:cNvGrpSpPr/>
+        <p:nvPr/>
+      </p:nvGrpSpPr>
+      <p:grpSpPr>
+        <a:xfrm>
+          <a:off x="0" y="0"/>
+          <a:ext cx="0" cy="0"/>
+          <a:chOff x="0" y="0"/>
+          <a:chExt cx="0" cy="0"/>
+        </a:xfrm>
+      </p:grpSpPr>
+      <p:sp>
+        <p:nvSpPr>
+          <p:cNvPr id="2" name="Slide Image Placeholder 1"/>
+          <p:cNvSpPr>
+            <a:spLocks noGrp="1" noRot="1" noChangeAspect="1"/>
+          </p:cNvSpPr>
+          <p:nvPr>
+            <p:ph type="sldImg"/>
+          </p:nvPr>
+        </p:nvSpPr>
+        <p:spPr/>
+      </p:sp>
+      <p:sp>
+        <p:nvSpPr>
+          <p:cNvPr id="3" name="Notes Placeholder 2"/>
+          <p:cNvSpPr>
+            <a:spLocks noGrp="1"/>
+          </p:cNvSpPr>
+          <p:nvPr>
+            <p:ph type="body" idx="1"/>
+          </p:nvPr>
+        </p:nvSpPr>
+        <p:spPr/>
+        <p:txBody>
+          <a:bodyPr/>
+          <a:lstStyle/>
+          <a:p>
+            <a:r>
+              <a:rPr lang="en-US" dirty="0"/>
+              <a:t>Três camadas decidem o que o usuário vê: o catálogo e o espaço na role (o tile aparece), o S_START do grupo de serviços (o OData responde) e os objetos ZPC_ADMIN e ZPC_PEDIDO (os botões e ações ficam habilitados). As análises usam o serviço ZUI_PC_ANALITICO_O4; a leitura só exige a atividade 03 se a DCL opcional for ativada (abap/README.md, seção 7).</a:t>
+            </a:r>
+            <a:endParaRPr lang="en-US" dirty="0"/>
+          </a:p>
+        </p:txBody>
+      </p:sp>
+      <p:sp>
+        <p:nvSpPr>
+          <p:cNvPr id="4" name="Slide Number Placeholder 3"/>
+          <p:cNvSpPr>
+            <a:spLocks noGrp="1"/>
+          </p:cNvSpPr>
+          <p:nvPr>
+            <p:ph type="sldNum" sz="quarter" idx="10"/>
+          </p:nvPr>
+        </p:nvSpPr>
+        <p:spPr/>
+        <p:txBody>
+          <a:bodyPr/>
+          <a:lstStyle/>
+          <a:p>
+            <a:fld id="{F7021451-1387-4CA6-816F-3879F97B5CBC}" type="slidenum">
+              <a:rPr lang="en-US"/>
+              <a:t>11</a:t>
             </a:fld>
             <a:endParaRPr lang="en-US"/>
           </a:p>
@@ -31619,6 +31975,3580 @@
 </p:sld>
 </file>
 
+<file path=ppt/slides/slide28.xml><?xml version="1.0" encoding="utf-8"?>
+<p:sld xmlns:a="http://schemas.openxmlformats.org/drawingml/2006/main" xmlns:r="http://schemas.openxmlformats.org/officeDocument/2006/relationships" xmlns:p="http://schemas.openxmlformats.org/presentationml/2006/main">
+  <p:cSld name="Slide 3">
+    <p:spTree>
+      <p:nvGrpSpPr>
+        <p:cNvPr id="1" name=""/>
+        <p:cNvGrpSpPr/>
+        <p:nvPr/>
+      </p:nvGrpSpPr>
+      <p:grpSpPr>
+        <a:xfrm>
+          <a:off x="0" y="0"/>
+          <a:ext cx="0" cy="0"/>
+          <a:chOff x="0" y="0"/>
+          <a:chExt cx="0" cy="0"/>
+        </a:xfrm>
+      </p:grpSpPr>
+      <p:sp>
+        <p:nvSpPr>
+          <p:cNvPr id="2" name="Text 0"/>
+          <p:cNvSpPr/>
+          <p:nvPr>
+            <p:ph idx="100" type="body" hasCustomPrompt="1"/>
+          </p:nvPr>
+        </p:nvSpPr>
+        <p:spPr>
+          <a:xfrm>
+            <a:off x="731520" y="1325880"/>
+            <a:ext cx="6949440" cy="365760"/>
+          </a:xfrm>
+          <a:prstGeom prst="rect">
+            <a:avLst/>
+          </a:prstGeom>
+          <a:noFill/>
+          <a:ln/>
+        </p:spPr>
+        <p:txBody>
+          <a:bodyPr wrap="square" lIns="0" tIns="0" rIns="0" bIns="0" rtlCol="0" anchor="ctr"/>
+          <a:lstStyle/>
+          <a:p>
+            <a:pPr algn="l" indent="0" marL="0">
+              <a:buNone/>
+            </a:pPr>
+            <a:r>
+              <a:rPr lang="en-US" sz="1400" b="1" spc="200" kern="0" dirty="0">
+                <a:solidFill>
+                  <a:schemeClr val="accent1"/>
+                </a:solidFill>
+              </a:rPr>
+              <a:t>ETAPA 5 · ON-PREMISE</a:t>
+            </a:r>
+            <a:endParaRPr lang="en-US" sz="1400" dirty="0"/>
+          </a:p>
+        </p:txBody>
+      </p:sp>
+      <p:sp>
+        <p:nvSpPr>
+          <p:cNvPr id="3" name="Text 0"/>
+          <p:cNvSpPr/>
+          <p:nvPr>
+            <p:ph idx="101" type="title" hasCustomPrompt="1"/>
+          </p:nvPr>
+        </p:nvSpPr>
+        <p:spPr>
+          <a:xfrm>
+            <a:off x="731520" y="1737360"/>
+            <a:ext cx="6949440" cy="1600200"/>
+          </a:xfrm>
+          <a:prstGeom prst="rect">
+            <a:avLst/>
+          </a:prstGeom>
+          <a:noFill/>
+          <a:ln/>
+        </p:spPr>
+        <p:txBody>
+          <a:bodyPr wrap="square" lIns="0" tIns="0" rIns="0" bIns="0" rtlCol="0" anchor="t"/>
+          <a:lstStyle/>
+          <a:p>
+            <a:pPr algn="l" indent="0" marL="0">
+              <a:buNone/>
+            </a:pPr>
+            <a:r>
+              <a:rPr lang="en-US" sz="4400" b="1" dirty="0">
+                <a:solidFill>
+                  <a:schemeClr val="bg1"/>
+                </a:solidFill>
+              </a:rPr>
+              <a:t>Apps no SAP Fiori launchpad do S/4HANA</a:t>
+            </a:r>
+            <a:endParaRPr lang="en-US" sz="4400" dirty="0"/>
+          </a:p>
+        </p:txBody>
+      </p:sp>
+      <p:sp>
+        <p:nvSpPr>
+          <p:cNvPr id="4" name="Text 0"/>
+          <p:cNvSpPr/>
+          <p:nvPr>
+            <p:ph idx="102" type="body" hasCustomPrompt="1"/>
+          </p:nvPr>
+        </p:nvSpPr>
+        <p:spPr>
+          <a:xfrm>
+            <a:off x="731520" y="3383280"/>
+            <a:ext cx="6949440" cy="914400"/>
+          </a:xfrm>
+          <a:prstGeom prst="rect">
+            <a:avLst/>
+          </a:prstGeom>
+          <a:noFill/>
+          <a:ln/>
+        </p:spPr>
+        <p:txBody>
+          <a:bodyPr wrap="square" lIns="0" tIns="0" rIns="0" bIns="0" rtlCol="0" anchor="t"/>
+          <a:lstStyle/>
+          <a:p>
+            <a:pPr algn="l" indent="0" marL="0">
+              <a:buNone/>
+            </a:pPr>
+            <a:r>
+              <a:rPr lang="en-US" sz="1800" dirty="0">
+                <a:solidFill>
+                  <a:schemeClr val="bg2"/>
+                </a:solidFill>
+              </a:rPr>
+              <a:t>Versão de deploy, BSPs publicadas com transporte, conteúdo do launchpad e as autorizações que liberam os tiles e os serviços.</a:t>
+            </a:r>
+            <a:endParaRPr lang="en-US" sz="1800" dirty="0"/>
+          </a:p>
+        </p:txBody>
+      </p:sp>
+      <p:sp>
+        <p:nvSpPr>
+          <p:cNvPr id="5" name="Decoração 1"/>
+          <p:cNvSpPr/>
+          <p:nvPr/>
+        </p:nvSpPr>
+        <p:spPr>
+          <a:xfrm>
+            <a:off x="8503920" y="-1463040"/>
+            <a:ext cx="5120640" cy="5120640"/>
+          </a:xfrm>
+          <a:prstGeom prst="ellipse">
+            <a:avLst/>
+          </a:prstGeom>
+          <a:solidFill>
+            <a:srgbClr val="0070F2">
+              <a:alpha val="28000"/>
+            </a:srgbClr>
+          </a:solidFill>
+          <a:ln/>
+        </p:spPr>
+      </p:sp>
+      <p:sp>
+        <p:nvSpPr>
+          <p:cNvPr id="6" name="Decoração 2"/>
+          <p:cNvSpPr/>
+          <p:nvPr/>
+        </p:nvSpPr>
+        <p:spPr>
+          <a:xfrm>
+            <a:off x="9784080" y="1828800"/>
+            <a:ext cx="2834640" cy="2834640"/>
+          </a:xfrm>
+          <a:prstGeom prst="ellipse">
+            <a:avLst/>
+          </a:prstGeom>
+          <a:solidFill>
+            <a:srgbClr val="4DB1FF">
+              <a:alpha val="18000"/>
+            </a:srgbClr>
+          </a:solidFill>
+          <a:ln/>
+        </p:spPr>
+      </p:sp>
+      <p:sp>
+        <p:nvSpPr>
+          <p:cNvPr id="7" name="Ícone settings"/>
+          <p:cNvSpPr/>
+          <p:nvPr/>
+        </p:nvSpPr>
+        <p:spPr>
+          <a:xfrm>
+            <a:off x="731520" y="411480"/>
+            <a:ext cx="731520" cy="731520"/>
+          </a:xfrm>
+          <a:prstGeom prst="roundRect">
+            <a:avLst>
+              <a:gd name="adj" fmla="val 22000"/>
+            </a:avLst>
+          </a:prstGeom>
+          <a:solidFill>
+            <a:srgbClr val="1D232A"/>
+          </a:solidFill>
+          <a:ln/>
+        </p:spPr>
+      </p:sp>
+      <p:pic>
+        <p:nvPicPr>
+          <p:cNvPr id="8" name="Image 0" descr="settings">    </p:cNvPr>
+          <p:cNvPicPr>
+            <a:picLocks noChangeAspect="1"/>
+          </p:cNvPicPr>
+          <p:nvPr/>
+        </p:nvPicPr>
+        <p:blipFill>
+          <a:blip r:embed="rId1"/>
+          <a:stretch>
+            <a:fillRect/>
+          </a:stretch>
+        </p:blipFill>
+        <p:spPr>
+          <a:xfrm>
+            <a:off x="907085" y="587045"/>
+            <a:ext cx="380390" cy="380390"/>
+          </a:xfrm>
+          <a:prstGeom prst="rect">
+            <a:avLst/>
+          </a:prstGeom>
+        </p:spPr>
+      </p:pic>
+      <p:sp>
+        <p:nvSpPr>
+          <p:cNvPr id="9" name="Objetos da seção"/>
+          <p:cNvSpPr/>
+          <p:nvPr/>
+        </p:nvSpPr>
+        <p:spPr>
+          <a:xfrm>
+            <a:off x="8001000" y="1325880"/>
+            <a:ext cx="3639312" cy="2990088"/>
+          </a:xfrm>
+          <a:prstGeom prst="roundRect">
+            <a:avLst>
+              <a:gd name="adj" fmla="val 3670"/>
+            </a:avLst>
+          </a:prstGeom>
+          <a:solidFill>
+            <a:srgbClr val="1D232A"/>
+          </a:solidFill>
+          <a:ln/>
+        </p:spPr>
+      </p:sp>
+      <p:sp>
+        <p:nvSpPr>
+          <p:cNvPr id="10" name="Text 7"/>
+          <p:cNvSpPr txBox="1"/>
+          <p:nvPr/>
+        </p:nvSpPr>
+        <p:spPr>
+          <a:xfrm>
+            <a:off x="8275320" y="1481328"/>
+            <a:ext cx="3090672" cy="274320"/>
+          </a:xfrm>
+          <a:prstGeom prst="rect">
+            <a:avLst/>
+          </a:prstGeom>
+          <a:noFill/>
+          <a:ln/>
+        </p:spPr>
+        <p:txBody>
+          <a:bodyPr wrap="square" lIns="0" tIns="0" rIns="0" bIns="0" rtlCol="0" anchor="ctr"/>
+          <a:lstStyle/>
+          <a:p>
+            <a:pPr indent="0" marL="0">
+              <a:buNone/>
+            </a:pPr>
+            <a:r>
+              <a:rPr lang="en-US" sz="1100" b="1" spc="150" kern="0" dirty="0">
+                <a:solidFill>
+                  <a:srgbClr val="4DB1FF"/>
+                </a:solidFill>
+              </a:rPr>
+              <a:t>OBJETOS NESTA SEÇÃO</a:t>
+            </a:r>
+            <a:endParaRPr lang="en-US" sz="1100" dirty="0"/>
+          </a:p>
+        </p:txBody>
+      </p:sp>
+      <p:sp>
+        <p:nvSpPr>
+          <p:cNvPr id="11" name="Text 8"/>
+          <p:cNvSpPr txBox="1"/>
+          <p:nvPr/>
+        </p:nvSpPr>
+        <p:spPr>
+          <a:xfrm>
+            <a:off x="8275320" y="1874520"/>
+            <a:ext cx="3182112" cy="384048"/>
+          </a:xfrm>
+          <a:prstGeom prst="rect">
+            <a:avLst/>
+          </a:prstGeom>
+          <a:noFill/>
+          <a:ln/>
+        </p:spPr>
+        <p:txBody>
+          <a:bodyPr wrap="square" lIns="0" tIns="0" rIns="0" bIns="0" rtlCol="0" anchor="ctr"/>
+          <a:lstStyle/>
+          <a:p>
+            <a:pPr indent="0" marL="0">
+              <a:buNone/>
+            </a:pPr>
+            <a:r>
+              <a:rPr lang="en-US" sz="1100" b="1" dirty="0">
+                <a:solidFill>
+                  <a:srgbClr val="FFFFFF"/>
+                </a:solidFill>
+                <a:latin typeface="Courier New" pitchFamily="34" charset="0"/>
+                <a:ea typeface="Courier New" pitchFamily="34" charset="-122"/>
+                <a:cs typeface="Courier New" pitchFamily="34" charset="-120"/>
+              </a:rPr>
+              <a:t>SAPUI5 1.136+</a:t>
+            </a:r>
+            <a:pPr indent="0" marL="0">
+              <a:buNone/>
+            </a:pPr>
+            <a:r>
+              <a:rPr lang="en-US" sz="1100" dirty="0">
+                <a:solidFill>
+                  <a:srgbClr val="A9B4BE"/>
+                </a:solidFill>
+              </a:rPr>
+              <a:t>  versão mínima das apps</a:t>
+            </a:r>
+            <a:endParaRPr lang="en-US" sz="1100" dirty="0"/>
+          </a:p>
+        </p:txBody>
+      </p:sp>
+      <p:sp>
+        <p:nvSpPr>
+          <p:cNvPr id="12" name="Text 9"/>
+          <p:cNvSpPr txBox="1"/>
+          <p:nvPr/>
+        </p:nvSpPr>
+        <p:spPr>
+          <a:xfrm>
+            <a:off x="8275320" y="2258568"/>
+            <a:ext cx="3182112" cy="384048"/>
+          </a:xfrm>
+          <a:prstGeom prst="rect">
+            <a:avLst/>
+          </a:prstGeom>
+          <a:noFill/>
+          <a:ln/>
+        </p:spPr>
+        <p:txBody>
+          <a:bodyPr wrap="square" lIns="0" tIns="0" rIns="0" bIns="0" rtlCol="0" anchor="ctr"/>
+          <a:lstStyle/>
+          <a:p>
+            <a:pPr indent="0" marL="0">
+              <a:buNone/>
+            </a:pPr>
+            <a:r>
+              <a:rPr lang="en-US" sz="1100" b="1" dirty="0">
+                <a:solidFill>
+                  <a:srgbClr val="FFFFFF"/>
+                </a:solidFill>
+                <a:latin typeface="Courier New" pitchFamily="34" charset="0"/>
+                <a:ea typeface="Courier New" pitchFamily="34" charset="-122"/>
+                <a:cs typeface="Courier New" pitchFamily="34" charset="-120"/>
+              </a:rPr>
+              <a:t>S/4HANA 2025 FPS01</a:t>
+            </a:r>
+            <a:pPr indent="0" marL="0">
+              <a:buNone/>
+            </a:pPr>
+            <a:r>
+              <a:rPr lang="en-US" sz="1100" dirty="0">
+                <a:solidFill>
+                  <a:srgbClr val="A9B4BE"/>
+                </a:solidFill>
+              </a:rPr>
+              <a:t>  FES 2025 · SAP_UI 816</a:t>
+            </a:r>
+            <a:endParaRPr lang="en-US" sz="1100" dirty="0"/>
+          </a:p>
+        </p:txBody>
+      </p:sp>
+      <p:sp>
+        <p:nvSpPr>
+          <p:cNvPr id="13" name="Text 10"/>
+          <p:cNvSpPr txBox="1"/>
+          <p:nvPr/>
+        </p:nvSpPr>
+        <p:spPr>
+          <a:xfrm>
+            <a:off x="8275320" y="2642616"/>
+            <a:ext cx="3182112" cy="384048"/>
+          </a:xfrm>
+          <a:prstGeom prst="rect">
+            <a:avLst/>
+          </a:prstGeom>
+          <a:noFill/>
+          <a:ln/>
+        </p:spPr>
+        <p:txBody>
+          <a:bodyPr wrap="square" lIns="0" tIns="0" rIns="0" bIns="0" rtlCol="0" anchor="ctr"/>
+          <a:lstStyle/>
+          <a:p>
+            <a:pPr indent="0" marL="0">
+              <a:buNone/>
+            </a:pPr>
+            <a:r>
+              <a:rPr lang="en-US" sz="1100" b="1" dirty="0">
+                <a:solidFill>
+                  <a:srgbClr val="FFFFFF"/>
+                </a:solidFill>
+                <a:latin typeface="Courier New" pitchFamily="34" charset="0"/>
+                <a:ea typeface="Courier New" pitchFamily="34" charset="-122"/>
+                <a:cs typeface="Courier New" pitchFamily="34" charset="-120"/>
+              </a:rPr>
+              <a:t>/UI5/ABAP_REPOSITORY_SRV</a:t>
+            </a:r>
+            <a:pPr indent="0" marL="0">
+              <a:buNone/>
+            </a:pPr>
+            <a:r>
+              <a:rPr lang="en-US" sz="1100" dirty="0">
+                <a:solidFill>
+                  <a:srgbClr val="A9B4BE"/>
+                </a:solidFill>
+              </a:rPr>
+              <a:t>  deploy das BSPs</a:t>
+            </a:r>
+            <a:endParaRPr lang="en-US" sz="1100" dirty="0"/>
+          </a:p>
+        </p:txBody>
+      </p:sp>
+      <p:sp>
+        <p:nvSpPr>
+          <p:cNvPr id="14" name="Text 11"/>
+          <p:cNvSpPr txBox="1"/>
+          <p:nvPr/>
+        </p:nvSpPr>
+        <p:spPr>
+          <a:xfrm>
+            <a:off x="8275320" y="3026664"/>
+            <a:ext cx="3182112" cy="384048"/>
+          </a:xfrm>
+          <a:prstGeom prst="rect">
+            <a:avLst/>
+          </a:prstGeom>
+          <a:noFill/>
+          <a:ln/>
+        </p:spPr>
+        <p:txBody>
+          <a:bodyPr wrap="square" lIns="0" tIns="0" rIns="0" bIns="0" rtlCol="0" anchor="ctr"/>
+          <a:lstStyle/>
+          <a:p>
+            <a:pPr indent="0" marL="0">
+              <a:buNone/>
+            </a:pPr>
+            <a:r>
+              <a:rPr lang="en-US" sz="1100" b="1" dirty="0">
+                <a:solidFill>
+                  <a:srgbClr val="FFFFFF"/>
+                </a:solidFill>
+                <a:latin typeface="Courier New" pitchFamily="34" charset="0"/>
+                <a:ea typeface="Courier New" pitchFamily="34" charset="-122"/>
+                <a:cs typeface="Courier New" pitchFamily="34" charset="-120"/>
+              </a:rPr>
+              <a:t>/UI2/FLPAM</a:t>
+            </a:r>
+            <a:pPr indent="0" marL="0">
+              <a:buNone/>
+            </a:pPr>
+            <a:r>
+              <a:rPr lang="en-US" sz="1100" dirty="0">
+                <a:solidFill>
+                  <a:srgbClr val="A9B4BE"/>
+                </a:solidFill>
+              </a:rPr>
+              <a:t>  catálogo técnico</a:t>
+            </a:r>
+            <a:endParaRPr lang="en-US" sz="1100" dirty="0"/>
+          </a:p>
+        </p:txBody>
+      </p:sp>
+      <p:sp>
+        <p:nvSpPr>
+          <p:cNvPr id="15" name="Text 12"/>
+          <p:cNvSpPr txBox="1"/>
+          <p:nvPr/>
+        </p:nvSpPr>
+        <p:spPr>
+          <a:xfrm>
+            <a:off x="8275320" y="3410712"/>
+            <a:ext cx="3182112" cy="384048"/>
+          </a:xfrm>
+          <a:prstGeom prst="rect">
+            <a:avLst/>
+          </a:prstGeom>
+          <a:noFill/>
+          <a:ln/>
+        </p:spPr>
+        <p:txBody>
+          <a:bodyPr wrap="square" lIns="0" tIns="0" rIns="0" bIns="0" rtlCol="0" anchor="ctr"/>
+          <a:lstStyle/>
+          <a:p>
+            <a:pPr indent="0" marL="0">
+              <a:buNone/>
+            </a:pPr>
+            <a:r>
+              <a:rPr lang="en-US" sz="1100" b="1" dirty="0">
+                <a:solidFill>
+                  <a:srgbClr val="FFFFFF"/>
+                </a:solidFill>
+                <a:latin typeface="Courier New" pitchFamily="34" charset="0"/>
+                <a:ea typeface="Courier New" pitchFamily="34" charset="-122"/>
+                <a:cs typeface="Courier New" pitchFamily="34" charset="-120"/>
+              </a:rPr>
+              <a:t>/UI2/FLPCM_CUST</a:t>
+            </a:r>
+            <a:pPr indent="0" marL="0">
+              <a:buNone/>
+            </a:pPr>
+            <a:r>
+              <a:rPr lang="en-US" sz="1100" dirty="0">
+                <a:solidFill>
+                  <a:srgbClr val="A9B4BE"/>
+                </a:solidFill>
+              </a:rPr>
+              <a:t>  espaço e página</a:t>
+            </a:r>
+            <a:endParaRPr lang="en-US" sz="1100" dirty="0"/>
+          </a:p>
+        </p:txBody>
+      </p:sp>
+      <p:sp>
+        <p:nvSpPr>
+          <p:cNvPr id="16" name="Text 13"/>
+          <p:cNvSpPr txBox="1"/>
+          <p:nvPr/>
+        </p:nvSpPr>
+        <p:spPr>
+          <a:xfrm>
+            <a:off x="8275320" y="3794760"/>
+            <a:ext cx="3182112" cy="384048"/>
+          </a:xfrm>
+          <a:prstGeom prst="rect">
+            <a:avLst/>
+          </a:prstGeom>
+          <a:noFill/>
+          <a:ln/>
+        </p:spPr>
+        <p:txBody>
+          <a:bodyPr wrap="square" lIns="0" tIns="0" rIns="0" bIns="0" rtlCol="0" anchor="ctr"/>
+          <a:lstStyle/>
+          <a:p>
+            <a:pPr indent="0" marL="0">
+              <a:buNone/>
+            </a:pPr>
+            <a:r>
+              <a:rPr lang="en-US" sz="1100" b="1" dirty="0">
+                <a:solidFill>
+                  <a:srgbClr val="FFFFFF"/>
+                </a:solidFill>
+                <a:latin typeface="Courier New" pitchFamily="34" charset="0"/>
+                <a:ea typeface="Courier New" pitchFamily="34" charset="-122"/>
+                <a:cs typeface="Courier New" pitchFamily="34" charset="-120"/>
+              </a:rPr>
+              <a:t>Z_PC_ADMIN · Z_PC_COMUM</a:t>
+            </a:r>
+            <a:pPr indent="0" marL="0">
+              <a:buNone/>
+            </a:pPr>
+            <a:r>
+              <a:rPr lang="en-US" sz="1100" dirty="0">
+                <a:solidFill>
+                  <a:srgbClr val="A9B4BE"/>
+                </a:solidFill>
+              </a:rPr>
+              <a:t>  roles PFCG</a:t>
+            </a:r>
+            <a:endParaRPr lang="en-US" sz="1100" dirty="0"/>
+          </a:p>
+        </p:txBody>
+      </p:sp>
+    </p:spTree>
+  </p:cSld>
+  <p:clrMapOvr>
+    <a:masterClrMapping/>
+  </p:clrMapOvr>
+</p:sld>
+</file>
+
+<file path=ppt/slides/slide29.xml><?xml version="1.0" encoding="utf-8"?>
+<p:sld xmlns:a="http://schemas.openxmlformats.org/drawingml/2006/main" xmlns:r="http://schemas.openxmlformats.org/officeDocument/2006/relationships" xmlns:p="http://schemas.openxmlformats.org/presentationml/2006/main">
+  <p:cSld name="Slide 24">
+    <p:spTree>
+      <p:nvGrpSpPr>
+        <p:cNvPr id="1" name=""/>
+        <p:cNvGrpSpPr/>
+        <p:nvPr/>
+      </p:nvGrpSpPr>
+      <p:grpSpPr>
+        <a:xfrm>
+          <a:off x="0" y="0"/>
+          <a:ext cx="0" cy="0"/>
+          <a:chOff x="0" y="0"/>
+          <a:chExt cx="0" cy="0"/>
+        </a:xfrm>
+      </p:grpSpPr>
+      <p:sp>
+        <p:nvSpPr>
+          <p:cNvPr id="2" name="Text 0"/>
+          <p:cNvSpPr/>
+          <p:nvPr>
+            <p:ph idx="100" type="body" hasCustomPrompt="1"/>
+          </p:nvPr>
+        </p:nvSpPr>
+        <p:spPr>
+          <a:xfrm>
+            <a:off x="548640" y="384048"/>
+            <a:ext cx="9144000" cy="274320"/>
+          </a:xfrm>
+          <a:prstGeom prst="rect">
+            <a:avLst/>
+          </a:prstGeom>
+          <a:noFill/>
+          <a:ln/>
+        </p:spPr>
+        <p:txBody>
+          <a:bodyPr wrap="square" lIns="0" tIns="0" rIns="0" bIns="0" rtlCol="0" anchor="ctr"/>
+          <a:lstStyle/>
+          <a:p>
+            <a:pPr algn="l" indent="0" marL="0">
+              <a:buNone/>
+            </a:pPr>
+            <a:r>
+              <a:rPr lang="en-US" sz="1100" b="1" spc="150" kern="0" dirty="0">
+                <a:solidFill>
+                  <a:schemeClr val="accent1"/>
+                </a:solidFill>
+              </a:rPr>
+              <a:t>DEPLOY · ON-PREMISE</a:t>
+            </a:r>
+            <a:endParaRPr lang="en-US" sz="1100" dirty="0"/>
+          </a:p>
+        </p:txBody>
+      </p:sp>
+      <p:sp>
+        <p:nvSpPr>
+          <p:cNvPr id="3" name="Text 0"/>
+          <p:cNvSpPr/>
+          <p:nvPr>
+            <p:ph idx="101" type="title" hasCustomPrompt="1"/>
+          </p:nvPr>
+        </p:nvSpPr>
+        <p:spPr>
+          <a:xfrm>
+            <a:off x="548640" y="676656"/>
+            <a:ext cx="11094415" cy="658368"/>
+          </a:xfrm>
+          <a:prstGeom prst="rect">
+            <a:avLst/>
+          </a:prstGeom>
+          <a:noFill/>
+          <a:ln/>
+        </p:spPr>
+        <p:txBody>
+          <a:bodyPr wrap="square" lIns="0" tIns="0" rIns="0" bIns="0" rtlCol="0" anchor="ctr"/>
+          <a:lstStyle/>
+          <a:p>
+            <a:pPr algn="l" indent="0" marL="0">
+              <a:buNone/>
+            </a:pPr>
+            <a:r>
+              <a:rPr lang="en-US" sz="3000" b="1" dirty="0">
+                <a:solidFill>
+                  <a:schemeClr val="tx1"/>
+                </a:solidFill>
+              </a:rPr>
+              <a:t>Deploy no On-Premise: SAPUI5 1.136 e ordem de transporte</a:t>
+            </a:r>
+            <a:endParaRPr lang="en-US" sz="3000" dirty="0"/>
+          </a:p>
+        </p:txBody>
+      </p:sp>
+      <p:sp>
+        <p:nvSpPr>
+          <p:cNvPr id="5" name="Editor"/>
+          <p:cNvSpPr/>
+          <p:nvPr/>
+        </p:nvSpPr>
+        <p:spPr>
+          <a:xfrm>
+            <a:off x="548640" y="1645920"/>
+            <a:ext cx="5760720" cy="3383280"/>
+          </a:xfrm>
+          <a:prstGeom prst="roundRect">
+            <a:avLst>
+              <a:gd name="adj" fmla="val 2703"/>
+            </a:avLst>
+          </a:prstGeom>
+          <a:solidFill>
+            <a:srgbClr val="181818"/>
+          </a:solidFill>
+          <a:ln w="9525">
+            <a:solidFill>
+              <a:srgbClr val="2B2B2B"/>
+            </a:solidFill>
+            <a:prstDash val="solid"/>
+          </a:ln>
+          <a:effectLst>
+            <a:outerShdw sx="100000" sy="100000" kx="0" ky="0" algn="bl" rotWithShape="0" blurRad="101600" dist="25400" dir="5400000">
+              <a:srgbClr val="223548">
+                <a:alpha val="16000"/>
+              </a:srgbClr>
+            </a:outerShdw>
+          </a:effectLst>
+        </p:spPr>
+      </p:sp>
+      <p:sp>
+        <p:nvSpPr>
+          <p:cNvPr id="6" name="Área do editor"/>
+          <p:cNvSpPr/>
+          <p:nvPr/>
+        </p:nvSpPr>
+        <p:spPr>
+          <a:xfrm>
+            <a:off x="548640" y="1993392"/>
+            <a:ext cx="5760720" cy="3035808"/>
+          </a:xfrm>
+          <a:prstGeom prst="roundRect">
+            <a:avLst>
+              <a:gd name="adj" fmla="val 3012"/>
+            </a:avLst>
+          </a:prstGeom>
+          <a:solidFill>
+            <a:srgbClr val="1F1F1F"/>
+          </a:solidFill>
+          <a:ln/>
+        </p:spPr>
+      </p:sp>
+      <p:sp>
+        <p:nvSpPr>
+          <p:cNvPr id="7" name="Shape 4"/>
+          <p:cNvSpPr/>
+          <p:nvPr/>
+        </p:nvSpPr>
+        <p:spPr>
+          <a:xfrm>
+            <a:off x="557784" y="1993392"/>
+            <a:ext cx="5742432" cy="137160"/>
+          </a:xfrm>
+          <a:prstGeom prst="rect">
+            <a:avLst/>
+          </a:prstGeom>
+          <a:solidFill>
+            <a:srgbClr val="1F1F1F"/>
+          </a:solidFill>
+          <a:ln/>
+        </p:spPr>
+      </p:sp>
+      <p:sp>
+        <p:nvSpPr>
+          <p:cNvPr id="8" name="Shape 5"/>
+          <p:cNvSpPr/>
+          <p:nvPr/>
+        </p:nvSpPr>
+        <p:spPr>
+          <a:xfrm>
+            <a:off x="557784" y="1993392"/>
+            <a:ext cx="5742432" cy="0"/>
+          </a:xfrm>
+          <a:prstGeom prst="line">
+            <a:avLst/>
+          </a:prstGeom>
+          <a:noFill/>
+          <a:ln w="9525">
+            <a:solidFill>
+              <a:srgbClr val="2B2B2B"/>
+            </a:solidFill>
+            <a:prstDash val="solid"/>
+          </a:ln>
+        </p:spPr>
+      </p:sp>
+      <p:sp>
+        <p:nvSpPr>
+          <p:cNvPr id="9" name="Aba ui5-deploy.yaml"/>
+          <p:cNvSpPr/>
+          <p:nvPr/>
+        </p:nvSpPr>
+        <p:spPr>
+          <a:xfrm>
+            <a:off x="640080" y="1719072"/>
+            <a:ext cx="1531620" cy="274320"/>
+          </a:xfrm>
+          <a:prstGeom prst="rect">
+            <a:avLst/>
+          </a:prstGeom>
+          <a:solidFill>
+            <a:srgbClr val="1F1F1F"/>
+          </a:solidFill>
+          <a:ln/>
+        </p:spPr>
+        <p:txBody>
+          <a:bodyPr wrap="square" lIns="0" tIns="0" rIns="0" bIns="0" rtlCol="0" anchor="ctr"/>
+          <a:lstStyle/>
+          <a:p>
+            <a:pPr algn="ctr" indent="0" marL="0">
+              <a:buNone/>
+            </a:pPr>
+            <a:r>
+              <a:rPr lang="en-US" sz="1000" dirty="0">
+                <a:solidFill>
+                  <a:srgbClr val="FFFFFF"/>
+                </a:solidFill>
+              </a:rPr>
+              <a:t>ui5-deploy.yaml</a:t>
+            </a:r>
+            <a:endParaRPr lang="en-US" sz="1000" dirty="0"/>
+          </a:p>
+        </p:txBody>
+      </p:sp>
+      <p:sp>
+        <p:nvSpPr>
+          <p:cNvPr id="10" name="Shape 7"/>
+          <p:cNvSpPr/>
+          <p:nvPr/>
+        </p:nvSpPr>
+        <p:spPr>
+          <a:xfrm>
+            <a:off x="640080" y="1719072"/>
+            <a:ext cx="1531620" cy="0"/>
+          </a:xfrm>
+          <a:prstGeom prst="line">
+            <a:avLst/>
+          </a:prstGeom>
+          <a:noFill/>
+          <a:ln w="19050">
+            <a:solidFill>
+              <a:srgbClr val="0078D4"/>
+            </a:solidFill>
+            <a:prstDash val="solid"/>
+          </a:ln>
+        </p:spPr>
+      </p:sp>
+      <p:sp>
+        <p:nvSpPr>
+          <p:cNvPr id="11" name="Breadcrumb"/>
+          <p:cNvSpPr txBox="1"/>
+          <p:nvPr/>
+        </p:nvSpPr>
+        <p:spPr>
+          <a:xfrm>
+            <a:off x="777240" y="2103120"/>
+            <a:ext cx="5303520" cy="219456"/>
+          </a:xfrm>
+          <a:prstGeom prst="rect">
+            <a:avLst/>
+          </a:prstGeom>
+          <a:noFill/>
+          <a:ln/>
+        </p:spPr>
+        <p:txBody>
+          <a:bodyPr wrap="square" lIns="0" tIns="0" rIns="0" bIns="0" rtlCol="0" anchor="ctr"/>
+          <a:lstStyle/>
+          <a:p>
+            <a:pPr indent="0" marL="0">
+              <a:buNone/>
+            </a:pPr>
+            <a:r>
+              <a:rPr lang="en-US" sz="900" dirty="0">
+                <a:solidFill>
+                  <a:srgbClr val="A9A9A9"/>
+                </a:solidFill>
+              </a:rPr>
+              <a:t>ui5</a:t>
+            </a:r>
+            <a:pPr indent="0" marL="0">
+              <a:buNone/>
+            </a:pPr>
+            <a:r>
+              <a:rPr lang="en-US" sz="900" dirty="0">
+                <a:solidFill>
+                  <a:srgbClr val="6E7681"/>
+                </a:solidFill>
+              </a:rPr>
+              <a:t>  ›  </a:t>
+            </a:r>
+            <a:pPr indent="0" marL="0">
+              <a:buNone/>
+            </a:pPr>
+            <a:r>
+              <a:rPr lang="en-US" sz="900" dirty="0">
+                <a:solidFill>
+                  <a:srgbClr val="A9A9A9"/>
+                </a:solidFill>
+              </a:rPr>
+              <a:t>pedidos-compras</a:t>
+            </a:r>
+            <a:pPr indent="0" marL="0">
+              <a:buNone/>
+            </a:pPr>
+            <a:r>
+              <a:rPr lang="en-US" sz="900" dirty="0">
+                <a:solidFill>
+                  <a:srgbClr val="6E7681"/>
+                </a:solidFill>
+              </a:rPr>
+              <a:t>  ›  </a:t>
+            </a:r>
+            <a:pPr indent="0" marL="0">
+              <a:buNone/>
+            </a:pPr>
+            <a:r>
+              <a:rPr lang="en-US" sz="900" dirty="0">
+                <a:solidFill>
+                  <a:srgbClr val="A9A9A9"/>
+                </a:solidFill>
+              </a:rPr>
+              <a:t>ui5-deploy.yaml</a:t>
+            </a:r>
+            <a:endParaRPr lang="en-US" sz="900" dirty="0"/>
+          </a:p>
+        </p:txBody>
+      </p:sp>
+      <p:sp>
+        <p:nvSpPr>
+          <p:cNvPr id="12" name="Trecho de código"/>
+          <p:cNvSpPr txBox="1"/>
+          <p:nvPr/>
+        </p:nvSpPr>
+        <p:spPr>
+          <a:xfrm>
+            <a:off x="731520" y="2414016"/>
+            <a:ext cx="5440680" cy="2523744"/>
+          </a:xfrm>
+          <a:prstGeom prst="rect">
+            <a:avLst/>
+          </a:prstGeom>
+          <a:noFill/>
+          <a:ln/>
+        </p:spPr>
+        <p:txBody>
+          <a:bodyPr wrap="square" lIns="0" tIns="0" rIns="0" bIns="0" rtlCol="0" anchor="t"/>
+          <a:lstStyle/>
+          <a:p>
+            <a:pPr indent="0" marL="0">
+              <a:lnSpc>
+                <a:spcPct val="105000"/>
+              </a:lnSpc>
+              <a:buNone/>
+            </a:pPr>
+            <a:r>
+              <a:rPr lang="en-US" sz="1100" dirty="0">
+                <a:solidFill>
+                  <a:srgbClr val="6E7681"/>
+                </a:solidFill>
+                <a:latin typeface="Courier New" pitchFamily="34" charset="0"/>
+                <a:ea typeface="Courier New" pitchFamily="34" charset="-122"/>
+                <a:cs typeface="Courier New" pitchFamily="34" charset="-120"/>
+              </a:rPr>
+              <a:t xml:space="preserve"> 1  </a:t>
+            </a:r>
+            <a:pPr indent="0" marL="0">
+              <a:lnSpc>
+                <a:spcPct val="105000"/>
+              </a:lnSpc>
+              <a:buNone/>
+            </a:pPr>
+            <a:r>
+              <a:rPr lang="en-US" sz="1100" dirty="0">
+                <a:solidFill>
+                  <a:srgbClr val="9CDCFE"/>
+                </a:solidFill>
+                <a:latin typeface="Courier New" pitchFamily="34" charset="0"/>
+                <a:ea typeface="Courier New" pitchFamily="34" charset="-122"/>
+                <a:cs typeface="Courier New" pitchFamily="34" charset="-120"/>
+              </a:rPr>
+              <a:t>customTasks</a:t>
+            </a:r>
+            <a:pPr indent="0" marL="0">
+              <a:lnSpc>
+                <a:spcPct val="105000"/>
+              </a:lnSpc>
+              <a:buNone/>
+            </a:pPr>
+            <a:r>
+              <a:rPr lang="en-US" sz="1100" dirty="0">
+                <a:solidFill>
+                  <a:srgbClr val="CCCCCC"/>
+                </a:solidFill>
+                <a:latin typeface="Courier New" pitchFamily="34" charset="0"/>
+                <a:ea typeface="Courier New" pitchFamily="34" charset="-122"/>
+                <a:cs typeface="Courier New" pitchFamily="34" charset="-120"/>
+              </a:rPr>
+              <a:t>:</a:t>
+            </a:r>
+            <a:endParaRPr lang="en-US" sz="1100" dirty="0"/>
+          </a:p>
+          <a:p>
+            <a:pPr indent="0" marL="0">
+              <a:lnSpc>
+                <a:spcPct val="105000"/>
+              </a:lnSpc>
+              <a:buNone/>
+            </a:pPr>
+            <a:r>
+              <a:rPr lang="en-US" sz="1100" dirty="0">
+                <a:solidFill>
+                  <a:srgbClr val="6E7681"/>
+                </a:solidFill>
+                <a:latin typeface="Courier New" pitchFamily="34" charset="0"/>
+                <a:ea typeface="Courier New" pitchFamily="34" charset="-122"/>
+                <a:cs typeface="Courier New" pitchFamily="34" charset="-120"/>
+              </a:rPr>
+              <a:t xml:space="preserve"> 2  </a:t>
+            </a:r>
+            <a:pPr indent="0" marL="0">
+              <a:lnSpc>
+                <a:spcPct val="105000"/>
+              </a:lnSpc>
+              <a:buNone/>
+            </a:pPr>
+            <a:r>
+              <a:rPr lang="en-US" sz="1100" dirty="0">
+                <a:solidFill>
+                  <a:srgbClr val="CCCCCC"/>
+                </a:solidFill>
+                <a:latin typeface="Courier New" pitchFamily="34" charset="0"/>
+                <a:ea typeface="Courier New" pitchFamily="34" charset="-122"/>
+                <a:cs typeface="Courier New" pitchFamily="34" charset="-120"/>
+              </a:rPr>
+              <a:t xml:space="preserve">  </a:t>
+            </a:r>
+            <a:pPr indent="0" marL="0">
+              <a:lnSpc>
+                <a:spcPct val="105000"/>
+              </a:lnSpc>
+              <a:buNone/>
+            </a:pPr>
+            <a:r>
+              <a:rPr lang="en-US" sz="1100" dirty="0">
+                <a:solidFill>
+                  <a:srgbClr val="CCCCCC"/>
+                </a:solidFill>
+                <a:latin typeface="Courier New" pitchFamily="34" charset="0"/>
+                <a:ea typeface="Courier New" pitchFamily="34" charset="-122"/>
+                <a:cs typeface="Courier New" pitchFamily="34" charset="-120"/>
+              </a:rPr>
+              <a:t xml:space="preserve">- </a:t>
+            </a:r>
+            <a:pPr indent="0" marL="0">
+              <a:lnSpc>
+                <a:spcPct val="105000"/>
+              </a:lnSpc>
+              <a:buNone/>
+            </a:pPr>
+            <a:r>
+              <a:rPr lang="en-US" sz="1100" dirty="0">
+                <a:solidFill>
+                  <a:srgbClr val="9CDCFE"/>
+                </a:solidFill>
+                <a:latin typeface="Courier New" pitchFamily="34" charset="0"/>
+                <a:ea typeface="Courier New" pitchFamily="34" charset="-122"/>
+                <a:cs typeface="Courier New" pitchFamily="34" charset="-120"/>
+              </a:rPr>
+              <a:t>name</a:t>
+            </a:r>
+            <a:pPr indent="0" marL="0">
+              <a:lnSpc>
+                <a:spcPct val="105000"/>
+              </a:lnSpc>
+              <a:buNone/>
+            </a:pPr>
+            <a:r>
+              <a:rPr lang="en-US" sz="1100" dirty="0">
+                <a:solidFill>
+                  <a:srgbClr val="CCCCCC"/>
+                </a:solidFill>
+                <a:latin typeface="Courier New" pitchFamily="34" charset="0"/>
+                <a:ea typeface="Courier New" pitchFamily="34" charset="-122"/>
+                <a:cs typeface="Courier New" pitchFamily="34" charset="-120"/>
+              </a:rPr>
+              <a:t>:</a:t>
+            </a:r>
+            <a:pPr indent="0" marL="0">
+              <a:lnSpc>
+                <a:spcPct val="105000"/>
+              </a:lnSpc>
+              <a:buNone/>
+            </a:pPr>
+            <a:r>
+              <a:rPr lang="en-US" sz="1100" dirty="0">
+                <a:solidFill>
+                  <a:srgbClr val="CE9178"/>
+                </a:solidFill>
+                <a:latin typeface="Courier New" pitchFamily="34" charset="0"/>
+                <a:ea typeface="Courier New" pitchFamily="34" charset="-122"/>
+                <a:cs typeface="Courier New" pitchFamily="34" charset="-120"/>
+              </a:rPr>
+              <a:t xml:space="preserve"> deploy-to-abap</a:t>
+            </a:r>
+            <a:endParaRPr lang="en-US" sz="1100" dirty="0"/>
+          </a:p>
+          <a:p>
+            <a:pPr indent="0" marL="0">
+              <a:lnSpc>
+                <a:spcPct val="105000"/>
+              </a:lnSpc>
+              <a:buNone/>
+            </a:pPr>
+            <a:r>
+              <a:rPr lang="en-US" sz="1100" dirty="0">
+                <a:solidFill>
+                  <a:srgbClr val="6E7681"/>
+                </a:solidFill>
+                <a:latin typeface="Courier New" pitchFamily="34" charset="0"/>
+                <a:ea typeface="Courier New" pitchFamily="34" charset="-122"/>
+                <a:cs typeface="Courier New" pitchFamily="34" charset="-120"/>
+              </a:rPr>
+              <a:t xml:space="preserve"> 3  </a:t>
+            </a:r>
+            <a:pPr indent="0" marL="0">
+              <a:lnSpc>
+                <a:spcPct val="105000"/>
+              </a:lnSpc>
+              <a:buNone/>
+            </a:pPr>
+            <a:r>
+              <a:rPr lang="en-US" sz="1100" dirty="0">
+                <a:solidFill>
+                  <a:srgbClr val="CCCCCC"/>
+                </a:solidFill>
+                <a:latin typeface="Courier New" pitchFamily="34" charset="0"/>
+                <a:ea typeface="Courier New" pitchFamily="34" charset="-122"/>
+                <a:cs typeface="Courier New" pitchFamily="34" charset="-120"/>
+              </a:rPr>
+              <a:t xml:space="preserve">    </a:t>
+            </a:r>
+            <a:pPr indent="0" marL="0">
+              <a:lnSpc>
+                <a:spcPct val="105000"/>
+              </a:lnSpc>
+              <a:buNone/>
+            </a:pPr>
+            <a:r>
+              <a:rPr lang="en-US" sz="1100" dirty="0">
+                <a:solidFill>
+                  <a:srgbClr val="9CDCFE"/>
+                </a:solidFill>
+                <a:latin typeface="Courier New" pitchFamily="34" charset="0"/>
+                <a:ea typeface="Courier New" pitchFamily="34" charset="-122"/>
+                <a:cs typeface="Courier New" pitchFamily="34" charset="-120"/>
+              </a:rPr>
+              <a:t>afterTask</a:t>
+            </a:r>
+            <a:pPr indent="0" marL="0">
+              <a:lnSpc>
+                <a:spcPct val="105000"/>
+              </a:lnSpc>
+              <a:buNone/>
+            </a:pPr>
+            <a:r>
+              <a:rPr lang="en-US" sz="1100" dirty="0">
+                <a:solidFill>
+                  <a:srgbClr val="CCCCCC"/>
+                </a:solidFill>
+                <a:latin typeface="Courier New" pitchFamily="34" charset="0"/>
+                <a:ea typeface="Courier New" pitchFamily="34" charset="-122"/>
+                <a:cs typeface="Courier New" pitchFamily="34" charset="-120"/>
+              </a:rPr>
+              <a:t>:</a:t>
+            </a:r>
+            <a:pPr indent="0" marL="0">
+              <a:lnSpc>
+                <a:spcPct val="105000"/>
+              </a:lnSpc>
+              <a:buNone/>
+            </a:pPr>
+            <a:r>
+              <a:rPr lang="en-US" sz="1100" dirty="0">
+                <a:solidFill>
+                  <a:srgbClr val="CE9178"/>
+                </a:solidFill>
+                <a:latin typeface="Courier New" pitchFamily="34" charset="0"/>
+                <a:ea typeface="Courier New" pitchFamily="34" charset="-122"/>
+                <a:cs typeface="Courier New" pitchFamily="34" charset="-120"/>
+              </a:rPr>
+              <a:t xml:space="preserve"> generateCachebusterInfo</a:t>
+            </a:r>
+            <a:endParaRPr lang="en-US" sz="1100" dirty="0"/>
+          </a:p>
+          <a:p>
+            <a:pPr indent="0" marL="0">
+              <a:lnSpc>
+                <a:spcPct val="105000"/>
+              </a:lnSpc>
+              <a:buNone/>
+            </a:pPr>
+            <a:r>
+              <a:rPr lang="en-US" sz="1100" dirty="0">
+                <a:solidFill>
+                  <a:srgbClr val="6E7681"/>
+                </a:solidFill>
+                <a:latin typeface="Courier New" pitchFamily="34" charset="0"/>
+                <a:ea typeface="Courier New" pitchFamily="34" charset="-122"/>
+                <a:cs typeface="Courier New" pitchFamily="34" charset="-120"/>
+              </a:rPr>
+              <a:t xml:space="preserve"> 4  </a:t>
+            </a:r>
+            <a:pPr indent="0" marL="0">
+              <a:lnSpc>
+                <a:spcPct val="105000"/>
+              </a:lnSpc>
+              <a:buNone/>
+            </a:pPr>
+            <a:r>
+              <a:rPr lang="en-US" sz="1100" dirty="0">
+                <a:solidFill>
+                  <a:srgbClr val="CCCCCC"/>
+                </a:solidFill>
+                <a:latin typeface="Courier New" pitchFamily="34" charset="0"/>
+                <a:ea typeface="Courier New" pitchFamily="34" charset="-122"/>
+                <a:cs typeface="Courier New" pitchFamily="34" charset="-120"/>
+              </a:rPr>
+              <a:t xml:space="preserve">    </a:t>
+            </a:r>
+            <a:pPr indent="0" marL="0">
+              <a:lnSpc>
+                <a:spcPct val="105000"/>
+              </a:lnSpc>
+              <a:buNone/>
+            </a:pPr>
+            <a:r>
+              <a:rPr lang="en-US" sz="1100" dirty="0">
+                <a:solidFill>
+                  <a:srgbClr val="9CDCFE"/>
+                </a:solidFill>
+                <a:latin typeface="Courier New" pitchFamily="34" charset="0"/>
+                <a:ea typeface="Courier New" pitchFamily="34" charset="-122"/>
+                <a:cs typeface="Courier New" pitchFamily="34" charset="-120"/>
+              </a:rPr>
+              <a:t>configuration</a:t>
+            </a:r>
+            <a:pPr indent="0" marL="0">
+              <a:lnSpc>
+                <a:spcPct val="105000"/>
+              </a:lnSpc>
+              <a:buNone/>
+            </a:pPr>
+            <a:r>
+              <a:rPr lang="en-US" sz="1100" dirty="0">
+                <a:solidFill>
+                  <a:srgbClr val="CCCCCC"/>
+                </a:solidFill>
+                <a:latin typeface="Courier New" pitchFamily="34" charset="0"/>
+                <a:ea typeface="Courier New" pitchFamily="34" charset="-122"/>
+                <a:cs typeface="Courier New" pitchFamily="34" charset="-120"/>
+              </a:rPr>
+              <a:t>:</a:t>
+            </a:r>
+            <a:endParaRPr lang="en-US" sz="1100" dirty="0"/>
+          </a:p>
+          <a:p>
+            <a:pPr indent="0" marL="0">
+              <a:lnSpc>
+                <a:spcPct val="105000"/>
+              </a:lnSpc>
+              <a:buNone/>
+            </a:pPr>
+            <a:r>
+              <a:rPr lang="en-US" sz="1100" dirty="0">
+                <a:solidFill>
+                  <a:srgbClr val="6E7681"/>
+                </a:solidFill>
+                <a:latin typeface="Courier New" pitchFamily="34" charset="0"/>
+                <a:ea typeface="Courier New" pitchFamily="34" charset="-122"/>
+                <a:cs typeface="Courier New" pitchFamily="34" charset="-120"/>
+              </a:rPr>
+              <a:t xml:space="preserve"> 5  </a:t>
+            </a:r>
+            <a:pPr indent="0" marL="0">
+              <a:lnSpc>
+                <a:spcPct val="105000"/>
+              </a:lnSpc>
+              <a:buNone/>
+            </a:pPr>
+            <a:r>
+              <a:rPr lang="en-US" sz="1100" dirty="0">
+                <a:solidFill>
+                  <a:srgbClr val="CCCCCC"/>
+                </a:solidFill>
+                <a:latin typeface="Courier New" pitchFamily="34" charset="0"/>
+                <a:ea typeface="Courier New" pitchFamily="34" charset="-122"/>
+                <a:cs typeface="Courier New" pitchFamily="34" charset="-120"/>
+              </a:rPr>
+              <a:t xml:space="preserve">      </a:t>
+            </a:r>
+            <a:pPr indent="0" marL="0">
+              <a:lnSpc>
+                <a:spcPct val="105000"/>
+              </a:lnSpc>
+              <a:buNone/>
+            </a:pPr>
+            <a:r>
+              <a:rPr lang="en-US" sz="1100" dirty="0">
+                <a:solidFill>
+                  <a:srgbClr val="9CDCFE"/>
+                </a:solidFill>
+                <a:latin typeface="Courier New" pitchFamily="34" charset="0"/>
+                <a:ea typeface="Courier New" pitchFamily="34" charset="-122"/>
+                <a:cs typeface="Courier New" pitchFamily="34" charset="-120"/>
+              </a:rPr>
+              <a:t>target</a:t>
+            </a:r>
+            <a:pPr indent="0" marL="0">
+              <a:lnSpc>
+                <a:spcPct val="105000"/>
+              </a:lnSpc>
+              <a:buNone/>
+            </a:pPr>
+            <a:r>
+              <a:rPr lang="en-US" sz="1100" dirty="0">
+                <a:solidFill>
+                  <a:srgbClr val="CCCCCC"/>
+                </a:solidFill>
+                <a:latin typeface="Courier New" pitchFamily="34" charset="0"/>
+                <a:ea typeface="Courier New" pitchFamily="34" charset="-122"/>
+                <a:cs typeface="Courier New" pitchFamily="34" charset="-120"/>
+              </a:rPr>
+              <a:t>:</a:t>
+            </a:r>
+            <a:endParaRPr lang="en-US" sz="1100" dirty="0"/>
+          </a:p>
+          <a:p>
+            <a:pPr indent="0" marL="0">
+              <a:lnSpc>
+                <a:spcPct val="105000"/>
+              </a:lnSpc>
+              <a:buNone/>
+            </a:pPr>
+            <a:r>
+              <a:rPr lang="en-US" sz="1100" dirty="0">
+                <a:solidFill>
+                  <a:srgbClr val="6E7681"/>
+                </a:solidFill>
+                <a:latin typeface="Courier New" pitchFamily="34" charset="0"/>
+                <a:ea typeface="Courier New" pitchFamily="34" charset="-122"/>
+                <a:cs typeface="Courier New" pitchFamily="34" charset="-120"/>
+              </a:rPr>
+              <a:t xml:space="preserve"> 6  </a:t>
+            </a:r>
+            <a:pPr indent="0" marL="0">
+              <a:lnSpc>
+                <a:spcPct val="105000"/>
+              </a:lnSpc>
+              <a:buNone/>
+            </a:pPr>
+            <a:r>
+              <a:rPr lang="en-US" sz="1100" dirty="0">
+                <a:solidFill>
+                  <a:srgbClr val="CCCCCC"/>
+                </a:solidFill>
+                <a:latin typeface="Courier New" pitchFamily="34" charset="0"/>
+                <a:ea typeface="Courier New" pitchFamily="34" charset="-122"/>
+                <a:cs typeface="Courier New" pitchFamily="34" charset="-120"/>
+              </a:rPr>
+              <a:t xml:space="preserve">        </a:t>
+            </a:r>
+            <a:pPr indent="0" marL="0">
+              <a:lnSpc>
+                <a:spcPct val="105000"/>
+              </a:lnSpc>
+              <a:buNone/>
+            </a:pPr>
+            <a:r>
+              <a:rPr lang="en-US" sz="1100" dirty="0">
+                <a:solidFill>
+                  <a:srgbClr val="9CDCFE"/>
+                </a:solidFill>
+                <a:latin typeface="Courier New" pitchFamily="34" charset="0"/>
+                <a:ea typeface="Courier New" pitchFamily="34" charset="-122"/>
+                <a:cs typeface="Courier New" pitchFamily="34" charset="-120"/>
+              </a:rPr>
+              <a:t>url</a:t>
+            </a:r>
+            <a:pPr indent="0" marL="0">
+              <a:lnSpc>
+                <a:spcPct val="105000"/>
+              </a:lnSpc>
+              <a:buNone/>
+            </a:pPr>
+            <a:r>
+              <a:rPr lang="en-US" sz="1100" dirty="0">
+                <a:solidFill>
+                  <a:srgbClr val="CCCCCC"/>
+                </a:solidFill>
+                <a:latin typeface="Courier New" pitchFamily="34" charset="0"/>
+                <a:ea typeface="Courier New" pitchFamily="34" charset="-122"/>
+                <a:cs typeface="Courier New" pitchFamily="34" charset="-120"/>
+              </a:rPr>
+              <a:t>:</a:t>
+            </a:r>
+            <a:pPr indent="0" marL="0">
+              <a:lnSpc>
+                <a:spcPct val="105000"/>
+              </a:lnSpc>
+              <a:buNone/>
+            </a:pPr>
+            <a:r>
+              <a:rPr lang="en-US" sz="1100" dirty="0">
+                <a:solidFill>
+                  <a:srgbClr val="CE9178"/>
+                </a:solidFill>
+                <a:latin typeface="Courier New" pitchFamily="34" charset="0"/>
+                <a:ea typeface="Courier New" pitchFamily="34" charset="-122"/>
+                <a:cs typeface="Courier New" pitchFamily="34" charset="-120"/>
+              </a:rPr>
+              <a:t xml:space="preserve"> https://s4h2025.empresa.local:44300</a:t>
+            </a:r>
+            <a:endParaRPr lang="en-US" sz="1100" dirty="0"/>
+          </a:p>
+          <a:p>
+            <a:pPr indent="0" marL="0">
+              <a:lnSpc>
+                <a:spcPct val="105000"/>
+              </a:lnSpc>
+              <a:buNone/>
+            </a:pPr>
+            <a:r>
+              <a:rPr lang="en-US" sz="1100" dirty="0">
+                <a:solidFill>
+                  <a:srgbClr val="6E7681"/>
+                </a:solidFill>
+                <a:latin typeface="Courier New" pitchFamily="34" charset="0"/>
+                <a:ea typeface="Courier New" pitchFamily="34" charset="-122"/>
+                <a:cs typeface="Courier New" pitchFamily="34" charset="-120"/>
+              </a:rPr>
+              <a:t xml:space="preserve"> 7  </a:t>
+            </a:r>
+            <a:pPr indent="0" marL="0">
+              <a:lnSpc>
+                <a:spcPct val="105000"/>
+              </a:lnSpc>
+              <a:buNone/>
+            </a:pPr>
+            <a:r>
+              <a:rPr lang="en-US" sz="1100" dirty="0">
+                <a:solidFill>
+                  <a:srgbClr val="CCCCCC"/>
+                </a:solidFill>
+                <a:latin typeface="Courier New" pitchFamily="34" charset="0"/>
+                <a:ea typeface="Courier New" pitchFamily="34" charset="-122"/>
+                <a:cs typeface="Courier New" pitchFamily="34" charset="-120"/>
+              </a:rPr>
+              <a:t xml:space="preserve">        </a:t>
+            </a:r>
+            <a:pPr indent="0" marL="0">
+              <a:lnSpc>
+                <a:spcPct val="105000"/>
+              </a:lnSpc>
+              <a:buNone/>
+            </a:pPr>
+            <a:r>
+              <a:rPr lang="en-US" sz="1100" dirty="0">
+                <a:solidFill>
+                  <a:srgbClr val="9CDCFE"/>
+                </a:solidFill>
+                <a:latin typeface="Courier New" pitchFamily="34" charset="0"/>
+                <a:ea typeface="Courier New" pitchFamily="34" charset="-122"/>
+                <a:cs typeface="Courier New" pitchFamily="34" charset="-120"/>
+              </a:rPr>
+              <a:t>client</a:t>
+            </a:r>
+            <a:pPr indent="0" marL="0">
+              <a:lnSpc>
+                <a:spcPct val="105000"/>
+              </a:lnSpc>
+              <a:buNone/>
+            </a:pPr>
+            <a:r>
+              <a:rPr lang="en-US" sz="1100" dirty="0">
+                <a:solidFill>
+                  <a:srgbClr val="CCCCCC"/>
+                </a:solidFill>
+                <a:latin typeface="Courier New" pitchFamily="34" charset="0"/>
+                <a:ea typeface="Courier New" pitchFamily="34" charset="-122"/>
+                <a:cs typeface="Courier New" pitchFamily="34" charset="-120"/>
+              </a:rPr>
+              <a:t>:</a:t>
+            </a:r>
+            <a:pPr indent="0" marL="0">
+              <a:lnSpc>
+                <a:spcPct val="105000"/>
+              </a:lnSpc>
+              <a:buNone/>
+            </a:pPr>
+            <a:r>
+              <a:rPr lang="en-US" sz="1100" dirty="0">
+                <a:solidFill>
+                  <a:srgbClr val="CE9178"/>
+                </a:solidFill>
+                <a:latin typeface="Courier New" pitchFamily="34" charset="0"/>
+                <a:ea typeface="Courier New" pitchFamily="34" charset="-122"/>
+                <a:cs typeface="Courier New" pitchFamily="34" charset="-120"/>
+              </a:rPr>
+              <a:t xml:space="preserve"> "100"</a:t>
+            </a:r>
+            <a:endParaRPr lang="en-US" sz="1100" dirty="0"/>
+          </a:p>
+          <a:p>
+            <a:pPr indent="0" marL="0">
+              <a:lnSpc>
+                <a:spcPct val="105000"/>
+              </a:lnSpc>
+              <a:buNone/>
+            </a:pPr>
+            <a:r>
+              <a:rPr lang="en-US" sz="1100" dirty="0">
+                <a:solidFill>
+                  <a:srgbClr val="6E7681"/>
+                </a:solidFill>
+                <a:latin typeface="Courier New" pitchFamily="34" charset="0"/>
+                <a:ea typeface="Courier New" pitchFamily="34" charset="-122"/>
+                <a:cs typeface="Courier New" pitchFamily="34" charset="-120"/>
+              </a:rPr>
+              <a:t xml:space="preserve"> 8  </a:t>
+            </a:r>
+            <a:pPr indent="0" marL="0">
+              <a:lnSpc>
+                <a:spcPct val="105000"/>
+              </a:lnSpc>
+              <a:buNone/>
+            </a:pPr>
+            <a:r>
+              <a:rPr lang="en-US" sz="1100" dirty="0">
+                <a:solidFill>
+                  <a:srgbClr val="CCCCCC"/>
+                </a:solidFill>
+                <a:latin typeface="Courier New" pitchFamily="34" charset="0"/>
+                <a:ea typeface="Courier New" pitchFamily="34" charset="-122"/>
+                <a:cs typeface="Courier New" pitchFamily="34" charset="-120"/>
+              </a:rPr>
+              <a:t xml:space="preserve">      </a:t>
+            </a:r>
+            <a:pPr indent="0" marL="0">
+              <a:lnSpc>
+                <a:spcPct val="105000"/>
+              </a:lnSpc>
+              <a:buNone/>
+            </a:pPr>
+            <a:r>
+              <a:rPr lang="en-US" sz="1100" dirty="0">
+                <a:solidFill>
+                  <a:srgbClr val="9CDCFE"/>
+                </a:solidFill>
+                <a:latin typeface="Courier New" pitchFamily="34" charset="0"/>
+                <a:ea typeface="Courier New" pitchFamily="34" charset="-122"/>
+                <a:cs typeface="Courier New" pitchFamily="34" charset="-120"/>
+              </a:rPr>
+              <a:t>credentials</a:t>
+            </a:r>
+            <a:pPr indent="0" marL="0">
+              <a:lnSpc>
+                <a:spcPct val="105000"/>
+              </a:lnSpc>
+              <a:buNone/>
+            </a:pPr>
+            <a:r>
+              <a:rPr lang="en-US" sz="1100" dirty="0">
+                <a:solidFill>
+                  <a:srgbClr val="CCCCCC"/>
+                </a:solidFill>
+                <a:latin typeface="Courier New" pitchFamily="34" charset="0"/>
+                <a:ea typeface="Courier New" pitchFamily="34" charset="-122"/>
+                <a:cs typeface="Courier New" pitchFamily="34" charset="-120"/>
+              </a:rPr>
+              <a:t>:</a:t>
+            </a:r>
+            <a:endParaRPr lang="en-US" sz="1100" dirty="0"/>
+          </a:p>
+          <a:p>
+            <a:pPr indent="0" marL="0">
+              <a:lnSpc>
+                <a:spcPct val="105000"/>
+              </a:lnSpc>
+              <a:buNone/>
+            </a:pPr>
+            <a:r>
+              <a:rPr lang="en-US" sz="1100" dirty="0">
+                <a:solidFill>
+                  <a:srgbClr val="6E7681"/>
+                </a:solidFill>
+                <a:latin typeface="Courier New" pitchFamily="34" charset="0"/>
+                <a:ea typeface="Courier New" pitchFamily="34" charset="-122"/>
+                <a:cs typeface="Courier New" pitchFamily="34" charset="-120"/>
+              </a:rPr>
+              <a:t xml:space="preserve"> 9  </a:t>
+            </a:r>
+            <a:pPr indent="0" marL="0">
+              <a:lnSpc>
+                <a:spcPct val="105000"/>
+              </a:lnSpc>
+              <a:buNone/>
+            </a:pPr>
+            <a:r>
+              <a:rPr lang="en-US" sz="1100" dirty="0">
+                <a:solidFill>
+                  <a:srgbClr val="CCCCCC"/>
+                </a:solidFill>
+                <a:latin typeface="Courier New" pitchFamily="34" charset="0"/>
+                <a:ea typeface="Courier New" pitchFamily="34" charset="-122"/>
+                <a:cs typeface="Courier New" pitchFamily="34" charset="-120"/>
+              </a:rPr>
+              <a:t xml:space="preserve">        </a:t>
+            </a:r>
+            <a:pPr indent="0" marL="0">
+              <a:lnSpc>
+                <a:spcPct val="105000"/>
+              </a:lnSpc>
+              <a:buNone/>
+            </a:pPr>
+            <a:r>
+              <a:rPr lang="en-US" sz="1100" dirty="0">
+                <a:solidFill>
+                  <a:srgbClr val="9CDCFE"/>
+                </a:solidFill>
+                <a:latin typeface="Courier New" pitchFamily="34" charset="0"/>
+                <a:ea typeface="Courier New" pitchFamily="34" charset="-122"/>
+                <a:cs typeface="Courier New" pitchFamily="34" charset="-120"/>
+              </a:rPr>
+              <a:t>username</a:t>
+            </a:r>
+            <a:pPr indent="0" marL="0">
+              <a:lnSpc>
+                <a:spcPct val="105000"/>
+              </a:lnSpc>
+              <a:buNone/>
+            </a:pPr>
+            <a:r>
+              <a:rPr lang="en-US" sz="1100" dirty="0">
+                <a:solidFill>
+                  <a:srgbClr val="CCCCCC"/>
+                </a:solidFill>
+                <a:latin typeface="Courier New" pitchFamily="34" charset="0"/>
+                <a:ea typeface="Courier New" pitchFamily="34" charset="-122"/>
+                <a:cs typeface="Courier New" pitchFamily="34" charset="-120"/>
+              </a:rPr>
+              <a:t>:</a:t>
+            </a:r>
+            <a:pPr indent="0" marL="0">
+              <a:lnSpc>
+                <a:spcPct val="105000"/>
+              </a:lnSpc>
+              <a:buNone/>
+            </a:pPr>
+            <a:r>
+              <a:rPr lang="en-US" sz="1100" dirty="0">
+                <a:solidFill>
+                  <a:srgbClr val="CE9178"/>
+                </a:solidFill>
+                <a:latin typeface="Courier New" pitchFamily="34" charset="0"/>
+                <a:ea typeface="Courier New" pitchFamily="34" charset="-122"/>
+                <a:cs typeface="Courier New" pitchFamily="34" charset="-120"/>
+              </a:rPr>
+              <a:t xml:space="preserve"> env:ABAP_USER</a:t>
+            </a:r>
+            <a:endParaRPr lang="en-US" sz="1100" dirty="0"/>
+          </a:p>
+          <a:p>
+            <a:pPr indent="0" marL="0">
+              <a:lnSpc>
+                <a:spcPct val="105000"/>
+              </a:lnSpc>
+              <a:buNone/>
+            </a:pPr>
+            <a:r>
+              <a:rPr lang="en-US" sz="1100" dirty="0">
+                <a:solidFill>
+                  <a:srgbClr val="6E7681"/>
+                </a:solidFill>
+                <a:latin typeface="Courier New" pitchFamily="34" charset="0"/>
+                <a:ea typeface="Courier New" pitchFamily="34" charset="-122"/>
+                <a:cs typeface="Courier New" pitchFamily="34" charset="-120"/>
+              </a:rPr>
+              <a:t xml:space="preserve">10  </a:t>
+            </a:r>
+            <a:pPr indent="0" marL="0">
+              <a:lnSpc>
+                <a:spcPct val="105000"/>
+              </a:lnSpc>
+              <a:buNone/>
+            </a:pPr>
+            <a:r>
+              <a:rPr lang="en-US" sz="1100" dirty="0">
+                <a:solidFill>
+                  <a:srgbClr val="CCCCCC"/>
+                </a:solidFill>
+                <a:latin typeface="Courier New" pitchFamily="34" charset="0"/>
+                <a:ea typeface="Courier New" pitchFamily="34" charset="-122"/>
+                <a:cs typeface="Courier New" pitchFamily="34" charset="-120"/>
+              </a:rPr>
+              <a:t xml:space="preserve">        </a:t>
+            </a:r>
+            <a:pPr indent="0" marL="0">
+              <a:lnSpc>
+                <a:spcPct val="105000"/>
+              </a:lnSpc>
+              <a:buNone/>
+            </a:pPr>
+            <a:r>
+              <a:rPr lang="en-US" sz="1100" dirty="0">
+                <a:solidFill>
+                  <a:srgbClr val="9CDCFE"/>
+                </a:solidFill>
+                <a:latin typeface="Courier New" pitchFamily="34" charset="0"/>
+                <a:ea typeface="Courier New" pitchFamily="34" charset="-122"/>
+                <a:cs typeface="Courier New" pitchFamily="34" charset="-120"/>
+              </a:rPr>
+              <a:t>password</a:t>
+            </a:r>
+            <a:pPr indent="0" marL="0">
+              <a:lnSpc>
+                <a:spcPct val="105000"/>
+              </a:lnSpc>
+              <a:buNone/>
+            </a:pPr>
+            <a:r>
+              <a:rPr lang="en-US" sz="1100" dirty="0">
+                <a:solidFill>
+                  <a:srgbClr val="CCCCCC"/>
+                </a:solidFill>
+                <a:latin typeface="Courier New" pitchFamily="34" charset="0"/>
+                <a:ea typeface="Courier New" pitchFamily="34" charset="-122"/>
+                <a:cs typeface="Courier New" pitchFamily="34" charset="-120"/>
+              </a:rPr>
+              <a:t>:</a:t>
+            </a:r>
+            <a:pPr indent="0" marL="0">
+              <a:lnSpc>
+                <a:spcPct val="105000"/>
+              </a:lnSpc>
+              <a:buNone/>
+            </a:pPr>
+            <a:r>
+              <a:rPr lang="en-US" sz="1100" dirty="0">
+                <a:solidFill>
+                  <a:srgbClr val="CE9178"/>
+                </a:solidFill>
+                <a:latin typeface="Courier New" pitchFamily="34" charset="0"/>
+                <a:ea typeface="Courier New" pitchFamily="34" charset="-122"/>
+                <a:cs typeface="Courier New" pitchFamily="34" charset="-120"/>
+              </a:rPr>
+              <a:t xml:space="preserve"> env:ABAP_PASSWORD</a:t>
+            </a:r>
+            <a:endParaRPr lang="en-US" sz="1100" dirty="0"/>
+          </a:p>
+          <a:p>
+            <a:pPr indent="0" marL="0">
+              <a:lnSpc>
+                <a:spcPct val="105000"/>
+              </a:lnSpc>
+              <a:buNone/>
+            </a:pPr>
+            <a:r>
+              <a:rPr lang="en-US" sz="1100" dirty="0">
+                <a:solidFill>
+                  <a:srgbClr val="6E7681"/>
+                </a:solidFill>
+                <a:latin typeface="Courier New" pitchFamily="34" charset="0"/>
+                <a:ea typeface="Courier New" pitchFamily="34" charset="-122"/>
+                <a:cs typeface="Courier New" pitchFamily="34" charset="-120"/>
+              </a:rPr>
+              <a:t xml:space="preserve">11  </a:t>
+            </a:r>
+            <a:pPr indent="0" marL="0">
+              <a:lnSpc>
+                <a:spcPct val="105000"/>
+              </a:lnSpc>
+              <a:buNone/>
+            </a:pPr>
+            <a:r>
+              <a:rPr lang="en-US" sz="1100" dirty="0">
+                <a:solidFill>
+                  <a:srgbClr val="CCCCCC"/>
+                </a:solidFill>
+                <a:latin typeface="Courier New" pitchFamily="34" charset="0"/>
+                <a:ea typeface="Courier New" pitchFamily="34" charset="-122"/>
+                <a:cs typeface="Courier New" pitchFamily="34" charset="-120"/>
+              </a:rPr>
+              <a:t xml:space="preserve">      </a:t>
+            </a:r>
+            <a:pPr indent="0" marL="0">
+              <a:lnSpc>
+                <a:spcPct val="105000"/>
+              </a:lnSpc>
+              <a:buNone/>
+            </a:pPr>
+            <a:r>
+              <a:rPr lang="en-US" sz="1100" dirty="0">
+                <a:solidFill>
+                  <a:srgbClr val="9CDCFE"/>
+                </a:solidFill>
+                <a:latin typeface="Courier New" pitchFamily="34" charset="0"/>
+                <a:ea typeface="Courier New" pitchFamily="34" charset="-122"/>
+                <a:cs typeface="Courier New" pitchFamily="34" charset="-120"/>
+              </a:rPr>
+              <a:t>app</a:t>
+            </a:r>
+            <a:pPr indent="0" marL="0">
+              <a:lnSpc>
+                <a:spcPct val="105000"/>
+              </a:lnSpc>
+              <a:buNone/>
+            </a:pPr>
+            <a:r>
+              <a:rPr lang="en-US" sz="1100" dirty="0">
+                <a:solidFill>
+                  <a:srgbClr val="CCCCCC"/>
+                </a:solidFill>
+                <a:latin typeface="Courier New" pitchFamily="34" charset="0"/>
+                <a:ea typeface="Courier New" pitchFamily="34" charset="-122"/>
+                <a:cs typeface="Courier New" pitchFamily="34" charset="-120"/>
+              </a:rPr>
+              <a:t>:</a:t>
+            </a:r>
+            <a:endParaRPr lang="en-US" sz="1100" dirty="0"/>
+          </a:p>
+          <a:p>
+            <a:pPr indent="0" marL="0">
+              <a:lnSpc>
+                <a:spcPct val="105000"/>
+              </a:lnSpc>
+              <a:buNone/>
+            </a:pPr>
+            <a:r>
+              <a:rPr lang="en-US" sz="1100" dirty="0">
+                <a:solidFill>
+                  <a:srgbClr val="6E7681"/>
+                </a:solidFill>
+                <a:latin typeface="Courier New" pitchFamily="34" charset="0"/>
+                <a:ea typeface="Courier New" pitchFamily="34" charset="-122"/>
+                <a:cs typeface="Courier New" pitchFamily="34" charset="-120"/>
+              </a:rPr>
+              <a:t xml:space="preserve">12  </a:t>
+            </a:r>
+            <a:pPr indent="0" marL="0">
+              <a:lnSpc>
+                <a:spcPct val="105000"/>
+              </a:lnSpc>
+              <a:buNone/>
+            </a:pPr>
+            <a:r>
+              <a:rPr lang="en-US" sz="1100" dirty="0">
+                <a:solidFill>
+                  <a:srgbClr val="CCCCCC"/>
+                </a:solidFill>
+                <a:latin typeface="Courier New" pitchFamily="34" charset="0"/>
+                <a:ea typeface="Courier New" pitchFamily="34" charset="-122"/>
+                <a:cs typeface="Courier New" pitchFamily="34" charset="-120"/>
+              </a:rPr>
+              <a:t xml:space="preserve">        </a:t>
+            </a:r>
+            <a:pPr indent="0" marL="0">
+              <a:lnSpc>
+                <a:spcPct val="105000"/>
+              </a:lnSpc>
+              <a:buNone/>
+            </a:pPr>
+            <a:r>
+              <a:rPr lang="en-US" sz="1100" dirty="0">
+                <a:solidFill>
+                  <a:srgbClr val="9CDCFE"/>
+                </a:solidFill>
+                <a:latin typeface="Courier New" pitchFamily="34" charset="0"/>
+                <a:ea typeface="Courier New" pitchFamily="34" charset="-122"/>
+                <a:cs typeface="Courier New" pitchFamily="34" charset="-120"/>
+              </a:rPr>
+              <a:t>name</a:t>
+            </a:r>
+            <a:pPr indent="0" marL="0">
+              <a:lnSpc>
+                <a:spcPct val="105000"/>
+              </a:lnSpc>
+              <a:buNone/>
+            </a:pPr>
+            <a:r>
+              <a:rPr lang="en-US" sz="1100" dirty="0">
+                <a:solidFill>
+                  <a:srgbClr val="CCCCCC"/>
+                </a:solidFill>
+                <a:latin typeface="Courier New" pitchFamily="34" charset="0"/>
+                <a:ea typeface="Courier New" pitchFamily="34" charset="-122"/>
+                <a:cs typeface="Courier New" pitchFamily="34" charset="-120"/>
+              </a:rPr>
+              <a:t>:</a:t>
+            </a:r>
+            <a:pPr indent="0" marL="0">
+              <a:lnSpc>
+                <a:spcPct val="105000"/>
+              </a:lnSpc>
+              <a:buNone/>
+            </a:pPr>
+            <a:r>
+              <a:rPr lang="en-US" sz="1100" dirty="0">
+                <a:solidFill>
+                  <a:srgbClr val="CE9178"/>
+                </a:solidFill>
+                <a:latin typeface="Courier New" pitchFamily="34" charset="0"/>
+                <a:ea typeface="Courier New" pitchFamily="34" charset="-122"/>
+                <a:cs typeface="Courier New" pitchFamily="34" charset="-120"/>
+              </a:rPr>
+              <a:t xml:space="preserve"> ZPC_PEDIDOS</a:t>
+            </a:r>
+            <a:endParaRPr lang="en-US" sz="1100" dirty="0"/>
+          </a:p>
+          <a:p>
+            <a:pPr indent="0" marL="0">
+              <a:lnSpc>
+                <a:spcPct val="105000"/>
+              </a:lnSpc>
+              <a:buNone/>
+            </a:pPr>
+            <a:r>
+              <a:rPr lang="en-US" sz="1100" dirty="0">
+                <a:solidFill>
+                  <a:srgbClr val="6E7681"/>
+                </a:solidFill>
+                <a:latin typeface="Courier New" pitchFamily="34" charset="0"/>
+                <a:ea typeface="Courier New" pitchFamily="34" charset="-122"/>
+                <a:cs typeface="Courier New" pitchFamily="34" charset="-120"/>
+              </a:rPr>
+              <a:t xml:space="preserve">13  </a:t>
+            </a:r>
+            <a:pPr indent="0" marL="0">
+              <a:lnSpc>
+                <a:spcPct val="105000"/>
+              </a:lnSpc>
+              <a:buNone/>
+            </a:pPr>
+            <a:r>
+              <a:rPr lang="en-US" sz="1100" dirty="0">
+                <a:solidFill>
+                  <a:srgbClr val="CCCCCC"/>
+                </a:solidFill>
+                <a:latin typeface="Courier New" pitchFamily="34" charset="0"/>
+                <a:ea typeface="Courier New" pitchFamily="34" charset="-122"/>
+                <a:cs typeface="Courier New" pitchFamily="34" charset="-120"/>
+              </a:rPr>
+              <a:t xml:space="preserve">        </a:t>
+            </a:r>
+            <a:pPr indent="0" marL="0">
+              <a:lnSpc>
+                <a:spcPct val="105000"/>
+              </a:lnSpc>
+              <a:buNone/>
+            </a:pPr>
+            <a:r>
+              <a:rPr lang="en-US" sz="1100" dirty="0">
+                <a:solidFill>
+                  <a:srgbClr val="9CDCFE"/>
+                </a:solidFill>
+                <a:latin typeface="Courier New" pitchFamily="34" charset="0"/>
+                <a:ea typeface="Courier New" pitchFamily="34" charset="-122"/>
+                <a:cs typeface="Courier New" pitchFamily="34" charset="-120"/>
+              </a:rPr>
+              <a:t>package</a:t>
+            </a:r>
+            <a:pPr indent="0" marL="0">
+              <a:lnSpc>
+                <a:spcPct val="105000"/>
+              </a:lnSpc>
+              <a:buNone/>
+            </a:pPr>
+            <a:r>
+              <a:rPr lang="en-US" sz="1100" dirty="0">
+                <a:solidFill>
+                  <a:srgbClr val="CCCCCC"/>
+                </a:solidFill>
+                <a:latin typeface="Courier New" pitchFamily="34" charset="0"/>
+                <a:ea typeface="Courier New" pitchFamily="34" charset="-122"/>
+                <a:cs typeface="Courier New" pitchFamily="34" charset="-120"/>
+              </a:rPr>
+              <a:t>:</a:t>
+            </a:r>
+            <a:pPr indent="0" marL="0">
+              <a:lnSpc>
+                <a:spcPct val="105000"/>
+              </a:lnSpc>
+              <a:buNone/>
+            </a:pPr>
+            <a:r>
+              <a:rPr lang="en-US" sz="1100" dirty="0">
+                <a:solidFill>
+                  <a:srgbClr val="CE9178"/>
+                </a:solidFill>
+                <a:latin typeface="Courier New" pitchFamily="34" charset="0"/>
+                <a:ea typeface="Courier New" pitchFamily="34" charset="-122"/>
+                <a:cs typeface="Courier New" pitchFamily="34" charset="-120"/>
+              </a:rPr>
+              <a:t xml:space="preserve"> ZAVBS_PC_PEDIDOS</a:t>
+            </a:r>
+            <a:endParaRPr lang="en-US" sz="1100" dirty="0"/>
+          </a:p>
+          <a:p>
+            <a:pPr indent="0" marL="0">
+              <a:lnSpc>
+                <a:spcPct val="105000"/>
+              </a:lnSpc>
+              <a:buNone/>
+            </a:pPr>
+            <a:r>
+              <a:rPr lang="en-US" sz="1100" dirty="0">
+                <a:solidFill>
+                  <a:srgbClr val="6E7681"/>
+                </a:solidFill>
+                <a:latin typeface="Courier New" pitchFamily="34" charset="0"/>
+                <a:ea typeface="Courier New" pitchFamily="34" charset="-122"/>
+                <a:cs typeface="Courier New" pitchFamily="34" charset="-120"/>
+              </a:rPr>
+              <a:t xml:space="preserve">14  </a:t>
+            </a:r>
+            <a:pPr indent="0" marL="0">
+              <a:lnSpc>
+                <a:spcPct val="105000"/>
+              </a:lnSpc>
+              <a:buNone/>
+            </a:pPr>
+            <a:r>
+              <a:rPr lang="en-US" sz="1100" dirty="0">
+                <a:solidFill>
+                  <a:srgbClr val="CCCCCC"/>
+                </a:solidFill>
+                <a:latin typeface="Courier New" pitchFamily="34" charset="0"/>
+                <a:ea typeface="Courier New" pitchFamily="34" charset="-122"/>
+                <a:cs typeface="Courier New" pitchFamily="34" charset="-120"/>
+              </a:rPr>
+              <a:t xml:space="preserve">        </a:t>
+            </a:r>
+            <a:pPr indent="0" marL="0">
+              <a:lnSpc>
+                <a:spcPct val="105000"/>
+              </a:lnSpc>
+              <a:buNone/>
+            </a:pPr>
+            <a:r>
+              <a:rPr lang="en-US" sz="1100" dirty="0">
+                <a:solidFill>
+                  <a:srgbClr val="9CDCFE"/>
+                </a:solidFill>
+                <a:latin typeface="Courier New" pitchFamily="34" charset="0"/>
+                <a:ea typeface="Courier New" pitchFamily="34" charset="-122"/>
+                <a:cs typeface="Courier New" pitchFamily="34" charset="-120"/>
+              </a:rPr>
+              <a:t>transport</a:t>
+            </a:r>
+            <a:pPr indent="0" marL="0">
+              <a:lnSpc>
+                <a:spcPct val="105000"/>
+              </a:lnSpc>
+              <a:buNone/>
+            </a:pPr>
+            <a:r>
+              <a:rPr lang="en-US" sz="1100" dirty="0">
+                <a:solidFill>
+                  <a:srgbClr val="CCCCCC"/>
+                </a:solidFill>
+                <a:latin typeface="Courier New" pitchFamily="34" charset="0"/>
+                <a:ea typeface="Courier New" pitchFamily="34" charset="-122"/>
+                <a:cs typeface="Courier New" pitchFamily="34" charset="-120"/>
+              </a:rPr>
+              <a:t>:</a:t>
+            </a:r>
+            <a:pPr indent="0" marL="0">
+              <a:lnSpc>
+                <a:spcPct val="105000"/>
+              </a:lnSpc>
+              <a:buNone/>
+            </a:pPr>
+            <a:r>
+              <a:rPr lang="en-US" sz="1100" dirty="0">
+                <a:solidFill>
+                  <a:srgbClr val="CE9178"/>
+                </a:solidFill>
+                <a:latin typeface="Courier New" pitchFamily="34" charset="0"/>
+                <a:ea typeface="Courier New" pitchFamily="34" charset="-122"/>
+                <a:cs typeface="Courier New" pitchFamily="34" charset="-120"/>
+              </a:rPr>
+              <a:t xml:space="preserve"> S4DK900123</a:t>
+            </a:r>
+            <a:endParaRPr lang="en-US" sz="1100" dirty="0"/>
+          </a:p>
+        </p:txBody>
+      </p:sp>
+      <p:sp>
+        <p:nvSpPr>
+          <p:cNvPr id="13" name="Fundo da tabela"/>
+          <p:cNvSpPr/>
+          <p:nvPr/>
+        </p:nvSpPr>
+        <p:spPr>
+          <a:xfrm>
+            <a:off x="6629400" y="1645920"/>
+            <a:ext cx="5013655" cy="2852928"/>
+          </a:xfrm>
+          <a:prstGeom prst="roundRect">
+            <a:avLst>
+              <a:gd name="adj" fmla="val 3846"/>
+            </a:avLst>
+          </a:prstGeom>
+          <a:solidFill>
+            <a:srgbClr val="FFFFFF"/>
+          </a:solidFill>
+          <a:ln/>
+          <a:effectLst>
+            <a:outerShdw sx="100000" sy="100000" kx="0" ky="0" algn="bl" rotWithShape="0" blurRad="101600" dist="25400" dir="5400000">
+              <a:srgbClr val="223548">
+                <a:alpha val="16000"/>
+              </a:srgbClr>
+            </a:outerShdw>
+          </a:effectLst>
+        </p:spPr>
+      </p:sp>
+      <p:graphicFrame>
+        <p:nvGraphicFramePr>
+          <p:cNvPr id="25" name="Table 0"/>
+          <p:cNvGraphicFramePr>
+            <a:graphicFrameLocks noGrp="1"/>
+          </p:cNvGraphicFramePr>
+          <p:nvPr>
+            <p:extLst>
+              <p:ext uri="{D42A27DB-BD31-4B8C-83A1-F6EECF244321}">
+                <p14:modId xmlns:p14="http://schemas.microsoft.com/office/powerpoint/2010/main" val="1579011935"/>
+              </p:ext>
+            </p:extLst>
+          </p:nvPr>
+        </p:nvGraphicFramePr>
+        <p:xfrm>
+          <a:off x="6766560" y="1755648"/>
+          <a:ext cx="4739335" cy="914400"/>
+        </p:xfrm>
+        <a:graphic>
+          <a:graphicData uri="http://schemas.openxmlformats.org/drawingml/2006/table">
+            <a:tbl>
+              <a:tblPr/>
+              <a:tblGrid>
+                <a:gridCol w="1150000"/>
+                <a:gridCol w="2250000"/>
+                <a:gridCol w="1339335"/>
+              </a:tblGrid>
+              <a:tr h="438912">
+                <a:tc>
+                  <a:txBody>
+                    <a:bodyPr/>
+                    <a:lstStyle/>
+                    <a:p>
+                      <a:pPr indent="0" marL="0">
+                        <a:buNone/>
+                      </a:pPr>
+                      <a:r>
+                        <a:rPr lang="en-US" sz="1050" b="1" dirty="0">
+                          <a:solidFill>
+                            <a:srgbClr val="1D2D3E"/>
+                          </a:solidFill>
+                        </a:rPr>
+                        <a:t>Item</a:t>
+                      </a:r>
+                      <a:endParaRPr lang="en-US" sz="1050" dirty="0"/>
+                    </a:p>
+                  </a:txBody>
+                  <a:tcPr marL="73152" marR="73152" marT="36576" marB="36576" anchor="ctr">
+                    <a:lnL w="0" cap="flat" cmpd="sng" algn="ctr">
+                      <a:noFill/>
+                    </a:lnL>
+                    <a:lnR w="0" cap="flat" cmpd="sng" algn="ctr">
+                      <a:noFill/>
+                    </a:lnR>
+                    <a:lnT w="0" cap="flat" cmpd="sng" algn="ctr">
+                      <a:noFill/>
+                    </a:lnT>
+                    <a:lnB w="19050" cap="flat" cmpd="sng" algn="ctr">
+                      <a:solidFill>
+                        <a:srgbClr val="A8B3BD"/>
+                      </a:solidFill>
+                      <a:prstDash val="solid"/>
+                      <a:round/>
+                      <a:headEnd type="none" w="med" len="med"/>
+                      <a:tailEnd type="none" w="med" len="med"/>
+                    </a:lnB>
+                    <a:solidFill>
+                      <a:srgbClr val="FFFFFF"/>
+                    </a:solidFill>
+                  </a:tcPr>
+                </a:tc>
+                <a:tc>
+                  <a:txBody>
+                    <a:bodyPr/>
+                    <a:lstStyle/>
+                    <a:p>
+                      <a:pPr indent="0" marL="0">
+                        <a:buNone/>
+                      </a:pPr>
+                      <a:r>
+                        <a:rPr lang="en-US" sz="1050" b="1" dirty="0">
+                          <a:solidFill>
+                            <a:srgbClr val="1D2D3E"/>
+                          </a:solidFill>
+                        </a:rPr>
+                        <a:t>Versão / valor</a:t>
+                      </a:r>
+                      <a:endParaRPr lang="en-US" sz="1050" dirty="0"/>
+                    </a:p>
+                  </a:txBody>
+                  <a:tcPr marL="73152" marR="73152" marT="36576" marB="36576" anchor="ctr">
+                    <a:lnL w="0" cap="flat" cmpd="sng" algn="ctr">
+                      <a:noFill/>
+                    </a:lnL>
+                    <a:lnR w="0" cap="flat" cmpd="sng" algn="ctr">
+                      <a:noFill/>
+                    </a:lnR>
+                    <a:lnT w="0" cap="flat" cmpd="sng" algn="ctr">
+                      <a:noFill/>
+                    </a:lnT>
+                    <a:lnB w="19050" cap="flat" cmpd="sng" algn="ctr">
+                      <a:solidFill>
+                        <a:srgbClr val="A8B3BD"/>
+                      </a:solidFill>
+                      <a:prstDash val="solid"/>
+                      <a:round/>
+                      <a:headEnd type="none" w="med" len="med"/>
+                      <a:tailEnd type="none" w="med" len="med"/>
+                    </a:lnB>
+                    <a:solidFill>
+                      <a:srgbClr val="FFFFFF"/>
+                    </a:solidFill>
+                  </a:tcPr>
+                </a:tc>
+                <a:tc>
+                  <a:txBody>
+                    <a:bodyPr/>
+                    <a:lstStyle/>
+                    <a:p>
+                      <a:pPr indent="0" marL="0">
+                        <a:buNone/>
+                      </a:pPr>
+                      <a:r>
+                        <a:rPr lang="en-US" sz="1050" b="1" dirty="0">
+                          <a:solidFill>
+                            <a:srgbClr val="1D2D3E"/>
+                          </a:solidFill>
+                        </a:rPr>
+                        <a:t>Onde conferir</a:t>
+                      </a:r>
+                      <a:endParaRPr lang="en-US" sz="1050" dirty="0"/>
+                    </a:p>
+                  </a:txBody>
+                  <a:tcPr marL="73152" marR="73152" marT="36576" marB="36576" anchor="ctr">
+                    <a:lnL w="0" cap="flat" cmpd="sng" algn="ctr">
+                      <a:noFill/>
+                    </a:lnL>
+                    <a:lnR w="0" cap="flat" cmpd="sng" algn="ctr">
+                      <a:noFill/>
+                    </a:lnR>
+                    <a:lnT w="0" cap="flat" cmpd="sng" algn="ctr">
+                      <a:noFill/>
+                    </a:lnT>
+                    <a:lnB w="19050" cap="flat" cmpd="sng" algn="ctr">
+                      <a:solidFill>
+                        <a:srgbClr val="A8B3BD"/>
+                      </a:solidFill>
+                      <a:prstDash val="solid"/>
+                      <a:round/>
+                      <a:headEnd type="none" w="med" len="med"/>
+                      <a:tailEnd type="none" w="med" len="med"/>
+                    </a:lnB>
+                    <a:solidFill>
+                      <a:srgbClr val="FFFFFF"/>
+                    </a:solidFill>
+                  </a:tcPr>
+                </a:tc>
+              </a:tr>
+              <a:tr h="438912">
+                <a:tc>
+                  <a:txBody>
+                    <a:bodyPr/>
+                    <a:lstStyle/>
+                    <a:p>
+                      <a:pPr indent="0" marL="0">
+                        <a:buNone/>
+                      </a:pPr>
+                      <a:r>
+                        <a:rPr lang="en-US" sz="1050" dirty="0">
+                          <a:solidFill>
+                            <a:srgbClr val="1D2D3E"/>
+                          </a:solidFill>
+                        </a:rPr>
+                        <a:t>SAPUI5 mínimo</a:t>
+                      </a:r>
+                      <a:endParaRPr lang="en-US" sz="1050" dirty="0"/>
+                    </a:p>
+                  </a:txBody>
+                  <a:tcPr marL="73152" marR="73152" marT="36576" marB="36576" anchor="ctr">
+                    <a:lnL w="0" cap="flat" cmpd="sng" algn="ctr">
+                      <a:noFill/>
+                    </a:lnL>
+                    <a:lnR w="0" cap="flat" cmpd="sng" algn="ctr">
+                      <a:noFill/>
+                    </a:lnR>
+                    <a:lnT w="0" cap="flat" cmpd="sng" algn="ctr">
+                      <a:noFill/>
+                    </a:lnT>
+                    <a:lnB w="12700" cap="flat" cmpd="sng" algn="ctr">
+                      <a:solidFill>
+                        <a:srgbClr val="E5E5E5"/>
+                      </a:solidFill>
+                      <a:prstDash val="solid"/>
+                      <a:round/>
+                      <a:headEnd type="none" w="med" len="med"/>
+                      <a:tailEnd type="none" w="med" len="med"/>
+                    </a:lnB>
+                    <a:solidFill>
+                      <a:srgbClr val="FFFFFF"/>
+                    </a:solidFill>
+                  </a:tcPr>
+                </a:tc>
+                <a:tc>
+                  <a:txBody>
+                    <a:bodyPr/>
+                    <a:lstStyle/>
+                    <a:p>
+                      <a:pPr indent="0" marL="0">
+                        <a:buNone/>
+                      </a:pPr>
+                      <a:r>
+                        <a:rPr lang="en-US" sz="1050" dirty="0">
+                          <a:solidFill>
+                            <a:srgbClr val="1D2D3E"/>
+                          </a:solidFill>
+                          <a:latin typeface="Courier New" pitchFamily="34" charset="0"/>
+                          <a:ea typeface="Courier New" pitchFamily="34" charset="-122"/>
+                          <a:cs typeface="Courier New" pitchFamily="34" charset="-120"/>
+                        </a:rPr>
+                        <a:t>1.136</a:t>
+                      </a:r>
+                      <a:endParaRPr lang="en-US" sz="1050" dirty="0">
+                        <a:latin typeface="Courier New" charset="0"/>
+                        <a:ea typeface="Courier New" charset="0"/>
+                        <a:cs typeface="Courier New" charset="0"/>
+                      </a:endParaRPr>
+                    </a:p>
+                  </a:txBody>
+                  <a:tcPr marL="73152" marR="73152" marT="36576" marB="36576" anchor="ctr">
+                    <a:lnL w="0" cap="flat" cmpd="sng" algn="ctr">
+                      <a:noFill/>
+                    </a:lnL>
+                    <a:lnR w="0" cap="flat" cmpd="sng" algn="ctr">
+                      <a:noFill/>
+                    </a:lnR>
+                    <a:lnT w="0" cap="flat" cmpd="sng" algn="ctr">
+                      <a:noFill/>
+                    </a:lnT>
+                    <a:lnB w="12700" cap="flat" cmpd="sng" algn="ctr">
+                      <a:solidFill>
+                        <a:srgbClr val="E5E5E5"/>
+                      </a:solidFill>
+                      <a:prstDash val="solid"/>
+                      <a:round/>
+                      <a:headEnd type="none" w="med" len="med"/>
+                      <a:tailEnd type="none" w="med" len="med"/>
+                    </a:lnB>
+                    <a:solidFill>
+                      <a:srgbClr val="FFFFFF"/>
+                    </a:solidFill>
+                  </a:tcPr>
+                </a:tc>
+                <a:tc>
+                  <a:txBody>
+                    <a:bodyPr/>
+                    <a:lstStyle/>
+                    <a:p>
+                      <a:pPr indent="0" marL="0">
+                        <a:buNone/>
+                      </a:pPr>
+                      <a:r>
+                        <a:rPr lang="en-US" sz="1050" dirty="0">
+                          <a:solidFill>
+                            <a:srgbClr val="1D2D3E"/>
+                          </a:solidFill>
+                          <a:latin typeface="Courier New" pitchFamily="34" charset="0"/>
+                          <a:ea typeface="Courier New" pitchFamily="34" charset="-122"/>
+                          <a:cs typeface="Courier New" pitchFamily="34" charset="-120"/>
+                        </a:rPr>
+                        <a:t>minUI5Version</a:t>
+                      </a:r>
+                      <a:endParaRPr lang="en-US" sz="1050" dirty="0">
+                        <a:latin typeface="Courier New" charset="0"/>
+                        <a:ea typeface="Courier New" charset="0"/>
+                        <a:cs typeface="Courier New" charset="0"/>
+                      </a:endParaRPr>
+                    </a:p>
+                  </a:txBody>
+                  <a:tcPr marL="73152" marR="73152" marT="36576" marB="36576" anchor="ctr">
+                    <a:lnL w="0" cap="flat" cmpd="sng" algn="ctr">
+                      <a:noFill/>
+                    </a:lnL>
+                    <a:lnR w="0" cap="flat" cmpd="sng" algn="ctr">
+                      <a:noFill/>
+                    </a:lnR>
+                    <a:lnT w="0" cap="flat" cmpd="sng" algn="ctr">
+                      <a:noFill/>
+                    </a:lnT>
+                    <a:lnB w="12700" cap="flat" cmpd="sng" algn="ctr">
+                      <a:solidFill>
+                        <a:srgbClr val="E5E5E5"/>
+                      </a:solidFill>
+                      <a:prstDash val="solid"/>
+                      <a:round/>
+                      <a:headEnd type="none" w="med" len="med"/>
+                      <a:tailEnd type="none" w="med" len="med"/>
+                    </a:lnB>
+                    <a:solidFill>
+                      <a:srgbClr val="FFFFFF"/>
+                    </a:solidFill>
+                  </a:tcPr>
+                </a:tc>
+              </a:tr>
+              <a:tr h="438912">
+                <a:tc>
+                  <a:txBody>
+                    <a:bodyPr/>
+                    <a:lstStyle/>
+                    <a:p>
+                      <a:pPr indent="0" marL="0">
+                        <a:buNone/>
+                      </a:pPr>
+                      <a:r>
+                        <a:rPr lang="en-US" sz="1050" dirty="0">
+                          <a:solidFill>
+                            <a:srgbClr val="1D2D3E"/>
+                          </a:solidFill>
+                        </a:rPr>
+                        <a:t>Sistema</a:t>
+                      </a:r>
+                      <a:endParaRPr lang="en-US" sz="1050" dirty="0"/>
+                    </a:p>
+                  </a:txBody>
+                  <a:tcPr marL="73152" marR="73152" marT="36576" marB="36576" anchor="ctr">
+                    <a:lnL w="0" cap="flat" cmpd="sng" algn="ctr">
+                      <a:noFill/>
+                    </a:lnL>
+                    <a:lnR w="0" cap="flat" cmpd="sng" algn="ctr">
+                      <a:noFill/>
+                    </a:lnR>
+                    <a:lnT w="0" cap="flat" cmpd="sng" algn="ctr">
+                      <a:noFill/>
+                    </a:lnT>
+                    <a:lnB w="12700" cap="flat" cmpd="sng" algn="ctr">
+                      <a:solidFill>
+                        <a:srgbClr val="E5E5E5"/>
+                      </a:solidFill>
+                      <a:prstDash val="solid"/>
+                      <a:round/>
+                      <a:headEnd type="none" w="med" len="med"/>
+                      <a:tailEnd type="none" w="med" len="med"/>
+                    </a:lnB>
+                    <a:solidFill>
+                      <a:srgbClr val="FFFFFF"/>
+                    </a:solidFill>
+                  </a:tcPr>
+                </a:tc>
+                <a:tc>
+                  <a:txBody>
+                    <a:bodyPr/>
+                    <a:lstStyle/>
+                    <a:p>
+                      <a:pPr indent="0" marL="0">
+                        <a:buNone/>
+                      </a:pPr>
+                      <a:r>
+                        <a:rPr lang="en-US" sz="1050" dirty="0">
+                          <a:solidFill>
+                            <a:srgbClr val="1D2D3E"/>
+                          </a:solidFill>
+                          <a:latin typeface="Courier New" pitchFamily="34" charset="0"/>
+                          <a:ea typeface="Courier New" pitchFamily="34" charset="-122"/>
+                          <a:cs typeface="Courier New" pitchFamily="34" charset="-120"/>
+                        </a:rPr>
+                        <a:t>S/4HANA 2025 FPS01</a:t>
+                      </a:r>
+                      <a:endParaRPr lang="en-US" sz="1050" dirty="0">
+                        <a:latin typeface="Courier New" charset="0"/>
+                        <a:ea typeface="Courier New" charset="0"/>
+                        <a:cs typeface="Courier New" charset="0"/>
+                      </a:endParaRPr>
+                    </a:p>
+                  </a:txBody>
+                  <a:tcPr marL="73152" marR="73152" marT="36576" marB="36576" anchor="ctr">
+                    <a:lnL w="0" cap="flat" cmpd="sng" algn="ctr">
+                      <a:noFill/>
+                    </a:lnL>
+                    <a:lnR w="0" cap="flat" cmpd="sng" algn="ctr">
+                      <a:noFill/>
+                    </a:lnR>
+                    <a:lnT w="0" cap="flat" cmpd="sng" algn="ctr">
+                      <a:noFill/>
+                    </a:lnT>
+                    <a:lnB w="12700" cap="flat" cmpd="sng" algn="ctr">
+                      <a:solidFill>
+                        <a:srgbClr val="E5E5E5"/>
+                      </a:solidFill>
+                      <a:prstDash val="solid"/>
+                      <a:round/>
+                      <a:headEnd type="none" w="med" len="med"/>
+                      <a:tailEnd type="none" w="med" len="med"/>
+                    </a:lnB>
+                    <a:solidFill>
+                      <a:srgbClr val="FFFFFF"/>
+                    </a:solidFill>
+                  </a:tcPr>
+                </a:tc>
+                <a:tc>
+                  <a:txBody>
+                    <a:bodyPr/>
+                    <a:lstStyle/>
+                    <a:p>
+                      <a:pPr indent="0" marL="0">
+                        <a:buNone/>
+                      </a:pPr>
+                      <a:r>
+                        <a:rPr lang="en-US" sz="1050" dirty="0">
+                          <a:solidFill>
+                            <a:srgbClr val="1D2D3E"/>
+                          </a:solidFill>
+                          <a:latin typeface="Courier New" pitchFamily="34" charset="0"/>
+                          <a:ea typeface="Courier New" pitchFamily="34" charset="-122"/>
+                          <a:cs typeface="Courier New" pitchFamily="34" charset="-120"/>
+                        </a:rPr>
+                        <a:t>CVERS</a:t>
+                      </a:r>
+                      <a:endParaRPr lang="en-US" sz="1050" dirty="0">
+                        <a:latin typeface="Courier New" charset="0"/>
+                        <a:ea typeface="Courier New" charset="0"/>
+                        <a:cs typeface="Courier New" charset="0"/>
+                      </a:endParaRPr>
+                    </a:p>
+                  </a:txBody>
+                  <a:tcPr marL="73152" marR="73152" marT="36576" marB="36576" anchor="ctr">
+                    <a:lnL w="0" cap="flat" cmpd="sng" algn="ctr">
+                      <a:noFill/>
+                    </a:lnL>
+                    <a:lnR w="0" cap="flat" cmpd="sng" algn="ctr">
+                      <a:noFill/>
+                    </a:lnR>
+                    <a:lnT w="0" cap="flat" cmpd="sng" algn="ctr">
+                      <a:noFill/>
+                    </a:lnT>
+                    <a:lnB w="12700" cap="flat" cmpd="sng" algn="ctr">
+                      <a:solidFill>
+                        <a:srgbClr val="E5E5E5"/>
+                      </a:solidFill>
+                      <a:prstDash val="solid"/>
+                      <a:round/>
+                      <a:headEnd type="none" w="med" len="med"/>
+                      <a:tailEnd type="none" w="med" len="med"/>
+                    </a:lnB>
+                    <a:solidFill>
+                      <a:srgbClr val="FFFFFF"/>
+                    </a:solidFill>
+                  </a:tcPr>
+                </a:tc>
+              </a:tr>
+              <a:tr h="438912">
+                <a:tc>
+                  <a:txBody>
+                    <a:bodyPr/>
+                    <a:lstStyle/>
+                    <a:p>
+                      <a:pPr indent="0" marL="0">
+                        <a:buNone/>
+                      </a:pPr>
+                      <a:r>
+                        <a:rPr lang="en-US" sz="1050" dirty="0">
+                          <a:solidFill>
+                            <a:srgbClr val="1D2D3E"/>
+                          </a:solidFill>
+                        </a:rPr>
+                        <a:t>Front-end server</a:t>
+                      </a:r>
+                      <a:endParaRPr lang="en-US" sz="1050" dirty="0"/>
+                    </a:p>
+                  </a:txBody>
+                  <a:tcPr marL="73152" marR="73152" marT="36576" marB="36576" anchor="ctr">
+                    <a:lnL w="0" cap="flat" cmpd="sng" algn="ctr">
+                      <a:noFill/>
+                    </a:lnL>
+                    <a:lnR w="0" cap="flat" cmpd="sng" algn="ctr">
+                      <a:noFill/>
+                    </a:lnR>
+                    <a:lnT w="0" cap="flat" cmpd="sng" algn="ctr">
+                      <a:noFill/>
+                    </a:lnT>
+                    <a:lnB w="12700" cap="flat" cmpd="sng" algn="ctr">
+                      <a:solidFill>
+                        <a:srgbClr val="E5E5E5"/>
+                      </a:solidFill>
+                      <a:prstDash val="solid"/>
+                      <a:round/>
+                      <a:headEnd type="none" w="med" len="med"/>
+                      <a:tailEnd type="none" w="med" len="med"/>
+                    </a:lnB>
+                    <a:solidFill>
+                      <a:srgbClr val="FFFFFF"/>
+                    </a:solidFill>
+                  </a:tcPr>
+                </a:tc>
+                <a:tc>
+                  <a:txBody>
+                    <a:bodyPr/>
+                    <a:lstStyle/>
+                    <a:p>
+                      <a:pPr indent="0" marL="0">
+                        <a:buNone/>
+                      </a:pPr>
+                      <a:r>
+                        <a:rPr lang="en-US" sz="1050" dirty="0">
+                          <a:solidFill>
+                            <a:srgbClr val="1D2D3E"/>
+                          </a:solidFill>
+                          <a:latin typeface="Courier New" pitchFamily="34" charset="0"/>
+                          <a:ea typeface="Courier New" pitchFamily="34" charset="-122"/>
+                          <a:cs typeface="Courier New" pitchFamily="34" charset="-120"/>
+                        </a:rPr>
+                        <a:t>FES 2025 · SAP_UI 816</a:t>
+                      </a:r>
+                      <a:endParaRPr lang="en-US" sz="1050" dirty="0">
+                        <a:latin typeface="Courier New" charset="0"/>
+                        <a:ea typeface="Courier New" charset="0"/>
+                        <a:cs typeface="Courier New" charset="0"/>
+                      </a:endParaRPr>
+                    </a:p>
+                  </a:txBody>
+                  <a:tcPr marL="73152" marR="73152" marT="36576" marB="36576" anchor="ctr">
+                    <a:lnL w="0" cap="flat" cmpd="sng" algn="ctr">
+                      <a:noFill/>
+                    </a:lnL>
+                    <a:lnR w="0" cap="flat" cmpd="sng" algn="ctr">
+                      <a:noFill/>
+                    </a:lnR>
+                    <a:lnT w="0" cap="flat" cmpd="sng" algn="ctr">
+                      <a:noFill/>
+                    </a:lnT>
+                    <a:lnB w="12700" cap="flat" cmpd="sng" algn="ctr">
+                      <a:solidFill>
+                        <a:srgbClr val="E5E5E5"/>
+                      </a:solidFill>
+                      <a:prstDash val="solid"/>
+                      <a:round/>
+                      <a:headEnd type="none" w="med" len="med"/>
+                      <a:tailEnd type="none" w="med" len="med"/>
+                    </a:lnB>
+                    <a:solidFill>
+                      <a:srgbClr val="FFFFFF"/>
+                    </a:solidFill>
+                  </a:tcPr>
+                </a:tc>
+                <a:tc>
+                  <a:txBody>
+                    <a:bodyPr/>
+                    <a:lstStyle/>
+                    <a:p>
+                      <a:pPr indent="0" marL="0">
+                        <a:buNone/>
+                      </a:pPr>
+                      <a:r>
+                        <a:rPr lang="en-US" sz="1050" dirty="0">
+                          <a:solidFill>
+                            <a:srgbClr val="1D2D3E"/>
+                          </a:solidFill>
+                          <a:latin typeface="Courier New" pitchFamily="34" charset="0"/>
+                          <a:ea typeface="Courier New" pitchFamily="34" charset="-122"/>
+                          <a:cs typeface="Courier New" pitchFamily="34" charset="-120"/>
+                        </a:rPr>
+                        <a:t>Sobre</a:t>
+                      </a:r>
+                      <a:endParaRPr lang="en-US" sz="1050" dirty="0">
+                        <a:latin typeface="Courier New" charset="0"/>
+                        <a:ea typeface="Courier New" charset="0"/>
+                        <a:cs typeface="Courier New" charset="0"/>
+                      </a:endParaRPr>
+                    </a:p>
+                  </a:txBody>
+                  <a:tcPr marL="73152" marR="73152" marT="36576" marB="36576" anchor="ctr">
+                    <a:lnL w="0" cap="flat" cmpd="sng" algn="ctr">
+                      <a:noFill/>
+                    </a:lnL>
+                    <a:lnR w="0" cap="flat" cmpd="sng" algn="ctr">
+                      <a:noFill/>
+                    </a:lnR>
+                    <a:lnT w="0" cap="flat" cmpd="sng" algn="ctr">
+                      <a:noFill/>
+                    </a:lnT>
+                    <a:lnB w="12700" cap="flat" cmpd="sng" algn="ctr">
+                      <a:solidFill>
+                        <a:srgbClr val="E5E5E5"/>
+                      </a:solidFill>
+                      <a:prstDash val="solid"/>
+                      <a:round/>
+                      <a:headEnd type="none" w="med" len="med"/>
+                      <a:tailEnd type="none" w="med" len="med"/>
+                    </a:lnB>
+                    <a:solidFill>
+                      <a:srgbClr val="FFFFFF"/>
+                    </a:solidFill>
+                  </a:tcPr>
+                </a:tc>
+              </a:tr>
+              <a:tr h="438912">
+                <a:tc>
+                  <a:txBody>
+                    <a:bodyPr/>
+                    <a:lstStyle/>
+                    <a:p>
+                      <a:pPr indent="0" marL="0">
+                        <a:buNone/>
+                      </a:pPr>
+                      <a:r>
+                        <a:rPr lang="en-US" sz="1050" dirty="0">
+                          <a:solidFill>
+                            <a:srgbClr val="1D2D3E"/>
+                          </a:solidFill>
+                        </a:rPr>
+                        <a:t>Serviço de deploy</a:t>
+                      </a:r>
+                      <a:endParaRPr lang="en-US" sz="1050" dirty="0"/>
+                    </a:p>
+                  </a:txBody>
+                  <a:tcPr marL="73152" marR="73152" marT="36576" marB="36576" anchor="ctr">
+                    <a:lnL w="0" cap="flat" cmpd="sng" algn="ctr">
+                      <a:noFill/>
+                    </a:lnL>
+                    <a:lnR w="0" cap="flat" cmpd="sng" algn="ctr">
+                      <a:noFill/>
+                    </a:lnR>
+                    <a:lnT w="0" cap="flat" cmpd="sng" algn="ctr">
+                      <a:noFill/>
+                    </a:lnT>
+                    <a:lnB w="12700" cap="flat" cmpd="sng" algn="ctr">
+                      <a:solidFill>
+                        <a:srgbClr val="E5E5E5"/>
+                      </a:solidFill>
+                      <a:prstDash val="solid"/>
+                      <a:round/>
+                      <a:headEnd type="none" w="med" len="med"/>
+                      <a:tailEnd type="none" w="med" len="med"/>
+                    </a:lnB>
+                    <a:solidFill>
+                      <a:srgbClr val="FFFFFF"/>
+                    </a:solidFill>
+                  </a:tcPr>
+                </a:tc>
+                <a:tc>
+                  <a:txBody>
+                    <a:bodyPr/>
+                    <a:lstStyle/>
+                    <a:p>
+                      <a:pPr indent="0" marL="0">
+                        <a:buNone/>
+                      </a:pPr>
+                      <a:r>
+                        <a:rPr lang="en-US" sz="1050" dirty="0">
+                          <a:solidFill>
+                            <a:srgbClr val="1D2D3E"/>
+                          </a:solidFill>
+                          <a:latin typeface="Courier New" pitchFamily="34" charset="0"/>
+                          <a:ea typeface="Courier New" pitchFamily="34" charset="-122"/>
+                          <a:cs typeface="Courier New" pitchFamily="34" charset="-120"/>
+                        </a:rPr>
+                        <a:t>/UI5/ABAP_REPOSITORY_SRV</a:t>
+                      </a:r>
+                      <a:endParaRPr lang="en-US" sz="1050" dirty="0">
+                        <a:latin typeface="Courier New" charset="0"/>
+                        <a:ea typeface="Courier New" charset="0"/>
+                        <a:cs typeface="Courier New" charset="0"/>
+                      </a:endParaRPr>
+                    </a:p>
+                  </a:txBody>
+                  <a:tcPr marL="73152" marR="73152" marT="36576" marB="36576" anchor="ctr">
+                    <a:lnL w="0" cap="flat" cmpd="sng" algn="ctr">
+                      <a:noFill/>
+                    </a:lnL>
+                    <a:lnR w="0" cap="flat" cmpd="sng" algn="ctr">
+                      <a:noFill/>
+                    </a:lnR>
+                    <a:lnT w="0" cap="flat" cmpd="sng" algn="ctr">
+                      <a:noFill/>
+                    </a:lnT>
+                    <a:lnB w="12700" cap="flat" cmpd="sng" algn="ctr">
+                      <a:solidFill>
+                        <a:srgbClr val="E5E5E5"/>
+                      </a:solidFill>
+                      <a:prstDash val="solid"/>
+                      <a:round/>
+                      <a:headEnd type="none" w="med" len="med"/>
+                      <a:tailEnd type="none" w="med" len="med"/>
+                    </a:lnB>
+                    <a:solidFill>
+                      <a:srgbClr val="FFFFFF"/>
+                    </a:solidFill>
+                  </a:tcPr>
+                </a:tc>
+                <a:tc>
+                  <a:txBody>
+                    <a:bodyPr/>
+                    <a:lstStyle/>
+                    <a:p>
+                      <a:pPr indent="0" marL="0">
+                        <a:buNone/>
+                      </a:pPr>
+                      <a:r>
+                        <a:rPr lang="en-US" sz="1050" dirty="0">
+                          <a:solidFill>
+                            <a:srgbClr val="1D2D3E"/>
+                          </a:solidFill>
+                          <a:latin typeface="Courier New" pitchFamily="34" charset="0"/>
+                          <a:ea typeface="Courier New" pitchFamily="34" charset="-122"/>
+                          <a:cs typeface="Courier New" pitchFamily="34" charset="-120"/>
+                        </a:rPr>
+                        <a:t>SICF ativo</a:t>
+                      </a:r>
+                      <a:endParaRPr lang="en-US" sz="1050" dirty="0">
+                        <a:latin typeface="Courier New" charset="0"/>
+                        <a:ea typeface="Courier New" charset="0"/>
+                        <a:cs typeface="Courier New" charset="0"/>
+                      </a:endParaRPr>
+                    </a:p>
+                  </a:txBody>
+                  <a:tcPr marL="73152" marR="73152" marT="36576" marB="36576" anchor="ctr">
+                    <a:lnL w="0" cap="flat" cmpd="sng" algn="ctr">
+                      <a:noFill/>
+                    </a:lnL>
+                    <a:lnR w="0" cap="flat" cmpd="sng" algn="ctr">
+                      <a:noFill/>
+                    </a:lnR>
+                    <a:lnT w="0" cap="flat" cmpd="sng" algn="ctr">
+                      <a:noFill/>
+                    </a:lnT>
+                    <a:lnB w="12700" cap="flat" cmpd="sng" algn="ctr">
+                      <a:solidFill>
+                        <a:srgbClr val="E5E5E5"/>
+                      </a:solidFill>
+                      <a:prstDash val="solid"/>
+                      <a:round/>
+                      <a:headEnd type="none" w="med" len="med"/>
+                      <a:tailEnd type="none" w="med" len="med"/>
+                    </a:lnB>
+                    <a:solidFill>
+                      <a:srgbClr val="FFFFFF"/>
+                    </a:solidFill>
+                  </a:tcPr>
+                </a:tc>
+              </a:tr>
+              <a:tr h="438912">
+                <a:tc>
+                  <a:txBody>
+                    <a:bodyPr/>
+                    <a:lstStyle/>
+                    <a:p>
+                      <a:pPr indent="0" marL="0">
+                        <a:buNone/>
+                      </a:pPr>
+                      <a:r>
+                        <a:rPr lang="en-US" sz="1050" dirty="0">
+                          <a:solidFill>
+                            <a:srgbClr val="1D2D3E"/>
+                          </a:solidFill>
+                        </a:rPr>
+                        <a:t>Transporte</a:t>
+                      </a:r>
+                      <a:endParaRPr lang="en-US" sz="1050" dirty="0"/>
+                    </a:p>
+                  </a:txBody>
+                  <a:tcPr marL="73152" marR="73152" marT="36576" marB="36576" anchor="ctr">
+                    <a:lnL w="0" cap="flat" cmpd="sng" algn="ctr">
+                      <a:noFill/>
+                    </a:lnL>
+                    <a:lnR w="0" cap="flat" cmpd="sng" algn="ctr">
+                      <a:noFill/>
+                    </a:lnR>
+                    <a:lnT w="0" cap="flat" cmpd="sng" algn="ctr">
+                      <a:noFill/>
+                    </a:lnT>
+                    <a:lnB w="12700" cap="flat" cmpd="sng" algn="ctr">
+                      <a:solidFill>
+                        <a:srgbClr val="E5E5E5"/>
+                      </a:solidFill>
+                      <a:prstDash val="solid"/>
+                      <a:round/>
+                      <a:headEnd type="none" w="med" len="med"/>
+                      <a:tailEnd type="none" w="med" len="med"/>
+                    </a:lnB>
+                    <a:solidFill>
+                      <a:srgbClr val="FFFFFF"/>
+                    </a:solidFill>
+                  </a:tcPr>
+                </a:tc>
+                <a:tc>
+                  <a:txBody>
+                    <a:bodyPr/>
+                    <a:lstStyle/>
+                    <a:p>
+                      <a:pPr indent="0" marL="0">
+                        <a:buNone/>
+                      </a:pPr>
+                      <a:r>
+                        <a:rPr lang="en-US" sz="1050" dirty="0">
+                          <a:solidFill>
+                            <a:srgbClr val="1D2D3E"/>
+                          </a:solidFill>
+                          <a:latin typeface="Courier New" pitchFamily="34" charset="0"/>
+                          <a:ea typeface="Courier New" pitchFamily="34" charset="-122"/>
+                          <a:cs typeface="Courier New" pitchFamily="34" charset="-120"/>
+                        </a:rPr>
+                        <a:t>ordem Workbench</a:t>
+                      </a:r>
+                      <a:endParaRPr lang="en-US" sz="1050" dirty="0">
+                        <a:latin typeface="Courier New" charset="0"/>
+                        <a:ea typeface="Courier New" charset="0"/>
+                        <a:cs typeface="Courier New" charset="0"/>
+                      </a:endParaRPr>
+                    </a:p>
+                  </a:txBody>
+                  <a:tcPr marL="73152" marR="73152" marT="36576" marB="36576" anchor="ctr">
+                    <a:lnL w="0" cap="flat" cmpd="sng" algn="ctr">
+                      <a:noFill/>
+                    </a:lnL>
+                    <a:lnR w="0" cap="flat" cmpd="sng" algn="ctr">
+                      <a:noFill/>
+                    </a:lnR>
+                    <a:lnT w="0" cap="flat" cmpd="sng" algn="ctr">
+                      <a:noFill/>
+                    </a:lnT>
+                    <a:lnB w="12700" cap="flat" cmpd="sng" algn="ctr">
+                      <a:solidFill>
+                        <a:srgbClr val="E5E5E5"/>
+                      </a:solidFill>
+                      <a:prstDash val="solid"/>
+                      <a:round/>
+                      <a:headEnd type="none" w="med" len="med"/>
+                      <a:tailEnd type="none" w="med" len="med"/>
+                    </a:lnB>
+                    <a:solidFill>
+                      <a:srgbClr val="FFFFFF"/>
+                    </a:solidFill>
+                  </a:tcPr>
+                </a:tc>
+                <a:tc>
+                  <a:txBody>
+                    <a:bodyPr/>
+                    <a:lstStyle/>
+                    <a:p>
+                      <a:pPr indent="0" marL="0">
+                        <a:buNone/>
+                      </a:pPr>
+                      <a:r>
+                        <a:rPr lang="en-US" sz="1050" dirty="0">
+                          <a:solidFill>
+                            <a:srgbClr val="1D2D3E"/>
+                          </a:solidFill>
+                          <a:latin typeface="Courier New" pitchFamily="34" charset="0"/>
+                          <a:ea typeface="Courier New" pitchFamily="34" charset="-122"/>
+                          <a:cs typeface="Courier New" pitchFamily="34" charset="-120"/>
+                        </a:rPr>
+                        <a:t>transport:</a:t>
+                      </a:r>
+                      <a:endParaRPr lang="en-US" sz="1050" dirty="0">
+                        <a:latin typeface="Courier New" charset="0"/>
+                        <a:ea typeface="Courier New" charset="0"/>
+                        <a:cs typeface="Courier New" charset="0"/>
+                      </a:endParaRPr>
+                    </a:p>
+                  </a:txBody>
+                  <a:tcPr marL="73152" marR="73152" marT="36576" marB="36576" anchor="ctr">
+                    <a:lnL w="0" cap="flat" cmpd="sng" algn="ctr">
+                      <a:noFill/>
+                    </a:lnL>
+                    <a:lnR w="0" cap="flat" cmpd="sng" algn="ctr">
+                      <a:noFill/>
+                    </a:lnR>
+                    <a:lnT w="0" cap="flat" cmpd="sng" algn="ctr">
+                      <a:noFill/>
+                    </a:lnT>
+                    <a:lnB w="12700" cap="flat" cmpd="sng" algn="ctr">
+                      <a:solidFill>
+                        <a:srgbClr val="E5E5E5"/>
+                      </a:solidFill>
+                      <a:prstDash val="solid"/>
+                      <a:round/>
+                      <a:headEnd type="none" w="med" len="med"/>
+                      <a:tailEnd type="none" w="med" len="med"/>
+                    </a:lnB>
+                    <a:solidFill>
+                      <a:srgbClr val="FFFFFF"/>
+                    </a:solidFill>
+                  </a:tcPr>
+                </a:tc>
+              </a:tr>
+            </a:tbl>
+          </a:graphicData>
+        </a:graphic>
+      </p:graphicFrame>
+      <p:sp>
+        <p:nvSpPr>
+          <p:cNvPr id="15" name="Cartão"/>
+          <p:cNvSpPr/>
+          <p:nvPr/>
+        </p:nvSpPr>
+        <p:spPr>
+          <a:xfrm>
+            <a:off x="548640" y="5257800"/>
+            <a:ext cx="2602154" cy="914400"/>
+          </a:xfrm>
+          <a:prstGeom prst="roundRect">
+            <a:avLst>
+              <a:gd name="adj" fmla="val 12000"/>
+            </a:avLst>
+          </a:prstGeom>
+          <a:solidFill>
+            <a:srgbClr val="FFFFFF"/>
+          </a:solidFill>
+          <a:ln/>
+          <a:effectLst>
+            <a:outerShdw sx="100000" sy="100000" kx="0" ky="0" algn="bl" rotWithShape="0" blurRad="101600" dist="25400" dir="5400000">
+              <a:srgbClr val="223548">
+                <a:alpha val="16000"/>
+              </a:srgbClr>
+            </a:outerShdw>
+          </a:effectLst>
+        </p:spPr>
+      </p:sp>
+      <p:sp>
+        <p:nvSpPr>
+          <p:cNvPr id="16" name="Ícone upload-to-cloud"/>
+          <p:cNvSpPr/>
+          <p:nvPr/>
+        </p:nvSpPr>
+        <p:spPr>
+          <a:xfrm>
+            <a:off x="731520" y="5440680"/>
+            <a:ext cx="548640" cy="548640"/>
+          </a:xfrm>
+          <a:prstGeom prst="roundRect">
+            <a:avLst>
+              <a:gd name="adj" fmla="val 22000"/>
+            </a:avLst>
+          </a:prstGeom>
+          <a:solidFill>
+            <a:srgbClr val="E1F4FF"/>
+          </a:solidFill>
+          <a:ln/>
+        </p:spPr>
+      </p:sp>
+      <p:pic>
+        <p:nvPicPr>
+          <p:cNvPr id="17" name="Image 0" descr="upload-to-cloud">    </p:cNvPr>
+          <p:cNvPicPr>
+            <a:picLocks noChangeAspect="1"/>
+          </p:cNvPicPr>
+          <p:nvPr/>
+        </p:nvPicPr>
+        <p:blipFill>
+          <a:blip r:embed="rId1"/>
+          <a:stretch>
+            <a:fillRect/>
+          </a:stretch>
+        </p:blipFill>
+        <p:spPr>
+          <a:xfrm>
+            <a:off x="863194" y="5572354"/>
+            <a:ext cx="285293" cy="285293"/>
+          </a:xfrm>
+          <a:prstGeom prst="rect">
+            <a:avLst/>
+          </a:prstGeom>
+        </p:spPr>
+      </p:pic>
+      <p:sp>
+        <p:nvSpPr>
+          <p:cNvPr id="18" name="Text 13"/>
+          <p:cNvSpPr txBox="1"/>
+          <p:nvPr/>
+        </p:nvSpPr>
+        <p:spPr>
+          <a:xfrm>
+            <a:off x="1417320" y="5257800"/>
+            <a:ext cx="1596314" cy="914400"/>
+          </a:xfrm>
+          <a:prstGeom prst="rect">
+            <a:avLst/>
+          </a:prstGeom>
+          <a:noFill/>
+          <a:ln/>
+        </p:spPr>
+        <p:txBody>
+          <a:bodyPr wrap="square" lIns="0" tIns="0" rIns="0" bIns="0" rtlCol="0" anchor="ctr"/>
+          <a:lstStyle/>
+          <a:p>
+            <a:pPr indent="0" marL="0">
+              <a:buNone/>
+            </a:pPr>
+            <a:r>
+              <a:rPr lang="en-US" sz="1300" b="1" dirty="0">
+                <a:solidFill>
+                  <a:srgbClr val="1D2D3E"/>
+                </a:solidFill>
+              </a:rPr>
+              <a:t>npm run deploy</a:t>
+            </a:r>
+            <a:endParaRPr lang="en-US" sz="1300" dirty="0"/>
+          </a:p>
+        </p:txBody>
+      </p:sp>
+      <p:sp>
+        <p:nvSpPr>
+          <p:cNvPr id="19" name="Shape 14"/>
+          <p:cNvSpPr/>
+          <p:nvPr/>
+        </p:nvSpPr>
+        <p:spPr>
+          <a:xfrm>
+            <a:off x="3169082" y="5715000"/>
+            <a:ext cx="192024" cy="0"/>
+          </a:xfrm>
+          <a:prstGeom prst="line">
+            <a:avLst/>
+          </a:prstGeom>
+          <a:noFill/>
+          <a:ln w="19050">
+            <a:solidFill>
+              <a:srgbClr val="556B82"/>
+            </a:solidFill>
+            <a:prstDash val="solid"/>
+            <a:tailEnd type="triangle"/>
+          </a:ln>
+        </p:spPr>
+      </p:sp>
+      <p:sp>
+        <p:nvSpPr>
+          <p:cNvPr id="20" name="Cartão"/>
+          <p:cNvSpPr/>
+          <p:nvPr/>
+        </p:nvSpPr>
+        <p:spPr>
+          <a:xfrm>
+            <a:off x="3379394" y="5257800"/>
+            <a:ext cx="2602154" cy="914400"/>
+          </a:xfrm>
+          <a:prstGeom prst="roundRect">
+            <a:avLst>
+              <a:gd name="adj" fmla="val 12000"/>
+            </a:avLst>
+          </a:prstGeom>
+          <a:solidFill>
+            <a:srgbClr val="FFFFFF"/>
+          </a:solidFill>
+          <a:ln/>
+          <a:effectLst>
+            <a:outerShdw sx="100000" sy="100000" kx="0" ky="0" algn="bl" rotWithShape="0" blurRad="101600" dist="25400" dir="5400000">
+              <a:srgbClr val="223548">
+                <a:alpha val="16000"/>
+              </a:srgbClr>
+            </a:outerShdw>
+          </a:effectLst>
+        </p:spPr>
+      </p:sp>
+      <p:sp>
+        <p:nvSpPr>
+          <p:cNvPr id="21" name="Ícone sap-box"/>
+          <p:cNvSpPr/>
+          <p:nvPr/>
+        </p:nvSpPr>
+        <p:spPr>
+          <a:xfrm>
+            <a:off x="3562274" y="5440680"/>
+            <a:ext cx="548640" cy="548640"/>
+          </a:xfrm>
+          <a:prstGeom prst="roundRect">
+            <a:avLst>
+              <a:gd name="adj" fmla="val 22000"/>
+            </a:avLst>
+          </a:prstGeom>
+          <a:solidFill>
+            <a:srgbClr val="E1F4FF"/>
+          </a:solidFill>
+          <a:ln/>
+        </p:spPr>
+      </p:sp>
+      <p:pic>
+        <p:nvPicPr>
+          <p:cNvPr id="22" name="Image 1" descr="sap-box">    </p:cNvPr>
+          <p:cNvPicPr>
+            <a:picLocks noChangeAspect="1"/>
+          </p:cNvPicPr>
+          <p:nvPr/>
+        </p:nvPicPr>
+        <p:blipFill>
+          <a:blip r:embed="rId2"/>
+          <a:stretch>
+            <a:fillRect/>
+          </a:stretch>
+        </p:blipFill>
+        <p:spPr>
+          <a:xfrm>
+            <a:off x="3693947" y="5572354"/>
+            <a:ext cx="285293" cy="285293"/>
+          </a:xfrm>
+          <a:prstGeom prst="rect">
+            <a:avLst/>
+          </a:prstGeom>
+        </p:spPr>
+      </p:pic>
+      <p:sp>
+        <p:nvSpPr>
+          <p:cNvPr id="23" name="Text 17"/>
+          <p:cNvSpPr txBox="1"/>
+          <p:nvPr/>
+        </p:nvSpPr>
+        <p:spPr>
+          <a:xfrm>
+            <a:off x="4248074" y="5257800"/>
+            <a:ext cx="1596314" cy="914400"/>
+          </a:xfrm>
+          <a:prstGeom prst="rect">
+            <a:avLst/>
+          </a:prstGeom>
+          <a:noFill/>
+          <a:ln/>
+        </p:spPr>
+        <p:txBody>
+          <a:bodyPr wrap="square" lIns="0" tIns="0" rIns="0" bIns="0" rtlCol="0" anchor="ctr"/>
+          <a:lstStyle/>
+          <a:p>
+            <a:pPr indent="0" marL="0">
+              <a:buNone/>
+            </a:pPr>
+            <a:r>
+              <a:rPr lang="en-US" sz="1300" b="1" dirty="0">
+                <a:solidFill>
+                  <a:srgbClr val="1D2D3E"/>
+                </a:solidFill>
+              </a:rPr>
+              <a:t>BSP (sem IAM App)</a:t>
+            </a:r>
+            <a:endParaRPr lang="en-US" sz="1300" dirty="0"/>
+          </a:p>
+        </p:txBody>
+      </p:sp>
+      <p:sp>
+        <p:nvSpPr>
+          <p:cNvPr id="24" name="Shape 18"/>
+          <p:cNvSpPr/>
+          <p:nvPr/>
+        </p:nvSpPr>
+        <p:spPr>
+          <a:xfrm>
+            <a:off x="5999836" y="5715000"/>
+            <a:ext cx="192024" cy="0"/>
+          </a:xfrm>
+          <a:prstGeom prst="line">
+            <a:avLst/>
+          </a:prstGeom>
+          <a:noFill/>
+          <a:ln w="19050">
+            <a:solidFill>
+              <a:srgbClr val="556B82"/>
+            </a:solidFill>
+            <a:prstDash val="solid"/>
+            <a:tailEnd type="triangle"/>
+          </a:ln>
+        </p:spPr>
+      </p:sp>
+      <p:sp>
+        <p:nvSpPr>
+          <p:cNvPr id="25" name="Cartão"/>
+          <p:cNvSpPr/>
+          <p:nvPr/>
+        </p:nvSpPr>
+        <p:spPr>
+          <a:xfrm>
+            <a:off x="6210148" y="5257800"/>
+            <a:ext cx="2602154" cy="914400"/>
+          </a:xfrm>
+          <a:prstGeom prst="roundRect">
+            <a:avLst>
+              <a:gd name="adj" fmla="val 12000"/>
+            </a:avLst>
+          </a:prstGeom>
+          <a:solidFill>
+            <a:srgbClr val="FFFFFF"/>
+          </a:solidFill>
+          <a:ln/>
+          <a:effectLst>
+            <a:outerShdw sx="100000" sy="100000" kx="0" ky="0" algn="bl" rotWithShape="0" blurRad="101600" dist="25400" dir="5400000">
+              <a:srgbClr val="223548">
+                <a:alpha val="16000"/>
+              </a:srgbClr>
+            </a:outerShdw>
+          </a:effectLst>
+        </p:spPr>
+      </p:sp>
+      <p:sp>
+        <p:nvSpPr>
+          <p:cNvPr id="26" name="Ícone list"/>
+          <p:cNvSpPr/>
+          <p:nvPr/>
+        </p:nvSpPr>
+        <p:spPr>
+          <a:xfrm>
+            <a:off x="6393028" y="5440680"/>
+            <a:ext cx="548640" cy="548640"/>
+          </a:xfrm>
+          <a:prstGeom prst="roundRect">
+            <a:avLst>
+              <a:gd name="adj" fmla="val 22000"/>
+            </a:avLst>
+          </a:prstGeom>
+          <a:solidFill>
+            <a:srgbClr val="E1F4FF"/>
+          </a:solidFill>
+          <a:ln/>
+        </p:spPr>
+      </p:sp>
+      <p:pic>
+        <p:nvPicPr>
+          <p:cNvPr id="27" name="Image 2" descr="list">    </p:cNvPr>
+          <p:cNvPicPr>
+            <a:picLocks noChangeAspect="1"/>
+          </p:cNvPicPr>
+          <p:nvPr/>
+        </p:nvPicPr>
+        <p:blipFill>
+          <a:blip r:embed="rId3"/>
+          <a:stretch>
+            <a:fillRect/>
+          </a:stretch>
+        </p:blipFill>
+        <p:spPr>
+          <a:xfrm>
+            <a:off x="6524701" y="5572354"/>
+            <a:ext cx="285293" cy="285293"/>
+          </a:xfrm>
+          <a:prstGeom prst="rect">
+            <a:avLst/>
+          </a:prstGeom>
+        </p:spPr>
+      </p:pic>
+      <p:sp>
+        <p:nvSpPr>
+          <p:cNvPr id="28" name="Text 21"/>
+          <p:cNvSpPr txBox="1"/>
+          <p:nvPr/>
+        </p:nvSpPr>
+        <p:spPr>
+          <a:xfrm>
+            <a:off x="7078828" y="5257800"/>
+            <a:ext cx="1596314" cy="914400"/>
+          </a:xfrm>
+          <a:prstGeom prst="rect">
+            <a:avLst/>
+          </a:prstGeom>
+          <a:noFill/>
+          <a:ln/>
+        </p:spPr>
+        <p:txBody>
+          <a:bodyPr wrap="square" lIns="0" tIns="0" rIns="0" bIns="0" rtlCol="0" anchor="ctr"/>
+          <a:lstStyle/>
+          <a:p>
+            <a:pPr indent="0" marL="0">
+              <a:buNone/>
+            </a:pPr>
+            <a:r>
+              <a:rPr lang="en-US" sz="1300" b="1" dirty="0">
+                <a:solidFill>
+                  <a:srgbClr val="1D2D3E"/>
+                </a:solidFill>
+              </a:rPr>
+              <a:t>Catálogo /UI2/FLPAM</a:t>
+            </a:r>
+            <a:endParaRPr lang="en-US" sz="1300" dirty="0"/>
+          </a:p>
+        </p:txBody>
+      </p:sp>
+      <p:sp>
+        <p:nvSpPr>
+          <p:cNvPr id="29" name="Shape 22"/>
+          <p:cNvSpPr/>
+          <p:nvPr/>
+        </p:nvSpPr>
+        <p:spPr>
+          <a:xfrm>
+            <a:off x="8830589" y="5715000"/>
+            <a:ext cx="192024" cy="0"/>
+          </a:xfrm>
+          <a:prstGeom prst="line">
+            <a:avLst/>
+          </a:prstGeom>
+          <a:noFill/>
+          <a:ln w="19050">
+            <a:solidFill>
+              <a:srgbClr val="556B82"/>
+            </a:solidFill>
+            <a:prstDash val="solid"/>
+            <a:tailEnd type="triangle"/>
+          </a:ln>
+        </p:spPr>
+      </p:sp>
+      <p:sp>
+        <p:nvSpPr>
+          <p:cNvPr id="30" name="Cartão"/>
+          <p:cNvSpPr/>
+          <p:nvPr/>
+        </p:nvSpPr>
+        <p:spPr>
+          <a:xfrm>
+            <a:off x="9040901" y="5257800"/>
+            <a:ext cx="2602154" cy="914400"/>
+          </a:xfrm>
+          <a:prstGeom prst="roundRect">
+            <a:avLst>
+              <a:gd name="adj" fmla="val 12000"/>
+            </a:avLst>
+          </a:prstGeom>
+          <a:solidFill>
+            <a:srgbClr val="0070F2"/>
+          </a:solidFill>
+          <a:ln/>
+          <a:effectLst>
+            <a:outerShdw sx="100000" sy="100000" kx="0" ky="0" algn="bl" rotWithShape="0" blurRad="101600" dist="25400" dir="5400000">
+              <a:srgbClr val="223548">
+                <a:alpha val="16000"/>
+              </a:srgbClr>
+            </a:outerShdw>
+          </a:effectLst>
+        </p:spPr>
+      </p:sp>
+      <p:sp>
+        <p:nvSpPr>
+          <p:cNvPr id="31" name="Ícone home"/>
+          <p:cNvSpPr/>
+          <p:nvPr/>
+        </p:nvSpPr>
+        <p:spPr>
+          <a:xfrm>
+            <a:off x="9223781" y="5440680"/>
+            <a:ext cx="548640" cy="548640"/>
+          </a:xfrm>
+          <a:prstGeom prst="roundRect">
+            <a:avLst>
+              <a:gd name="adj" fmla="val 22000"/>
+            </a:avLst>
+          </a:prstGeom>
+          <a:solidFill>
+            <a:srgbClr val="FFFFFF"/>
+          </a:solidFill>
+          <a:ln/>
+        </p:spPr>
+      </p:sp>
+      <p:pic>
+        <p:nvPicPr>
+          <p:cNvPr id="32" name="Image 3" descr="home">    </p:cNvPr>
+          <p:cNvPicPr>
+            <a:picLocks noChangeAspect="1"/>
+          </p:cNvPicPr>
+          <p:nvPr/>
+        </p:nvPicPr>
+        <p:blipFill>
+          <a:blip r:embed="rId4"/>
+          <a:stretch>
+            <a:fillRect/>
+          </a:stretch>
+        </p:blipFill>
+        <p:spPr>
+          <a:xfrm>
+            <a:off x="9355455" y="5572354"/>
+            <a:ext cx="285293" cy="285293"/>
+          </a:xfrm>
+          <a:prstGeom prst="rect">
+            <a:avLst/>
+          </a:prstGeom>
+        </p:spPr>
+      </p:pic>
+      <p:sp>
+        <p:nvSpPr>
+          <p:cNvPr id="33" name="Text 25"/>
+          <p:cNvSpPr txBox="1"/>
+          <p:nvPr/>
+        </p:nvSpPr>
+        <p:spPr>
+          <a:xfrm>
+            <a:off x="9909581" y="5257800"/>
+            <a:ext cx="1596314" cy="914400"/>
+          </a:xfrm>
+          <a:prstGeom prst="rect">
+            <a:avLst/>
+          </a:prstGeom>
+          <a:noFill/>
+          <a:ln/>
+        </p:spPr>
+        <p:txBody>
+          <a:bodyPr wrap="square" lIns="0" tIns="0" rIns="0" bIns="0" rtlCol="0" anchor="ctr"/>
+          <a:lstStyle/>
+          <a:p>
+            <a:pPr indent="0" marL="0">
+              <a:buNone/>
+            </a:pPr>
+            <a:r>
+              <a:rPr lang="en-US" sz="1300" b="1" dirty="0">
+                <a:solidFill>
+                  <a:srgbClr val="FFFFFF"/>
+                </a:solidFill>
+              </a:rPr>
+              <a:t>Launchpad</a:t>
+            </a:r>
+            <a:endParaRPr lang="en-US" sz="1300" dirty="0"/>
+          </a:p>
+        </p:txBody>
+      </p:sp>
+      <p:sp>
+        <p:nvSpPr>
+          <p:cNvPr id="25" name="Slide Number Placeholder 0"/>
+          <p:cNvSpPr>
+            <a:spLocks noGrp="1"/>
+          </p:cNvSpPr>
+          <p:nvPr>
+            <p:ph type="sldNum" sz="quarter" idx="4294967295"/>
+          </p:nvPr>
+        </p:nvSpPr>
+        <p:spPr>
+          <a:xfrm>
+            <a:off x="11183112" y="6419088"/>
+            <a:ext cx="457200" cy="274320"/>
+          </a:xfrm>
+          <a:prstGeom prst="rect">
+            <a:avLst/>
+          </a:prstGeom>
+          <a:extLst>
+            <a:ext uri="{C572A759-6A51-4108-AA02-DFA0A04FC94B}">
+              <ma14:wrappingTextBoxFlag xmlns:ma14="http://schemas.microsoft.com/office/mac/drawingml/2011/main" val="0"/>
+            </a:ext>
+          </a:extLst>
+        </p:spPr>
+        <p:txBody>
+          <a:bodyPr lIns="0" tIns="0" rIns="0" bIns="0" anchor="ctr"/>
+          <a:lstStyle>
+            <a:lvl1pPr>
+              <a:defRPr sz="900">
+                <a:solidFill>
+                  <a:srgbClr val="556B82"/>
+                </a:solidFill>
+              </a:defRPr>
+            </a:lvl1pPr>
+          </a:lstStyle>
+          <a:p>
+            <a:pPr algn="r"/>
+            <a:fld id="{F7021451-1387-4CA6-816F-3879F97B5CBC}" type="slidenum">
+              <a:rPr b="0" lang="en-US"/>
+              <a:t>24</a:t>
+            </a:fld>
+            <a:endParaRPr lang="en-US"/>
+          </a:p>
+        </p:txBody>
+      </p:sp>
+    </p:spTree>
+  </p:cSld>
+  <p:clrMapOvr>
+    <a:masterClrMapping/>
+  </p:clrMapOvr>
+</p:sld>
+</file>
+
 <file path=ppt/slides/slide3.xml><?xml version="1.0" encoding="utf-8"?>
 <p:sld xmlns:a="http://schemas.openxmlformats.org/drawingml/2006/main" xmlns:r="http://schemas.openxmlformats.org/officeDocument/2006/relationships" xmlns:p="http://schemas.openxmlformats.org/presentationml/2006/main">
   <p:cSld name="Slide 3">
@@ -32195,6 +36125,3267 @@
               <a:t>  deploy-to-abap</a:t>
             </a:r>
             <a:endParaRPr lang="en-US" sz="1100" dirty="0"/>
+          </a:p>
+        </p:txBody>
+      </p:sp>
+    </p:spTree>
+  </p:cSld>
+  <p:clrMapOvr>
+    <a:masterClrMapping/>
+  </p:clrMapOvr>
+</p:sld>
+</file>
+
+<file path=ppt/slides/slide30.xml><?xml version="1.0" encoding="utf-8"?>
+<p:sld xmlns:a="http://schemas.openxmlformats.org/drawingml/2006/main" xmlns:r="http://schemas.openxmlformats.org/officeDocument/2006/relationships" xmlns:p="http://schemas.openxmlformats.org/presentationml/2006/main">
+  <p:cSld name="Slide 25">
+    <p:spTree>
+      <p:nvGrpSpPr>
+        <p:cNvPr id="1" name=""/>
+        <p:cNvGrpSpPr/>
+        <p:nvPr/>
+      </p:nvGrpSpPr>
+      <p:grpSpPr>
+        <a:xfrm>
+          <a:off x="0" y="0"/>
+          <a:ext cx="0" cy="0"/>
+          <a:chOff x="0" y="0"/>
+          <a:chExt cx="0" cy="0"/>
+        </a:xfrm>
+      </p:grpSpPr>
+      <p:sp>
+        <p:nvSpPr>
+          <p:cNvPr id="2" name="Text 0"/>
+          <p:cNvSpPr/>
+          <p:nvPr>
+            <p:ph idx="100" type="body" hasCustomPrompt="1"/>
+          </p:nvPr>
+        </p:nvSpPr>
+        <p:spPr>
+          <a:xfrm>
+            <a:off x="548640" y="384048"/>
+            <a:ext cx="9144000" cy="274320"/>
+          </a:xfrm>
+          <a:prstGeom prst="rect">
+            <a:avLst/>
+          </a:prstGeom>
+          <a:noFill/>
+          <a:ln/>
+        </p:spPr>
+        <p:txBody>
+          <a:bodyPr wrap="square" lIns="0" tIns="0" rIns="0" bIns="0" rtlCol="0" anchor="ctr"/>
+          <a:lstStyle/>
+          <a:p>
+            <a:pPr algn="l" indent="0" marL="0">
+              <a:buNone/>
+            </a:pPr>
+            <a:r>
+              <a:rPr lang="en-US" sz="1100" b="1" spc="150" kern="0" dirty="0">
+                <a:solidFill>
+                  <a:schemeClr val="accent1"/>
+                </a:solidFill>
+              </a:rPr>
+              <a:t>ACESSO NO ON-PREMISE</a:t>
+            </a:r>
+            <a:endParaRPr lang="en-US" sz="1100" dirty="0"/>
+          </a:p>
+        </p:txBody>
+      </p:sp>
+      <p:sp>
+        <p:nvSpPr>
+          <p:cNvPr id="3" name="Text 0"/>
+          <p:cNvSpPr/>
+          <p:nvPr>
+            <p:ph idx="101" type="title" hasCustomPrompt="1"/>
+          </p:nvPr>
+        </p:nvSpPr>
+        <p:spPr>
+          <a:xfrm>
+            <a:off x="548640" y="676656"/>
+            <a:ext cx="11094415" cy="658368"/>
+          </a:xfrm>
+          <a:prstGeom prst="rect">
+            <a:avLst/>
+          </a:prstGeom>
+          <a:noFill/>
+          <a:ln/>
+        </p:spPr>
+        <p:txBody>
+          <a:bodyPr wrap="square" lIns="0" tIns="0" rIns="0" bIns="0" rtlCol="0" anchor="ctr"/>
+          <a:lstStyle/>
+          <a:p>
+            <a:pPr algn="l" indent="0" marL="0">
+              <a:buNone/>
+            </a:pPr>
+            <a:r>
+              <a:rPr lang="en-US" sz="3000" b="1" dirty="0">
+                <a:solidFill>
+                  <a:schemeClr val="tx1"/>
+                </a:solidFill>
+              </a:rPr>
+              <a:t>No On-Premise, a entrada é o SAP Fiori launchpad</a:t>
+            </a:r>
+            <a:endParaRPr lang="en-US" sz="3000" dirty="0"/>
+          </a:p>
+        </p:txBody>
+      </p:sp>
+      <p:sp>
+        <p:nvSpPr>
+          <p:cNvPr id="5" name="Cartão"/>
+          <p:cNvSpPr/>
+          <p:nvPr/>
+        </p:nvSpPr>
+        <p:spPr>
+          <a:xfrm>
+            <a:off x="548640" y="1645920"/>
+            <a:ext cx="3515258" cy="4526280"/>
+          </a:xfrm>
+          <a:prstGeom prst="roundRect">
+            <a:avLst>
+              <a:gd name="adj" fmla="val 3121"/>
+            </a:avLst>
+          </a:prstGeom>
+          <a:solidFill>
+            <a:srgbClr val="FFFFFF"/>
+          </a:solidFill>
+          <a:ln/>
+          <a:effectLst>
+            <a:outerShdw sx="100000" sy="100000" kx="0" ky="0" algn="bl" rotWithShape="0" blurRad="101600" dist="25400" dir="5400000">
+              <a:srgbClr val="223548">
+                <a:alpha val="16000"/>
+              </a:srgbClr>
+            </a:outerShdw>
+          </a:effectLst>
+        </p:spPr>
+      </p:sp>
+      <p:sp>
+        <p:nvSpPr>
+          <p:cNvPr id="6" name="Ícone world"/>
+          <p:cNvSpPr/>
+          <p:nvPr/>
+        </p:nvSpPr>
+        <p:spPr>
+          <a:xfrm>
+            <a:off x="822960" y="1874520"/>
+            <a:ext cx="594360" cy="594360"/>
+          </a:xfrm>
+          <a:prstGeom prst="roundRect">
+            <a:avLst>
+              <a:gd name="adj" fmla="val 22000"/>
+            </a:avLst>
+          </a:prstGeom>
+          <a:solidFill>
+            <a:srgbClr val="F5FAE5"/>
+          </a:solidFill>
+          <a:ln/>
+        </p:spPr>
+      </p:sp>
+      <p:pic>
+        <p:nvPicPr>
+          <p:cNvPr id="7" name="Image 0" descr="world">    </p:cNvPr>
+          <p:cNvPicPr>
+            <a:picLocks noChangeAspect="1"/>
+          </p:cNvPicPr>
+          <p:nvPr/>
+        </p:nvPicPr>
+        <p:blipFill>
+          <a:blip r:embed="rId1"/>
+          <a:stretch>
+            <a:fillRect/>
+          </a:stretch>
+        </p:blipFill>
+        <p:spPr>
+          <a:xfrm>
+            <a:off x="965606" y="2017166"/>
+            <a:ext cx="309067" cy="309067"/>
+          </a:xfrm>
+          <a:prstGeom prst="rect">
+            <a:avLst/>
+          </a:prstGeom>
+        </p:spPr>
+      </p:pic>
+      <p:sp>
+        <p:nvSpPr>
+          <p:cNvPr id="8" name="Status Adotado"/>
+          <p:cNvSpPr/>
+          <p:nvPr/>
+        </p:nvSpPr>
+        <p:spPr>
+          <a:xfrm>
+            <a:off x="2990027" y="2011680"/>
+            <a:ext cx="799551" cy="274320"/>
+          </a:xfrm>
+          <a:prstGeom prst="roundRect">
+            <a:avLst>
+              <a:gd name="adj" fmla="val 50000"/>
+            </a:avLst>
+          </a:prstGeom>
+          <a:solidFill>
+            <a:srgbClr val="F5FAE5"/>
+          </a:solidFill>
+          <a:ln/>
+        </p:spPr>
+        <p:txBody>
+          <a:bodyPr wrap="square" lIns="0" tIns="0" rIns="0" bIns="0" rtlCol="0" anchor="ctr"/>
+          <a:lstStyle/>
+          <a:p>
+            <a:pPr algn="ctr" indent="0" marL="0">
+              <a:buNone/>
+            </a:pPr>
+            <a:r>
+              <a:rPr lang="en-US" sz="1100" b="1" dirty="0">
+                <a:solidFill>
+                  <a:srgbClr val="256F3A"/>
+                </a:solidFill>
+              </a:rPr>
+              <a:t>Passo 1</a:t>
+            </a:r>
+            <a:endParaRPr lang="en-US" sz="1100" dirty="0"/>
+          </a:p>
+        </p:txBody>
+      </p:sp>
+      <p:sp>
+        <p:nvSpPr>
+          <p:cNvPr id="9" name="Text 5"/>
+          <p:cNvSpPr txBox="1"/>
+          <p:nvPr/>
+        </p:nvSpPr>
+        <p:spPr>
+          <a:xfrm>
+            <a:off x="822960" y="2697480"/>
+            <a:ext cx="2966618" cy="594360"/>
+          </a:xfrm>
+          <a:prstGeom prst="rect">
+            <a:avLst/>
+          </a:prstGeom>
+          <a:noFill/>
+          <a:ln/>
+        </p:spPr>
+        <p:txBody>
+          <a:bodyPr wrap="square" lIns="0" tIns="0" rIns="0" bIns="0" rtlCol="0" anchor="t"/>
+          <a:lstStyle/>
+          <a:p>
+            <a:pPr indent="0" marL="0">
+              <a:buNone/>
+            </a:pPr>
+            <a:r>
+              <a:rPr lang="en-US" sz="1600" b="1" dirty="0">
+                <a:solidFill>
+                  <a:srgbClr val="1D2D3E"/>
+                </a:solidFill>
+              </a:rPr>
+              <a:t>Catálogo técnico</a:t>
+            </a:r>
+            <a:endParaRPr lang="en-US" sz="1600" dirty="0"/>
+          </a:p>
+        </p:txBody>
+      </p:sp>
+      <p:sp>
+        <p:nvSpPr>
+          <p:cNvPr id="10" name="Text 6"/>
+          <p:cNvSpPr txBox="1"/>
+          <p:nvPr/>
+        </p:nvSpPr>
+        <p:spPr>
+          <a:xfrm>
+            <a:off x="822960" y="3383280"/>
+            <a:ext cx="2966618" cy="1371600"/>
+          </a:xfrm>
+          <a:prstGeom prst="rect">
+            <a:avLst/>
+          </a:prstGeom>
+          <a:noFill/>
+          <a:ln/>
+        </p:spPr>
+        <p:txBody>
+          <a:bodyPr wrap="square" lIns="0" tIns="0" rIns="0" bIns="0" rtlCol="0" anchor="t"/>
+          <a:lstStyle/>
+          <a:p>
+            <a:pPr indent="0" marL="0">
+              <a:buNone/>
+            </a:pPr>
+            <a:r>
+              <a:rPr lang="en-US" sz="1250" dirty="0">
+                <a:solidFill>
+                  <a:srgbClr val="1D2D3E"/>
+                </a:solidFill>
+              </a:rPr>
+              <a:t>/UI2/FLPAM: um app descriptor por app, com tile e target mapping (ZPCPedidoCompra-manage → ZPC_PEDIDOS).</a:t>
+            </a:r>
+            <a:endParaRPr lang="en-US" sz="1250" dirty="0"/>
+          </a:p>
+        </p:txBody>
+      </p:sp>
+      <p:sp>
+        <p:nvSpPr>
+          <p:cNvPr id="11" name="Shape 7"/>
+          <p:cNvSpPr/>
+          <p:nvPr/>
+        </p:nvSpPr>
+        <p:spPr>
+          <a:xfrm>
+            <a:off x="822960" y="4846320"/>
+            <a:ext cx="2966618" cy="0"/>
+          </a:xfrm>
+          <a:prstGeom prst="line">
+            <a:avLst/>
+          </a:prstGeom>
+          <a:noFill/>
+          <a:ln w="12700">
+            <a:solidFill>
+              <a:srgbClr val="E5E5E5"/>
+            </a:solidFill>
+            <a:prstDash val="solid"/>
+          </a:ln>
+        </p:spPr>
+      </p:sp>
+      <p:sp>
+        <p:nvSpPr>
+          <p:cNvPr id="12" name="Text 8"/>
+          <p:cNvSpPr txBox="1"/>
+          <p:nvPr/>
+        </p:nvSpPr>
+        <p:spPr>
+          <a:xfrm>
+            <a:off x="822960" y="4983480"/>
+            <a:ext cx="2966618" cy="1005840"/>
+          </a:xfrm>
+          <a:prstGeom prst="rect">
+            <a:avLst/>
+          </a:prstGeom>
+          <a:noFill/>
+          <a:ln/>
+        </p:spPr>
+        <p:txBody>
+          <a:bodyPr wrap="square" lIns="0" tIns="0" rIns="0" bIns="0" rtlCol="0" anchor="t"/>
+          <a:lstStyle/>
+          <a:p>
+            <a:pPr indent="0" marL="0">
+              <a:buNone/>
+            </a:pPr>
+            <a:r>
+              <a:rPr lang="en-US" sz="1150" dirty="0">
+                <a:solidFill>
+                  <a:srgbClr val="556B82"/>
+                </a:solidFill>
+              </a:rPr>
+              <a:t>Os intents são os mesmos dos manifests e do launchpad local.</a:t>
+            </a:r>
+            <a:endParaRPr lang="en-US" sz="1150" dirty="0"/>
+          </a:p>
+        </p:txBody>
+      </p:sp>
+      <p:sp>
+        <p:nvSpPr>
+          <p:cNvPr id="13" name="Cartão"/>
+          <p:cNvSpPr/>
+          <p:nvPr/>
+        </p:nvSpPr>
+        <p:spPr>
+          <a:xfrm>
+            <a:off x="4338218" y="1645920"/>
+            <a:ext cx="3515258" cy="4526280"/>
+          </a:xfrm>
+          <a:prstGeom prst="roundRect">
+            <a:avLst>
+              <a:gd name="adj" fmla="val 3121"/>
+            </a:avLst>
+          </a:prstGeom>
+          <a:solidFill>
+            <a:srgbClr val="FFFFFF"/>
+          </a:solidFill>
+          <a:ln/>
+          <a:effectLst>
+            <a:outerShdw sx="100000" sy="100000" kx="0" ky="0" algn="bl" rotWithShape="0" blurRad="101600" dist="25400" dir="5400000">
+              <a:srgbClr val="223548">
+                <a:alpha val="16000"/>
+              </a:srgbClr>
+            </a:outerShdw>
+          </a:effectLst>
+        </p:spPr>
+      </p:sp>
+      <p:sp>
+        <p:nvSpPr>
+          <p:cNvPr id="14" name="Ícone home"/>
+          <p:cNvSpPr/>
+          <p:nvPr/>
+        </p:nvSpPr>
+        <p:spPr>
+          <a:xfrm>
+            <a:off x="4612538" y="1874520"/>
+            <a:ext cx="594360" cy="594360"/>
+          </a:xfrm>
+          <a:prstGeom prst="roundRect">
+            <a:avLst>
+              <a:gd name="adj" fmla="val 22000"/>
+            </a:avLst>
+          </a:prstGeom>
+          <a:solidFill>
+            <a:srgbClr val="E1F4FF"/>
+          </a:solidFill>
+          <a:ln/>
+        </p:spPr>
+      </p:sp>
+      <p:pic>
+        <p:nvPicPr>
+          <p:cNvPr id="15" name="Image 1" descr="home">    </p:cNvPr>
+          <p:cNvPicPr>
+            <a:picLocks noChangeAspect="1"/>
+          </p:cNvPicPr>
+          <p:nvPr/>
+        </p:nvPicPr>
+        <p:blipFill>
+          <a:blip r:embed="rId2"/>
+          <a:stretch>
+            <a:fillRect/>
+          </a:stretch>
+        </p:blipFill>
+        <p:spPr>
+          <a:xfrm>
+            <a:off x="4755185" y="2017166"/>
+            <a:ext cx="309067" cy="309067"/>
+          </a:xfrm>
+          <a:prstGeom prst="rect">
+            <a:avLst/>
+          </a:prstGeom>
+        </p:spPr>
+      </p:pic>
+      <p:sp>
+        <p:nvSpPr>
+          <p:cNvPr id="16" name="Status Fora do trial"/>
+          <p:cNvSpPr/>
+          <p:nvPr/>
+        </p:nvSpPr>
+        <p:spPr>
+          <a:xfrm>
+            <a:off x="6345083" y="2011680"/>
+            <a:ext cx="1234074" cy="274320"/>
+          </a:xfrm>
+          <a:prstGeom prst="roundRect">
+            <a:avLst>
+              <a:gd name="adj" fmla="val 50000"/>
+            </a:avLst>
+          </a:prstGeom>
+          <a:solidFill>
+            <a:srgbClr val="E1F4FF"/>
+          </a:solidFill>
+          <a:ln/>
+        </p:spPr>
+        <p:txBody>
+          <a:bodyPr wrap="square" lIns="0" tIns="0" rIns="0" bIns="0" rtlCol="0" anchor="ctr"/>
+          <a:lstStyle/>
+          <a:p>
+            <a:pPr algn="ctr" indent="0" marL="0">
+              <a:buNone/>
+            </a:pPr>
+            <a:r>
+              <a:rPr lang="en-US" sz="1100" b="1" dirty="0">
+                <a:solidFill>
+                  <a:srgbClr val="0064D9"/>
+                </a:solidFill>
+              </a:rPr>
+              <a:t>Passo 2</a:t>
+            </a:r>
+            <a:endParaRPr lang="en-US" sz="1100" dirty="0"/>
+          </a:p>
+        </p:txBody>
+      </p:sp>
+      <p:sp>
+        <p:nvSpPr>
+          <p:cNvPr id="17" name="Text 12"/>
+          <p:cNvSpPr txBox="1"/>
+          <p:nvPr/>
+        </p:nvSpPr>
+        <p:spPr>
+          <a:xfrm>
+            <a:off x="4612538" y="2697480"/>
+            <a:ext cx="2966618" cy="594360"/>
+          </a:xfrm>
+          <a:prstGeom prst="rect">
+            <a:avLst/>
+          </a:prstGeom>
+          <a:noFill/>
+          <a:ln/>
+        </p:spPr>
+        <p:txBody>
+          <a:bodyPr wrap="square" lIns="0" tIns="0" rIns="0" bIns="0" rtlCol="0" anchor="t"/>
+          <a:lstStyle/>
+          <a:p>
+            <a:pPr indent="0" marL="0">
+              <a:buNone/>
+            </a:pPr>
+            <a:r>
+              <a:rPr lang="en-US" sz="1600" b="1" dirty="0">
+                <a:solidFill>
+                  <a:srgbClr val="1D2D3E"/>
+                </a:solidFill>
+              </a:rPr>
+              <a:t>Catálogo, espaço e página</a:t>
+            </a:r>
+            <a:endParaRPr lang="en-US" sz="1600" dirty="0"/>
+          </a:p>
+        </p:txBody>
+      </p:sp>
+      <p:sp>
+        <p:nvSpPr>
+          <p:cNvPr id="18" name="Text 13"/>
+          <p:cNvSpPr txBox="1"/>
+          <p:nvPr/>
+        </p:nvSpPr>
+        <p:spPr>
+          <a:xfrm>
+            <a:off x="4612538" y="3383280"/>
+            <a:ext cx="2966618" cy="1371600"/>
+          </a:xfrm>
+          <a:prstGeom prst="rect">
+            <a:avLst/>
+          </a:prstGeom>
+          <a:noFill/>
+          <a:ln/>
+        </p:spPr>
+        <p:txBody>
+          <a:bodyPr wrap="square" lIns="0" tIns="0" rIns="0" bIns="0" rtlCol="0" anchor="t"/>
+          <a:lstStyle/>
+          <a:p>
+            <a:pPr indent="0" marL="0">
+              <a:buNone/>
+            </a:pPr>
+            <a:r>
+              <a:rPr lang="en-US" sz="1250" dirty="0">
+                <a:solidFill>
+                  <a:srgbClr val="1D2D3E"/>
+                </a:solidFill>
+              </a:rPr>
+              <a:t>/UI2/FLPCM_CUST: catálogos de negócio e o espaço Pedidos de Compras, com as seções Gestão e Análises.</a:t>
+            </a:r>
+            <a:endParaRPr lang="en-US" sz="1250" dirty="0"/>
+          </a:p>
+        </p:txBody>
+      </p:sp>
+      <p:sp>
+        <p:nvSpPr>
+          <p:cNvPr id="19" name="Shape 14"/>
+          <p:cNvSpPr/>
+          <p:nvPr/>
+        </p:nvSpPr>
+        <p:spPr>
+          <a:xfrm>
+            <a:off x="4612538" y="4846320"/>
+            <a:ext cx="2966618" cy="0"/>
+          </a:xfrm>
+          <a:prstGeom prst="line">
+            <a:avLst/>
+          </a:prstGeom>
+          <a:noFill/>
+          <a:ln w="12700">
+            <a:solidFill>
+              <a:srgbClr val="E5E5E5"/>
+            </a:solidFill>
+            <a:prstDash val="solid"/>
+          </a:ln>
+        </p:spPr>
+      </p:sp>
+      <p:sp>
+        <p:nvSpPr>
+          <p:cNvPr id="20" name="Text 15"/>
+          <p:cNvSpPr txBox="1"/>
+          <p:nvPr/>
+        </p:nvSpPr>
+        <p:spPr>
+          <a:xfrm>
+            <a:off x="4612538" y="4983480"/>
+            <a:ext cx="2966618" cy="1005840"/>
+          </a:xfrm>
+          <a:prstGeom prst="rect">
+            <a:avLst/>
+          </a:prstGeom>
+          <a:noFill/>
+          <a:ln/>
+        </p:spPr>
+        <p:txBody>
+          <a:bodyPr wrap="square" lIns="0" tIns="0" rIns="0" bIns="0" rtlCol="0" anchor="t"/>
+          <a:lstStyle/>
+          <a:p>
+            <a:pPr indent="0" marL="0">
+              <a:buNone/>
+            </a:pPr>
+            <a:r>
+              <a:rPr lang="en-US" sz="1150" dirty="0">
+                <a:solidFill>
+                  <a:srgbClr val="556B82"/>
+                </a:solidFill>
+              </a:rPr>
+              <a:t>Depois, limpe o cache com /UI2/INVALIDATE_GLOBAL_CACHES.</a:t>
+            </a:r>
+            <a:endParaRPr lang="en-US" sz="1150" dirty="0"/>
+          </a:p>
+        </p:txBody>
+      </p:sp>
+      <p:sp>
+        <p:nvSpPr>
+          <p:cNvPr id="21" name="Cartão"/>
+          <p:cNvSpPr/>
+          <p:nvPr/>
+        </p:nvSpPr>
+        <p:spPr>
+          <a:xfrm>
+            <a:off x="8127797" y="1645920"/>
+            <a:ext cx="3515258" cy="4526280"/>
+          </a:xfrm>
+          <a:prstGeom prst="roundRect">
+            <a:avLst>
+              <a:gd name="adj" fmla="val 3121"/>
+            </a:avLst>
+          </a:prstGeom>
+          <a:solidFill>
+            <a:srgbClr val="FFFFFF"/>
+          </a:solidFill>
+          <a:ln/>
+          <a:effectLst>
+            <a:outerShdw sx="100000" sy="100000" kx="0" ky="0" algn="bl" rotWithShape="0" blurRad="101600" dist="25400" dir="5400000">
+              <a:srgbClr val="223548">
+                <a:alpha val="16000"/>
+              </a:srgbClr>
+            </a:outerShdw>
+          </a:effectLst>
+        </p:spPr>
+      </p:sp>
+      <p:sp>
+        <p:nvSpPr>
+          <p:cNvPr id="22" name="Ícone cloud"/>
+          <p:cNvSpPr/>
+          <p:nvPr/>
+        </p:nvSpPr>
+        <p:spPr>
+          <a:xfrm>
+            <a:off x="8402117" y="1874520"/>
+            <a:ext cx="594360" cy="594360"/>
+          </a:xfrm>
+          <a:prstGeom prst="roundRect">
+            <a:avLst>
+              <a:gd name="adj" fmla="val 22000"/>
+            </a:avLst>
+          </a:prstGeom>
+          <a:solidFill>
+            <a:srgbClr val="E1F4FF"/>
+          </a:solidFill>
+          <a:ln/>
+        </p:spPr>
+      </p:sp>
+      <p:pic>
+        <p:nvPicPr>
+          <p:cNvPr id="23" name="Image 2" descr="cloud">    </p:cNvPr>
+          <p:cNvPicPr>
+            <a:picLocks noChangeAspect="1"/>
+          </p:cNvPicPr>
+          <p:nvPr/>
+        </p:nvPicPr>
+        <p:blipFill>
+          <a:blip r:embed="rId3"/>
+          <a:stretch>
+            <a:fillRect/>
+          </a:stretch>
+        </p:blipFill>
+        <p:spPr>
+          <a:xfrm>
+            <a:off x="8544763" y="2017166"/>
+            <a:ext cx="309067" cy="309067"/>
+          </a:xfrm>
+          <a:prstGeom prst="rect">
+            <a:avLst/>
+          </a:prstGeom>
+        </p:spPr>
+      </p:pic>
+      <p:sp>
+        <p:nvSpPr>
+          <p:cNvPr id="24" name="Status Descartado"/>
+          <p:cNvSpPr/>
+          <p:nvPr/>
+        </p:nvSpPr>
+        <p:spPr>
+          <a:xfrm>
+            <a:off x="10351922" y="2011680"/>
+            <a:ext cx="1016813" cy="274320"/>
+          </a:xfrm>
+          <a:prstGeom prst="roundRect">
+            <a:avLst>
+              <a:gd name="adj" fmla="val 50000"/>
+            </a:avLst>
+          </a:prstGeom>
+          <a:solidFill>
+            <a:srgbClr val="E1F4FF"/>
+          </a:solidFill>
+          <a:ln/>
+        </p:spPr>
+        <p:txBody>
+          <a:bodyPr wrap="square" lIns="0" tIns="0" rIns="0" bIns="0" rtlCol="0" anchor="ctr"/>
+          <a:lstStyle/>
+          <a:p>
+            <a:pPr algn="ctr" indent="0" marL="0">
+              <a:buNone/>
+            </a:pPr>
+            <a:r>
+              <a:rPr lang="en-US" sz="1100" b="1" dirty="0">
+                <a:solidFill>
+                  <a:srgbClr val="0064D9"/>
+                </a:solidFill>
+              </a:rPr>
+              <a:t>Passo 3</a:t>
+            </a:r>
+            <a:endParaRPr lang="en-US" sz="1100" dirty="0"/>
+          </a:p>
+        </p:txBody>
+      </p:sp>
+      <p:sp>
+        <p:nvSpPr>
+          <p:cNvPr id="25" name="Text 19"/>
+          <p:cNvSpPr txBox="1"/>
+          <p:nvPr/>
+        </p:nvSpPr>
+        <p:spPr>
+          <a:xfrm>
+            <a:off x="8402117" y="2697480"/>
+            <a:ext cx="2966618" cy="594360"/>
+          </a:xfrm>
+          <a:prstGeom prst="rect">
+            <a:avLst/>
+          </a:prstGeom>
+          <a:noFill/>
+          <a:ln/>
+        </p:spPr>
+        <p:txBody>
+          <a:bodyPr wrap="square" lIns="0" tIns="0" rIns="0" bIns="0" rtlCol="0" anchor="t"/>
+          <a:lstStyle/>
+          <a:p>
+            <a:pPr indent="0" marL="0">
+              <a:buNone/>
+            </a:pPr>
+            <a:r>
+              <a:rPr lang="en-US" sz="1600" b="1" dirty="0">
+                <a:solidFill>
+                  <a:srgbClr val="1D2D3E"/>
+                </a:solidFill>
+              </a:rPr>
+              <a:t>Role PFCG</a:t>
+            </a:r>
+            <a:endParaRPr lang="en-US" sz="1600" dirty="0"/>
+          </a:p>
+        </p:txBody>
+      </p:sp>
+      <p:sp>
+        <p:nvSpPr>
+          <p:cNvPr id="26" name="Text 20"/>
+          <p:cNvSpPr txBox="1"/>
+          <p:nvPr/>
+        </p:nvSpPr>
+        <p:spPr>
+          <a:xfrm>
+            <a:off x="8402117" y="3383280"/>
+            <a:ext cx="2966618" cy="1371600"/>
+          </a:xfrm>
+          <a:prstGeom prst="rect">
+            <a:avLst/>
+          </a:prstGeom>
+          <a:noFill/>
+          <a:ln/>
+        </p:spPr>
+        <p:txBody>
+          <a:bodyPr wrap="square" lIns="0" tIns="0" rIns="0" bIns="0" rtlCol="0" anchor="t"/>
+          <a:lstStyle/>
+          <a:p>
+            <a:pPr indent="0" marL="0">
+              <a:buNone/>
+            </a:pPr>
+            <a:r>
+              <a:rPr lang="en-US" sz="1250" dirty="0">
+                <a:solidFill>
+                  <a:srgbClr val="1D2D3E"/>
+                </a:solidFill>
+              </a:rPr>
+              <a:t>Menu da role com catálogo, espaço e grupos de serviços (S_START); gerar perfil e atribuir na SU01.</a:t>
+            </a:r>
+            <a:endParaRPr lang="en-US" sz="1250" dirty="0"/>
+          </a:p>
+        </p:txBody>
+      </p:sp>
+      <p:sp>
+        <p:nvSpPr>
+          <p:cNvPr id="27" name="Shape 21"/>
+          <p:cNvSpPr/>
+          <p:nvPr/>
+        </p:nvSpPr>
+        <p:spPr>
+          <a:xfrm>
+            <a:off x="8402117" y="4846320"/>
+            <a:ext cx="2966618" cy="0"/>
+          </a:xfrm>
+          <a:prstGeom prst="line">
+            <a:avLst/>
+          </a:prstGeom>
+          <a:noFill/>
+          <a:ln w="12700">
+            <a:solidFill>
+              <a:srgbClr val="E5E5E5"/>
+            </a:solidFill>
+            <a:prstDash val="solid"/>
+          </a:ln>
+        </p:spPr>
+      </p:sp>
+      <p:sp>
+        <p:nvSpPr>
+          <p:cNvPr id="28" name="Text 22"/>
+          <p:cNvSpPr txBox="1"/>
+          <p:nvPr/>
+        </p:nvSpPr>
+        <p:spPr>
+          <a:xfrm>
+            <a:off x="8402117" y="4983480"/>
+            <a:ext cx="2966618" cy="1005840"/>
+          </a:xfrm>
+          <a:prstGeom prst="rect">
+            <a:avLst/>
+          </a:prstGeom>
+          <a:noFill/>
+          <a:ln/>
+        </p:spPr>
+        <p:txBody>
+          <a:bodyPr wrap="square" lIns="0" tIns="0" rIns="0" bIns="0" rtlCol="0" anchor="t"/>
+          <a:lstStyle/>
+          <a:p>
+            <a:pPr indent="0" marL="0">
+              <a:buNone/>
+            </a:pPr>
+            <a:r>
+              <a:rPr lang="en-US" sz="1150" dirty="0">
+                <a:solidFill>
+                  <a:srgbClr val="556B82"/>
+                </a:solidFill>
+              </a:rPr>
+              <a:t>Z_PC_ADMIN: oito tiles. Z_PC_COMUM: Pedidos, Reembolsos e análises.</a:t>
+            </a:r>
+            <a:endParaRPr lang="en-US" sz="1150" dirty="0"/>
+          </a:p>
+        </p:txBody>
+      </p:sp>
+      <p:sp>
+        <p:nvSpPr>
+          <p:cNvPr id="25" name="Slide Number Placeholder 0"/>
+          <p:cNvSpPr>
+            <a:spLocks noGrp="1"/>
+          </p:cNvSpPr>
+          <p:nvPr>
+            <p:ph type="sldNum" sz="quarter" idx="4294967295"/>
+          </p:nvPr>
+        </p:nvSpPr>
+        <p:spPr>
+          <a:xfrm>
+            <a:off x="11183112" y="6419088"/>
+            <a:ext cx="457200" cy="274320"/>
+          </a:xfrm>
+          <a:prstGeom prst="rect">
+            <a:avLst/>
+          </a:prstGeom>
+          <a:extLst>
+            <a:ext uri="{C572A759-6A51-4108-AA02-DFA0A04FC94B}">
+              <ma14:wrappingTextBoxFlag xmlns:ma14="http://schemas.microsoft.com/office/mac/drawingml/2011/main" val="0"/>
+            </a:ext>
+          </a:extLst>
+        </p:spPr>
+        <p:txBody>
+          <a:bodyPr lIns="0" tIns="0" rIns="0" bIns="0" anchor="ctr"/>
+          <a:lstStyle>
+            <a:lvl1pPr>
+              <a:defRPr sz="900">
+                <a:solidFill>
+                  <a:srgbClr val="556B82"/>
+                </a:solidFill>
+              </a:defRPr>
+            </a:lvl1pPr>
+          </a:lstStyle>
+          <a:p>
+            <a:pPr algn="r"/>
+            <a:fld id="{F7021451-1387-4CA6-816F-3879F97B5CBC}" type="slidenum">
+              <a:rPr b="0" lang="en-US"/>
+              <a:t>25</a:t>
+            </a:fld>
+            <a:endParaRPr lang="en-US"/>
+          </a:p>
+        </p:txBody>
+      </p:sp>
+    </p:spTree>
+  </p:cSld>
+  <p:clrMapOvr>
+    <a:masterClrMapping/>
+  </p:clrMapOvr>
+</p:sld>
+</file>
+
+<file path=ppt/slides/slide31.xml><?xml version="1.0" encoding="utf-8"?>
+<p:sld xmlns:a="http://schemas.openxmlformats.org/drawingml/2006/main" xmlns:r="http://schemas.openxmlformats.org/officeDocument/2006/relationships" xmlns:p="http://schemas.openxmlformats.org/presentationml/2006/main">
+  <p:cSld name="Slide 11">
+    <p:spTree>
+      <p:nvGrpSpPr>
+        <p:cNvPr id="1" name=""/>
+        <p:cNvGrpSpPr/>
+        <p:nvPr/>
+      </p:nvGrpSpPr>
+      <p:grpSpPr>
+        <a:xfrm>
+          <a:off x="0" y="0"/>
+          <a:ext cx="0" cy="0"/>
+          <a:chOff x="0" y="0"/>
+          <a:chExt cx="0" cy="0"/>
+        </a:xfrm>
+      </p:grpSpPr>
+      <p:sp>
+        <p:nvSpPr>
+          <p:cNvPr id="2" name="Text 0"/>
+          <p:cNvSpPr/>
+          <p:nvPr>
+            <p:ph idx="100" type="body" hasCustomPrompt="1"/>
+          </p:nvPr>
+        </p:nvSpPr>
+        <p:spPr>
+          <a:xfrm>
+            <a:off x="548640" y="384048"/>
+            <a:ext cx="9144000" cy="274320"/>
+          </a:xfrm>
+          <a:prstGeom prst="rect">
+            <a:avLst/>
+          </a:prstGeom>
+          <a:noFill/>
+          <a:ln/>
+        </p:spPr>
+        <p:txBody>
+          <a:bodyPr wrap="square" lIns="0" tIns="0" rIns="0" bIns="0" rtlCol="0" anchor="ctr"/>
+          <a:lstStyle/>
+          <a:p>
+            <a:pPr algn="l" indent="0" marL="0">
+              <a:buNone/>
+            </a:pPr>
+            <a:r>
+              <a:rPr lang="en-US" sz="1100" b="1" spc="150" kern="0" dirty="0">
+                <a:solidFill>
+                  <a:schemeClr val="accent1"/>
+                </a:solidFill>
+              </a:rPr>
+              <a:t>ON-PREMISE · AUTORIZAÇÃO</a:t>
+            </a:r>
+            <a:endParaRPr lang="en-US" sz="1100" dirty="0"/>
+          </a:p>
+        </p:txBody>
+      </p:sp>
+      <p:sp>
+        <p:nvSpPr>
+          <p:cNvPr id="3" name="Text 0"/>
+          <p:cNvSpPr/>
+          <p:nvPr>
+            <p:ph idx="101" type="title" hasCustomPrompt="1"/>
+          </p:nvPr>
+        </p:nvSpPr>
+        <p:spPr>
+          <a:xfrm>
+            <a:off x="548640" y="676656"/>
+            <a:ext cx="11094415" cy="658368"/>
+          </a:xfrm>
+          <a:prstGeom prst="rect">
+            <a:avLst/>
+          </a:prstGeom>
+          <a:noFill/>
+          <a:ln/>
+        </p:spPr>
+        <p:txBody>
+          <a:bodyPr wrap="square" lIns="0" tIns="0" rIns="0" bIns="0" rtlCol="0" anchor="ctr"/>
+          <a:lstStyle/>
+          <a:p>
+            <a:pPr algn="l" indent="0" marL="0">
+              <a:buNone/>
+            </a:pPr>
+            <a:r>
+              <a:rPr lang="en-US" sz="3000" b="1" dirty="0">
+                <a:solidFill>
+                  <a:schemeClr val="tx1"/>
+                </a:solidFill>
+              </a:rPr>
+              <a:t>Quem vê cada app: tile, S_START e objeto ZPC_*</a:t>
+            </a:r>
+            <a:endParaRPr lang="en-US" sz="3000" dirty="0"/>
+          </a:p>
+        </p:txBody>
+      </p:sp>
+      <p:sp>
+        <p:nvSpPr>
+          <p:cNvPr id="5" name="Fundo da tabela"/>
+          <p:cNvSpPr/>
+          <p:nvPr/>
+        </p:nvSpPr>
+        <p:spPr>
+          <a:xfrm>
+            <a:off x="548640" y="1645920"/>
+            <a:ext cx="6720840" cy="2798064"/>
+          </a:xfrm>
+          <a:prstGeom prst="roundRect">
+            <a:avLst>
+              <a:gd name="adj" fmla="val 3922"/>
+            </a:avLst>
+          </a:prstGeom>
+          <a:solidFill>
+            <a:srgbClr val="FFFFFF"/>
+          </a:solidFill>
+          <a:ln/>
+          <a:effectLst>
+            <a:outerShdw sx="100000" sy="100000" kx="0" ky="0" algn="bl" rotWithShape="0" blurRad="101600" dist="25400" dir="5400000">
+              <a:srgbClr val="223548">
+                <a:alpha val="16000"/>
+              </a:srgbClr>
+            </a:outerShdw>
+          </a:effectLst>
+        </p:spPr>
+      </p:sp>
+      <p:graphicFrame>
+        <p:nvGraphicFramePr>
+          <p:cNvPr id="12" name="Table 0"/>
+          <p:cNvGraphicFramePr>
+            <a:graphicFrameLocks noGrp="1"/>
+          </p:cNvGraphicFramePr>
+          <p:nvPr>
+            <p:extLst>
+              <p:ext uri="{D42A27DB-BD31-4B8C-83A1-F6EECF244321}">
+                <p14:modId xmlns:p14="http://schemas.microsoft.com/office/powerpoint/2010/main" val="1579011935"/>
+              </p:ext>
+            </p:extLst>
+          </p:nvPr>
+        </p:nvGraphicFramePr>
+        <p:xfrm>
+          <a:off x="685800" y="1755648"/>
+          <a:ext cx="6446520" cy="914400"/>
+        </p:xfrm>
+        <a:graphic>
+          <a:graphicData uri="http://schemas.openxmlformats.org/drawingml/2006/table">
+            <a:tbl>
+              <a:tblPr/>
+              <a:tblGrid>
+                <a:gridCol w="1100000"/>
+                <a:gridCol w="1850000"/>
+                <a:gridCol w="2300000"/>
+                <a:gridCol w="1196520"/>
+              </a:tblGrid>
+              <a:tr h="429768">
+                <a:tc>
+                  <a:txBody>
+                    <a:bodyPr/>
+                    <a:lstStyle/>
+                    <a:p>
+                      <a:pPr indent="0" marL="0">
+                        <a:buNone/>
+                      </a:pPr>
+                      <a:r>
+                        <a:rPr lang="en-US" sz="1000" b="1" dirty="0">
+                          <a:solidFill>
+                            <a:srgbClr val="1D2D3E"/>
+                          </a:solidFill>
+                        </a:rPr>
+                        <a:t>App</a:t>
+                      </a:r>
+                      <a:endParaRPr lang="en-US" sz="1000" dirty="0"/>
+                    </a:p>
+                  </a:txBody>
+                  <a:tcPr marL="73152" marR="73152" marT="36576" marB="36576" anchor="ctr">
+                    <a:lnL w="0" cap="flat" cmpd="sng" algn="ctr">
+                      <a:noFill/>
+                    </a:lnL>
+                    <a:lnR w="0" cap="flat" cmpd="sng" algn="ctr">
+                      <a:noFill/>
+                    </a:lnR>
+                    <a:lnT w="0" cap="flat" cmpd="sng" algn="ctr">
+                      <a:noFill/>
+                    </a:lnT>
+                    <a:lnB w="19050" cap="flat" cmpd="sng" algn="ctr">
+                      <a:solidFill>
+                        <a:srgbClr val="A8B3BD"/>
+                      </a:solidFill>
+                      <a:prstDash val="solid"/>
+                      <a:round/>
+                      <a:headEnd type="none" w="med" len="med"/>
+                      <a:tailEnd type="none" w="med" len="med"/>
+                    </a:lnB>
+                    <a:solidFill>
+                      <a:srgbClr val="FFFFFF"/>
+                    </a:solidFill>
+                  </a:tcPr>
+                </a:tc>
+                <a:tc>
+                  <a:txBody>
+                    <a:bodyPr/>
+                    <a:lstStyle/>
+                    <a:p>
+                      <a:pPr indent="0" marL="0">
+                        <a:buNone/>
+                      </a:pPr>
+                      <a:r>
+                        <a:rPr lang="en-US" sz="1000" b="1" dirty="0">
+                          <a:solidFill>
+                            <a:srgbClr val="1D2D3E"/>
+                          </a:solidFill>
+                        </a:rPr>
+                        <a:t>Intent do tile</a:t>
+                      </a:r>
+                      <a:endParaRPr lang="en-US" sz="1000" dirty="0"/>
+                    </a:p>
+                  </a:txBody>
+                  <a:tcPr marL="73152" marR="73152" marT="36576" marB="36576" anchor="ctr">
+                    <a:lnL w="0" cap="flat" cmpd="sng" algn="ctr">
+                      <a:noFill/>
+                    </a:lnL>
+                    <a:lnR w="0" cap="flat" cmpd="sng" algn="ctr">
+                      <a:noFill/>
+                    </a:lnR>
+                    <a:lnT w="0" cap="flat" cmpd="sng" algn="ctr">
+                      <a:noFill/>
+                    </a:lnT>
+                    <a:lnB w="19050" cap="flat" cmpd="sng" algn="ctr">
+                      <a:solidFill>
+                        <a:srgbClr val="A8B3BD"/>
+                      </a:solidFill>
+                      <a:prstDash val="solid"/>
+                      <a:round/>
+                      <a:headEnd type="none" w="med" len="med"/>
+                      <a:tailEnd type="none" w="med" len="med"/>
+                    </a:lnB>
+                    <a:solidFill>
+                      <a:srgbClr val="FFFFFF"/>
+                    </a:solidFill>
+                  </a:tcPr>
+                </a:tc>
+                <a:tc>
+                  <a:txBody>
+                    <a:bodyPr/>
+                    <a:lstStyle/>
+                    <a:p>
+                      <a:pPr indent="0" marL="0">
+                        <a:buNone/>
+                      </a:pPr>
+                      <a:r>
+                        <a:rPr lang="en-US" sz="1000" b="1" dirty="0">
+                          <a:solidFill>
+                            <a:srgbClr val="1D2D3E"/>
+                          </a:solidFill>
+                        </a:rPr>
+                        <a:t>Grupo de serviços (S_START)</a:t>
+                      </a:r>
+                      <a:endParaRPr lang="en-US" sz="1000" dirty="0"/>
+                    </a:p>
+                  </a:txBody>
+                  <a:tcPr marL="73152" marR="73152" marT="36576" marB="36576" anchor="ctr">
+                    <a:lnL w="0" cap="flat" cmpd="sng" algn="ctr">
+                      <a:noFill/>
+                    </a:lnL>
+                    <a:lnR w="0" cap="flat" cmpd="sng" algn="ctr">
+                      <a:noFill/>
+                    </a:lnR>
+                    <a:lnT w="0" cap="flat" cmpd="sng" algn="ctr">
+                      <a:noFill/>
+                    </a:lnT>
+                    <a:lnB w="19050" cap="flat" cmpd="sng" algn="ctr">
+                      <a:solidFill>
+                        <a:srgbClr val="A8B3BD"/>
+                      </a:solidFill>
+                      <a:prstDash val="solid"/>
+                      <a:round/>
+                      <a:headEnd type="none" w="med" len="med"/>
+                      <a:tailEnd type="none" w="med" len="med"/>
+                    </a:lnB>
+                    <a:solidFill>
+                      <a:srgbClr val="FFFFFF"/>
+                    </a:solidFill>
+                  </a:tcPr>
+                </a:tc>
+                <a:tc>
+                  <a:txBody>
+                    <a:bodyPr/>
+                    <a:lstStyle/>
+                    <a:p>
+                      <a:pPr indent="0" marL="0">
+                        <a:buNone/>
+                      </a:pPr>
+                      <a:r>
+                        <a:rPr lang="en-US" sz="1000" b="1" dirty="0">
+                          <a:solidFill>
+                            <a:srgbClr val="1D2D3E"/>
+                          </a:solidFill>
+                        </a:rPr>
+                        <a:t>Objeto</a:t>
+                      </a:r>
+                      <a:endParaRPr lang="en-US" sz="1000" dirty="0"/>
+                    </a:p>
+                  </a:txBody>
+                  <a:tcPr marL="73152" marR="73152" marT="36576" marB="36576" anchor="ctr">
+                    <a:lnL w="0" cap="flat" cmpd="sng" algn="ctr">
+                      <a:noFill/>
+                    </a:lnL>
+                    <a:lnR w="0" cap="flat" cmpd="sng" algn="ctr">
+                      <a:noFill/>
+                    </a:lnR>
+                    <a:lnT w="0" cap="flat" cmpd="sng" algn="ctr">
+                      <a:noFill/>
+                    </a:lnT>
+                    <a:lnB w="19050" cap="flat" cmpd="sng" algn="ctr">
+                      <a:solidFill>
+                        <a:srgbClr val="A8B3BD"/>
+                      </a:solidFill>
+                      <a:prstDash val="solid"/>
+                      <a:round/>
+                      <a:headEnd type="none" w="med" len="med"/>
+                      <a:tailEnd type="none" w="med" len="med"/>
+                    </a:lnB>
+                    <a:solidFill>
+                      <a:srgbClr val="FFFFFF"/>
+                    </a:solidFill>
+                  </a:tcPr>
+                </a:tc>
+              </a:tr>
+              <a:tr h="429768">
+                <a:tc>
+                  <a:txBody>
+                    <a:bodyPr/>
+                    <a:lstStyle/>
+                    <a:p>
+                      <a:pPr indent="0" marL="0">
+                        <a:buNone/>
+                      </a:pPr>
+                      <a:r>
+                        <a:rPr lang="en-US" sz="1000" dirty="0">
+                          <a:solidFill>
+                            <a:srgbClr val="1D2D3E"/>
+                          </a:solidFill>
+                          <a:latin typeface="Courier New" pitchFamily="34" charset="0"/>
+                          <a:ea typeface="Courier New" pitchFamily="34" charset="-122"/>
+                          <a:cs typeface="Courier New" pitchFamily="34" charset="-120"/>
+                        </a:rPr>
+                        <a:t>Clientes</a:t>
+                      </a:r>
+                      <a:endParaRPr lang="en-US" sz="1000" dirty="0">
+                        <a:latin typeface="Courier New" charset="0"/>
+                        <a:ea typeface="Courier New" charset="0"/>
+                        <a:cs typeface="Courier New" charset="0"/>
+                      </a:endParaRPr>
+                    </a:p>
+                  </a:txBody>
+                  <a:tcPr marL="73152" marR="73152" marT="36576" marB="36576" anchor="ctr">
+                    <a:lnL w="0" cap="flat" cmpd="sng" algn="ctr">
+                      <a:noFill/>
+                    </a:lnL>
+                    <a:lnR w="0" cap="flat" cmpd="sng" algn="ctr">
+                      <a:noFill/>
+                    </a:lnR>
+                    <a:lnT w="0" cap="flat" cmpd="sng" algn="ctr">
+                      <a:noFill/>
+                    </a:lnT>
+                    <a:lnB w="12700" cap="flat" cmpd="sng" algn="ctr">
+                      <a:solidFill>
+                        <a:srgbClr val="E5E5E5"/>
+                      </a:solidFill>
+                      <a:prstDash val="solid"/>
+                      <a:round/>
+                      <a:headEnd type="none" w="med" len="med"/>
+                      <a:tailEnd type="none" w="med" len="med"/>
+                    </a:lnB>
+                    <a:solidFill>
+                      <a:srgbClr val="FFFFFF"/>
+                    </a:solidFill>
+                  </a:tcPr>
+                </a:tc>
+                <a:tc>
+                  <a:txBody>
+                    <a:bodyPr/>
+                    <a:lstStyle/>
+                    <a:p>
+                      <a:pPr indent="0" marL="0">
+                        <a:buNone/>
+                      </a:pPr>
+                      <a:r>
+                        <a:rPr lang="en-US" sz="1000" dirty="0">
+                          <a:solidFill>
+                            <a:srgbClr val="1D2D3E"/>
+                          </a:solidFill>
+                          <a:latin typeface="Courier New" pitchFamily="34" charset="0"/>
+                          <a:ea typeface="Courier New" pitchFamily="34" charset="-122"/>
+                          <a:cs typeface="Courier New" pitchFamily="34" charset="-120"/>
+                        </a:rPr>
+                        <a:t>ZPCCliente-manage</a:t>
+                      </a:r>
+                      <a:endParaRPr lang="en-US" sz="1000" dirty="0">
+                        <a:latin typeface="Courier New" charset="0"/>
+                        <a:ea typeface="Courier New" charset="0"/>
+                        <a:cs typeface="Courier New" charset="0"/>
+                      </a:endParaRPr>
+                    </a:p>
+                  </a:txBody>
+                  <a:tcPr marL="73152" marR="73152" marT="36576" marB="36576" anchor="ctr">
+                    <a:lnL w="0" cap="flat" cmpd="sng" algn="ctr">
+                      <a:noFill/>
+                    </a:lnL>
+                    <a:lnR w="0" cap="flat" cmpd="sng" algn="ctr">
+                      <a:noFill/>
+                    </a:lnR>
+                    <a:lnT w="0" cap="flat" cmpd="sng" algn="ctr">
+                      <a:noFill/>
+                    </a:lnT>
+                    <a:lnB w="12700" cap="flat" cmpd="sng" algn="ctr">
+                      <a:solidFill>
+                        <a:srgbClr val="E5E5E5"/>
+                      </a:solidFill>
+                      <a:prstDash val="solid"/>
+                      <a:round/>
+                      <a:headEnd type="none" w="med" len="med"/>
+                      <a:tailEnd type="none" w="med" len="med"/>
+                    </a:lnB>
+                    <a:solidFill>
+                      <a:srgbClr val="FFFFFF"/>
+                    </a:solidFill>
+                  </a:tcPr>
+                </a:tc>
+                <a:tc>
+                  <a:txBody>
+                    <a:bodyPr/>
+                    <a:lstStyle/>
+                    <a:p>
+                      <a:pPr indent="0" marL="0">
+                        <a:buNone/>
+                      </a:pPr>
+                      <a:r>
+                        <a:rPr lang="en-US" sz="1000" dirty="0">
+                          <a:solidFill>
+                            <a:srgbClr val="1D2D3E"/>
+                          </a:solidFill>
+                          <a:latin typeface="Courier New" pitchFamily="34" charset="0"/>
+                          <a:ea typeface="Courier New" pitchFamily="34" charset="-122"/>
+                          <a:cs typeface="Courier New" pitchFamily="34" charset="-120"/>
+                        </a:rPr>
+                        <a:t>ZUI_PC_CLIENTES_O4</a:t>
+                      </a:r>
+                      <a:endParaRPr lang="en-US" sz="1000" dirty="0">
+                        <a:latin typeface="Courier New" charset="0"/>
+                        <a:ea typeface="Courier New" charset="0"/>
+                        <a:cs typeface="Courier New" charset="0"/>
+                      </a:endParaRPr>
+                    </a:p>
+                  </a:txBody>
+                  <a:tcPr marL="73152" marR="73152" marT="36576" marB="36576" anchor="ctr">
+                    <a:lnL w="0" cap="flat" cmpd="sng" algn="ctr">
+                      <a:noFill/>
+                    </a:lnL>
+                    <a:lnR w="0" cap="flat" cmpd="sng" algn="ctr">
+                      <a:noFill/>
+                    </a:lnR>
+                    <a:lnT w="0" cap="flat" cmpd="sng" algn="ctr">
+                      <a:noFill/>
+                    </a:lnT>
+                    <a:lnB w="12700" cap="flat" cmpd="sng" algn="ctr">
+                      <a:solidFill>
+                        <a:srgbClr val="E5E5E5"/>
+                      </a:solidFill>
+                      <a:prstDash val="solid"/>
+                      <a:round/>
+                      <a:headEnd type="none" w="med" len="med"/>
+                      <a:tailEnd type="none" w="med" len="med"/>
+                    </a:lnB>
+                    <a:solidFill>
+                      <a:srgbClr val="FFFFFF"/>
+                    </a:solidFill>
+                  </a:tcPr>
+                </a:tc>
+                <a:tc>
+                  <a:txBody>
+                    <a:bodyPr/>
+                    <a:lstStyle/>
+                    <a:p>
+                      <a:pPr indent="0" marL="0">
+                        <a:buNone/>
+                      </a:pPr>
+                      <a:r>
+                        <a:rPr lang="en-US" sz="1000" dirty="0">
+                          <a:solidFill>
+                            <a:srgbClr val="1D2D3E"/>
+                          </a:solidFill>
+                        </a:rPr>
+                        <a:t>ZPC_ADMIN</a:t>
+                      </a:r>
+                      <a:endParaRPr lang="en-US" sz="1000" dirty="0"/>
+                    </a:p>
+                  </a:txBody>
+                  <a:tcPr marL="73152" marR="73152" marT="36576" marB="36576" anchor="ctr">
+                    <a:lnL w="0" cap="flat" cmpd="sng" algn="ctr">
+                      <a:noFill/>
+                    </a:lnL>
+                    <a:lnR w="0" cap="flat" cmpd="sng" algn="ctr">
+                      <a:noFill/>
+                    </a:lnR>
+                    <a:lnT w="0" cap="flat" cmpd="sng" algn="ctr">
+                      <a:noFill/>
+                    </a:lnT>
+                    <a:lnB w="12700" cap="flat" cmpd="sng" algn="ctr">
+                      <a:solidFill>
+                        <a:srgbClr val="E5E5E5"/>
+                      </a:solidFill>
+                      <a:prstDash val="solid"/>
+                      <a:round/>
+                      <a:headEnd type="none" w="med" len="med"/>
+                      <a:tailEnd type="none" w="med" len="med"/>
+                    </a:lnB>
+                    <a:solidFill>
+                      <a:srgbClr val="FFFFFF"/>
+                    </a:solidFill>
+                  </a:tcPr>
+                </a:tc>
+              </a:tr>
+              <a:tr h="429768">
+                <a:tc>
+                  <a:txBody>
+                    <a:bodyPr/>
+                    <a:lstStyle/>
+                    <a:p>
+                      <a:pPr indent="0" marL="0">
+                        <a:buNone/>
+                      </a:pPr>
+                      <a:r>
+                        <a:rPr lang="en-US" sz="1000" dirty="0">
+                          <a:solidFill>
+                            <a:srgbClr val="1D2D3E"/>
+                          </a:solidFill>
+                          <a:latin typeface="Courier New" pitchFamily="34" charset="0"/>
+                          <a:ea typeface="Courier New" pitchFamily="34" charset="-122"/>
+                          <a:cs typeface="Courier New" pitchFamily="34" charset="-120"/>
+                        </a:rPr>
+                        <a:t>Estoque</a:t>
+                      </a:r>
+                      <a:endParaRPr lang="en-US" sz="1000" dirty="0">
+                        <a:latin typeface="Courier New" charset="0"/>
+                        <a:ea typeface="Courier New" charset="0"/>
+                        <a:cs typeface="Courier New" charset="0"/>
+                      </a:endParaRPr>
+                    </a:p>
+                  </a:txBody>
+                  <a:tcPr marL="73152" marR="73152" marT="36576" marB="36576" anchor="ctr">
+                    <a:lnL w="0" cap="flat" cmpd="sng" algn="ctr">
+                      <a:noFill/>
+                    </a:lnL>
+                    <a:lnR w="0" cap="flat" cmpd="sng" algn="ctr">
+                      <a:noFill/>
+                    </a:lnR>
+                    <a:lnT w="0" cap="flat" cmpd="sng" algn="ctr">
+                      <a:noFill/>
+                    </a:lnT>
+                    <a:lnB w="12700" cap="flat" cmpd="sng" algn="ctr">
+                      <a:solidFill>
+                        <a:srgbClr val="E5E5E5"/>
+                      </a:solidFill>
+                      <a:prstDash val="solid"/>
+                      <a:round/>
+                      <a:headEnd type="none" w="med" len="med"/>
+                      <a:tailEnd type="none" w="med" len="med"/>
+                    </a:lnB>
+                    <a:solidFill>
+                      <a:srgbClr val="FFFFFF"/>
+                    </a:solidFill>
+                  </a:tcPr>
+                </a:tc>
+                <a:tc>
+                  <a:txBody>
+                    <a:bodyPr/>
+                    <a:lstStyle/>
+                    <a:p>
+                      <a:pPr indent="0" marL="0">
+                        <a:buNone/>
+                      </a:pPr>
+                      <a:r>
+                        <a:rPr lang="en-US" sz="1000" dirty="0">
+                          <a:solidFill>
+                            <a:srgbClr val="1D2D3E"/>
+                          </a:solidFill>
+                          <a:latin typeface="Courier New" pitchFamily="34" charset="0"/>
+                          <a:ea typeface="Courier New" pitchFamily="34" charset="-122"/>
+                          <a:cs typeface="Courier New" pitchFamily="34" charset="-120"/>
+                        </a:rPr>
+                        <a:t>ZPCItemEstoque-manage</a:t>
+                      </a:r>
+                      <a:endParaRPr lang="en-US" sz="1000" dirty="0">
+                        <a:latin typeface="Courier New" charset="0"/>
+                        <a:ea typeface="Courier New" charset="0"/>
+                        <a:cs typeface="Courier New" charset="0"/>
+                      </a:endParaRPr>
+                    </a:p>
+                  </a:txBody>
+                  <a:tcPr marL="73152" marR="73152" marT="36576" marB="36576" anchor="ctr">
+                    <a:lnL w="0" cap="flat" cmpd="sng" algn="ctr">
+                      <a:noFill/>
+                    </a:lnL>
+                    <a:lnR w="0" cap="flat" cmpd="sng" algn="ctr">
+                      <a:noFill/>
+                    </a:lnR>
+                    <a:lnT w="0" cap="flat" cmpd="sng" algn="ctr">
+                      <a:noFill/>
+                    </a:lnT>
+                    <a:lnB w="12700" cap="flat" cmpd="sng" algn="ctr">
+                      <a:solidFill>
+                        <a:srgbClr val="E5E5E5"/>
+                      </a:solidFill>
+                      <a:prstDash val="solid"/>
+                      <a:round/>
+                      <a:headEnd type="none" w="med" len="med"/>
+                      <a:tailEnd type="none" w="med" len="med"/>
+                    </a:lnB>
+                    <a:solidFill>
+                      <a:srgbClr val="FFFFFF"/>
+                    </a:solidFill>
+                  </a:tcPr>
+                </a:tc>
+                <a:tc>
+                  <a:txBody>
+                    <a:bodyPr/>
+                    <a:lstStyle/>
+                    <a:p>
+                      <a:pPr indent="0" marL="0">
+                        <a:buNone/>
+                      </a:pPr>
+                      <a:r>
+                        <a:rPr lang="en-US" sz="1000" dirty="0">
+                          <a:solidFill>
+                            <a:srgbClr val="1D2D3E"/>
+                          </a:solidFill>
+                          <a:latin typeface="Courier New" pitchFamily="34" charset="0"/>
+                          <a:ea typeface="Courier New" pitchFamily="34" charset="-122"/>
+                          <a:cs typeface="Courier New" pitchFamily="34" charset="-120"/>
+                        </a:rPr>
+                        <a:t>ZUI_PC_ESTOQUE_O4</a:t>
+                      </a:r>
+                      <a:endParaRPr lang="en-US" sz="1000" dirty="0">
+                        <a:latin typeface="Courier New" charset="0"/>
+                        <a:ea typeface="Courier New" charset="0"/>
+                        <a:cs typeface="Courier New" charset="0"/>
+                      </a:endParaRPr>
+                    </a:p>
+                  </a:txBody>
+                  <a:tcPr marL="73152" marR="73152" marT="36576" marB="36576" anchor="ctr">
+                    <a:lnL w="0" cap="flat" cmpd="sng" algn="ctr">
+                      <a:noFill/>
+                    </a:lnL>
+                    <a:lnR w="0" cap="flat" cmpd="sng" algn="ctr">
+                      <a:noFill/>
+                    </a:lnR>
+                    <a:lnT w="0" cap="flat" cmpd="sng" algn="ctr">
+                      <a:noFill/>
+                    </a:lnT>
+                    <a:lnB w="12700" cap="flat" cmpd="sng" algn="ctr">
+                      <a:solidFill>
+                        <a:srgbClr val="E5E5E5"/>
+                      </a:solidFill>
+                      <a:prstDash val="solid"/>
+                      <a:round/>
+                      <a:headEnd type="none" w="med" len="med"/>
+                      <a:tailEnd type="none" w="med" len="med"/>
+                    </a:lnB>
+                    <a:solidFill>
+                      <a:srgbClr val="FFFFFF"/>
+                    </a:solidFill>
+                  </a:tcPr>
+                </a:tc>
+                <a:tc>
+                  <a:txBody>
+                    <a:bodyPr/>
+                    <a:lstStyle/>
+                    <a:p>
+                      <a:pPr indent="0" marL="0">
+                        <a:buNone/>
+                      </a:pPr>
+                      <a:r>
+                        <a:rPr lang="en-US" sz="1000" dirty="0">
+                          <a:solidFill>
+                            <a:srgbClr val="1D2D3E"/>
+                          </a:solidFill>
+                        </a:rPr>
+                        <a:t>ZPC_ADMIN</a:t>
+                      </a:r>
+                      <a:endParaRPr lang="en-US" sz="1000" dirty="0"/>
+                    </a:p>
+                  </a:txBody>
+                  <a:tcPr marL="73152" marR="73152" marT="36576" marB="36576" anchor="ctr">
+                    <a:lnL w="0" cap="flat" cmpd="sng" algn="ctr">
+                      <a:noFill/>
+                    </a:lnL>
+                    <a:lnR w="0" cap="flat" cmpd="sng" algn="ctr">
+                      <a:noFill/>
+                    </a:lnR>
+                    <a:lnT w="0" cap="flat" cmpd="sng" algn="ctr">
+                      <a:noFill/>
+                    </a:lnT>
+                    <a:lnB w="12700" cap="flat" cmpd="sng" algn="ctr">
+                      <a:solidFill>
+                        <a:srgbClr val="E5E5E5"/>
+                      </a:solidFill>
+                      <a:prstDash val="solid"/>
+                      <a:round/>
+                      <a:headEnd type="none" w="med" len="med"/>
+                      <a:tailEnd type="none" w="med" len="med"/>
+                    </a:lnB>
+                    <a:solidFill>
+                      <a:srgbClr val="FFFFFF"/>
+                    </a:solidFill>
+                  </a:tcPr>
+                </a:tc>
+              </a:tr>
+              <a:tr h="429768">
+                <a:tc>
+                  <a:txBody>
+                    <a:bodyPr/>
+                    <a:lstStyle/>
+                    <a:p>
+                      <a:pPr indent="0" marL="0">
+                        <a:buNone/>
+                      </a:pPr>
+                      <a:r>
+                        <a:rPr lang="en-US" sz="1000" dirty="0">
+                          <a:solidFill>
+                            <a:srgbClr val="1D2D3E"/>
+                          </a:solidFill>
+                          <a:latin typeface="Courier New" pitchFamily="34" charset="0"/>
+                          <a:ea typeface="Courier New" pitchFamily="34" charset="-122"/>
+                          <a:cs typeface="Courier New" pitchFamily="34" charset="-120"/>
+                        </a:rPr>
+                        <a:t>Pedidos</a:t>
+                      </a:r>
+                      <a:endParaRPr lang="en-US" sz="1000" dirty="0">
+                        <a:latin typeface="Courier New" charset="0"/>
+                        <a:ea typeface="Courier New" charset="0"/>
+                        <a:cs typeface="Courier New" charset="0"/>
+                      </a:endParaRPr>
+                    </a:p>
+                  </a:txBody>
+                  <a:tcPr marL="73152" marR="73152" marT="36576" marB="36576" anchor="ctr">
+                    <a:lnL w="0" cap="flat" cmpd="sng" algn="ctr">
+                      <a:noFill/>
+                    </a:lnL>
+                    <a:lnR w="0" cap="flat" cmpd="sng" algn="ctr">
+                      <a:noFill/>
+                    </a:lnR>
+                    <a:lnT w="0" cap="flat" cmpd="sng" algn="ctr">
+                      <a:noFill/>
+                    </a:lnT>
+                    <a:lnB w="12700" cap="flat" cmpd="sng" algn="ctr">
+                      <a:solidFill>
+                        <a:srgbClr val="E5E5E5"/>
+                      </a:solidFill>
+                      <a:prstDash val="solid"/>
+                      <a:round/>
+                      <a:headEnd type="none" w="med" len="med"/>
+                      <a:tailEnd type="none" w="med" len="med"/>
+                    </a:lnB>
+                    <a:solidFill>
+                      <a:srgbClr val="FFFFFF"/>
+                    </a:solidFill>
+                  </a:tcPr>
+                </a:tc>
+                <a:tc>
+                  <a:txBody>
+                    <a:bodyPr/>
+                    <a:lstStyle/>
+                    <a:p>
+                      <a:pPr indent="0" marL="0">
+                        <a:buNone/>
+                      </a:pPr>
+                      <a:r>
+                        <a:rPr lang="en-US" sz="1000" dirty="0">
+                          <a:solidFill>
+                            <a:srgbClr val="1D2D3E"/>
+                          </a:solidFill>
+                          <a:latin typeface="Courier New" pitchFamily="34" charset="0"/>
+                          <a:ea typeface="Courier New" pitchFamily="34" charset="-122"/>
+                          <a:cs typeface="Courier New" pitchFamily="34" charset="-120"/>
+                        </a:rPr>
+                        <a:t>ZPCPedidoCompra-manage</a:t>
+                      </a:r>
+                      <a:endParaRPr lang="en-US" sz="1000" dirty="0">
+                        <a:latin typeface="Courier New" charset="0"/>
+                        <a:ea typeface="Courier New" charset="0"/>
+                        <a:cs typeface="Courier New" charset="0"/>
+                      </a:endParaRPr>
+                    </a:p>
+                  </a:txBody>
+                  <a:tcPr marL="73152" marR="73152" marT="36576" marB="36576" anchor="ctr">
+                    <a:lnL w="0" cap="flat" cmpd="sng" algn="ctr">
+                      <a:noFill/>
+                    </a:lnL>
+                    <a:lnR w="0" cap="flat" cmpd="sng" algn="ctr">
+                      <a:noFill/>
+                    </a:lnR>
+                    <a:lnT w="0" cap="flat" cmpd="sng" algn="ctr">
+                      <a:noFill/>
+                    </a:lnT>
+                    <a:lnB w="12700" cap="flat" cmpd="sng" algn="ctr">
+                      <a:solidFill>
+                        <a:srgbClr val="E5E5E5"/>
+                      </a:solidFill>
+                      <a:prstDash val="solid"/>
+                      <a:round/>
+                      <a:headEnd type="none" w="med" len="med"/>
+                      <a:tailEnd type="none" w="med" len="med"/>
+                    </a:lnB>
+                    <a:solidFill>
+                      <a:srgbClr val="FFFFFF"/>
+                    </a:solidFill>
+                  </a:tcPr>
+                </a:tc>
+                <a:tc>
+                  <a:txBody>
+                    <a:bodyPr/>
+                    <a:lstStyle/>
+                    <a:p>
+                      <a:pPr indent="0" marL="0">
+                        <a:buNone/>
+                      </a:pPr>
+                      <a:r>
+                        <a:rPr lang="en-US" sz="1000" dirty="0">
+                          <a:solidFill>
+                            <a:srgbClr val="1D2D3E"/>
+                          </a:solidFill>
+                          <a:latin typeface="Courier New" pitchFamily="34" charset="0"/>
+                          <a:ea typeface="Courier New" pitchFamily="34" charset="-122"/>
+                          <a:cs typeface="Courier New" pitchFamily="34" charset="-120"/>
+                        </a:rPr>
+                        <a:t>ZUI_PC_PEDIDOS_COMPRAS_O4</a:t>
+                      </a:r>
+                      <a:endParaRPr lang="en-US" sz="1000" dirty="0">
+                        <a:latin typeface="Courier New" charset="0"/>
+                        <a:ea typeface="Courier New" charset="0"/>
+                        <a:cs typeface="Courier New" charset="0"/>
+                      </a:endParaRPr>
+                    </a:p>
+                  </a:txBody>
+                  <a:tcPr marL="73152" marR="73152" marT="36576" marB="36576" anchor="ctr">
+                    <a:lnL w="0" cap="flat" cmpd="sng" algn="ctr">
+                      <a:noFill/>
+                    </a:lnL>
+                    <a:lnR w="0" cap="flat" cmpd="sng" algn="ctr">
+                      <a:noFill/>
+                    </a:lnR>
+                    <a:lnT w="0" cap="flat" cmpd="sng" algn="ctr">
+                      <a:noFill/>
+                    </a:lnT>
+                    <a:lnB w="12700" cap="flat" cmpd="sng" algn="ctr">
+                      <a:solidFill>
+                        <a:srgbClr val="E5E5E5"/>
+                      </a:solidFill>
+                      <a:prstDash val="solid"/>
+                      <a:round/>
+                      <a:headEnd type="none" w="med" len="med"/>
+                      <a:tailEnd type="none" w="med" len="med"/>
+                    </a:lnB>
+                    <a:solidFill>
+                      <a:srgbClr val="FFFFFF"/>
+                    </a:solidFill>
+                  </a:tcPr>
+                </a:tc>
+                <a:tc>
+                  <a:txBody>
+                    <a:bodyPr/>
+                    <a:lstStyle/>
+                    <a:p>
+                      <a:pPr indent="0" marL="0">
+                        <a:buNone/>
+                      </a:pPr>
+                      <a:r>
+                        <a:rPr lang="en-US" sz="1000" dirty="0">
+                          <a:solidFill>
+                            <a:srgbClr val="1D2D3E"/>
+                          </a:solidFill>
+                        </a:rPr>
+                        <a:t>ZPC_PEDIDO</a:t>
+                      </a:r>
+                      <a:endParaRPr lang="en-US" sz="1000" dirty="0"/>
+                    </a:p>
+                  </a:txBody>
+                  <a:tcPr marL="73152" marR="73152" marT="36576" marB="36576" anchor="ctr">
+                    <a:lnL w="0" cap="flat" cmpd="sng" algn="ctr">
+                      <a:noFill/>
+                    </a:lnL>
+                    <a:lnR w="0" cap="flat" cmpd="sng" algn="ctr">
+                      <a:noFill/>
+                    </a:lnR>
+                    <a:lnT w="0" cap="flat" cmpd="sng" algn="ctr">
+                      <a:noFill/>
+                    </a:lnT>
+                    <a:lnB w="12700" cap="flat" cmpd="sng" algn="ctr">
+                      <a:solidFill>
+                        <a:srgbClr val="E5E5E5"/>
+                      </a:solidFill>
+                      <a:prstDash val="solid"/>
+                      <a:round/>
+                      <a:headEnd type="none" w="med" len="med"/>
+                      <a:tailEnd type="none" w="med" len="med"/>
+                    </a:lnB>
+                    <a:solidFill>
+                      <a:srgbClr val="FFFFFF"/>
+                    </a:solidFill>
+                  </a:tcPr>
+                </a:tc>
+              </a:tr>
+              <a:tr h="429768">
+                <a:tc>
+                  <a:txBody>
+                    <a:bodyPr/>
+                    <a:lstStyle/>
+                    <a:p>
+                      <a:pPr indent="0" marL="0">
+                        <a:buNone/>
+                      </a:pPr>
+                      <a:r>
+                        <a:rPr lang="en-US" sz="1000" dirty="0">
+                          <a:solidFill>
+                            <a:srgbClr val="1D2D3E"/>
+                          </a:solidFill>
+                          <a:latin typeface="Courier New" pitchFamily="34" charset="0"/>
+                          <a:ea typeface="Courier New" pitchFamily="34" charset="-122"/>
+                          <a:cs typeface="Courier New" pitchFamily="34" charset="-120"/>
+                        </a:rPr>
+                        <a:t>Reembolsos</a:t>
+                      </a:r>
+                      <a:endParaRPr lang="en-US" sz="1000" dirty="0">
+                        <a:latin typeface="Courier New" charset="0"/>
+                        <a:ea typeface="Courier New" charset="0"/>
+                        <a:cs typeface="Courier New" charset="0"/>
+                      </a:endParaRPr>
+                    </a:p>
+                  </a:txBody>
+                  <a:tcPr marL="73152" marR="73152" marT="36576" marB="36576" anchor="ctr">
+                    <a:lnL w="0" cap="flat" cmpd="sng" algn="ctr">
+                      <a:noFill/>
+                    </a:lnL>
+                    <a:lnR w="0" cap="flat" cmpd="sng" algn="ctr">
+                      <a:noFill/>
+                    </a:lnR>
+                    <a:lnT w="0" cap="flat" cmpd="sng" algn="ctr">
+                      <a:noFill/>
+                    </a:lnT>
+                    <a:lnB w="12700" cap="flat" cmpd="sng" algn="ctr">
+                      <a:solidFill>
+                        <a:srgbClr val="E5E5E5"/>
+                      </a:solidFill>
+                      <a:prstDash val="solid"/>
+                      <a:round/>
+                      <a:headEnd type="none" w="med" len="med"/>
+                      <a:tailEnd type="none" w="med" len="med"/>
+                    </a:lnB>
+                    <a:solidFill>
+                      <a:srgbClr val="FFFFFF"/>
+                    </a:solidFill>
+                  </a:tcPr>
+                </a:tc>
+                <a:tc>
+                  <a:txBody>
+                    <a:bodyPr/>
+                    <a:lstStyle/>
+                    <a:p>
+                      <a:pPr indent="0" marL="0">
+                        <a:buNone/>
+                      </a:pPr>
+                      <a:r>
+                        <a:rPr lang="en-US" sz="1000" dirty="0">
+                          <a:solidFill>
+                            <a:srgbClr val="1D2D3E"/>
+                          </a:solidFill>
+                          <a:latin typeface="Courier New" pitchFamily="34" charset="0"/>
+                          <a:ea typeface="Courier New" pitchFamily="34" charset="-122"/>
+                          <a:cs typeface="Courier New" pitchFamily="34" charset="-120"/>
+                        </a:rPr>
+                        <a:t>ZPCReembolso-manage</a:t>
+                      </a:r>
+                      <a:endParaRPr lang="en-US" sz="1000" dirty="0">
+                        <a:latin typeface="Courier New" charset="0"/>
+                        <a:ea typeface="Courier New" charset="0"/>
+                        <a:cs typeface="Courier New" charset="0"/>
+                      </a:endParaRPr>
+                    </a:p>
+                  </a:txBody>
+                  <a:tcPr marL="73152" marR="73152" marT="36576" marB="36576" anchor="ctr">
+                    <a:lnL w="0" cap="flat" cmpd="sng" algn="ctr">
+                      <a:noFill/>
+                    </a:lnL>
+                    <a:lnR w="0" cap="flat" cmpd="sng" algn="ctr">
+                      <a:noFill/>
+                    </a:lnR>
+                    <a:lnT w="0" cap="flat" cmpd="sng" algn="ctr">
+                      <a:noFill/>
+                    </a:lnT>
+                    <a:lnB w="12700" cap="flat" cmpd="sng" algn="ctr">
+                      <a:solidFill>
+                        <a:srgbClr val="E5E5E5"/>
+                      </a:solidFill>
+                      <a:prstDash val="solid"/>
+                      <a:round/>
+                      <a:headEnd type="none" w="med" len="med"/>
+                      <a:tailEnd type="none" w="med" len="med"/>
+                    </a:lnB>
+                    <a:solidFill>
+                      <a:srgbClr val="FFFFFF"/>
+                    </a:solidFill>
+                  </a:tcPr>
+                </a:tc>
+                <a:tc>
+                  <a:txBody>
+                    <a:bodyPr/>
+                    <a:lstStyle/>
+                    <a:p>
+                      <a:pPr indent="0" marL="0">
+                        <a:buNone/>
+                      </a:pPr>
+                      <a:r>
+                        <a:rPr lang="en-US" sz="1000" dirty="0">
+                          <a:solidFill>
+                            <a:srgbClr val="1D2D3E"/>
+                          </a:solidFill>
+                          <a:latin typeface="Courier New" pitchFamily="34" charset="0"/>
+                          <a:ea typeface="Courier New" pitchFamily="34" charset="-122"/>
+                          <a:cs typeface="Courier New" pitchFamily="34" charset="-120"/>
+                        </a:rPr>
+                        <a:t>ZUI_PC_REEMBOLSOS_O4</a:t>
+                      </a:r>
+                      <a:endParaRPr lang="en-US" sz="1000" dirty="0">
+                        <a:latin typeface="Courier New" charset="0"/>
+                        <a:ea typeface="Courier New" charset="0"/>
+                        <a:cs typeface="Courier New" charset="0"/>
+                      </a:endParaRPr>
+                    </a:p>
+                  </a:txBody>
+                  <a:tcPr marL="73152" marR="73152" marT="36576" marB="36576" anchor="ctr">
+                    <a:lnL w="0" cap="flat" cmpd="sng" algn="ctr">
+                      <a:noFill/>
+                    </a:lnL>
+                    <a:lnR w="0" cap="flat" cmpd="sng" algn="ctr">
+                      <a:noFill/>
+                    </a:lnR>
+                    <a:lnT w="0" cap="flat" cmpd="sng" algn="ctr">
+                      <a:noFill/>
+                    </a:lnT>
+                    <a:lnB w="12700" cap="flat" cmpd="sng" algn="ctr">
+                      <a:solidFill>
+                        <a:srgbClr val="E5E5E5"/>
+                      </a:solidFill>
+                      <a:prstDash val="solid"/>
+                      <a:round/>
+                      <a:headEnd type="none" w="med" len="med"/>
+                      <a:tailEnd type="none" w="med" len="med"/>
+                    </a:lnB>
+                    <a:solidFill>
+                      <a:srgbClr val="FFFFFF"/>
+                    </a:solidFill>
+                  </a:tcPr>
+                </a:tc>
+                <a:tc>
+                  <a:txBody>
+                    <a:bodyPr/>
+                    <a:lstStyle/>
+                    <a:p>
+                      <a:pPr indent="0" marL="0">
+                        <a:buNone/>
+                      </a:pPr>
+                      <a:r>
+                        <a:rPr lang="en-US" sz="1000" dirty="0">
+                          <a:solidFill>
+                            <a:srgbClr val="1D2D3E"/>
+                          </a:solidFill>
+                        </a:rPr>
+                        <a:t>ZPC_PEDIDO</a:t>
+                      </a:r>
+                      <a:endParaRPr lang="en-US" sz="1000" dirty="0"/>
+                    </a:p>
+                  </a:txBody>
+                  <a:tcPr marL="73152" marR="73152" marT="36576" marB="36576" anchor="ctr">
+                    <a:lnL w="0" cap="flat" cmpd="sng" algn="ctr">
+                      <a:noFill/>
+                    </a:lnL>
+                    <a:lnR w="0" cap="flat" cmpd="sng" algn="ctr">
+                      <a:noFill/>
+                    </a:lnR>
+                    <a:lnT w="0" cap="flat" cmpd="sng" algn="ctr">
+                      <a:noFill/>
+                    </a:lnT>
+                    <a:lnB w="12700" cap="flat" cmpd="sng" algn="ctr">
+                      <a:solidFill>
+                        <a:srgbClr val="E5E5E5"/>
+                      </a:solidFill>
+                      <a:prstDash val="solid"/>
+                      <a:round/>
+                      <a:headEnd type="none" w="med" len="med"/>
+                      <a:tailEnd type="none" w="med" len="med"/>
+                    </a:lnB>
+                    <a:solidFill>
+                      <a:srgbClr val="FFFFFF"/>
+                    </a:solidFill>
+                  </a:tcPr>
+                </a:tc>
+              </a:tr>
+              <a:tr h="429768">
+                <a:tc>
+                  <a:txBody>
+                    <a:bodyPr/>
+                    <a:lstStyle/>
+                    <a:p>
+                      <a:pPr indent="0" marL="0">
+                        <a:buNone/>
+                      </a:pPr>
+                      <a:r>
+                        <a:rPr lang="en-US" sz="1000" dirty="0">
+                          <a:solidFill>
+                            <a:srgbClr val="1D2D3E"/>
+                          </a:solidFill>
+                          <a:latin typeface="Courier New" pitchFamily="34" charset="0"/>
+                          <a:ea typeface="Courier New" pitchFamily="34" charset="-122"/>
+                          <a:cs typeface="Courier New" pitchFamily="34" charset="-120"/>
+                        </a:rPr>
+                        <a:t>4 análises</a:t>
+                      </a:r>
+                      <a:endParaRPr lang="en-US" sz="1000" dirty="0">
+                        <a:latin typeface="Courier New" charset="0"/>
+                        <a:ea typeface="Courier New" charset="0"/>
+                        <a:cs typeface="Courier New" charset="0"/>
+                      </a:endParaRPr>
+                    </a:p>
+                  </a:txBody>
+                  <a:tcPr marL="73152" marR="73152" marT="36576" marB="36576" anchor="ctr">
+                    <a:lnL w="0" cap="flat" cmpd="sng" algn="ctr">
+                      <a:noFill/>
+                    </a:lnL>
+                    <a:lnR w="0" cap="flat" cmpd="sng" algn="ctr">
+                      <a:noFill/>
+                    </a:lnR>
+                    <a:lnT w="0" cap="flat" cmpd="sng" algn="ctr">
+                      <a:noFill/>
+                    </a:lnT>
+                    <a:lnB w="12700" cap="flat" cmpd="sng" algn="ctr">
+                      <a:solidFill>
+                        <a:srgbClr val="E5E5E5"/>
+                      </a:solidFill>
+                      <a:prstDash val="solid"/>
+                      <a:round/>
+                      <a:headEnd type="none" w="med" len="med"/>
+                      <a:tailEnd type="none" w="med" len="med"/>
+                    </a:lnB>
+                    <a:solidFill>
+                      <a:srgbClr val="FFFFFF"/>
+                    </a:solidFill>
+                  </a:tcPr>
+                </a:tc>
+                <a:tc>
+                  <a:txBody>
+                    <a:bodyPr/>
+                    <a:lstStyle/>
+                    <a:p>
+                      <a:pPr indent="0" marL="0">
+                        <a:buNone/>
+                      </a:pPr>
+                      <a:r>
+                        <a:rPr lang="en-US" sz="1000" dirty="0">
+                          <a:solidFill>
+                            <a:srgbClr val="1D2D3E"/>
+                          </a:solidFill>
+                          <a:latin typeface="Courier New" pitchFamily="34" charset="0"/>
+                          <a:ea typeface="Courier New" pitchFamily="34" charset="-122"/>
+                          <a:cs typeface="Courier New" pitchFamily="34" charset="-120"/>
+                        </a:rPr>
+                        <a:t>ZPCAnalise*-display</a:t>
+                      </a:r>
+                      <a:endParaRPr lang="en-US" sz="1000" dirty="0">
+                        <a:latin typeface="Courier New" charset="0"/>
+                        <a:ea typeface="Courier New" charset="0"/>
+                        <a:cs typeface="Courier New" charset="0"/>
+                      </a:endParaRPr>
+                    </a:p>
+                  </a:txBody>
+                  <a:tcPr marL="73152" marR="73152" marT="36576" marB="36576" anchor="ctr">
+                    <a:lnL w="0" cap="flat" cmpd="sng" algn="ctr">
+                      <a:noFill/>
+                    </a:lnL>
+                    <a:lnR w="0" cap="flat" cmpd="sng" algn="ctr">
+                      <a:noFill/>
+                    </a:lnR>
+                    <a:lnT w="0" cap="flat" cmpd="sng" algn="ctr">
+                      <a:noFill/>
+                    </a:lnT>
+                    <a:lnB w="12700" cap="flat" cmpd="sng" algn="ctr">
+                      <a:solidFill>
+                        <a:srgbClr val="E5E5E5"/>
+                      </a:solidFill>
+                      <a:prstDash val="solid"/>
+                      <a:round/>
+                      <a:headEnd type="none" w="med" len="med"/>
+                      <a:tailEnd type="none" w="med" len="med"/>
+                    </a:lnB>
+                    <a:solidFill>
+                      <a:srgbClr val="FFFFFF"/>
+                    </a:solidFill>
+                  </a:tcPr>
+                </a:tc>
+                <a:tc>
+                  <a:txBody>
+                    <a:bodyPr/>
+                    <a:lstStyle/>
+                    <a:p>
+                      <a:pPr indent="0" marL="0">
+                        <a:buNone/>
+                      </a:pPr>
+                      <a:r>
+                        <a:rPr lang="en-US" sz="1000" dirty="0">
+                          <a:solidFill>
+                            <a:srgbClr val="1D2D3E"/>
+                          </a:solidFill>
+                          <a:latin typeface="Courier New" pitchFamily="34" charset="0"/>
+                          <a:ea typeface="Courier New" pitchFamily="34" charset="-122"/>
+                          <a:cs typeface="Courier New" pitchFamily="34" charset="-120"/>
+                        </a:rPr>
+                        <a:t>ZUI_PC_ANALITICO_O4</a:t>
+                      </a:r>
+                      <a:endParaRPr lang="en-US" sz="1000" dirty="0">
+                        <a:latin typeface="Courier New" charset="0"/>
+                        <a:ea typeface="Courier New" charset="0"/>
+                        <a:cs typeface="Courier New" charset="0"/>
+                      </a:endParaRPr>
+                    </a:p>
+                  </a:txBody>
+                  <a:tcPr marL="73152" marR="73152" marT="36576" marB="36576" anchor="ctr">
+                    <a:lnL w="0" cap="flat" cmpd="sng" algn="ctr">
+                      <a:noFill/>
+                    </a:lnL>
+                    <a:lnR w="0" cap="flat" cmpd="sng" algn="ctr">
+                      <a:noFill/>
+                    </a:lnR>
+                    <a:lnT w="0" cap="flat" cmpd="sng" algn="ctr">
+                      <a:noFill/>
+                    </a:lnT>
+                    <a:lnB w="12700" cap="flat" cmpd="sng" algn="ctr">
+                      <a:solidFill>
+                        <a:srgbClr val="E5E5E5"/>
+                      </a:solidFill>
+                      <a:prstDash val="solid"/>
+                      <a:round/>
+                      <a:headEnd type="none" w="med" len="med"/>
+                      <a:tailEnd type="none" w="med" len="med"/>
+                    </a:lnB>
+                    <a:solidFill>
+                      <a:srgbClr val="FFFFFF"/>
+                    </a:solidFill>
+                  </a:tcPr>
+                </a:tc>
+                <a:tc>
+                  <a:txBody>
+                    <a:bodyPr/>
+                    <a:lstStyle/>
+                    <a:p>
+                      <a:pPr indent="0" marL="0">
+                        <a:buNone/>
+                      </a:pPr>
+                      <a:r>
+                        <a:rPr lang="en-US" sz="1000" dirty="0">
+                          <a:solidFill>
+                            <a:srgbClr val="1D2D3E"/>
+                          </a:solidFill>
+                        </a:rPr>
+                        <a:t>ZPC_* 03</a:t>
+                      </a:r>
+                      <a:endParaRPr lang="en-US" sz="1000" dirty="0"/>
+                    </a:p>
+                  </a:txBody>
+                  <a:tcPr marL="73152" marR="73152" marT="36576" marB="36576" anchor="ctr">
+                    <a:lnL w="0" cap="flat" cmpd="sng" algn="ctr">
+                      <a:noFill/>
+                    </a:lnL>
+                    <a:lnR w="0" cap="flat" cmpd="sng" algn="ctr">
+                      <a:noFill/>
+                    </a:lnR>
+                    <a:lnT w="0" cap="flat" cmpd="sng" algn="ctr">
+                      <a:noFill/>
+                    </a:lnT>
+                    <a:lnB w="12700" cap="flat" cmpd="sng" algn="ctr">
+                      <a:solidFill>
+                        <a:srgbClr val="E5E5E5"/>
+                      </a:solidFill>
+                      <a:prstDash val="solid"/>
+                      <a:round/>
+                      <a:headEnd type="none" w="med" len="med"/>
+                      <a:tailEnd type="none" w="med" len="med"/>
+                    </a:lnB>
+                    <a:solidFill>
+                      <a:srgbClr val="FFFFFF"/>
+                    </a:solidFill>
+                  </a:tcPr>
+                </a:tc>
+              </a:tr>
+            </a:tbl>
+          </a:graphicData>
+        </a:graphic>
+      </p:graphicFrame>
+      <p:sp>
+        <p:nvSpPr>
+          <p:cNvPr id="7" name="Cartão"/>
+          <p:cNvSpPr/>
+          <p:nvPr/>
+        </p:nvSpPr>
+        <p:spPr>
+          <a:xfrm>
+            <a:off x="548640" y="4608576"/>
+            <a:ext cx="3154680" cy="1563624"/>
+          </a:xfrm>
+          <a:prstGeom prst="roundRect">
+            <a:avLst>
+              <a:gd name="adj" fmla="val 7018"/>
+            </a:avLst>
+          </a:prstGeom>
+          <a:solidFill>
+            <a:srgbClr val="FFFFFF"/>
+          </a:solidFill>
+          <a:ln/>
+          <a:effectLst>
+            <a:outerShdw sx="100000" sy="100000" kx="0" ky="0" algn="bl" rotWithShape="0" blurRad="101600" dist="25400" dir="5400000">
+              <a:srgbClr val="223548">
+                <a:alpha val="16000"/>
+              </a:srgbClr>
+            </a:outerShdw>
+          </a:effectLst>
+        </p:spPr>
+      </p:sp>
+      <p:sp>
+        <p:nvSpPr>
+          <p:cNvPr id="8" name="Text 4"/>
+          <p:cNvSpPr txBox="1"/>
+          <p:nvPr/>
+        </p:nvSpPr>
+        <p:spPr>
+          <a:xfrm>
+            <a:off x="731520" y="4745736"/>
+            <a:ext cx="2788920" cy="274320"/>
+          </a:xfrm>
+          <a:prstGeom prst="rect">
+            <a:avLst/>
+          </a:prstGeom>
+          <a:noFill/>
+          <a:ln/>
+        </p:spPr>
+        <p:txBody>
+          <a:bodyPr wrap="square" lIns="0" tIns="0" rIns="0" bIns="0" rtlCol="0" anchor="t"/>
+          <a:lstStyle/>
+          <a:p>
+            <a:pPr indent="0" marL="0">
+              <a:buNone/>
+            </a:pPr>
+            <a:r>
+              <a:rPr lang="en-US" sz="1250" b="1" dirty="0">
+                <a:solidFill>
+                  <a:srgbClr val="1D2D3E"/>
+                </a:solidFill>
+              </a:rPr>
+              <a:t>Role Z_PC_ADMIN</a:t>
+            </a:r>
+            <a:endParaRPr lang="en-US" sz="1250" dirty="0"/>
+          </a:p>
+        </p:txBody>
+      </p:sp>
+      <p:sp>
+        <p:nvSpPr>
+          <p:cNvPr id="9" name="Status Genero"/>
+          <p:cNvSpPr/>
+          <p:nvPr/>
+        </p:nvSpPr>
+        <p:spPr>
+          <a:xfrm>
+            <a:off x="731520" y="5111496"/>
+            <a:ext cx="867200" cy="274320"/>
+          </a:xfrm>
+          <a:prstGeom prst="roundRect">
+            <a:avLst>
+              <a:gd name="adj" fmla="val 50000"/>
+            </a:avLst>
+          </a:prstGeom>
+          <a:solidFill>
+            <a:srgbClr val="E1F4FF"/>
+          </a:solidFill>
+          <a:ln/>
+        </p:spPr>
+        <p:txBody>
+          <a:bodyPr wrap="square" lIns="0" tIns="0" rIns="0" bIns="0" rtlCol="0" anchor="ctr"/>
+          <a:lstStyle/>
+          <a:p>
+            <a:pPr algn="ctr" indent="0" marL="0">
+              <a:buNone/>
+            </a:pPr>
+            <a:r>
+              <a:rPr lang="en-US" sz="1000" b="1" dirty="0">
+                <a:solidFill>
+                  <a:srgbClr val="0064D9"/>
+                </a:solidFill>
+                <a:latin typeface="Courier New" pitchFamily="34" charset="0"/>
+                <a:ea typeface="Courier New" pitchFamily="34" charset="-122"/>
+                <a:cs typeface="Courier New" pitchFamily="34" charset="-120"/>
+              </a:rPr>
+              <a:t>Clientes</a:t>
+            </a:r>
+            <a:endParaRPr lang="en-US" sz="1000" dirty="0"/>
+          </a:p>
+        </p:txBody>
+      </p:sp>
+      <p:sp>
+        <p:nvSpPr>
+          <p:cNvPr id="10" name="Status ClienteAtivo"/>
+          <p:cNvSpPr/>
+          <p:nvPr/>
+        </p:nvSpPr>
+        <p:spPr>
+          <a:xfrm>
+            <a:off x="1690160" y="5111496"/>
+            <a:ext cx="813800" cy="274320"/>
+          </a:xfrm>
+          <a:prstGeom prst="roundRect">
+            <a:avLst>
+              <a:gd name="adj" fmla="val 50000"/>
+            </a:avLst>
+          </a:prstGeom>
+          <a:solidFill>
+            <a:srgbClr val="E1F4FF"/>
+          </a:solidFill>
+          <a:ln/>
+        </p:spPr>
+        <p:txBody>
+          <a:bodyPr wrap="square" lIns="0" tIns="0" rIns="0" bIns="0" rtlCol="0" anchor="ctr"/>
+          <a:lstStyle/>
+          <a:p>
+            <a:pPr algn="ctr" indent="0" marL="0">
+              <a:buNone/>
+            </a:pPr>
+            <a:r>
+              <a:rPr lang="en-US" sz="1000" b="1" dirty="0">
+                <a:solidFill>
+                  <a:srgbClr val="0064D9"/>
+                </a:solidFill>
+                <a:latin typeface="Courier New" pitchFamily="34" charset="0"/>
+                <a:ea typeface="Courier New" pitchFamily="34" charset="-122"/>
+                <a:cs typeface="Courier New" pitchFamily="34" charset="-120"/>
+              </a:rPr>
+              <a:t>Estoque</a:t>
+            </a:r>
+            <a:endParaRPr lang="en-US" sz="1000" dirty="0"/>
+          </a:p>
+        </p:txBody>
+      </p:sp>
+      <p:sp>
+        <p:nvSpPr>
+          <p:cNvPr id="11" name="Status Uf"/>
+          <p:cNvSpPr/>
+          <p:nvPr/>
+        </p:nvSpPr>
+        <p:spPr>
+          <a:xfrm>
+            <a:off x="2595400" y="5111496"/>
+            <a:ext cx="813800" cy="274320"/>
+          </a:xfrm>
+          <a:prstGeom prst="roundRect">
+            <a:avLst>
+              <a:gd name="adj" fmla="val 50000"/>
+            </a:avLst>
+          </a:prstGeom>
+          <a:solidFill>
+            <a:srgbClr val="E1F4FF"/>
+          </a:solidFill>
+          <a:ln/>
+        </p:spPr>
+        <p:txBody>
+          <a:bodyPr wrap="square" lIns="0" tIns="0" rIns="0" bIns="0" rtlCol="0" anchor="ctr"/>
+          <a:lstStyle/>
+          <a:p>
+            <a:pPr algn="ctr" indent="0" marL="0">
+              <a:buNone/>
+            </a:pPr>
+            <a:r>
+              <a:rPr lang="en-US" sz="1000" b="1" dirty="0">
+                <a:solidFill>
+                  <a:srgbClr val="0064D9"/>
+                </a:solidFill>
+                <a:latin typeface="Courier New" pitchFamily="34" charset="0"/>
+                <a:ea typeface="Courier New" pitchFamily="34" charset="-122"/>
+                <a:cs typeface="Courier New" pitchFamily="34" charset="-120"/>
+              </a:rPr>
+              <a:t>Pedidos</a:t>
+            </a:r>
+            <a:endParaRPr lang="en-US" sz="1000" dirty="0"/>
+          </a:p>
+        </p:txBody>
+      </p:sp>
+      <p:sp>
+        <p:nvSpPr>
+          <p:cNvPr id="12" name="Status FaixaScore"/>
+          <p:cNvSpPr/>
+          <p:nvPr/>
+        </p:nvSpPr>
+        <p:spPr>
+          <a:xfrm>
+            <a:off x="731520" y="5440680"/>
+            <a:ext cx="974000" cy="274320"/>
+          </a:xfrm>
+          <a:prstGeom prst="roundRect">
+            <a:avLst>
+              <a:gd name="adj" fmla="val 50000"/>
+            </a:avLst>
+          </a:prstGeom>
+          <a:solidFill>
+            <a:srgbClr val="E1F4FF"/>
+          </a:solidFill>
+          <a:ln/>
+        </p:spPr>
+        <p:txBody>
+          <a:bodyPr wrap="square" lIns="0" tIns="0" rIns="0" bIns="0" rtlCol="0" anchor="ctr"/>
+          <a:lstStyle/>
+          <a:p>
+            <a:pPr algn="ctr" indent="0" marL="0">
+              <a:buNone/>
+            </a:pPr>
+            <a:r>
+              <a:rPr lang="en-US" sz="1000" b="1" dirty="0">
+                <a:solidFill>
+                  <a:srgbClr val="0064D9"/>
+                </a:solidFill>
+                <a:latin typeface="Courier New" pitchFamily="34" charset="0"/>
+                <a:ea typeface="Courier New" pitchFamily="34" charset="-122"/>
+                <a:cs typeface="Courier New" pitchFamily="34" charset="-120"/>
+              </a:rPr>
+              <a:t>Reembolsos</a:t>
+            </a:r>
+            <a:endParaRPr lang="en-US" sz="1000" dirty="0"/>
+          </a:p>
+        </p:txBody>
+      </p:sp>
+      <p:sp>
+        <p:nvSpPr>
+          <p:cNvPr id="13" name="Status Nome"/>
+          <p:cNvSpPr/>
+          <p:nvPr/>
+        </p:nvSpPr>
+        <p:spPr>
+          <a:xfrm>
+            <a:off x="1796960" y="5440680"/>
+            <a:ext cx="867200" cy="274320"/>
+          </a:xfrm>
+          <a:prstGeom prst="roundRect">
+            <a:avLst>
+              <a:gd name="adj" fmla="val 50000"/>
+            </a:avLst>
+          </a:prstGeom>
+          <a:solidFill>
+            <a:srgbClr val="E1F4FF"/>
+          </a:solidFill>
+          <a:ln/>
+        </p:spPr>
+        <p:txBody>
+          <a:bodyPr wrap="square" lIns="0" tIns="0" rIns="0" bIns="0" rtlCol="0" anchor="ctr"/>
+          <a:lstStyle/>
+          <a:p>
+            <a:pPr algn="ctr" indent="0" marL="0">
+              <a:buNone/>
+            </a:pPr>
+            <a:r>
+              <a:rPr lang="en-US" sz="1000" b="1" dirty="0">
+                <a:solidFill>
+                  <a:srgbClr val="0064D9"/>
+                </a:solidFill>
+                <a:latin typeface="Courier New" pitchFamily="34" charset="0"/>
+                <a:ea typeface="Courier New" pitchFamily="34" charset="-122"/>
+                <a:cs typeface="Courier New" pitchFamily="34" charset="-120"/>
+              </a:rPr>
+              <a:t>Análises</a:t>
+            </a:r>
+            <a:endParaRPr lang="en-US" sz="1000" dirty="0"/>
+          </a:p>
+        </p:txBody>
+      </p:sp>
+      <p:sp>
+        <p:nvSpPr>
+          <p:cNvPr id="14" name="Cartão"/>
+          <p:cNvSpPr/>
+          <p:nvPr/>
+        </p:nvSpPr>
+        <p:spPr>
+          <a:xfrm>
+            <a:off x="3977640" y="4608576"/>
+            <a:ext cx="3154680" cy="1563624"/>
+          </a:xfrm>
+          <a:prstGeom prst="roundRect">
+            <a:avLst>
+              <a:gd name="adj" fmla="val 7018"/>
+            </a:avLst>
+          </a:prstGeom>
+          <a:solidFill>
+            <a:srgbClr val="FFFFFF"/>
+          </a:solidFill>
+          <a:ln/>
+          <a:effectLst>
+            <a:outerShdw sx="100000" sy="100000" kx="0" ky="0" algn="bl" rotWithShape="0" blurRad="101600" dist="25400" dir="5400000">
+              <a:srgbClr val="223548">
+                <a:alpha val="16000"/>
+              </a:srgbClr>
+            </a:outerShdw>
+          </a:effectLst>
+        </p:spPr>
+      </p:sp>
+      <p:sp>
+        <p:nvSpPr>
+          <p:cNvPr id="15" name="Text 11"/>
+          <p:cNvSpPr txBox="1"/>
+          <p:nvPr/>
+        </p:nvSpPr>
+        <p:spPr>
+          <a:xfrm>
+            <a:off x="4160520" y="4745736"/>
+            <a:ext cx="2788920" cy="274320"/>
+          </a:xfrm>
+          <a:prstGeom prst="rect">
+            <a:avLst/>
+          </a:prstGeom>
+          <a:noFill/>
+          <a:ln/>
+        </p:spPr>
+        <p:txBody>
+          <a:bodyPr wrap="square" lIns="0" tIns="0" rIns="0" bIns="0" rtlCol="0" anchor="t"/>
+          <a:lstStyle/>
+          <a:p>
+            <a:pPr indent="0" marL="0">
+              <a:buNone/>
+            </a:pPr>
+            <a:r>
+              <a:rPr lang="en-US" sz="1250" b="1" dirty="0">
+                <a:solidFill>
+                  <a:srgbClr val="1D2D3E"/>
+                </a:solidFill>
+              </a:rPr>
+              <a:t>Role Z_PC_COMUM</a:t>
+            </a:r>
+            <a:endParaRPr lang="en-US" sz="1250" dirty="0"/>
+          </a:p>
+        </p:txBody>
+      </p:sp>
+      <p:sp>
+        <p:nvSpPr>
+          <p:cNvPr id="16" name="Status QtdeClientes"/>
+          <p:cNvSpPr/>
+          <p:nvPr/>
+        </p:nvSpPr>
+        <p:spPr>
+          <a:xfrm>
+            <a:off x="4160520" y="5111496"/>
+            <a:ext cx="1082650" cy="274320"/>
+          </a:xfrm>
+          <a:prstGeom prst="roundRect">
+            <a:avLst>
+              <a:gd name="adj" fmla="val 50000"/>
+            </a:avLst>
+          </a:prstGeom>
+          <a:solidFill>
+            <a:srgbClr val="F5FAE5"/>
+          </a:solidFill>
+          <a:ln/>
+        </p:spPr>
+        <p:txBody>
+          <a:bodyPr wrap="square" lIns="0" tIns="0" rIns="0" bIns="0" rtlCol="0" anchor="ctr"/>
+          <a:lstStyle/>
+          <a:p>
+            <a:pPr algn="ctr" indent="0" marL="0">
+              <a:buNone/>
+            </a:pPr>
+            <a:r>
+              <a:rPr lang="en-US" sz="1000" b="1" dirty="0">
+                <a:solidFill>
+                  <a:srgbClr val="256F3A"/>
+                </a:solidFill>
+                <a:latin typeface="Courier New" pitchFamily="34" charset="0"/>
+                <a:ea typeface="Courier New" pitchFamily="34" charset="-122"/>
+                <a:cs typeface="Courier New" pitchFamily="34" charset="-120"/>
+              </a:rPr>
+              <a:t>Pedidos</a:t>
+            </a:r>
+            <a:endParaRPr lang="en-US" sz="1000" dirty="0"/>
+          </a:p>
+        </p:txBody>
+      </p:sp>
+      <p:sp>
+        <p:nvSpPr>
+          <p:cNvPr id="17" name="Status ScoreMedio"/>
+          <p:cNvSpPr/>
+          <p:nvPr/>
+        </p:nvSpPr>
+        <p:spPr>
+          <a:xfrm>
+            <a:off x="5334610" y="5111496"/>
+            <a:ext cx="950976" cy="274320"/>
+          </a:xfrm>
+          <a:prstGeom prst="roundRect">
+            <a:avLst>
+              <a:gd name="adj" fmla="val 50000"/>
+            </a:avLst>
+          </a:prstGeom>
+          <a:solidFill>
+            <a:srgbClr val="F5FAE5"/>
+          </a:solidFill>
+          <a:ln/>
+        </p:spPr>
+        <p:txBody>
+          <a:bodyPr wrap="square" lIns="0" tIns="0" rIns="0" bIns="0" rtlCol="0" anchor="ctr"/>
+          <a:lstStyle/>
+          <a:p>
+            <a:pPr algn="ctr" indent="0" marL="0">
+              <a:buNone/>
+            </a:pPr>
+            <a:r>
+              <a:rPr lang="en-US" sz="1000" b="1" dirty="0">
+                <a:solidFill>
+                  <a:srgbClr val="256F3A"/>
+                </a:solidFill>
+                <a:latin typeface="Courier New" pitchFamily="34" charset="0"/>
+                <a:ea typeface="Courier New" pitchFamily="34" charset="-122"/>
+                <a:cs typeface="Courier New" pitchFamily="34" charset="-120"/>
+              </a:rPr>
+              <a:t>Reembolsos</a:t>
+            </a:r>
+            <a:endParaRPr lang="en-US" sz="1000" dirty="0"/>
+          </a:p>
+        </p:txBody>
+      </p:sp>
+      <p:sp>
+        <p:nvSpPr>
+          <p:cNvPr id="18" name="Cartão"/>
+          <p:cNvSpPr/>
+          <p:nvPr/>
+        </p:nvSpPr>
+        <p:spPr>
+          <a:xfrm>
+            <a:off x="7452360" y="1645920"/>
+            <a:ext cx="4190695" cy="4526280"/>
+          </a:xfrm>
+          <a:prstGeom prst="roundRect">
+            <a:avLst>
+              <a:gd name="adj" fmla="val 2618"/>
+            </a:avLst>
+          </a:prstGeom>
+          <a:solidFill>
+            <a:srgbClr val="FFFFFF"/>
+          </a:solidFill>
+          <a:ln/>
+          <a:effectLst>
+            <a:outerShdw sx="100000" sy="100000" kx="0" ky="0" algn="bl" rotWithShape="0" blurRad="101600" dist="25400" dir="5400000">
+              <a:srgbClr val="223548">
+                <a:alpha val="16000"/>
+              </a:srgbClr>
+            </a:outerShdw>
+          </a:effectLst>
+        </p:spPr>
+      </p:sp>
+      <p:sp>
+        <p:nvSpPr>
+          <p:cNvPr id="19" name="Text 15"/>
+          <p:cNvSpPr txBox="1"/>
+          <p:nvPr/>
+        </p:nvSpPr>
+        <p:spPr>
+          <a:xfrm>
+            <a:off x="7635240" y="1783080"/>
+            <a:ext cx="1143000" cy="274320"/>
+          </a:xfrm>
+          <a:prstGeom prst="rect">
+            <a:avLst/>
+          </a:prstGeom>
+          <a:noFill/>
+          <a:ln/>
+        </p:spPr>
+        <p:txBody>
+          <a:bodyPr wrap="square" lIns="0" tIns="0" rIns="0" bIns="0" rtlCol="0" anchor="ctr"/>
+          <a:lstStyle/>
+          <a:p>
+            <a:pPr indent="0" marL="0">
+              <a:buNone/>
+            </a:pPr>
+            <a:r>
+              <a:rPr lang="en-US" sz="1050" dirty="0">
+                <a:solidFill>
+                  <a:srgbClr val="556B82"/>
+                </a:solidFill>
+              </a:rPr>
+              <a:t>Menu da role</a:t>
+            </a:r>
+            <a:endParaRPr lang="en-US" sz="1050" dirty="0"/>
+          </a:p>
+        </p:txBody>
+      </p:sp>
+      <p:sp>
+        <p:nvSpPr>
+          <p:cNvPr id="20" name="Text 16"/>
+          <p:cNvSpPr txBox="1"/>
+          <p:nvPr/>
+        </p:nvSpPr>
+        <p:spPr>
+          <a:xfrm>
+            <a:off x="8778240" y="1783080"/>
+            <a:ext cx="2727655" cy="274320"/>
+          </a:xfrm>
+          <a:prstGeom prst="rect">
+            <a:avLst/>
+          </a:prstGeom>
+          <a:noFill/>
+          <a:ln/>
+        </p:spPr>
+        <p:txBody>
+          <a:bodyPr wrap="square" lIns="0" tIns="0" rIns="0" bIns="0" rtlCol="0" anchor="ctr"/>
+          <a:lstStyle/>
+          <a:p>
+            <a:pPr indent="0" marL="0">
+              <a:buNone/>
+            </a:pPr>
+            <a:r>
+              <a:rPr lang="en-US" sz="1000" dirty="0">
+                <a:solidFill>
+                  <a:srgbClr val="0064D9"/>
+                </a:solidFill>
+                <a:latin typeface="Courier New" pitchFamily="34" charset="0"/>
+                <a:ea typeface="Courier New" pitchFamily="34" charset="-122"/>
+                <a:cs typeface="Courier New" pitchFamily="34" charset="-120"/>
+              </a:rPr>
+              <a:t>catálogo + espaço</a:t>
+            </a:r>
+            <a:endParaRPr lang="en-US" sz="1000" dirty="0"/>
+          </a:p>
+        </p:txBody>
+      </p:sp>
+      <p:sp>
+        <p:nvSpPr>
+          <p:cNvPr id="21" name="Text 17"/>
+          <p:cNvSpPr txBox="1"/>
+          <p:nvPr/>
+        </p:nvSpPr>
+        <p:spPr>
+          <a:xfrm>
+            <a:off x="7635240" y="2148840"/>
+            <a:ext cx="1143000" cy="274320"/>
+          </a:xfrm>
+          <a:prstGeom prst="rect">
+            <a:avLst/>
+          </a:prstGeom>
+          <a:noFill/>
+          <a:ln/>
+        </p:spPr>
+        <p:txBody>
+          <a:bodyPr wrap="square" lIns="0" tIns="0" rIns="0" bIns="0" rtlCol="0" anchor="ctr"/>
+          <a:lstStyle/>
+          <a:p>
+            <a:pPr indent="0" marL="0">
+              <a:buNone/>
+            </a:pPr>
+            <a:r>
+              <a:rPr lang="en-US" sz="1050" dirty="0">
+                <a:solidFill>
+                  <a:srgbClr val="556B82"/>
+                </a:solidFill>
+              </a:rPr>
+              <a:t>Serviço V4</a:t>
+            </a:r>
+            <a:endParaRPr lang="en-US" sz="1050" dirty="0"/>
+          </a:p>
+        </p:txBody>
+      </p:sp>
+      <p:sp>
+        <p:nvSpPr>
+          <p:cNvPr id="22" name="Text 18"/>
+          <p:cNvSpPr txBox="1"/>
+          <p:nvPr/>
+        </p:nvSpPr>
+        <p:spPr>
+          <a:xfrm>
+            <a:off x="8778240" y="2148840"/>
+            <a:ext cx="2727655" cy="274320"/>
+          </a:xfrm>
+          <a:prstGeom prst="rect">
+            <a:avLst/>
+          </a:prstGeom>
+          <a:noFill/>
+          <a:ln/>
+        </p:spPr>
+        <p:txBody>
+          <a:bodyPr wrap="square" lIns="0" tIns="0" rIns="0" bIns="0" rtlCol="0" anchor="ctr"/>
+          <a:lstStyle/>
+          <a:p>
+            <a:pPr indent="0" marL="0">
+              <a:buNone/>
+            </a:pPr>
+            <a:r>
+              <a:rPr lang="en-US" sz="1000" dirty="0">
+                <a:solidFill>
+                  <a:srgbClr val="0064D9"/>
+                </a:solidFill>
+                <a:latin typeface="Courier New" pitchFamily="34" charset="0"/>
+                <a:ea typeface="Courier New" pitchFamily="34" charset="-122"/>
+                <a:cs typeface="Courier New" pitchFamily="34" charset="-120"/>
+              </a:rPr>
+              <a:t>G4BA → S_START</a:t>
+            </a:r>
+            <a:endParaRPr lang="en-US" sz="1000" dirty="0"/>
+          </a:p>
+        </p:txBody>
+      </p:sp>
+      <p:sp>
+        <p:nvSpPr>
+          <p:cNvPr id="23" name="Text 19"/>
+          <p:cNvSpPr txBox="1"/>
+          <p:nvPr/>
+        </p:nvSpPr>
+        <p:spPr>
+          <a:xfrm>
+            <a:off x="7635240" y="2514600"/>
+            <a:ext cx="1143000" cy="274320"/>
+          </a:xfrm>
+          <a:prstGeom prst="rect">
+            <a:avLst/>
+          </a:prstGeom>
+          <a:noFill/>
+          <a:ln/>
+        </p:spPr>
+        <p:txBody>
+          <a:bodyPr wrap="square" lIns="0" tIns="0" rIns="0" bIns="0" rtlCol="0" anchor="ctr"/>
+          <a:lstStyle/>
+          <a:p>
+            <a:pPr indent="0" marL="0">
+              <a:buNone/>
+            </a:pPr>
+            <a:r>
+              <a:rPr lang="en-US" sz="1050" dirty="0">
+                <a:solidFill>
+                  <a:srgbClr val="556B82"/>
+                </a:solidFill>
+              </a:rPr>
+              <a:t>Objetos</a:t>
+            </a:r>
+            <a:endParaRPr lang="en-US" sz="1050" dirty="0"/>
+          </a:p>
+        </p:txBody>
+      </p:sp>
+      <p:sp>
+        <p:nvSpPr>
+          <p:cNvPr id="24" name="Text 20"/>
+          <p:cNvSpPr txBox="1"/>
+          <p:nvPr/>
+        </p:nvSpPr>
+        <p:spPr>
+          <a:xfrm>
+            <a:off x="8778240" y="2514600"/>
+            <a:ext cx="2727655" cy="274320"/>
+          </a:xfrm>
+          <a:prstGeom prst="rect">
+            <a:avLst/>
+          </a:prstGeom>
+          <a:noFill/>
+          <a:ln/>
+        </p:spPr>
+        <p:txBody>
+          <a:bodyPr wrap="square" lIns="0" tIns="0" rIns="0" bIns="0" rtlCol="0" anchor="ctr"/>
+          <a:lstStyle/>
+          <a:p>
+            <a:pPr indent="0" marL="0">
+              <a:buNone/>
+            </a:pPr>
+            <a:r>
+              <a:rPr lang="en-US" sz="1000" dirty="0">
+                <a:solidFill>
+                  <a:srgbClr val="0064D9"/>
+                </a:solidFill>
+                <a:latin typeface="Courier New" pitchFamily="34" charset="0"/>
+                <a:ea typeface="Courier New" pitchFamily="34" charset="-122"/>
+                <a:cs typeface="Courier New" pitchFamily="34" charset="-120"/>
+              </a:rPr>
+              <a:t>ZPC_ADMIN · ZPC_PEDIDO</a:t>
+            </a:r>
+            <a:endParaRPr lang="en-US" sz="1000" dirty="0"/>
+          </a:p>
+        </p:txBody>
+      </p:sp>
+      <p:sp>
+        <p:nvSpPr>
+          <p:cNvPr id="25" name="Text 21"/>
+          <p:cNvSpPr txBox="1"/>
+          <p:nvPr/>
+        </p:nvSpPr>
+        <p:spPr>
+          <a:xfrm>
+            <a:off x="7635240" y="2880360"/>
+            <a:ext cx="1143000" cy="274320"/>
+          </a:xfrm>
+          <a:prstGeom prst="rect">
+            <a:avLst/>
+          </a:prstGeom>
+          <a:noFill/>
+          <a:ln/>
+        </p:spPr>
+        <p:txBody>
+          <a:bodyPr wrap="square" lIns="0" tIns="0" rIns="0" bIns="0" rtlCol="0" anchor="ctr"/>
+          <a:lstStyle/>
+          <a:p>
+            <a:pPr indent="0" marL="0">
+              <a:buNone/>
+            </a:pPr>
+            <a:r>
+              <a:rPr lang="en-US" sz="1050" dirty="0">
+                <a:solidFill>
+                  <a:srgbClr val="556B82"/>
+                </a:solidFill>
+              </a:rPr>
+              <a:t>Valores</a:t>
+            </a:r>
+            <a:endParaRPr lang="en-US" sz="1050" dirty="0"/>
+          </a:p>
+        </p:txBody>
+      </p:sp>
+      <p:sp>
+        <p:nvSpPr>
+          <p:cNvPr id="26" name="Text 22"/>
+          <p:cNvSpPr txBox="1"/>
+          <p:nvPr/>
+        </p:nvSpPr>
+        <p:spPr>
+          <a:xfrm>
+            <a:off x="8778240" y="2880360"/>
+            <a:ext cx="2727655" cy="274320"/>
+          </a:xfrm>
+          <a:prstGeom prst="rect">
+            <a:avLst/>
+          </a:prstGeom>
+          <a:noFill/>
+          <a:ln/>
+        </p:spPr>
+        <p:txBody>
+          <a:bodyPr wrap="square" lIns="0" tIns="0" rIns="0" bIns="0" rtlCol="0" anchor="ctr"/>
+          <a:lstStyle/>
+          <a:p>
+            <a:pPr indent="0" marL="0">
+              <a:buNone/>
+            </a:pPr>
+            <a:r>
+              <a:rPr lang="en-US" sz="1000" dirty="0">
+                <a:solidFill>
+                  <a:srgbClr val="0064D9"/>
+                </a:solidFill>
+                <a:latin typeface="Courier New" pitchFamily="34" charset="0"/>
+                <a:ea typeface="Courier New" pitchFamily="34" charset="-122"/>
+                <a:cs typeface="Courier New" pitchFamily="34" charset="-120"/>
+              </a:rPr>
+              <a:t>SU24 por grupo</a:t>
+            </a:r>
+            <a:endParaRPr lang="en-US" sz="1000" dirty="0"/>
+          </a:p>
+        </p:txBody>
+      </p:sp>
+      <p:sp>
+        <p:nvSpPr>
+          <p:cNvPr id="27" name="Text 23"/>
+          <p:cNvSpPr txBox="1"/>
+          <p:nvPr/>
+        </p:nvSpPr>
+        <p:spPr>
+          <a:xfrm>
+            <a:off x="7635240" y="3246120"/>
+            <a:ext cx="1143000" cy="274320"/>
+          </a:xfrm>
+          <a:prstGeom prst="rect">
+            <a:avLst/>
+          </a:prstGeom>
+          <a:noFill/>
+          <a:ln/>
+        </p:spPr>
+        <p:txBody>
+          <a:bodyPr wrap="square" lIns="0" tIns="0" rIns="0" bIns="0" rtlCol="0" anchor="ctr"/>
+          <a:lstStyle/>
+          <a:p>
+            <a:pPr indent="0" marL="0">
+              <a:buNone/>
+            </a:pPr>
+            <a:r>
+              <a:rPr lang="en-US" sz="1050" dirty="0">
+                <a:solidFill>
+                  <a:srgbClr val="556B82"/>
+                </a:solidFill>
+              </a:rPr>
+              <a:t>Usuários</a:t>
+            </a:r>
+            <a:endParaRPr lang="en-US" sz="1050" dirty="0"/>
+          </a:p>
+        </p:txBody>
+      </p:sp>
+      <p:sp>
+        <p:nvSpPr>
+          <p:cNvPr id="28" name="Text 24"/>
+          <p:cNvSpPr txBox="1"/>
+          <p:nvPr/>
+        </p:nvSpPr>
+        <p:spPr>
+          <a:xfrm>
+            <a:off x="8778240" y="3246120"/>
+            <a:ext cx="2727655" cy="274320"/>
+          </a:xfrm>
+          <a:prstGeom prst="rect">
+            <a:avLst/>
+          </a:prstGeom>
+          <a:noFill/>
+          <a:ln/>
+        </p:spPr>
+        <p:txBody>
+          <a:bodyPr wrap="square" lIns="0" tIns="0" rIns="0" bIns="0" rtlCol="0" anchor="ctr"/>
+          <a:lstStyle/>
+          <a:p>
+            <a:pPr indent="0" marL="0">
+              <a:buNone/>
+            </a:pPr>
+            <a:r>
+              <a:rPr lang="en-US" sz="1000" dirty="0">
+                <a:solidFill>
+                  <a:srgbClr val="0064D9"/>
+                </a:solidFill>
+                <a:latin typeface="Courier New" pitchFamily="34" charset="0"/>
+                <a:ea typeface="Courier New" pitchFamily="34" charset="-122"/>
+                <a:cs typeface="Courier New" pitchFamily="34" charset="-120"/>
+              </a:rPr>
+              <a:t>SU01 + comparação</a:t>
+            </a:r>
+            <a:endParaRPr lang="en-US" sz="1000" dirty="0"/>
+          </a:p>
+        </p:txBody>
+      </p:sp>
+      <p:sp>
+        <p:nvSpPr>
+          <p:cNvPr id="29" name="Text 25"/>
+          <p:cNvSpPr txBox="1"/>
+          <p:nvPr/>
+        </p:nvSpPr>
+        <p:spPr>
+          <a:xfrm>
+            <a:off x="7635240" y="3611880"/>
+            <a:ext cx="1143000" cy="274320"/>
+          </a:xfrm>
+          <a:prstGeom prst="rect">
+            <a:avLst/>
+          </a:prstGeom>
+          <a:noFill/>
+          <a:ln/>
+        </p:spPr>
+        <p:txBody>
+          <a:bodyPr wrap="square" lIns="0" tIns="0" rIns="0" bIns="0" rtlCol="0" anchor="ctr"/>
+          <a:lstStyle/>
+          <a:p>
+            <a:pPr indent="0" marL="0">
+              <a:buNone/>
+            </a:pPr>
+            <a:r>
+              <a:rPr lang="en-US" sz="1050" dirty="0">
+                <a:solidFill>
+                  <a:srgbClr val="556B82"/>
+                </a:solidFill>
+              </a:rPr>
+              <a:t>Diagnóstico</a:t>
+            </a:r>
+            <a:endParaRPr lang="en-US" sz="1050" dirty="0"/>
+          </a:p>
+        </p:txBody>
+      </p:sp>
+      <p:sp>
+        <p:nvSpPr>
+          <p:cNvPr id="30" name="Text 26"/>
+          <p:cNvSpPr txBox="1"/>
+          <p:nvPr/>
+        </p:nvSpPr>
+        <p:spPr>
+          <a:xfrm>
+            <a:off x="8778240" y="3611880"/>
+            <a:ext cx="2727655" cy="274320"/>
+          </a:xfrm>
+          <a:prstGeom prst="rect">
+            <a:avLst/>
+          </a:prstGeom>
+          <a:noFill/>
+          <a:ln/>
+        </p:spPr>
+        <p:txBody>
+          <a:bodyPr wrap="square" lIns="0" tIns="0" rIns="0" bIns="0" rtlCol="0" anchor="ctr"/>
+          <a:lstStyle/>
+          <a:p>
+            <a:pPr indent="0" marL="0">
+              <a:buNone/>
+            </a:pPr>
+            <a:r>
+              <a:rPr lang="en-US" sz="1000" dirty="0">
+                <a:solidFill>
+                  <a:srgbClr val="0064D9"/>
+                </a:solidFill>
+                <a:latin typeface="Courier New" pitchFamily="34" charset="0"/>
+                <a:ea typeface="Courier New" pitchFamily="34" charset="-122"/>
+                <a:cs typeface="Courier New" pitchFamily="34" charset="-120"/>
+              </a:rPr>
+              <a:t>SU53 · STAUTHTRACE</a:t>
+            </a:r>
+            <a:endParaRPr lang="en-US" sz="1000" dirty="0"/>
+          </a:p>
+        </p:txBody>
+      </p:sp>
+      <p:sp>
+        <p:nvSpPr>
+          <p:cNvPr id="31" name="Text 27"/>
+          <p:cNvSpPr txBox="1"/>
+          <p:nvPr/>
+        </p:nvSpPr>
+        <p:spPr>
+          <a:xfrm>
+            <a:off x="7635240" y="3977640"/>
+            <a:ext cx="1143000" cy="274320"/>
+          </a:xfrm>
+          <a:prstGeom prst="rect">
+            <a:avLst/>
+          </a:prstGeom>
+          <a:noFill/>
+          <a:ln/>
+        </p:spPr>
+        <p:txBody>
+          <a:bodyPr wrap="square" lIns="0" tIns="0" rIns="0" bIns="0" rtlCol="0" anchor="ctr"/>
+          <a:lstStyle/>
+          <a:p>
+            <a:pPr indent="0" marL="0">
+              <a:buNone/>
+            </a:pPr>
+            <a:r>
+              <a:rPr lang="en-US" sz="1050" dirty="0">
+                <a:solidFill>
+                  <a:srgbClr val="556B82"/>
+                </a:solidFill>
+              </a:rPr>
+              <a:t>Leitura</a:t>
+            </a:r>
+            <a:endParaRPr lang="en-US" sz="1050" dirty="0"/>
+          </a:p>
+        </p:txBody>
+      </p:sp>
+      <p:sp>
+        <p:nvSpPr>
+          <p:cNvPr id="32" name="Text 28"/>
+          <p:cNvSpPr txBox="1"/>
+          <p:nvPr/>
+        </p:nvSpPr>
+        <p:spPr>
+          <a:xfrm>
+            <a:off x="8778240" y="3977640"/>
+            <a:ext cx="2727655" cy="274320"/>
+          </a:xfrm>
+          <a:prstGeom prst="rect">
+            <a:avLst/>
+          </a:prstGeom>
+          <a:noFill/>
+          <a:ln/>
+        </p:spPr>
+        <p:txBody>
+          <a:bodyPr wrap="square" lIns="0" tIns="0" rIns="0" bIns="0" rtlCol="0" anchor="ctr"/>
+          <a:lstStyle/>
+          <a:p>
+            <a:pPr indent="0" marL="0">
+              <a:buNone/>
+            </a:pPr>
+            <a:r>
+              <a:rPr lang="en-US" sz="1000" dirty="0">
+                <a:solidFill>
+                  <a:srgbClr val="0064D9"/>
+                </a:solidFill>
+                <a:latin typeface="Courier New" pitchFamily="34" charset="0"/>
+                <a:ea typeface="Courier New" pitchFamily="34" charset="-122"/>
+                <a:cs typeface="Courier New" pitchFamily="34" charset="-120"/>
+              </a:rPr>
+              <a:t>DCL (atividade 03)</a:t>
+            </a:r>
+            <a:endParaRPr lang="en-US" sz="1000" dirty="0"/>
+          </a:p>
+        </p:txBody>
+      </p:sp>
+      <p:sp>
+        <p:nvSpPr>
+          <p:cNvPr id="33" name="Text 29"/>
+          <p:cNvSpPr txBox="1"/>
+          <p:nvPr/>
+        </p:nvSpPr>
+        <p:spPr>
+          <a:xfrm>
+            <a:off x="7635240" y="4480560"/>
+            <a:ext cx="3824935" cy="1554480"/>
+          </a:xfrm>
+          <a:prstGeom prst="rect">
+            <a:avLst/>
+          </a:prstGeom>
+          <a:noFill/>
+          <a:ln/>
+        </p:spPr>
+        <p:txBody>
+          <a:bodyPr wrap="square" lIns="0" tIns="0" rIns="0" bIns="0" rtlCol="0" anchor="t"/>
+          <a:lstStyle/>
+          <a:p>
+            <a:pPr indent="0" marL="0">
+              <a:buNone/>
+            </a:pPr>
+            <a:r>
+              <a:rPr lang="en-US" sz="1100" dirty="0">
+                <a:solidFill>
+                  <a:srgbClr val="556B82"/>
+                </a:solidFill>
+              </a:rPr>
+              <a:t>Sem o catálogo na role o tile nem aparece; com o tile e sem S_START, o serviço responde 403. Os botões seguem ZCL_PC_AUTH (etapa 4).</a:t>
+            </a:r>
+            <a:endParaRPr lang="en-US" sz="1100" dirty="0"/>
+          </a:p>
+        </p:txBody>
+      </p:sp>
+      <p:sp>
+        <p:nvSpPr>
+          <p:cNvPr id="25" name="Slide Number Placeholder 0"/>
+          <p:cNvSpPr>
+            <a:spLocks noGrp="1"/>
+          </p:cNvSpPr>
+          <p:nvPr>
+            <p:ph type="sldNum" sz="quarter" idx="4294967295"/>
+          </p:nvPr>
+        </p:nvSpPr>
+        <p:spPr>
+          <a:xfrm>
+            <a:off x="11183112" y="6419088"/>
+            <a:ext cx="457200" cy="274320"/>
+          </a:xfrm>
+          <a:prstGeom prst="rect">
+            <a:avLst/>
+          </a:prstGeom>
+          <a:extLst>
+            <a:ext uri="{C572A759-6A51-4108-AA02-DFA0A04FC94B}">
+              <ma14:wrappingTextBoxFlag xmlns:ma14="http://schemas.microsoft.com/office/mac/drawingml/2011/main" val="0"/>
+            </a:ext>
+          </a:extLst>
+        </p:spPr>
+        <p:txBody>
+          <a:bodyPr lIns="0" tIns="0" rIns="0" bIns="0" anchor="ctr"/>
+          <a:lstStyle>
+            <a:lvl1pPr>
+              <a:defRPr sz="900">
+                <a:solidFill>
+                  <a:srgbClr val="556B82"/>
+                </a:solidFill>
+              </a:defRPr>
+            </a:lvl1pPr>
+          </a:lstStyle>
+          <a:p>
+            <a:pPr algn="r"/>
+            <a:fld id="{F7021451-1387-4CA6-816F-3879F97B5CBC}" type="slidenum">
+              <a:rPr b="0" lang="en-US"/>
+              <a:t>11</a:t>
+            </a:fld>
+            <a:endParaRPr lang="en-US"/>
           </a:p>
         </p:txBody>
       </p:sp>

--- a/docs/apresentacoes/05-apps-fiori.pptx
+++ b/docs/apresentacoes/05-apps-fiori.pptx
@@ -3318,7 +3318,7 @@
     <p:bg>
       <p:bgPr>
         <a:solidFill>
-          <a:srgbClr val="12171C"/>
+          <a:srgbClr val="00144A"/>
         </a:solidFill>
       </p:bgPr>
     </p:bg>
@@ -3467,7 +3467,7 @@
     <p:bg>
       <p:bgPr>
         <a:solidFill>
-          <a:srgbClr val="12171C"/>
+          <a:srgbClr val="00144A"/>
         </a:solidFill>
       </p:bgPr>
     </p:bg>
@@ -3807,7 +3807,7 @@
     <p:bg>
       <p:bgPr>
         <a:solidFill>
-          <a:srgbClr val="12171C"/>
+          <a:srgbClr val="00144A"/>
         </a:solidFill>
       </p:bgPr>
     </p:bg>
@@ -4309,8 +4309,8 @@
         </p:nvSpPr>
         <p:spPr>
           <a:xfrm>
-            <a:off x="731520" y="1325880"/>
-            <a:ext cx="7772400" cy="365760"/>
+            <a:off x="731520" y="1417320"/>
+            <a:ext cx="5486400" cy="411480"/>
           </a:xfrm>
           <a:prstGeom prst="rect">
             <a:avLst/>
@@ -4328,10 +4328,10 @@
             <a:r>
               <a:rPr lang="en-US" sz="1400" b="1" spc="200" kern="0" dirty="0">
                 <a:solidFill>
-                  <a:schemeClr val="accent1"/>
-                </a:solidFill>
-              </a:rPr>
-              <a:t>ETAPA 5 DE 5 · SAP RAP NO BTP OU ON-PREMISE</a:t>
+                  <a:srgbClr val="89D1FF"/>
+                </a:solidFill>
+              </a:rPr>
+              <a:t>ETAPA 05 DE 05</a:t>
             </a:r>
             <a:endParaRPr lang="en-US" sz="1400" dirty="0"/>
           </a:p>
@@ -4347,8 +4347,8 @@
         </p:nvSpPr>
         <p:spPr>
           <a:xfrm>
-            <a:off x="731520" y="1737360"/>
-            <a:ext cx="7680960" cy="1600200"/>
+            <a:off x="731520" y="1965960"/>
+            <a:ext cx="6766560" cy="1737360"/>
           </a:xfrm>
           <a:prstGeom prst="rect">
             <a:avLst/>
@@ -4364,14 +4364,14 @@
               <a:buNone/>
             </a:pPr>
             <a:r>
-              <a:rPr lang="en-US" sz="4800" b="1" dirty="0">
+              <a:rPr lang="en-US" sz="4400" b="1" dirty="0">
                 <a:solidFill>
                   <a:schemeClr val="bg1"/>
                 </a:solidFill>
               </a:rPr>
               <a:t>Apps Fiori</a:t>
             </a:r>
-            <a:endParaRPr lang="en-US" sz="4800" dirty="0"/>
+            <a:endParaRPr lang="en-US" sz="4400" dirty="0"/>
           </a:p>
         </p:txBody>
       </p:sp>
@@ -4385,8 +4385,8 @@
         </p:nvSpPr>
         <p:spPr>
           <a:xfrm>
-            <a:off x="731520" y="3383280"/>
-            <a:ext cx="7132320" cy="914400"/>
+            <a:off x="731520" y="3840480"/>
+            <a:ext cx="6400800" cy="1097280"/>
           </a:xfrm>
           <a:prstGeom prst="rect">
             <a:avLst/>
@@ -4404,7 +4404,7 @@
             <a:r>
               <a:rPr lang="en-US" sz="1800" dirty="0">
                 <a:solidFill>
-                  <a:schemeClr val="bg2"/>
+                  <a:srgbClr val="D1EFFF"/>
                 </a:solidFill>
               </a:rPr>
               <a:t>Quatro apps Fiori Elements e quatro apps de análise SAPUI5, domínio por domínio, até o launchpad e o deploy</a:t>
@@ -4415,71 +4415,72 @@
       </p:sp>
       <p:sp>
         <p:nvSpPr>
-          <p:cNvPr id="5" name="Decoração 1"/>
+          <p:cNvPr id="5" name="Avatar da etapa"/>
           <p:cNvSpPr/>
           <p:nvPr/>
         </p:nvSpPr>
         <p:spPr>
           <a:xfrm>
-            <a:off x="8503920" y="-1463040"/>
-            <a:ext cx="5120640" cy="5120640"/>
-          </a:xfrm>
-          <a:prstGeom prst="ellipse">
+            <a:off x="8183880" y="1417320"/>
+            <a:ext cx="3291840" cy="3291840"/>
+          </a:xfrm>
+          <a:prstGeom prst="roundRect">
+            <a:avLst>
+              <a:gd name="adj" fmla="val 22222"/>
+            </a:avLst>
+          </a:prstGeom>
+          <a:solidFill>
+            <a:srgbClr val="1B3A7A"/>
+          </a:solidFill>
+          <a:ln/>
+        </p:spPr>
+      </p:sp>
+      <p:sp>
+        <p:nvSpPr>
+          <p:cNvPr id="6" name="Avatar interno"/>
+          <p:cNvSpPr/>
+          <p:nvPr/>
+        </p:nvSpPr>
+        <p:spPr>
+          <a:xfrm>
+            <a:off x="8732520" y="1965960"/>
+            <a:ext cx="2194560" cy="2194560"/>
+          </a:xfrm>
+          <a:prstGeom prst="roundRect">
+            <a:avLst>
+              <a:gd name="adj" fmla="val 22917"/>
+            </a:avLst>
+          </a:prstGeom>
+          <a:solidFill>
+            <a:schemeClr val="accent1"/>
+          </a:solidFill>
+          <a:ln/>
+        </p:spPr>
+      </p:sp>
+      <p:pic>
+        <p:nvPicPr>
+          <p:cNvPr id="7" name="Image 0" descr="Apps Fiori">    </p:cNvPr>
+          <p:cNvPicPr>
+            <a:picLocks noChangeAspect="1"/>
+          </p:cNvPicPr>
+          <p:nvPr/>
+        </p:nvPicPr>
+        <p:blipFill>
+          <a:blip r:embed="rId100"/>
+          <a:stretch>
+            <a:fillRect/>
+          </a:stretch>
+        </p:blipFill>
+        <p:spPr>
+          <a:xfrm>
+            <a:off x="9281160" y="2514600"/>
+            <a:ext cx="1097280" cy="1097280"/>
+          </a:xfrm>
+          <a:prstGeom prst="rect">
             <a:avLst/>
           </a:prstGeom>
-          <a:solidFill>
-            <a:srgbClr val="0070F2">
-              <a:alpha val="28000"/>
-            </a:srgbClr>
-          </a:solidFill>
-          <a:ln/>
-        </p:spPr>
-      </p:sp>
-      <p:sp>
-        <p:nvSpPr>
-          <p:cNvPr id="6" name="Decoração 2"/>
-          <p:cNvSpPr/>
-          <p:nvPr/>
-        </p:nvSpPr>
-        <p:spPr>
-          <a:xfrm>
-            <a:off x="9784080" y="1828800"/>
-            <a:ext cx="2834640" cy="2834640"/>
-          </a:xfrm>
-          <a:prstGeom prst="ellipse">
-            <a:avLst/>
-          </a:prstGeom>
-          <a:solidFill>
-            <a:srgbClr val="4DB1FF">
-              <a:alpha val="18000"/>
-            </a:srgbClr>
-          </a:solidFill>
-          <a:ln/>
-        </p:spPr>
-      </p:sp>
-      <p:sp>
-        <p:nvSpPr>
-          <p:cNvPr id="7" name="Shape 5"/>
-          <p:cNvSpPr/>
-          <p:nvPr/>
-        </p:nvSpPr>
-        <p:spPr>
-          <a:xfrm>
-            <a:off x="923544" y="5266944"/>
-            <a:ext cx="10131552" cy="0"/>
-          </a:xfrm>
-          <a:prstGeom prst="line">
-            <a:avLst/>
-          </a:prstGeom>
-          <a:noFill/>
-          <a:ln w="25400">
-            <a:solidFill>
-              <a:srgbClr val="3A4654"/>
-            </a:solidFill>
-            <a:prstDash val="solid"/>
-          </a:ln>
-        </p:spPr>
-      </p:sp>
+        </p:spPr>
+      </p:pic>
       <p:sp>
         <p:nvSpPr>
           <p:cNvPr id="8" name="Etapa 1"/>
@@ -4488,385 +4489,172 @@
         </p:nvSpPr>
         <p:spPr>
           <a:xfrm>
-            <a:off x="731520" y="5074920"/>
-            <a:ext cx="384048" cy="384048"/>
-          </a:xfrm>
-          <a:prstGeom prst="ellipse">
+            <a:off x="8183880" y="5074920"/>
+            <a:ext cx="570586" cy="109728"/>
+          </a:xfrm>
+          <a:prstGeom prst="roundRect">
+            <a:avLst>
+              <a:gd name="adj" fmla="val 50000"/>
+            </a:avLst>
+          </a:prstGeom>
+          <a:solidFill>
+            <a:srgbClr val="1B3A7A"/>
+          </a:solidFill>
+          <a:ln/>
+        </p:spPr>
+      </p:sp>
+      <p:sp>
+        <p:nvSpPr>
+          <p:cNvPr id="9" name="Etapa 2"/>
+          <p:cNvSpPr/>
+          <p:nvPr/>
+        </p:nvSpPr>
+        <p:spPr>
+          <a:xfrm>
+            <a:off x="8864194" y="5074920"/>
+            <a:ext cx="570586" cy="109728"/>
+          </a:xfrm>
+          <a:prstGeom prst="roundRect">
+            <a:avLst>
+              <a:gd name="adj" fmla="val 50000"/>
+            </a:avLst>
+          </a:prstGeom>
+          <a:solidFill>
+            <a:srgbClr val="1B3A7A"/>
+          </a:solidFill>
+          <a:ln/>
+        </p:spPr>
+      </p:sp>
+      <p:sp>
+        <p:nvSpPr>
+          <p:cNvPr id="10" name="Etapa 3"/>
+          <p:cNvSpPr/>
+          <p:nvPr/>
+        </p:nvSpPr>
+        <p:spPr>
+          <a:xfrm>
+            <a:off x="9544508" y="5074920"/>
+            <a:ext cx="570586" cy="109728"/>
+          </a:xfrm>
+          <a:prstGeom prst="roundRect">
+            <a:avLst>
+              <a:gd name="adj" fmla="val 50000"/>
+            </a:avLst>
+          </a:prstGeom>
+          <a:solidFill>
+            <a:srgbClr val="1B3A7A"/>
+          </a:solidFill>
+          <a:ln/>
+        </p:spPr>
+      </p:sp>
+      <p:sp>
+        <p:nvSpPr>
+          <p:cNvPr id="11" name="Etapa 4"/>
+          <p:cNvSpPr/>
+          <p:nvPr/>
+        </p:nvSpPr>
+        <p:spPr>
+          <a:xfrm>
+            <a:off x="10224822" y="5074920"/>
+            <a:ext cx="570586" cy="109728"/>
+          </a:xfrm>
+          <a:prstGeom prst="roundRect">
+            <a:avLst>
+              <a:gd name="adj" fmla="val 50000"/>
+            </a:avLst>
+          </a:prstGeom>
+          <a:solidFill>
+            <a:srgbClr val="1B3A7A"/>
+          </a:solidFill>
+          <a:ln/>
+        </p:spPr>
+      </p:sp>
+      <p:sp>
+        <p:nvSpPr>
+          <p:cNvPr id="12" name="Etapa 5"/>
+          <p:cNvSpPr/>
+          <p:nvPr/>
+        </p:nvSpPr>
+        <p:spPr>
+          <a:xfrm>
+            <a:off x="10905136" y="5074920"/>
+            <a:ext cx="570586" cy="109728"/>
+          </a:xfrm>
+          <a:prstGeom prst="roundRect">
+            <a:avLst>
+              <a:gd name="adj" fmla="val 50000"/>
+            </a:avLst>
+          </a:prstGeom>
+          <a:solidFill>
+            <a:srgbClr val="89D1FF"/>
+          </a:solidFill>
+          <a:ln/>
+        </p:spPr>
+      </p:sp>
+      <p:sp>
+        <p:nvSpPr>
+          <p:cNvPr id="14" name="Text 11"/>
+          <p:cNvSpPr txBox="1"/>
+          <p:nvPr/>
+        </p:nvSpPr>
+        <p:spPr>
+          <a:xfrm>
+            <a:off x="8183880" y="5303520"/>
+            <a:ext cx="3291840" cy="274320"/>
+          </a:xfrm>
+          <a:prstGeom prst="rect">
             <a:avLst/>
           </a:prstGeom>
-          <a:solidFill>
-            <a:srgbClr val="1F4F86"/>
-          </a:solidFill>
-          <a:ln w="19050">
-            <a:solidFill>
-              <a:srgbClr val="1F4F86"/>
-            </a:solidFill>
-          </a:ln>
+          <a:noFill/>
+          <a:ln/>
         </p:spPr>
         <p:txBody>
           <a:bodyPr wrap="square" lIns="0" tIns="0" rIns="0" bIns="0" rtlCol="0" anchor="ctr"/>
           <a:lstStyle/>
           <a:p>
-            <a:pPr algn="ctr" indent="0" marL="0">
-              <a:buNone/>
-            </a:pPr>
-            <a:r>
-              <a:rPr lang="en-US" sz="1300" b="1" dirty="0">
-                <a:solidFill>
-                  <a:srgbClr val="FFFFFF"/>
-                </a:solidFill>
-              </a:rPr>
-              <a:t>1</a:t>
-            </a:r>
-            <a:endParaRPr lang="en-US" sz="1300" dirty="0"/>
+            <a:pPr indent="0" marL="0">
+              <a:buNone/>
+            </a:pPr>
+            <a:r>
+              <a:rPr lang="en-US" sz="1200" dirty="0">
+                <a:solidFill>
+                  <a:srgbClr val="89D1FF"/>
+                </a:solidFill>
+              </a:rPr>
+              <a:t>Etapa 5 de 5</a:t>
+            </a:r>
+            <a:endParaRPr lang="en-US" sz="1200" dirty="0"/>
           </a:p>
         </p:txBody>
       </p:sp>
       <p:sp>
         <p:nvSpPr>
-          <p:cNvPr id="9" name="Text 7"/>
+          <p:cNvPr id="40" name="Rodapé"/>
           <p:cNvSpPr txBox="1"/>
           <p:nvPr/>
         </p:nvSpPr>
         <p:spPr>
           <a:xfrm>
-            <a:off x="192024" y="5550408"/>
-            <a:ext cx="1463040" cy="274320"/>
+            <a:off x="731520" y="5989320"/>
+            <a:ext cx="7315200" cy="320040"/>
           </a:xfrm>
           <a:prstGeom prst="rect">
             <a:avLst/>
           </a:prstGeom>
           <a:noFill/>
-          <a:ln/>
         </p:spPr>
         <p:txBody>
-          <a:bodyPr wrap="square" lIns="0" tIns="0" rIns="0" bIns="0" rtlCol="0" anchor="ctr"/>
+          <a:bodyPr wrap="square" lIns="0" tIns="0" rIns="0" bIns="0" rtlCol="0" anchor="t"/>
           <a:lstStyle/>
           <a:p>
-            <a:pPr algn="ctr" indent="0" marL="0">
-              <a:buNone/>
-            </a:pPr>
-            <a:r>
-              <a:rPr lang="en-US" sz="1100" dirty="0">
-                <a:solidFill>
-                  <a:srgbClr val="A9B4BE"/>
-                </a:solidFill>
-              </a:rPr>
-              <a:t>Modelagem de dados</a:t>
-            </a:r>
-            <a:endParaRPr lang="en-US" sz="1100" dirty="0"/>
-          </a:p>
-        </p:txBody>
-      </p:sp>
-      <p:sp>
-        <p:nvSpPr>
-          <p:cNvPr id="10" name="Etapa 2"/>
-          <p:cNvSpPr/>
-          <p:nvPr/>
-        </p:nvSpPr>
-        <p:spPr>
-          <a:xfrm>
-            <a:off x="3264408" y="5074920"/>
-            <a:ext cx="384048" cy="384048"/>
-          </a:xfrm>
-          <a:prstGeom prst="ellipse">
-            <a:avLst/>
-          </a:prstGeom>
-          <a:solidFill>
-            <a:srgbClr val="1F4F86"/>
-          </a:solidFill>
-          <a:ln w="19050">
-            <a:solidFill>
-              <a:srgbClr val="1F4F86"/>
-            </a:solidFill>
-          </a:ln>
-        </p:spPr>
-        <p:txBody>
-          <a:bodyPr wrap="square" lIns="0" tIns="0" rIns="0" bIns="0" rtlCol="0" anchor="ctr"/>
-          <a:lstStyle/>
-          <a:p>
-            <a:pPr algn="ctr" indent="0" marL="0">
-              <a:buNone/>
-            </a:pPr>
-            <a:r>
-              <a:rPr lang="en-US" sz="1300" b="1" dirty="0">
-                <a:solidFill>
-                  <a:srgbClr val="FFFFFF"/>
-                </a:solidFill>
-              </a:rPr>
-              <a:t>2</a:t>
-            </a:r>
-            <a:endParaRPr lang="en-US" sz="1300" dirty="0"/>
-          </a:p>
-        </p:txBody>
-      </p:sp>
-      <p:sp>
-        <p:nvSpPr>
-          <p:cNvPr id="11" name="Text 9"/>
-          <p:cNvSpPr txBox="1"/>
-          <p:nvPr/>
-        </p:nvSpPr>
-        <p:spPr>
-          <a:xfrm>
-            <a:off x="2724912" y="5550408"/>
-            <a:ext cx="1463040" cy="274320"/>
-          </a:xfrm>
-          <a:prstGeom prst="rect">
-            <a:avLst/>
-          </a:prstGeom>
-          <a:noFill/>
-          <a:ln/>
-        </p:spPr>
-        <p:txBody>
-          <a:bodyPr wrap="square" lIns="0" tIns="0" rIns="0" bIns="0" rtlCol="0" anchor="ctr"/>
-          <a:lstStyle/>
-          <a:p>
-            <a:pPr algn="ctr" indent="0" marL="0">
-              <a:buNone/>
-            </a:pPr>
-            <a:r>
-              <a:rPr lang="en-US" sz="1100" dirty="0">
-                <a:solidFill>
-                  <a:srgbClr val="A9B4BE"/>
-                </a:solidFill>
-              </a:rPr>
-              <a:t>Core Data Services</a:t>
-            </a:r>
-            <a:endParaRPr lang="en-US" sz="1100" dirty="0"/>
-          </a:p>
-        </p:txBody>
-      </p:sp>
-      <p:sp>
-        <p:nvSpPr>
-          <p:cNvPr id="12" name="Etapa 3"/>
-          <p:cNvSpPr/>
-          <p:nvPr/>
-        </p:nvSpPr>
-        <p:spPr>
-          <a:xfrm>
-            <a:off x="5797296" y="5074920"/>
-            <a:ext cx="384048" cy="384048"/>
-          </a:xfrm>
-          <a:prstGeom prst="ellipse">
-            <a:avLst/>
-          </a:prstGeom>
-          <a:solidFill>
-            <a:srgbClr val="1F4F86"/>
-          </a:solidFill>
-          <a:ln w="19050">
-            <a:solidFill>
-              <a:srgbClr val="1F4F86"/>
-            </a:solidFill>
-          </a:ln>
-        </p:spPr>
-        <p:txBody>
-          <a:bodyPr wrap="square" lIns="0" tIns="0" rIns="0" bIns="0" rtlCol="0" anchor="ctr"/>
-          <a:lstStyle/>
-          <a:p>
-            <a:pPr algn="ctr" indent="0" marL="0">
-              <a:buNone/>
-            </a:pPr>
-            <a:r>
-              <a:rPr lang="en-US" sz="1300" b="1" dirty="0">
-                <a:solidFill>
-                  <a:srgbClr val="FFFFFF"/>
-                </a:solidFill>
-              </a:rPr>
-              <a:t>3</a:t>
-            </a:r>
-            <a:endParaRPr lang="en-US" sz="1300" dirty="0"/>
-          </a:p>
-        </p:txBody>
-      </p:sp>
-      <p:sp>
-        <p:nvSpPr>
-          <p:cNvPr id="13" name="Text 11"/>
-          <p:cNvSpPr txBox="1"/>
-          <p:nvPr/>
-        </p:nvSpPr>
-        <p:spPr>
-          <a:xfrm>
-            <a:off x="5257800" y="5550408"/>
-            <a:ext cx="1463040" cy="274320"/>
-          </a:xfrm>
-          <a:prstGeom prst="rect">
-            <a:avLst/>
-          </a:prstGeom>
-          <a:noFill/>
-          <a:ln/>
-        </p:spPr>
-        <p:txBody>
-          <a:bodyPr wrap="square" lIns="0" tIns="0" rIns="0" bIns="0" rtlCol="0" anchor="ctr"/>
-          <a:lstStyle/>
-          <a:p>
-            <a:pPr algn="ctr" indent="0" marL="0">
-              <a:buNone/>
-            </a:pPr>
-            <a:r>
-              <a:rPr lang="en-US" sz="1100" dirty="0">
-                <a:solidFill>
-                  <a:srgbClr val="A9B4BE"/>
-                </a:solidFill>
-              </a:rPr>
-              <a:t>Comportamento RAP</a:t>
-            </a:r>
-            <a:endParaRPr lang="en-US" sz="1100" dirty="0"/>
-          </a:p>
-        </p:txBody>
-      </p:sp>
-      <p:sp>
-        <p:nvSpPr>
-          <p:cNvPr id="14" name="Etapa 4"/>
-          <p:cNvSpPr/>
-          <p:nvPr/>
-        </p:nvSpPr>
-        <p:spPr>
-          <a:xfrm>
-            <a:off x="8330184" y="5074920"/>
-            <a:ext cx="384048" cy="384048"/>
-          </a:xfrm>
-          <a:prstGeom prst="ellipse">
-            <a:avLst/>
-          </a:prstGeom>
-          <a:solidFill>
-            <a:srgbClr val="1F4F86"/>
-          </a:solidFill>
-          <a:ln w="19050">
-            <a:solidFill>
-              <a:srgbClr val="1F4F86"/>
-            </a:solidFill>
-          </a:ln>
-        </p:spPr>
-        <p:txBody>
-          <a:bodyPr wrap="square" lIns="0" tIns="0" rIns="0" bIns="0" rtlCol="0" anchor="ctr"/>
-          <a:lstStyle/>
-          <a:p>
-            <a:pPr algn="ctr" indent="0" marL="0">
-              <a:buNone/>
-            </a:pPr>
-            <a:r>
-              <a:rPr lang="en-US" sz="1300" b="1" dirty="0">
-                <a:solidFill>
-                  <a:srgbClr val="FFFFFF"/>
-                </a:solidFill>
-              </a:rPr>
-              <a:t>4</a:t>
-            </a:r>
-            <a:endParaRPr lang="en-US" sz="1300" dirty="0"/>
-          </a:p>
-        </p:txBody>
-      </p:sp>
-      <p:sp>
-        <p:nvSpPr>
-          <p:cNvPr id="15" name="Text 13"/>
-          <p:cNvSpPr txBox="1"/>
-          <p:nvPr/>
-        </p:nvSpPr>
-        <p:spPr>
-          <a:xfrm>
-            <a:off x="7790688" y="5550408"/>
-            <a:ext cx="1463040" cy="274320"/>
-          </a:xfrm>
-          <a:prstGeom prst="rect">
-            <a:avLst/>
-          </a:prstGeom>
-          <a:noFill/>
-          <a:ln/>
-        </p:spPr>
-        <p:txBody>
-          <a:bodyPr wrap="square" lIns="0" tIns="0" rIns="0" bIns="0" rtlCol="0" anchor="ctr"/>
-          <a:lstStyle/>
-          <a:p>
-            <a:pPr algn="ctr" indent="0" marL="0">
-              <a:buNone/>
-            </a:pPr>
-            <a:r>
-              <a:rPr lang="en-US" sz="1100" dirty="0">
-                <a:solidFill>
-                  <a:srgbClr val="A9B4BE"/>
-                </a:solidFill>
-              </a:rPr>
-              <a:t>Serviços OData</a:t>
-            </a:r>
-            <a:endParaRPr lang="en-US" sz="1100" dirty="0"/>
-          </a:p>
-        </p:txBody>
-      </p:sp>
-      <p:sp>
-        <p:nvSpPr>
-          <p:cNvPr id="16" name="Etapa 5"/>
-          <p:cNvSpPr/>
-          <p:nvPr/>
-        </p:nvSpPr>
-        <p:spPr>
-          <a:xfrm>
-            <a:off x="10863072" y="5074920"/>
-            <a:ext cx="384048" cy="384048"/>
-          </a:xfrm>
-          <a:prstGeom prst="ellipse">
-            <a:avLst/>
-          </a:prstGeom>
-          <a:solidFill>
-            <a:srgbClr val="0070F2"/>
-          </a:solidFill>
-          <a:ln w="19050">
-            <a:solidFill>
-              <a:srgbClr val="0070F2"/>
-            </a:solidFill>
-          </a:ln>
-        </p:spPr>
-        <p:txBody>
-          <a:bodyPr wrap="square" lIns="0" tIns="0" rIns="0" bIns="0" rtlCol="0" anchor="ctr"/>
-          <a:lstStyle/>
-          <a:p>
-            <a:pPr algn="ctr" indent="0" marL="0">
-              <a:buNone/>
-            </a:pPr>
-            <a:r>
-              <a:rPr lang="en-US" sz="1300" b="1" dirty="0">
-                <a:solidFill>
-                  <a:srgbClr val="FFFFFF"/>
-                </a:solidFill>
-              </a:rPr>
-              <a:t>5</a:t>
-            </a:r>
-            <a:endParaRPr lang="en-US" sz="1300" dirty="0"/>
-          </a:p>
-        </p:txBody>
-      </p:sp>
-      <p:sp>
-        <p:nvSpPr>
-          <p:cNvPr id="17" name="Text 15"/>
-          <p:cNvSpPr txBox="1"/>
-          <p:nvPr/>
-        </p:nvSpPr>
-        <p:spPr>
-          <a:xfrm>
-            <a:off x="10323576" y="5550408"/>
-            <a:ext cx="1463040" cy="274320"/>
-          </a:xfrm>
-          <a:prstGeom prst="rect">
-            <a:avLst/>
-          </a:prstGeom>
-          <a:noFill/>
-          <a:ln/>
-        </p:spPr>
-        <p:txBody>
-          <a:bodyPr wrap="square" lIns="0" tIns="0" rIns="0" bIns="0" rtlCol="0" anchor="ctr"/>
-          <a:lstStyle/>
-          <a:p>
-            <a:pPr algn="ctr" indent="0" marL="0">
-              <a:buNone/>
-            </a:pPr>
-            <a:r>
-              <a:rPr lang="en-US" sz="1100" b="1" dirty="0">
-                <a:solidFill>
-                  <a:srgbClr val="FFFFFF"/>
-                </a:solidFill>
-              </a:rPr>
-              <a:t>Apps Fiori</a:t>
-            </a:r>
-            <a:endParaRPr lang="en-US" sz="1100" dirty="0"/>
+            <a:r>
+              <a:rPr lang="pt-BR" sz="1200" dirty="0">
+                <a:solidFill>
+                  <a:srgbClr val="89D1FF"/>
+                </a:solidFill>
+              </a:rPr>
+              <a:t>Pedidos de Compras · SAP RAP no BTP e On-Premise · Design System SAP Horizon</a:t>
+            </a:r>
           </a:p>
         </p:txBody>
       </p:sp>
@@ -8093,7 +7881,7 @@
             <a:r>
               <a:rPr lang="en-US" sz="1400" b="1" spc="200" kern="0" dirty="0">
                 <a:solidFill>
-                  <a:schemeClr val="accent1"/>
+                  <a:srgbClr val="89D1FF"/>
                 </a:solidFill>
               </a:rPr>
               <a:t>ETAPA 5 · ESTOQUE</a:t>
@@ -8180,50 +7968,6 @@
       </p:sp>
       <p:sp>
         <p:nvSpPr>
-          <p:cNvPr id="5" name="Decoração 1"/>
-          <p:cNvSpPr/>
-          <p:nvPr/>
-        </p:nvSpPr>
-        <p:spPr>
-          <a:xfrm>
-            <a:off x="8503920" y="-1463040"/>
-            <a:ext cx="5120640" cy="5120640"/>
-          </a:xfrm>
-          <a:prstGeom prst="ellipse">
-            <a:avLst/>
-          </a:prstGeom>
-          <a:solidFill>
-            <a:srgbClr val="0070F2">
-              <a:alpha val="28000"/>
-            </a:srgbClr>
-          </a:solidFill>
-          <a:ln/>
-        </p:spPr>
-      </p:sp>
-      <p:sp>
-        <p:nvSpPr>
-          <p:cNvPr id="6" name="Decoração 2"/>
-          <p:cNvSpPr/>
-          <p:nvPr/>
-        </p:nvSpPr>
-        <p:spPr>
-          <a:xfrm>
-            <a:off x="9784080" y="1828800"/>
-            <a:ext cx="2834640" cy="2834640"/>
-          </a:xfrm>
-          <a:prstGeom prst="ellipse">
-            <a:avLst/>
-          </a:prstGeom>
-          <a:solidFill>
-            <a:srgbClr val="4DB1FF">
-              <a:alpha val="18000"/>
-            </a:srgbClr>
-          </a:solidFill>
-          <a:ln/>
-        </p:spPr>
-      </p:sp>
-      <p:sp>
-        <p:nvSpPr>
           <p:cNvPr id="7" name="Ícone product"/>
           <p:cNvSpPr/>
           <p:nvPr/>
@@ -8239,7 +7983,7 @@
             </a:avLst>
           </a:prstGeom>
           <a:solidFill>
-            <a:srgbClr val="1D232A"/>
+            <a:srgbClr val="1B3A7A"/>
           </a:solidFill>
           <a:ln/>
         </p:spPr>
@@ -8285,7 +8029,7 @@
             </a:avLst>
           </a:prstGeom>
           <a:solidFill>
-            <a:srgbClr val="1D232A"/>
+            <a:srgbClr val="1B3A7A"/>
           </a:solidFill>
           <a:ln/>
         </p:spPr>
@@ -8317,7 +8061,7 @@
             <a:r>
               <a:rPr lang="en-US" sz="1100" b="1" spc="150" kern="0" dirty="0">
                 <a:solidFill>
-                  <a:srgbClr val="4DB1FF"/>
+                  <a:srgbClr val="89D1FF"/>
                 </a:solidFill>
               </a:rPr>
               <a:t>OBJETOS NESTA SEÇÃO</a:t>
@@ -8367,7 +8111,7 @@
             <a:r>
               <a:rPr lang="en-US" sz="1100" dirty="0">
                 <a:solidFill>
-                  <a:srgbClr val="A9B4BE"/>
+                  <a:srgbClr val="D1EFFF"/>
                 </a:solidFill>
               </a:rPr>
               <a:t>  Fiori Elements</a:t>
@@ -8417,7 +8161,7 @@
             <a:r>
               <a:rPr lang="en-US" sz="1100" dirty="0">
                 <a:solidFill>
-                  <a:srgbClr val="A9B4BE"/>
+                  <a:srgbClr val="D1EFFF"/>
                 </a:solidFill>
               </a:rPr>
               <a:t>  BSP</a:t>
@@ -8467,7 +8211,7 @@
             <a:r>
               <a:rPr lang="en-US" sz="1100" dirty="0">
                 <a:solidFill>
-                  <a:srgbClr val="A9B4BE"/>
+                  <a:srgbClr val="D1EFFF"/>
                 </a:solidFill>
               </a:rPr>
               <a:t>  SAPUI5 freestyle</a:t>
@@ -8517,7 +8261,7 @@
             <a:r>
               <a:rPr lang="en-US" sz="1100" dirty="0">
                 <a:solidFill>
-                  <a:srgbClr val="A9B4BE"/>
+                  <a:srgbClr val="D1EFFF"/>
                 </a:solidFill>
               </a:rPr>
               <a:t>  BSP</a:t>
@@ -11552,7 +11296,7 @@
             <a:r>
               <a:rPr lang="en-US" sz="1400" b="1" spc="200" kern="0" dirty="0">
                 <a:solidFill>
-                  <a:schemeClr val="accent1"/>
+                  <a:srgbClr val="89D1FF"/>
                 </a:solidFill>
               </a:rPr>
               <a:t>ETAPA 5 · PEDIDOS</a:t>
@@ -11639,50 +11383,6 @@
       </p:sp>
       <p:sp>
         <p:nvSpPr>
-          <p:cNvPr id="5" name="Decoração 1"/>
-          <p:cNvSpPr/>
-          <p:nvPr/>
-        </p:nvSpPr>
-        <p:spPr>
-          <a:xfrm>
-            <a:off x="8503920" y="-1463040"/>
-            <a:ext cx="5120640" cy="5120640"/>
-          </a:xfrm>
-          <a:prstGeom prst="ellipse">
-            <a:avLst/>
-          </a:prstGeom>
-          <a:solidFill>
-            <a:srgbClr val="0070F2">
-              <a:alpha val="28000"/>
-            </a:srgbClr>
-          </a:solidFill>
-          <a:ln/>
-        </p:spPr>
-      </p:sp>
-      <p:sp>
-        <p:nvSpPr>
-          <p:cNvPr id="6" name="Decoração 2"/>
-          <p:cNvSpPr/>
-          <p:nvPr/>
-        </p:nvSpPr>
-        <p:spPr>
-          <a:xfrm>
-            <a:off x="9784080" y="1828800"/>
-            <a:ext cx="2834640" cy="2834640"/>
-          </a:xfrm>
-          <a:prstGeom prst="ellipse">
-            <a:avLst/>
-          </a:prstGeom>
-          <a:solidFill>
-            <a:srgbClr val="4DB1FF">
-              <a:alpha val="18000"/>
-            </a:srgbClr>
-          </a:solidFill>
-          <a:ln/>
-        </p:spPr>
-      </p:sp>
-      <p:sp>
-        <p:nvSpPr>
           <p:cNvPr id="7" name="Ícone sales-order"/>
           <p:cNvSpPr/>
           <p:nvPr/>
@@ -11698,7 +11398,7 @@
             </a:avLst>
           </a:prstGeom>
           <a:solidFill>
-            <a:srgbClr val="1D232A"/>
+            <a:srgbClr val="1B3A7A"/>
           </a:solidFill>
           <a:ln/>
         </p:spPr>
@@ -11744,7 +11444,7 @@
             </a:avLst>
           </a:prstGeom>
           <a:solidFill>
-            <a:srgbClr val="1D232A"/>
+            <a:srgbClr val="1B3A7A"/>
           </a:solidFill>
           <a:ln/>
         </p:spPr>
@@ -11776,7 +11476,7 @@
             <a:r>
               <a:rPr lang="en-US" sz="1100" b="1" spc="150" kern="0" dirty="0">
                 <a:solidFill>
-                  <a:srgbClr val="4DB1FF"/>
+                  <a:srgbClr val="89D1FF"/>
                 </a:solidFill>
               </a:rPr>
               <a:t>OBJETOS NESTA SEÇÃO</a:t>
@@ -11826,7 +11526,7 @@
             <a:r>
               <a:rPr lang="en-US" sz="1100" dirty="0">
                 <a:solidFill>
-                  <a:srgbClr val="A9B4BE"/>
+                  <a:srgbClr val="D1EFFF"/>
                 </a:solidFill>
               </a:rPr>
               <a:t>  Fiori Elements</a:t>
@@ -11876,7 +11576,7 @@
             <a:r>
               <a:rPr lang="en-US" sz="1100" dirty="0">
                 <a:solidFill>
-                  <a:srgbClr val="A9B4BE"/>
+                  <a:srgbClr val="D1EFFF"/>
                 </a:solidFill>
               </a:rPr>
               <a:t>  BSP</a:t>
@@ -11926,7 +11626,7 @@
             <a:r>
               <a:rPr lang="en-US" sz="1100" dirty="0">
                 <a:solidFill>
-                  <a:srgbClr val="A9B4BE"/>
+                  <a:srgbClr val="D1EFFF"/>
                 </a:solidFill>
               </a:rPr>
               <a:t>  anotação local</a:t>
@@ -11976,7 +11676,7 @@
             <a:r>
               <a:rPr lang="en-US" sz="1100" dirty="0">
                 <a:solidFill>
-                  <a:srgbClr val="A9B4BE"/>
+                  <a:srgbClr val="D1EFFF"/>
                 </a:solidFill>
               </a:rPr>
               <a:t>  SAPUI5 freestyle</a:t>
@@ -12026,7 +11726,7 @@
             <a:r>
               <a:rPr lang="en-US" sz="1100" dirty="0">
                 <a:solidFill>
-                  <a:srgbClr val="A9B4BE"/>
+                  <a:srgbClr val="D1EFFF"/>
                 </a:solidFill>
               </a:rPr>
               <a:t>  BSP</a:t>
@@ -22040,7 +21740,7 @@
             <a:r>
               <a:rPr lang="en-US" sz="1400" b="1" spc="200" kern="0" dirty="0">
                 <a:solidFill>
-                  <a:schemeClr val="accent1"/>
+                  <a:srgbClr val="89D1FF"/>
                 </a:solidFill>
               </a:rPr>
               <a:t>ETAPA 5 · REEMBOLSOS</a:t>
@@ -22127,50 +21827,6 @@
       </p:sp>
       <p:sp>
         <p:nvSpPr>
-          <p:cNvPr id="5" name="Decoração 1"/>
-          <p:cNvSpPr/>
-          <p:nvPr/>
-        </p:nvSpPr>
-        <p:spPr>
-          <a:xfrm>
-            <a:off x="8503920" y="-1463040"/>
-            <a:ext cx="5120640" cy="5120640"/>
-          </a:xfrm>
-          <a:prstGeom prst="ellipse">
-            <a:avLst/>
-          </a:prstGeom>
-          <a:solidFill>
-            <a:srgbClr val="0070F2">
-              <a:alpha val="28000"/>
-            </a:srgbClr>
-          </a:solidFill>
-          <a:ln/>
-        </p:spPr>
-      </p:sp>
-      <p:sp>
-        <p:nvSpPr>
-          <p:cNvPr id="6" name="Decoração 2"/>
-          <p:cNvSpPr/>
-          <p:nvPr/>
-        </p:nvSpPr>
-        <p:spPr>
-          <a:xfrm>
-            <a:off x="9784080" y="1828800"/>
-            <a:ext cx="2834640" cy="2834640"/>
-          </a:xfrm>
-          <a:prstGeom prst="ellipse">
-            <a:avLst/>
-          </a:prstGeom>
-          <a:solidFill>
-            <a:srgbClr val="4DB1FF">
-              <a:alpha val="18000"/>
-            </a:srgbClr>
-          </a:solidFill>
-          <a:ln/>
-        </p:spPr>
-      </p:sp>
-      <p:sp>
-        <p:nvSpPr>
           <p:cNvPr id="7" name="Ícone money-bills"/>
           <p:cNvSpPr/>
           <p:nvPr/>
@@ -22186,7 +21842,7 @@
             </a:avLst>
           </a:prstGeom>
           <a:solidFill>
-            <a:srgbClr val="1D232A"/>
+            <a:srgbClr val="1B3A7A"/>
           </a:solidFill>
           <a:ln/>
         </p:spPr>
@@ -22232,7 +21888,7 @@
             </a:avLst>
           </a:prstGeom>
           <a:solidFill>
-            <a:srgbClr val="1D232A"/>
+            <a:srgbClr val="1B3A7A"/>
           </a:solidFill>
           <a:ln/>
         </p:spPr>
@@ -22264,7 +21920,7 @@
             <a:r>
               <a:rPr lang="en-US" sz="1100" b="1" spc="150" kern="0" dirty="0">
                 <a:solidFill>
-                  <a:srgbClr val="4DB1FF"/>
+                  <a:srgbClr val="89D1FF"/>
                 </a:solidFill>
               </a:rPr>
               <a:t>OBJETOS NESTA SEÇÃO</a:t>
@@ -22314,7 +21970,7 @@
             <a:r>
               <a:rPr lang="en-US" sz="1100" dirty="0">
                 <a:solidFill>
-                  <a:srgbClr val="A9B4BE"/>
+                  <a:srgbClr val="D1EFFF"/>
                 </a:solidFill>
               </a:rPr>
               <a:t>  Fiori Elements</a:t>
@@ -22364,7 +22020,7 @@
             <a:r>
               <a:rPr lang="en-US" sz="1100" dirty="0">
                 <a:solidFill>
-                  <a:srgbClr val="A9B4BE"/>
+                  <a:srgbClr val="D1EFFF"/>
                 </a:solidFill>
               </a:rPr>
               <a:t>  BSP</a:t>
@@ -22414,7 +22070,7 @@
             <a:r>
               <a:rPr lang="en-US" sz="1100" dirty="0">
                 <a:solidFill>
-                  <a:srgbClr val="A9B4BE"/>
+                  <a:srgbClr val="D1EFFF"/>
                 </a:solidFill>
               </a:rPr>
               <a:t>  SAPUI5 freestyle</a:t>
@@ -22464,7 +22120,7 @@
             <a:r>
               <a:rPr lang="en-US" sz="1100" dirty="0">
                 <a:solidFill>
-                  <a:srgbClr val="A9B4BE"/>
+                  <a:srgbClr val="D1EFFF"/>
                 </a:solidFill>
               </a:rPr>
               <a:t>  BSP</a:t>
@@ -30325,7 +29981,7 @@
             <a:r>
               <a:rPr lang="en-US" sz="1100" b="1" spc="150" kern="0" dirty="0">
                 <a:solidFill>
-                  <a:schemeClr val="accent1"/>
+                  <a:srgbClr val="89D1FF"/>
                 </a:solidFill>
               </a:rPr>
               <a:t>A SÉRIE COMPLETA</a:t>
@@ -30374,50 +30030,6 @@
       </p:sp>
       <p:sp>
         <p:nvSpPr>
-          <p:cNvPr id="4" name="Decoração 1"/>
-          <p:cNvSpPr/>
-          <p:nvPr/>
-        </p:nvSpPr>
-        <p:spPr>
-          <a:xfrm>
-            <a:off x="8503920" y="-1463040"/>
-            <a:ext cx="5120640" cy="5120640"/>
-          </a:xfrm>
-          <a:prstGeom prst="ellipse">
-            <a:avLst/>
-          </a:prstGeom>
-          <a:solidFill>
-            <a:srgbClr val="0070F2">
-              <a:alpha val="12000"/>
-            </a:srgbClr>
-          </a:solidFill>
-          <a:ln/>
-        </p:spPr>
-      </p:sp>
-      <p:sp>
-        <p:nvSpPr>
-          <p:cNvPr id="5" name="Decoração 2"/>
-          <p:cNvSpPr/>
-          <p:nvPr/>
-        </p:nvSpPr>
-        <p:spPr>
-          <a:xfrm>
-            <a:off x="9784080" y="1828800"/>
-            <a:ext cx="2834640" cy="2834640"/>
-          </a:xfrm>
-          <a:prstGeom prst="ellipse">
-            <a:avLst/>
-          </a:prstGeom>
-          <a:solidFill>
-            <a:srgbClr val="4DB1FF">
-              <a:alpha val="8000"/>
-            </a:srgbClr>
-          </a:solidFill>
-          <a:ln/>
-        </p:spPr>
-      </p:sp>
-      <p:sp>
-        <p:nvSpPr>
           <p:cNvPr id="7" name="Cartão"/>
           <p:cNvSpPr/>
           <p:nvPr/>
@@ -30433,7 +30045,7 @@
             </a:avLst>
           </a:prstGeom>
           <a:solidFill>
-            <a:srgbClr val="1D232A"/>
+            <a:srgbClr val="1B3A7A"/>
           </a:solidFill>
           <a:ln/>
         </p:spPr>
@@ -30563,7 +30175,7 @@
             <a:r>
               <a:rPr lang="en-US" sz="1250" dirty="0">
                 <a:solidFill>
-                  <a:srgbClr val="A9B4BE"/>
+                  <a:srgbClr val="D1EFFF"/>
                 </a:solidFill>
               </a:rPr>
               <a:t>10 tabelas ativas, 8 drafts, CodeLists, numeração e mensagens</a:t>
@@ -30589,7 +30201,7 @@
             </a:avLst>
           </a:prstGeom>
           <a:solidFill>
-            <a:srgbClr val="1D232A"/>
+            <a:srgbClr val="1B3A7A"/>
           </a:solidFill>
           <a:ln/>
         </p:spPr>
@@ -30719,7 +30331,7 @@
             <a:r>
               <a:rPr lang="en-US" sz="1250" dirty="0">
                 <a:solidFill>
-                  <a:srgbClr val="A9B4BE"/>
+                  <a:srgbClr val="D1EFFF"/>
                 </a:solidFill>
               </a:rPr>
               <a:t>Views ZR_, 9 projeções, 11 value helps, 13 ddlx e 4 cubos</a:t>
@@ -30745,7 +30357,7 @@
             </a:avLst>
           </a:prstGeom>
           <a:solidFill>
-            <a:srgbClr val="1D232A"/>
+            <a:srgbClr val="1B3A7A"/>
           </a:solidFill>
           <a:ln/>
         </p:spPr>
@@ -30875,7 +30487,7 @@
             <a:r>
               <a:rPr lang="en-US" sz="1250" dirty="0">
                 <a:solidFill>
-                  <a:srgbClr val="A9B4BE"/>
+                  <a:srgbClr val="D1EFFF"/>
                 </a:solidFill>
               </a:rPr>
               <a:t>4 BOs managed com draft, regras, ações e EML</a:t>
@@ -30901,7 +30513,7 @@
             </a:avLst>
           </a:prstGeom>
           <a:solidFill>
-            <a:srgbClr val="1D232A"/>
+            <a:srgbClr val="1B3A7A"/>
           </a:solidFill>
           <a:ln/>
         </p:spPr>
@@ -31031,7 +30643,7 @@
             <a:r>
               <a:rPr lang="en-US" sz="1250" dirty="0">
                 <a:solidFill>
-                  <a:srgbClr val="A9B4BE"/>
+                  <a:srgbClr val="D1EFFF"/>
                 </a:solidFill>
               </a:rPr>
               <a:t>5 serviços OData V4, IAM ou PFCG</a:t>
@@ -31057,7 +30669,7 @@
             </a:avLst>
           </a:prstGeom>
           <a:solidFill>
-            <a:srgbClr val="1D232A"/>
+            <a:srgbClr val="1B3A7A"/>
           </a:solidFill>
           <a:ln/>
         </p:spPr>
@@ -31187,7 +30799,7 @@
             <a:r>
               <a:rPr lang="en-US" sz="1250" dirty="0">
                 <a:solidFill>
-                  <a:srgbClr val="A9B4BE"/>
+                  <a:srgbClr val="D1EFFF"/>
                 </a:solidFill>
               </a:rPr>
               <a:t>8 apps, launchpad local e deploy no ABAP</a:t>
@@ -31223,7 +30835,7 @@
             <a:r>
               <a:rPr lang="en-US" sz="1200" dirty="0">
                 <a:solidFill>
-                  <a:srgbClr val="A9B4BE"/>
+                  <a:srgbClr val="D1EFFF"/>
                 </a:solidFill>
               </a:rPr>
               <a:t>Arquivos: docs/apresentacoes/01 a 05 · fontes em abap/ e ui5/ · diagramas em diagramas/</a:t>
@@ -31262,7 +30874,7 @@
             <a:lvl1pPr>
               <a:defRPr sz="900">
                 <a:solidFill>
-                  <a:srgbClr val="A9B4BE"/>
+                  <a:srgbClr val="D1EFFF"/>
                 </a:solidFill>
               </a:defRPr>
             </a:lvl1pPr>
@@ -31312,8 +30924,8 @@
         </p:nvSpPr>
         <p:spPr>
           <a:xfrm>
-            <a:off x="731520" y="1325880"/>
-            <a:ext cx="6949440" cy="365760"/>
+            <a:off x="731520" y="548640"/>
+            <a:ext cx="7315200" cy="365760"/>
           </a:xfrm>
           <a:prstGeom prst="rect">
             <a:avLst/>
@@ -31331,10 +30943,10 @@
             <a:r>
               <a:rPr lang="en-US" sz="1400" b="1" spc="200" kern="0" dirty="0">
                 <a:solidFill>
-                  <a:schemeClr val="accent1"/>
-                </a:solidFill>
-              </a:rPr>
-              <a:t>ETAPA 5 CONCLUÍDA</a:t>
+                  <a:srgbClr val="89D1FF"/>
+                </a:solidFill>
+              </a:rPr>
+              <a:t>RESUMO DA ETAPA</a:t>
             </a:r>
             <a:endParaRPr lang="en-US" sz="1400" dirty="0"/>
           </a:p>
@@ -31350,8 +30962,90 @@
         </p:nvSpPr>
         <p:spPr>
           <a:xfrm>
-            <a:off x="731520" y="1737360"/>
-            <a:ext cx="6949440" cy="1600200"/>
+            <a:off x="731520" y="960120"/>
+            <a:ext cx="10698480" cy="822960"/>
+          </a:xfrm>
+          <a:prstGeom prst="rect">
+            <a:avLst/>
+          </a:prstGeom>
+          <a:noFill/>
+          <a:ln/>
+        </p:spPr>
+        <p:txBody>
+          <a:bodyPr wrap="square" lIns="0" tIns="0" rIns="0" bIns="0" rtlCol="0" anchor="ctr"/>
+          <a:lstStyle/>
+          <a:p>
+            <a:pPr algn="l" indent="0" marL="0">
+              <a:buNone/>
+            </a:pPr>
+            <a:r>
+              <a:rPr lang="en-US" sz="3600" b="1" dirty="0">
+                <a:solidFill>
+                  <a:schemeClr val="bg1"/>
+                </a:solidFill>
+              </a:rPr>
+              <a:t>O que construímos na etapa 5</a:t>
+            </a:r>
+            <a:endParaRPr lang="en-US" sz="3600" dirty="0"/>
+          </a:p>
+        </p:txBody>
+      </p:sp>
+      <p:sp>
+        <p:nvSpPr>
+          <p:cNvPr id="4" name="Marcador"/>
+          <p:cNvSpPr/>
+          <p:nvPr/>
+        </p:nvSpPr>
+        <p:spPr>
+          <a:xfrm>
+            <a:off x="731520" y="2103120"/>
+            <a:ext cx="457200" cy="457200"/>
+          </a:xfrm>
+          <a:prstGeom prst="roundRect">
+            <a:avLst>
+              <a:gd name="adj" fmla="val 22000"/>
+            </a:avLst>
+          </a:prstGeom>
+          <a:solidFill>
+            <a:schemeClr val="accent1"/>
+          </a:solidFill>
+          <a:ln/>
+        </p:spPr>
+      </p:sp>
+      <p:pic>
+        <p:nvPicPr>
+          <p:cNvPr id="5" name="Image 0" descr="concluído">    </p:cNvPr>
+          <p:cNvPicPr>
+            <a:picLocks noChangeAspect="1"/>
+          </p:cNvPicPr>
+          <p:nvPr/>
+        </p:nvPicPr>
+        <p:blipFill>
+          <a:blip r:embed="rId100"/>
+          <a:stretch>
+            <a:fillRect/>
+          </a:stretch>
+        </p:blipFill>
+        <p:spPr>
+          <a:xfrm>
+            <a:off x="832104" y="2203704"/>
+            <a:ext cx="256032" cy="256032"/>
+          </a:xfrm>
+          <a:prstGeom prst="rect">
+            <a:avLst/>
+          </a:prstGeom>
+        </p:spPr>
+      </p:pic>
+      <p:sp>
+        <p:nvSpPr>
+          <p:cNvPr id="6" name="Text 3"/>
+          <p:cNvSpPr txBox="1"/>
+          <p:nvPr/>
+        </p:nvSpPr>
+        <p:spPr>
+          <a:xfrm>
+            <a:off x="1371600" y="2029968"/>
+            <a:ext cx="4526280" cy="777240"/>
           </a:xfrm>
           <a:prstGeom prst="rect">
             <a:avLst/>
@@ -31363,33 +31057,77 @@
           <a:bodyPr wrap="square" lIns="0" tIns="0" rIns="0" bIns="0" rtlCol="0" anchor="t"/>
           <a:lstStyle/>
           <a:p>
-            <a:pPr algn="l" indent="0" marL="0">
-              <a:buNone/>
-            </a:pPr>
-            <a:r>
-              <a:rPr lang="en-US" sz="4400" b="1" dirty="0">
-                <a:solidFill>
-                  <a:schemeClr val="bg1"/>
-                </a:solidFill>
-              </a:rPr>
-              <a:t>Apps no ar</a:t>
-            </a:r>
-            <a:endParaRPr lang="en-US" sz="4400" dirty="0"/>
+            <a:pPr indent="0" marL="0">
+              <a:buNone/>
+            </a:pPr>
+            <a:r>
+              <a:rPr lang="en-US" sz="1500" dirty="0">
+                <a:solidFill>
+                  <a:srgbClr val="FFFFFF"/>
+                </a:solidFill>
+              </a:rPr>
+              <a:t>Quatro apps Fiori Elements geradas com SAP Fiori tools</a:t>
+            </a:r>
+            <a:endParaRPr lang="en-US" sz="1500" dirty="0"/>
           </a:p>
         </p:txBody>
       </p:sp>
       <p:sp>
         <p:nvSpPr>
-          <p:cNvPr id="4" name="Text 0"/>
+          <p:cNvPr id="7" name="Marcador"/>
           <p:cNvSpPr/>
-          <p:nvPr>
-            <p:ph idx="102" type="body" hasCustomPrompt="1"/>
-          </p:nvPr>
-        </p:nvSpPr>
-        <p:spPr>
-          <a:xfrm>
-            <a:off x="731520" y="3383280"/>
-            <a:ext cx="6949440" cy="914400"/>
+          <p:nvPr/>
+        </p:nvSpPr>
+        <p:spPr>
+          <a:xfrm>
+            <a:off x="6263640" y="2103120"/>
+            <a:ext cx="457200" cy="457200"/>
+          </a:xfrm>
+          <a:prstGeom prst="roundRect">
+            <a:avLst>
+              <a:gd name="adj" fmla="val 22000"/>
+            </a:avLst>
+          </a:prstGeom>
+          <a:solidFill>
+            <a:schemeClr val="accent1"/>
+          </a:solidFill>
+          <a:ln/>
+        </p:spPr>
+      </p:sp>
+      <p:pic>
+        <p:nvPicPr>
+          <p:cNvPr id="8" name="Image 1" descr="concluído">    </p:cNvPr>
+          <p:cNvPicPr>
+            <a:picLocks noChangeAspect="1"/>
+          </p:cNvPicPr>
+          <p:nvPr/>
+        </p:nvPicPr>
+        <p:blipFill>
+          <a:blip r:embed="rId101"/>
+          <a:stretch>
+            <a:fillRect/>
+          </a:stretch>
+        </p:blipFill>
+        <p:spPr>
+          <a:xfrm>
+            <a:off x="6364224" y="2203704"/>
+            <a:ext cx="256032" cy="256032"/>
+          </a:xfrm>
+          <a:prstGeom prst="rect">
+            <a:avLst/>
+          </a:prstGeom>
+        </p:spPr>
+      </p:pic>
+      <p:sp>
+        <p:nvSpPr>
+          <p:cNvPr id="9" name="Text 5"/>
+          <p:cNvSpPr txBox="1"/>
+          <p:nvPr/>
+        </p:nvSpPr>
+        <p:spPr>
+          <a:xfrm>
+            <a:off x="6903720" y="2029968"/>
+            <a:ext cx="4526280" cy="777240"/>
           </a:xfrm>
           <a:prstGeom prst="rect">
             <a:avLst/>
@@ -31401,569 +31139,470 @@
           <a:bodyPr wrap="square" lIns="0" tIns="0" rIns="0" bIns="0" rtlCol="0" anchor="t"/>
           <a:lstStyle/>
           <a:p>
-            <a:pPr algn="l" indent="0" marL="0">
-              <a:buNone/>
-            </a:pPr>
-            <a:r>
-              <a:rPr lang="en-US" sz="1800" dirty="0">
-                <a:solidFill>
-                  <a:schemeClr val="bg2"/>
-                </a:solidFill>
-              </a:rPr>
-              <a:t>Quatro apps Fiori Elements, quatro análises SAPUI5, navegação entre apps e acesso pelo launchpad.</a:t>
-            </a:r>
-            <a:endParaRPr lang="en-US" sz="1800" dirty="0"/>
+            <a:pPr indent="0" marL="0">
+              <a:buNone/>
+            </a:pPr>
+            <a:r>
+              <a:rPr lang="en-US" sz="1500" dirty="0">
+                <a:solidFill>
+                  <a:srgbClr val="FFFFFF"/>
+                </a:solidFill>
+              </a:rPr>
+              <a:t>Quatro análises SAPUI5 freestyle sobre ZUI_PC_ANALITICO</a:t>
+            </a:r>
+            <a:endParaRPr lang="en-US" sz="1500" dirty="0"/>
           </a:p>
         </p:txBody>
       </p:sp>
       <p:sp>
         <p:nvSpPr>
-          <p:cNvPr id="5" name="Decoração 1"/>
+          <p:cNvPr id="10" name="Marcador"/>
           <p:cNvSpPr/>
           <p:nvPr/>
         </p:nvSpPr>
         <p:spPr>
           <a:xfrm>
-            <a:off x="8503920" y="-1463040"/>
-            <a:ext cx="5120640" cy="5120640"/>
-          </a:xfrm>
-          <a:prstGeom prst="ellipse">
+            <a:off x="731520" y="3063240"/>
+            <a:ext cx="457200" cy="457200"/>
+          </a:xfrm>
+          <a:prstGeom prst="roundRect">
+            <a:avLst>
+              <a:gd name="adj" fmla="val 22000"/>
+            </a:avLst>
+          </a:prstGeom>
+          <a:solidFill>
+            <a:schemeClr val="accent1"/>
+          </a:solidFill>
+          <a:ln/>
+        </p:spPr>
+      </p:sp>
+      <p:pic>
+        <p:nvPicPr>
+          <p:cNvPr id="11" name="Image 2" descr="concluído">    </p:cNvPr>
+          <p:cNvPicPr>
+            <a:picLocks noChangeAspect="1"/>
+          </p:cNvPicPr>
+          <p:nvPr/>
+        </p:nvPicPr>
+        <p:blipFill>
+          <a:blip r:embed="rId102"/>
+          <a:stretch>
+            <a:fillRect/>
+          </a:stretch>
+        </p:blipFill>
+        <p:spPr>
+          <a:xfrm>
+            <a:off x="832104" y="3163824"/>
+            <a:ext cx="256032" cy="256032"/>
+          </a:xfrm>
+          <a:prstGeom prst="rect">
             <a:avLst/>
           </a:prstGeom>
+        </p:spPr>
+      </p:pic>
+      <p:sp>
+        <p:nvSpPr>
+          <p:cNvPr id="12" name="Text 7"/>
+          <p:cNvSpPr txBox="1"/>
+          <p:nvPr/>
+        </p:nvSpPr>
+        <p:spPr>
+          <a:xfrm>
+            <a:off x="1371600" y="2990088"/>
+            <a:ext cx="4526280" cy="777240"/>
+          </a:xfrm>
+          <a:prstGeom prst="rect">
+            <a:avLst/>
+          </a:prstGeom>
+          <a:noFill/>
+          <a:ln/>
+        </p:spPr>
+        <p:txBody>
+          <a:bodyPr wrap="square" lIns="0" tIns="0" rIns="0" bIns="0" rtlCol="0" anchor="t"/>
+          <a:lstStyle/>
+          <a:p>
+            <a:pPr indent="0" marL="0">
+              <a:buNone/>
+            </a:pPr>
+            <a:r>
+              <a:rPr lang="en-US" sz="1500" dirty="0">
+                <a:solidFill>
+                  <a:srgbClr val="FFFFFF"/>
+                </a:solidFill>
+              </a:rPr>
+              <a:t>Navegação entre apps por semantic objects</a:t>
+            </a:r>
+            <a:endParaRPr lang="en-US" sz="1500" dirty="0"/>
+          </a:p>
+        </p:txBody>
+      </p:sp>
+      <p:sp>
+        <p:nvSpPr>
+          <p:cNvPr id="13" name="Marcador"/>
+          <p:cNvSpPr/>
+          <p:nvPr/>
+        </p:nvSpPr>
+        <p:spPr>
+          <a:xfrm>
+            <a:off x="6263640" y="3063240"/>
+            <a:ext cx="457200" cy="457200"/>
+          </a:xfrm>
+          <a:prstGeom prst="roundRect">
+            <a:avLst>
+              <a:gd name="adj" fmla="val 22000"/>
+            </a:avLst>
+          </a:prstGeom>
           <a:solidFill>
-            <a:srgbClr val="0070F2">
-              <a:alpha val="28000"/>
-            </a:srgbClr>
+            <a:schemeClr val="accent1"/>
           </a:solidFill>
           <a:ln/>
         </p:spPr>
       </p:sp>
-      <p:sp>
-        <p:nvSpPr>
-          <p:cNvPr id="6" name="Decoração 2"/>
+      <p:pic>
+        <p:nvPicPr>
+          <p:cNvPr id="14" name="Image 3" descr="concluído">    </p:cNvPr>
+          <p:cNvPicPr>
+            <a:picLocks noChangeAspect="1"/>
+          </p:cNvPicPr>
+          <p:nvPr/>
+        </p:nvPicPr>
+        <p:blipFill>
+          <a:blip r:embed="rId103"/>
+          <a:stretch>
+            <a:fillRect/>
+          </a:stretch>
+        </p:blipFill>
+        <p:spPr>
+          <a:xfrm>
+            <a:off x="6364224" y="3163824"/>
+            <a:ext cx="256032" cy="256032"/>
+          </a:xfrm>
+          <a:prstGeom prst="rect">
+            <a:avLst/>
+          </a:prstGeom>
+        </p:spPr>
+      </p:pic>
+      <p:sp>
+        <p:nvSpPr>
+          <p:cNvPr id="15" name="Text 9"/>
+          <p:cNvSpPr txBox="1"/>
+          <p:nvPr/>
+        </p:nvSpPr>
+        <p:spPr>
+          <a:xfrm>
+            <a:off x="6903720" y="2990088"/>
+            <a:ext cx="4526280" cy="777240"/>
+          </a:xfrm>
+          <a:prstGeom prst="rect">
+            <a:avLst/>
+          </a:prstGeom>
+          <a:noFill/>
+          <a:ln/>
+        </p:spPr>
+        <p:txBody>
+          <a:bodyPr wrap="square" lIns="0" tIns="0" rIns="0" bIns="0" rtlCol="0" anchor="t"/>
+          <a:lstStyle/>
+          <a:p>
+            <a:pPr indent="0" marL="0">
+              <a:buNone/>
+            </a:pPr>
+            <a:r>
+              <a:rPr lang="en-US" sz="1500" dirty="0">
+                <a:solidFill>
+                  <a:srgbClr val="FFFFFF"/>
+                </a:solidFill>
+              </a:rPr>
+              <a:t>Launchpad local para testar tudo junto</a:t>
+            </a:r>
+            <a:endParaRPr lang="en-US" sz="1500" dirty="0"/>
+          </a:p>
+        </p:txBody>
+      </p:sp>
+      <p:sp>
+        <p:nvSpPr>
+          <p:cNvPr id="16" name="Marcador"/>
           <p:cNvSpPr/>
           <p:nvPr/>
         </p:nvSpPr>
         <p:spPr>
           <a:xfrm>
-            <a:off x="9784080" y="1828800"/>
-            <a:ext cx="2834640" cy="2834640"/>
-          </a:xfrm>
-          <a:prstGeom prst="ellipse">
+            <a:off x="731520" y="4023360"/>
+            <a:ext cx="457200" cy="457200"/>
+          </a:xfrm>
+          <a:prstGeom prst="roundRect">
+            <a:avLst>
+              <a:gd name="adj" fmla="val 22000"/>
+            </a:avLst>
+          </a:prstGeom>
+          <a:solidFill>
+            <a:schemeClr val="accent1"/>
+          </a:solidFill>
+          <a:ln/>
+        </p:spPr>
+      </p:sp>
+      <p:pic>
+        <p:nvPicPr>
+          <p:cNvPr id="17" name="Image 4" descr="concluído">    </p:cNvPr>
+          <p:cNvPicPr>
+            <a:picLocks noChangeAspect="1"/>
+          </p:cNvPicPr>
+          <p:nvPr/>
+        </p:nvPicPr>
+        <p:blipFill>
+          <a:blip r:embed="rId104"/>
+          <a:stretch>
+            <a:fillRect/>
+          </a:stretch>
+        </p:blipFill>
+        <p:spPr>
+          <a:xfrm>
+            <a:off x="832104" y="4123944"/>
+            <a:ext cx="256032" cy="256032"/>
+          </a:xfrm>
+          <a:prstGeom prst="rect">
             <a:avLst/>
           </a:prstGeom>
+        </p:spPr>
+      </p:pic>
+      <p:sp>
+        <p:nvSpPr>
+          <p:cNvPr id="18" name="Text 11"/>
+          <p:cNvSpPr txBox="1"/>
+          <p:nvPr/>
+        </p:nvSpPr>
+        <p:spPr>
+          <a:xfrm>
+            <a:off x="1371600" y="3950208"/>
+            <a:ext cx="4526280" cy="777240"/>
+          </a:xfrm>
+          <a:prstGeom prst="rect">
+            <a:avLst/>
+          </a:prstGeom>
+          <a:noFill/>
+          <a:ln/>
+        </p:spPr>
+        <p:txBody>
+          <a:bodyPr wrap="square" lIns="0" tIns="0" rIns="0" bIns="0" rtlCol="0" anchor="t"/>
+          <a:lstStyle/>
+          <a:p>
+            <a:pPr indent="0" marL="0">
+              <a:buNone/>
+            </a:pPr>
+            <a:r>
+              <a:rPr lang="en-US" sz="1500" dirty="0">
+                <a:solidFill>
+                  <a:srgbClr val="FFFFFF"/>
+                </a:solidFill>
+              </a:rPr>
+              <a:t>SAP BTP: BSP, IAM App e acesso pelo SAP Build Work Zone</a:t>
+            </a:r>
+            <a:endParaRPr lang="en-US" sz="1500" dirty="0"/>
+          </a:p>
+        </p:txBody>
+      </p:sp>
+      <p:sp>
+        <p:nvSpPr>
+          <p:cNvPr id="19" name="Marcador"/>
+          <p:cNvSpPr/>
+          <p:nvPr/>
+        </p:nvSpPr>
+        <p:spPr>
+          <a:xfrm>
+            <a:off x="6263640" y="4023360"/>
+            <a:ext cx="457200" cy="457200"/>
+          </a:xfrm>
+          <a:prstGeom prst="roundRect">
+            <a:avLst>
+              <a:gd name="adj" fmla="val 22000"/>
+            </a:avLst>
+          </a:prstGeom>
           <a:solidFill>
-            <a:srgbClr val="4DB1FF">
-              <a:alpha val="18000"/>
-            </a:srgbClr>
+            <a:schemeClr val="accent1"/>
           </a:solidFill>
           <a:ln/>
         </p:spPr>
       </p:sp>
-      <p:sp>
-        <p:nvSpPr>
-          <p:cNvPr id="7" name="Shape 5"/>
+      <p:pic>
+        <p:nvPicPr>
+          <p:cNvPr id="20" name="Image 5" descr="concluído">    </p:cNvPr>
+          <p:cNvPicPr>
+            <a:picLocks noChangeAspect="1"/>
+          </p:cNvPicPr>
+          <p:nvPr/>
+        </p:nvPicPr>
+        <p:blipFill>
+          <a:blip r:embed="rId105"/>
+          <a:stretch>
+            <a:fillRect/>
+          </a:stretch>
+        </p:blipFill>
+        <p:spPr>
+          <a:xfrm>
+            <a:off x="6364224" y="4123944"/>
+            <a:ext cx="256032" cy="256032"/>
+          </a:xfrm>
+          <a:prstGeom prst="rect">
+            <a:avLst/>
+          </a:prstGeom>
+        </p:spPr>
+      </p:pic>
+      <p:sp>
+        <p:nvSpPr>
+          <p:cNvPr id="21" name="Text 13"/>
+          <p:cNvSpPr txBox="1"/>
+          <p:nvPr/>
+        </p:nvSpPr>
+        <p:spPr>
+          <a:xfrm>
+            <a:off x="6903720" y="3950208"/>
+            <a:ext cx="4526280" cy="777240"/>
+          </a:xfrm>
+          <a:prstGeom prst="rect">
+            <a:avLst/>
+          </a:prstGeom>
+          <a:noFill/>
+          <a:ln/>
+        </p:spPr>
+        <p:txBody>
+          <a:bodyPr wrap="square" lIns="0" tIns="0" rIns="0" bIns="0" rtlCol="0" anchor="t"/>
+          <a:lstStyle/>
+          <a:p>
+            <a:pPr indent="0" marL="0">
+              <a:buNone/>
+            </a:pPr>
+            <a:r>
+              <a:rPr lang="en-US" sz="1500" dirty="0">
+                <a:solidFill>
+                  <a:srgbClr val="FFFFFF"/>
+                </a:solidFill>
+              </a:rPr>
+              <a:t>On-Premise: SAPUI5 1.136+, roles PFCG e SAP Fiori launchpad</a:t>
+            </a:r>
+            <a:endParaRPr lang="en-US" sz="1500" dirty="0"/>
+          </a:p>
+        </p:txBody>
+      </p:sp>
+      <p:sp>
+        <p:nvSpPr>
+          <p:cNvPr id="22" name="Próxima etapa"/>
           <p:cNvSpPr/>
           <p:nvPr/>
         </p:nvSpPr>
         <p:spPr>
           <a:xfrm>
-            <a:off x="923544" y="5266944"/>
-            <a:ext cx="10131552" cy="0"/>
-          </a:xfrm>
-          <a:prstGeom prst="line">
+            <a:off x="731520" y="5394960"/>
+            <a:ext cx="10725912" cy="777240"/>
+          </a:xfrm>
+          <a:prstGeom prst="roundRect">
+            <a:avLst>
+              <a:gd name="adj" fmla="val 16471"/>
+            </a:avLst>
+          </a:prstGeom>
+          <a:solidFill>
+            <a:srgbClr val="1B3A7A"/>
+          </a:solidFill>
+          <a:ln/>
+        </p:spPr>
+      </p:sp>
+      <p:pic>
+        <p:nvPicPr>
+          <p:cNvPr id="23" name="Image 6" descr="próxima etapa">    </p:cNvPr>
+          <p:cNvPicPr>
+            <a:picLocks noChangeAspect="1"/>
+          </p:cNvPicPr>
+          <p:nvPr/>
+        </p:nvPicPr>
+        <p:blipFill>
+          <a:blip r:embed="rId106"/>
+          <a:stretch>
+            <a:fillRect/>
+          </a:stretch>
+        </p:blipFill>
+        <p:spPr>
+          <a:xfrm>
+            <a:off x="960120" y="5559552"/>
+            <a:ext cx="438912" cy="438912"/>
+          </a:xfrm>
+          <a:prstGeom prst="rect">
             <a:avLst/>
           </a:prstGeom>
+        </p:spPr>
+      </p:pic>
+      <p:sp>
+        <p:nvSpPr>
+          <p:cNvPr id="24" name="Text 15"/>
+          <p:cNvSpPr txBox="1"/>
+          <p:nvPr/>
+        </p:nvSpPr>
+        <p:spPr>
+          <a:xfrm>
+            <a:off x="1600200" y="5440680"/>
+            <a:ext cx="9692640" cy="685800"/>
+          </a:xfrm>
+          <a:prstGeom prst="rect">
+            <a:avLst/>
+          </a:prstGeom>
           <a:noFill/>
-          <a:ln w="25400">
-            <a:solidFill>
-              <a:srgbClr val="3A4654"/>
-            </a:solidFill>
-            <a:prstDash val="solid"/>
-          </a:ln>
-        </p:spPr>
-      </p:sp>
-      <p:sp>
-        <p:nvSpPr>
-          <p:cNvPr id="8" name="Etapa 1"/>
-          <p:cNvSpPr/>
-          <p:nvPr/>
-        </p:nvSpPr>
-        <p:spPr>
-          <a:xfrm>
-            <a:off x="731520" y="5074920"/>
-            <a:ext cx="384048" cy="384048"/>
-          </a:xfrm>
-          <a:prstGeom prst="ellipse">
-            <a:avLst/>
-          </a:prstGeom>
-          <a:solidFill>
-            <a:srgbClr val="1F4F86"/>
-          </a:solidFill>
-          <a:ln w="19050">
-            <a:solidFill>
-              <a:srgbClr val="1F4F86"/>
-            </a:solidFill>
-          </a:ln>
+          <a:ln/>
         </p:spPr>
         <p:txBody>
           <a:bodyPr wrap="square" lIns="0" tIns="0" rIns="0" bIns="0" rtlCol="0" anchor="ctr"/>
           <a:lstStyle/>
           <a:p>
-            <a:pPr algn="ctr" indent="0" marL="0">
-              <a:buNone/>
-            </a:pPr>
-            <a:r>
-              <a:rPr lang="en-US" sz="1300" b="1" dirty="0">
+            <a:pPr indent="0" marL="0">
+              <a:buNone/>
+            </a:pPr>
+            <a:r>
+              <a:rPr lang="en-US" sz="1600" b="1" dirty="0">
+                <a:solidFill>
+                  <a:srgbClr val="89D1FF"/>
+                </a:solidFill>
+              </a:rPr>
+              <a:t>Série concluída ·  </a:t>
+            </a:r>
+            <a:pPr indent="0" marL="0">
+              <a:buNone/>
+            </a:pPr>
+            <a:r>
+              <a:rPr lang="en-US" sz="1600" dirty="0">
                 <a:solidFill>
                   <a:srgbClr val="FFFFFF"/>
                 </a:solidFill>
               </a:rPr>
-              <a:t>1</a:t>
-            </a:r>
-            <a:endParaRPr lang="en-US" sz="1300" dirty="0"/>
+              <a:t>CDS, RAP, OData e Fiori no SAP BTP ou On-Premise.</a:t>
+            </a:r>
+            <a:endParaRPr lang="en-US" sz="1600" dirty="0"/>
           </a:p>
         </p:txBody>
       </p:sp>
       <p:sp>
         <p:nvSpPr>
-          <p:cNvPr id="9" name="Text 7"/>
+          <p:cNvPr id="40" name="Rodapé"/>
           <p:cNvSpPr txBox="1"/>
           <p:nvPr/>
         </p:nvSpPr>
         <p:spPr>
           <a:xfrm>
-            <a:off x="192024" y="5550408"/>
-            <a:ext cx="1463040" cy="274320"/>
+            <a:off x="731520" y="6419088"/>
+            <a:ext cx="9144000" cy="320040"/>
           </a:xfrm>
           <a:prstGeom prst="rect">
             <a:avLst/>
           </a:prstGeom>
           <a:noFill/>
-          <a:ln/>
-        </p:spPr>
-        <p:txBody>
-          <a:bodyPr wrap="square" lIns="0" tIns="0" rIns="0" bIns="0" rtlCol="0" anchor="ctr"/>
-          <a:lstStyle/>
-          <a:p>
-            <a:pPr algn="ctr" indent="0" marL="0">
-              <a:buNone/>
-            </a:pPr>
-            <a:r>
-              <a:rPr lang="en-US" sz="1100" dirty="0">
-                <a:solidFill>
-                  <a:srgbClr val="A9B4BE"/>
-                </a:solidFill>
-              </a:rPr>
-              <a:t>Modelagem de dados</a:t>
-            </a:r>
-            <a:endParaRPr lang="en-US" sz="1100" dirty="0"/>
-          </a:p>
-        </p:txBody>
-      </p:sp>
-      <p:sp>
-        <p:nvSpPr>
-          <p:cNvPr id="10" name="Etapa 2"/>
-          <p:cNvSpPr/>
-          <p:nvPr/>
-        </p:nvSpPr>
-        <p:spPr>
-          <a:xfrm>
-            <a:off x="3264408" y="5074920"/>
-            <a:ext cx="384048" cy="384048"/>
-          </a:xfrm>
-          <a:prstGeom prst="ellipse">
-            <a:avLst/>
-          </a:prstGeom>
-          <a:solidFill>
-            <a:srgbClr val="1F4F86"/>
-          </a:solidFill>
-          <a:ln w="19050">
-            <a:solidFill>
-              <a:srgbClr val="1F4F86"/>
-            </a:solidFill>
-          </a:ln>
-        </p:spPr>
-        <p:txBody>
-          <a:bodyPr wrap="square" lIns="0" tIns="0" rIns="0" bIns="0" rtlCol="0" anchor="ctr"/>
-          <a:lstStyle/>
-          <a:p>
-            <a:pPr algn="ctr" indent="0" marL="0">
-              <a:buNone/>
-            </a:pPr>
-            <a:r>
-              <a:rPr lang="en-US" sz="1300" b="1" dirty="0">
-                <a:solidFill>
-                  <a:srgbClr val="FFFFFF"/>
-                </a:solidFill>
-              </a:rPr>
-              <a:t>2</a:t>
-            </a:r>
-            <a:endParaRPr lang="en-US" sz="1300" dirty="0"/>
-          </a:p>
-        </p:txBody>
-      </p:sp>
-      <p:sp>
-        <p:nvSpPr>
-          <p:cNvPr id="11" name="Text 9"/>
-          <p:cNvSpPr txBox="1"/>
-          <p:nvPr/>
-        </p:nvSpPr>
-        <p:spPr>
-          <a:xfrm>
-            <a:off x="2724912" y="5550408"/>
-            <a:ext cx="1463040" cy="274320"/>
-          </a:xfrm>
-          <a:prstGeom prst="rect">
-            <a:avLst/>
-          </a:prstGeom>
-          <a:noFill/>
-          <a:ln/>
-        </p:spPr>
-        <p:txBody>
-          <a:bodyPr wrap="square" lIns="0" tIns="0" rIns="0" bIns="0" rtlCol="0" anchor="ctr"/>
-          <a:lstStyle/>
-          <a:p>
-            <a:pPr algn="ctr" indent="0" marL="0">
-              <a:buNone/>
-            </a:pPr>
-            <a:r>
-              <a:rPr lang="en-US" sz="1100" dirty="0">
-                <a:solidFill>
-                  <a:srgbClr val="A9B4BE"/>
-                </a:solidFill>
-              </a:rPr>
-              <a:t>Core Data Services</a:t>
-            </a:r>
-            <a:endParaRPr lang="en-US" sz="1100" dirty="0"/>
-          </a:p>
-        </p:txBody>
-      </p:sp>
-      <p:sp>
-        <p:nvSpPr>
-          <p:cNvPr id="12" name="Etapa 3"/>
-          <p:cNvSpPr/>
-          <p:nvPr/>
-        </p:nvSpPr>
-        <p:spPr>
-          <a:xfrm>
-            <a:off x="5797296" y="5074920"/>
-            <a:ext cx="384048" cy="384048"/>
-          </a:xfrm>
-          <a:prstGeom prst="ellipse">
-            <a:avLst/>
-          </a:prstGeom>
-          <a:solidFill>
-            <a:srgbClr val="1F4F86"/>
-          </a:solidFill>
-          <a:ln w="19050">
-            <a:solidFill>
-              <a:srgbClr val="1F4F86"/>
-            </a:solidFill>
-          </a:ln>
-        </p:spPr>
-        <p:txBody>
-          <a:bodyPr wrap="square" lIns="0" tIns="0" rIns="0" bIns="0" rtlCol="0" anchor="ctr"/>
-          <a:lstStyle/>
-          <a:p>
-            <a:pPr algn="ctr" indent="0" marL="0">
-              <a:buNone/>
-            </a:pPr>
-            <a:r>
-              <a:rPr lang="en-US" sz="1300" b="1" dirty="0">
-                <a:solidFill>
-                  <a:srgbClr val="FFFFFF"/>
-                </a:solidFill>
-              </a:rPr>
-              <a:t>3</a:t>
-            </a:r>
-            <a:endParaRPr lang="en-US" sz="1300" dirty="0"/>
-          </a:p>
-        </p:txBody>
-      </p:sp>
-      <p:sp>
-        <p:nvSpPr>
-          <p:cNvPr id="13" name="Text 11"/>
-          <p:cNvSpPr txBox="1"/>
-          <p:nvPr/>
-        </p:nvSpPr>
-        <p:spPr>
-          <a:xfrm>
-            <a:off x="5257800" y="5550408"/>
-            <a:ext cx="1463040" cy="274320"/>
-          </a:xfrm>
-          <a:prstGeom prst="rect">
-            <a:avLst/>
-          </a:prstGeom>
-          <a:noFill/>
-          <a:ln/>
-        </p:spPr>
-        <p:txBody>
-          <a:bodyPr wrap="square" lIns="0" tIns="0" rIns="0" bIns="0" rtlCol="0" anchor="ctr"/>
-          <a:lstStyle/>
-          <a:p>
-            <a:pPr algn="ctr" indent="0" marL="0">
-              <a:buNone/>
-            </a:pPr>
-            <a:r>
-              <a:rPr lang="en-US" sz="1100" dirty="0">
-                <a:solidFill>
-                  <a:srgbClr val="A9B4BE"/>
-                </a:solidFill>
-              </a:rPr>
-              <a:t>Comportamento RAP</a:t>
-            </a:r>
-            <a:endParaRPr lang="en-US" sz="1100" dirty="0"/>
-          </a:p>
-        </p:txBody>
-      </p:sp>
-      <p:sp>
-        <p:nvSpPr>
-          <p:cNvPr id="14" name="Etapa 4"/>
-          <p:cNvSpPr/>
-          <p:nvPr/>
-        </p:nvSpPr>
-        <p:spPr>
-          <a:xfrm>
-            <a:off x="8330184" y="5074920"/>
-            <a:ext cx="384048" cy="384048"/>
-          </a:xfrm>
-          <a:prstGeom prst="ellipse">
-            <a:avLst/>
-          </a:prstGeom>
-          <a:solidFill>
-            <a:srgbClr val="1F4F86"/>
-          </a:solidFill>
-          <a:ln w="19050">
-            <a:solidFill>
-              <a:srgbClr val="1F4F86"/>
-            </a:solidFill>
-          </a:ln>
-        </p:spPr>
-        <p:txBody>
-          <a:bodyPr wrap="square" lIns="0" tIns="0" rIns="0" bIns="0" rtlCol="0" anchor="ctr"/>
-          <a:lstStyle/>
-          <a:p>
-            <a:pPr algn="ctr" indent="0" marL="0">
-              <a:buNone/>
-            </a:pPr>
-            <a:r>
-              <a:rPr lang="en-US" sz="1300" b="1" dirty="0">
-                <a:solidFill>
-                  <a:srgbClr val="FFFFFF"/>
-                </a:solidFill>
-              </a:rPr>
-              <a:t>4</a:t>
-            </a:r>
-            <a:endParaRPr lang="en-US" sz="1300" dirty="0"/>
-          </a:p>
-        </p:txBody>
-      </p:sp>
-      <p:sp>
-        <p:nvSpPr>
-          <p:cNvPr id="15" name="Text 13"/>
-          <p:cNvSpPr txBox="1"/>
-          <p:nvPr/>
-        </p:nvSpPr>
-        <p:spPr>
-          <a:xfrm>
-            <a:off x="7790688" y="5550408"/>
-            <a:ext cx="1463040" cy="274320"/>
-          </a:xfrm>
-          <a:prstGeom prst="rect">
-            <a:avLst/>
-          </a:prstGeom>
-          <a:noFill/>
-          <a:ln/>
-        </p:spPr>
-        <p:txBody>
-          <a:bodyPr wrap="square" lIns="0" tIns="0" rIns="0" bIns="0" rtlCol="0" anchor="ctr"/>
-          <a:lstStyle/>
-          <a:p>
-            <a:pPr algn="ctr" indent="0" marL="0">
-              <a:buNone/>
-            </a:pPr>
-            <a:r>
-              <a:rPr lang="en-US" sz="1100" dirty="0">
-                <a:solidFill>
-                  <a:srgbClr val="A9B4BE"/>
-                </a:solidFill>
-              </a:rPr>
-              <a:t>Serviços OData</a:t>
-            </a:r>
-            <a:endParaRPr lang="en-US" sz="1100" dirty="0"/>
-          </a:p>
-        </p:txBody>
-      </p:sp>
-      <p:sp>
-        <p:nvSpPr>
-          <p:cNvPr id="16" name="Etapa 5"/>
-          <p:cNvSpPr/>
-          <p:nvPr/>
-        </p:nvSpPr>
-        <p:spPr>
-          <a:xfrm>
-            <a:off x="10863072" y="5074920"/>
-            <a:ext cx="384048" cy="384048"/>
-          </a:xfrm>
-          <a:prstGeom prst="ellipse">
-            <a:avLst/>
-          </a:prstGeom>
-          <a:solidFill>
-            <a:srgbClr val="1F4F86"/>
-          </a:solidFill>
-          <a:ln w="19050">
-            <a:solidFill>
-              <a:srgbClr val="1F4F86"/>
-            </a:solidFill>
-          </a:ln>
-        </p:spPr>
-        <p:txBody>
-          <a:bodyPr wrap="square" lIns="0" tIns="0" rIns="0" bIns="0" rtlCol="0" anchor="ctr"/>
-          <a:lstStyle/>
-          <a:p>
-            <a:pPr algn="ctr" indent="0" marL="0">
-              <a:buNone/>
-            </a:pPr>
-            <a:r>
-              <a:rPr lang="en-US" sz="1300" b="1" dirty="0">
-                <a:solidFill>
-                  <a:srgbClr val="FFFFFF"/>
-                </a:solidFill>
-              </a:rPr>
-              <a:t>5</a:t>
-            </a:r>
-            <a:endParaRPr lang="en-US" sz="1300" dirty="0"/>
-          </a:p>
-        </p:txBody>
-      </p:sp>
-      <p:sp>
-        <p:nvSpPr>
-          <p:cNvPr id="17" name="Text 15"/>
-          <p:cNvSpPr txBox="1"/>
-          <p:nvPr/>
-        </p:nvSpPr>
-        <p:spPr>
-          <a:xfrm>
-            <a:off x="10323576" y="5550408"/>
-            <a:ext cx="1463040" cy="274320"/>
-          </a:xfrm>
-          <a:prstGeom prst="rect">
-            <a:avLst/>
-          </a:prstGeom>
-          <a:noFill/>
-          <a:ln/>
-        </p:spPr>
-        <p:txBody>
-          <a:bodyPr wrap="square" lIns="0" tIns="0" rIns="0" bIns="0" rtlCol="0" anchor="ctr"/>
-          <a:lstStyle/>
-          <a:p>
-            <a:pPr algn="ctr" indent="0" marL="0">
-              <a:buNone/>
-            </a:pPr>
-            <a:r>
-              <a:rPr lang="en-US" sz="1100" dirty="0">
-                <a:solidFill>
-                  <a:srgbClr val="A9B4BE"/>
-                </a:solidFill>
-              </a:rPr>
-              <a:t>Apps Fiori</a:t>
-            </a:r>
-            <a:endParaRPr lang="en-US" sz="1100" dirty="0"/>
-          </a:p>
-        </p:txBody>
-      </p:sp>
-      <p:sp>
-        <p:nvSpPr>
-          <p:cNvPr id="18" name="Próxima etapa"/>
-          <p:cNvSpPr/>
-          <p:nvPr/>
-        </p:nvSpPr>
-        <p:spPr>
-          <a:xfrm>
-            <a:off x="8183880" y="1783080"/>
-            <a:ext cx="3429000" cy="1600200"/>
-          </a:xfrm>
-          <a:prstGeom prst="roundRect">
-            <a:avLst>
-              <a:gd name="adj" fmla="val 6857"/>
-            </a:avLst>
-          </a:prstGeom>
-          <a:solidFill>
-            <a:srgbClr val="1D232A"/>
-          </a:solidFill>
-          <a:ln/>
-        </p:spPr>
-      </p:sp>
-      <p:sp>
-        <p:nvSpPr>
-          <p:cNvPr id="19" name="Text 17"/>
-          <p:cNvSpPr txBox="1"/>
-          <p:nvPr/>
-        </p:nvSpPr>
-        <p:spPr>
-          <a:xfrm>
-            <a:off x="8412480" y="1965960"/>
-            <a:ext cx="3017520" cy="274320"/>
-          </a:xfrm>
-          <a:prstGeom prst="rect">
-            <a:avLst/>
-          </a:prstGeom>
-          <a:noFill/>
-          <a:ln/>
-        </p:spPr>
-        <p:txBody>
-          <a:bodyPr wrap="square" lIns="0" tIns="0" rIns="0" bIns="0" rtlCol="0" anchor="ctr"/>
-          <a:lstStyle/>
-          <a:p>
-            <a:pPr indent="0" marL="0">
-              <a:buNone/>
-            </a:pPr>
-            <a:r>
-              <a:rPr lang="en-US" sz="1100" b="1" spc="150" kern="0" dirty="0">
-                <a:solidFill>
-                  <a:srgbClr val="4DB1FF"/>
-                </a:solidFill>
-              </a:rPr>
-              <a:t>SÉRIE CONCLUÍDA</a:t>
-            </a:r>
-            <a:endParaRPr lang="en-US" sz="1100" dirty="0"/>
-          </a:p>
-        </p:txBody>
-      </p:sp>
-      <p:sp>
-        <p:nvSpPr>
-          <p:cNvPr id="20" name="Text 18"/>
-          <p:cNvSpPr txBox="1"/>
-          <p:nvPr/>
-        </p:nvSpPr>
-        <p:spPr>
-          <a:xfrm>
-            <a:off x="8412480" y="2286000"/>
-            <a:ext cx="3017520" cy="960120"/>
-          </a:xfrm>
-          <a:prstGeom prst="rect">
-            <a:avLst/>
-          </a:prstGeom>
-          <a:noFill/>
-          <a:ln/>
         </p:spPr>
         <p:txBody>
           <a:bodyPr wrap="square" lIns="0" tIns="0" rIns="0" bIns="0" rtlCol="0" anchor="t"/>
           <a:lstStyle/>
           <a:p>
-            <a:pPr indent="0" marL="0">
-              <a:buNone/>
-            </a:pPr>
-            <a:r>
-              <a:rPr lang="en-US" sz="1800" b="1" dirty="0">
-                <a:solidFill>
-                  <a:srgbClr val="FFFFFF"/>
-                </a:solidFill>
-              </a:rPr>
-              <a:t>CDS, RAP, OData e Fiori no BTP ou On-Premise</a:t>
-            </a:r>
-            <a:endParaRPr lang="en-US" sz="1800" dirty="0"/>
+            <a:r>
+              <a:rPr lang="pt-BR" sz="1000" dirty="0">
+                <a:solidFill>
+                  <a:srgbClr val="89D1FF"/>
+                </a:solidFill>
+              </a:rPr>
+              <a:t>Pedidos de Compras · SAP RAP no BTP e On-Premise  ·  Etapa 5 de 5 — Apps Fiori</a:t>
+            </a:r>
           </a:p>
         </p:txBody>
       </p:sp>
@@ -32021,7 +31660,7 @@
             <a:r>
               <a:rPr lang="en-US" sz="1400" b="1" spc="200" kern="0" dirty="0">
                 <a:solidFill>
-                  <a:schemeClr val="accent1"/>
+                  <a:srgbClr val="89D1FF"/>
                 </a:solidFill>
               </a:rPr>
               <a:t>ETAPA 5 · ON-PREMISE</a:t>
@@ -32108,50 +31747,6 @@
       </p:sp>
       <p:sp>
         <p:nvSpPr>
-          <p:cNvPr id="5" name="Decoração 1"/>
-          <p:cNvSpPr/>
-          <p:nvPr/>
-        </p:nvSpPr>
-        <p:spPr>
-          <a:xfrm>
-            <a:off x="8503920" y="-1463040"/>
-            <a:ext cx="5120640" cy="5120640"/>
-          </a:xfrm>
-          <a:prstGeom prst="ellipse">
-            <a:avLst/>
-          </a:prstGeom>
-          <a:solidFill>
-            <a:srgbClr val="0070F2">
-              <a:alpha val="28000"/>
-            </a:srgbClr>
-          </a:solidFill>
-          <a:ln/>
-        </p:spPr>
-      </p:sp>
-      <p:sp>
-        <p:nvSpPr>
-          <p:cNvPr id="6" name="Decoração 2"/>
-          <p:cNvSpPr/>
-          <p:nvPr/>
-        </p:nvSpPr>
-        <p:spPr>
-          <a:xfrm>
-            <a:off x="9784080" y="1828800"/>
-            <a:ext cx="2834640" cy="2834640"/>
-          </a:xfrm>
-          <a:prstGeom prst="ellipse">
-            <a:avLst/>
-          </a:prstGeom>
-          <a:solidFill>
-            <a:srgbClr val="4DB1FF">
-              <a:alpha val="18000"/>
-            </a:srgbClr>
-          </a:solidFill>
-          <a:ln/>
-        </p:spPr>
-      </p:sp>
-      <p:sp>
-        <p:nvSpPr>
           <p:cNvPr id="7" name="Ícone settings"/>
           <p:cNvSpPr/>
           <p:nvPr/>
@@ -32167,7 +31762,7 @@
             </a:avLst>
           </a:prstGeom>
           <a:solidFill>
-            <a:srgbClr val="1D232A"/>
+            <a:srgbClr val="1B3A7A"/>
           </a:solidFill>
           <a:ln/>
         </p:spPr>
@@ -32213,7 +31808,7 @@
             </a:avLst>
           </a:prstGeom>
           <a:solidFill>
-            <a:srgbClr val="1D232A"/>
+            <a:srgbClr val="1B3A7A"/>
           </a:solidFill>
           <a:ln/>
         </p:spPr>
@@ -32245,7 +31840,7 @@
             <a:r>
               <a:rPr lang="en-US" sz="1100" b="1" spc="150" kern="0" dirty="0">
                 <a:solidFill>
-                  <a:srgbClr val="4DB1FF"/>
+                  <a:srgbClr val="89D1FF"/>
                 </a:solidFill>
               </a:rPr>
               <a:t>OBJETOS NESTA SEÇÃO</a:t>
@@ -32295,7 +31890,7 @@
             <a:r>
               <a:rPr lang="en-US" sz="1100" dirty="0">
                 <a:solidFill>
-                  <a:srgbClr val="A9B4BE"/>
+                  <a:srgbClr val="D1EFFF"/>
                 </a:solidFill>
               </a:rPr>
               <a:t>  versão mínima das apps</a:t>
@@ -32345,7 +31940,7 @@
             <a:r>
               <a:rPr lang="en-US" sz="1100" dirty="0">
                 <a:solidFill>
-                  <a:srgbClr val="A9B4BE"/>
+                  <a:srgbClr val="D1EFFF"/>
                 </a:solidFill>
               </a:rPr>
               <a:t>  FES 2025 · SAP_UI 816</a:t>
@@ -32395,7 +31990,7 @@
             <a:r>
               <a:rPr lang="en-US" sz="1100" dirty="0">
                 <a:solidFill>
-                  <a:srgbClr val="A9B4BE"/>
+                  <a:srgbClr val="D1EFFF"/>
                 </a:solidFill>
               </a:rPr>
               <a:t>  deploy das BSPs</a:t>
@@ -32445,7 +32040,7 @@
             <a:r>
               <a:rPr lang="en-US" sz="1100" dirty="0">
                 <a:solidFill>
-                  <a:srgbClr val="A9B4BE"/>
+                  <a:srgbClr val="D1EFFF"/>
                 </a:solidFill>
               </a:rPr>
               <a:t>  catálogo técnico</a:t>
@@ -32495,7 +32090,7 @@
             <a:r>
               <a:rPr lang="en-US" sz="1100" dirty="0">
                 <a:solidFill>
-                  <a:srgbClr val="A9B4BE"/>
+                  <a:srgbClr val="D1EFFF"/>
                 </a:solidFill>
               </a:rPr>
               <a:t>  espaço e página</a:t>
@@ -32545,7 +32140,7 @@
             <a:r>
               <a:rPr lang="en-US" sz="1100" dirty="0">
                 <a:solidFill>
-                  <a:srgbClr val="A9B4BE"/>
+                  <a:srgbClr val="D1EFFF"/>
                 </a:solidFill>
               </a:rPr>
               <a:t>  roles PFCG</a:t>
@@ -35595,7 +35190,7 @@
             <a:r>
               <a:rPr lang="en-US" sz="1400" b="1" spc="200" kern="0" dirty="0">
                 <a:solidFill>
-                  <a:schemeClr val="accent1"/>
+                  <a:srgbClr val="89D1FF"/>
                 </a:solidFill>
               </a:rPr>
               <a:t>ETAPA 5 · BASE COMUM</a:t>
@@ -35682,50 +35277,6 @@
       </p:sp>
       <p:sp>
         <p:nvSpPr>
-          <p:cNvPr id="5" name="Decoração 1"/>
-          <p:cNvSpPr/>
-          <p:nvPr/>
-        </p:nvSpPr>
-        <p:spPr>
-          <a:xfrm>
-            <a:off x="8503920" y="-1463040"/>
-            <a:ext cx="5120640" cy="5120640"/>
-          </a:xfrm>
-          <a:prstGeom prst="ellipse">
-            <a:avLst/>
-          </a:prstGeom>
-          <a:solidFill>
-            <a:srgbClr val="0070F2">
-              <a:alpha val="28000"/>
-            </a:srgbClr>
-          </a:solidFill>
-          <a:ln/>
-        </p:spPr>
-      </p:sp>
-      <p:sp>
-        <p:nvSpPr>
-          <p:cNvPr id="6" name="Decoração 2"/>
-          <p:cNvSpPr/>
-          <p:nvPr/>
-        </p:nvSpPr>
-        <p:spPr>
-          <a:xfrm>
-            <a:off x="9784080" y="1828800"/>
-            <a:ext cx="2834640" cy="2834640"/>
-          </a:xfrm>
-          <a:prstGeom prst="ellipse">
-            <a:avLst/>
-          </a:prstGeom>
-          <a:solidFill>
-            <a:srgbClr val="4DB1FF">
-              <a:alpha val="18000"/>
-            </a:srgbClr>
-          </a:solidFill>
-          <a:ln/>
-        </p:spPr>
-      </p:sp>
-      <p:sp>
-        <p:nvSpPr>
           <p:cNvPr id="7" name="Ícone settings"/>
           <p:cNvSpPr/>
           <p:nvPr/>
@@ -35741,7 +35292,7 @@
             </a:avLst>
           </a:prstGeom>
           <a:solidFill>
-            <a:srgbClr val="1D232A"/>
+            <a:srgbClr val="1B3A7A"/>
           </a:solidFill>
           <a:ln/>
         </p:spPr>
@@ -35787,7 +35338,7 @@
             </a:avLst>
           </a:prstGeom>
           <a:solidFill>
-            <a:srgbClr val="1D232A"/>
+            <a:srgbClr val="1B3A7A"/>
           </a:solidFill>
           <a:ln/>
         </p:spPr>
@@ -35819,7 +35370,7 @@
             <a:r>
               <a:rPr lang="en-US" sz="1100" b="1" spc="150" kern="0" dirty="0">
                 <a:solidFill>
-                  <a:srgbClr val="4DB1FF"/>
+                  <a:srgbClr val="89D1FF"/>
                 </a:solidFill>
               </a:rPr>
               <a:t>OBJETOS NESTA SEÇÃO</a:t>
@@ -35869,7 +35420,7 @@
             <a:r>
               <a:rPr lang="en-US" sz="1100" dirty="0">
                 <a:solidFill>
-                  <a:srgbClr val="A9B4BE"/>
+                  <a:srgbClr val="D1EFFF"/>
                 </a:solidFill>
               </a:rPr>
               <a:t>  projeto isolado</a:t>
@@ -35919,7 +35470,7 @@
             <a:r>
               <a:rPr lang="en-US" sz="1100" dirty="0">
                 <a:solidFill>
-                  <a:srgbClr val="A9B4BE"/>
+                  <a:srgbClr val="D1EFFF"/>
                 </a:solidFill>
               </a:rPr>
               <a:t>  descriptor v2</a:t>
@@ -35969,7 +35520,7 @@
             <a:r>
               <a:rPr lang="en-US" sz="1100" dirty="0">
                 <a:solidFill>
-                  <a:srgbClr val="A9B4BE"/>
+                  <a:srgbClr val="D1EFFF"/>
                 </a:solidFill>
               </a:rPr>
               <a:t>  proxy /sap → ABAP</a:t>
@@ -36019,7 +35570,7 @@
             <a:r>
               <a:rPr lang="en-US" sz="1100" dirty="0">
                 <a:solidFill>
-                  <a:srgbClr val="A9B4BE"/>
+                  <a:srgbClr val="D1EFFF"/>
                 </a:solidFill>
               </a:rPr>
               <a:t>  motor das análises</a:t>
@@ -36069,7 +35620,7 @@
             <a:r>
               <a:rPr lang="en-US" sz="1100" dirty="0">
                 <a:solidFill>
-                  <a:srgbClr val="A9B4BE"/>
+                  <a:srgbClr val="D1EFFF"/>
                 </a:solidFill>
               </a:rPr>
               <a:t>  sandbox sap.ushell</a:t>
@@ -36119,7 +35670,7 @@
             <a:r>
               <a:rPr lang="en-US" sz="1100" dirty="0">
                 <a:solidFill>
-                  <a:srgbClr val="A9B4BE"/>
+                  <a:srgbClr val="D1EFFF"/>
                 </a:solidFill>
               </a:rPr>
               <a:t>  deploy-to-abap</a:t>
@@ -54505,7 +54056,7 @@
             <a:r>
               <a:rPr lang="en-US" sz="1400" b="1" spc="200" kern="0" dirty="0">
                 <a:solidFill>
-                  <a:schemeClr val="accent1"/>
+                  <a:srgbClr val="89D1FF"/>
                 </a:solidFill>
               </a:rPr>
               <a:t>ETAPA 5 · CLIENTES</a:t>
@@ -54592,50 +54143,6 @@
       </p:sp>
       <p:sp>
         <p:nvSpPr>
-          <p:cNvPr id="5" name="Decoração 1"/>
-          <p:cNvSpPr/>
-          <p:nvPr/>
-        </p:nvSpPr>
-        <p:spPr>
-          <a:xfrm>
-            <a:off x="8503920" y="-1463040"/>
-            <a:ext cx="5120640" cy="5120640"/>
-          </a:xfrm>
-          <a:prstGeom prst="ellipse">
-            <a:avLst/>
-          </a:prstGeom>
-          <a:solidFill>
-            <a:srgbClr val="0070F2">
-              <a:alpha val="28000"/>
-            </a:srgbClr>
-          </a:solidFill>
-          <a:ln/>
-        </p:spPr>
-      </p:sp>
-      <p:sp>
-        <p:nvSpPr>
-          <p:cNvPr id="6" name="Decoração 2"/>
-          <p:cNvSpPr/>
-          <p:nvPr/>
-        </p:nvSpPr>
-        <p:spPr>
-          <a:xfrm>
-            <a:off x="9784080" y="1828800"/>
-            <a:ext cx="2834640" cy="2834640"/>
-          </a:xfrm>
-          <a:prstGeom prst="ellipse">
-            <a:avLst/>
-          </a:prstGeom>
-          <a:solidFill>
-            <a:srgbClr val="4DB1FF">
-              <a:alpha val="18000"/>
-            </a:srgbClr>
-          </a:solidFill>
-          <a:ln/>
-        </p:spPr>
-      </p:sp>
-      <p:sp>
-        <p:nvSpPr>
           <p:cNvPr id="7" name="Ícone customer"/>
           <p:cNvSpPr/>
           <p:nvPr/>
@@ -54651,7 +54158,7 @@
             </a:avLst>
           </a:prstGeom>
           <a:solidFill>
-            <a:srgbClr val="1D232A"/>
+            <a:srgbClr val="1B3A7A"/>
           </a:solidFill>
           <a:ln/>
         </p:spPr>
@@ -54697,7 +54204,7 @@
             </a:avLst>
           </a:prstGeom>
           <a:solidFill>
-            <a:srgbClr val="1D232A"/>
+            <a:srgbClr val="1B3A7A"/>
           </a:solidFill>
           <a:ln/>
         </p:spPr>
@@ -54729,7 +54236,7 @@
             <a:r>
               <a:rPr lang="en-US" sz="1100" b="1" spc="150" kern="0" dirty="0">
                 <a:solidFill>
-                  <a:srgbClr val="4DB1FF"/>
+                  <a:srgbClr val="89D1FF"/>
                 </a:solidFill>
               </a:rPr>
               <a:t>OBJETOS NESTA SEÇÃO</a:t>
@@ -54779,7 +54286,7 @@
             <a:r>
               <a:rPr lang="en-US" sz="1100" dirty="0">
                 <a:solidFill>
-                  <a:srgbClr val="A9B4BE"/>
+                  <a:srgbClr val="D1EFFF"/>
                 </a:solidFill>
               </a:rPr>
               <a:t>  Fiori Elements</a:t>
@@ -54829,7 +54336,7 @@
             <a:r>
               <a:rPr lang="en-US" sz="1100" dirty="0">
                 <a:solidFill>
-                  <a:srgbClr val="A9B4BE"/>
+                  <a:srgbClr val="D1EFFF"/>
                 </a:solidFill>
               </a:rPr>
               <a:t>  BSP</a:t>
@@ -54879,7 +54386,7 @@
             <a:r>
               <a:rPr lang="en-US" sz="1100" dirty="0">
                 <a:solidFill>
-                  <a:srgbClr val="A9B4BE"/>
+                  <a:srgbClr val="D1EFFF"/>
                 </a:solidFill>
               </a:rPr>
               <a:t>  SAPUI5 freestyle</a:t>
@@ -54929,7 +54436,7 @@
             <a:r>
               <a:rPr lang="en-US" sz="1100" dirty="0">
                 <a:solidFill>
-                  <a:srgbClr val="A9B4BE"/>
+                  <a:srgbClr val="D1EFFF"/>
                 </a:solidFill>
               </a:rPr>
               <a:t>  BSP</a:t>
@@ -54957,7 +54464,7 @@
         <a:srgbClr val="FFFFFF"/>
       </a:lt1>
       <a:dk2>
-        <a:srgbClr val="12171C"/>
+        <a:srgbClr val="00144A"/>
       </a:dk2>
       <a:lt2>
         <a:srgbClr val="F5F6F7"/>

--- a/docs/apresentacoes/05-apps-fiori.pptx
+++ b/docs/apresentacoes/05-apps-fiori.pptx
@@ -30838,7 +30838,7 @@
                   <a:srgbClr val="D1EFFF"/>
                 </a:solidFill>
               </a:rPr>
-              <a:t>Arquivos: docs/apresentacoes/01 a 05 · fontes em abap/ e ui5/ · diagramas em diagramas/</a:t>
+              <a:t>Arquivos: docs/apresentacoes/01 a 05 · fontes em abap/ e ui5/ · diagrama em docs/pedidos-de-compras.drawio</a:t>
             </a:r>
             <a:endParaRPr lang="en-US" sz="1200" dirty="0"/>
           </a:p>

--- a/docs/apresentacoes/05-apps-fiori.pptx
+++ b/docs/apresentacoes/05-apps-fiori.pptx
@@ -27457,6 +27457,17 @@
               </a:rPr>
               <a:t>ZAVBS_PC_PEDIDOS</a:t>
             </a:r>
+            <a:r>
+              <a:rPr lang="en-US" sz="1100" dirty="0">
+                <a:solidFill>
+                  <a:srgbClr val="6A9955"/>
+                </a:solidFill>
+                <a:latin typeface="Courier New" pitchFamily="34" charset="0"/>
+                <a:ea typeface="Courier New" pitchFamily="34" charset="-122"/>
+                <a:cs typeface="Courier New" pitchFamily="34" charset="-120"/>
+              </a:rPr>
+              <a:t>  # ou ZPK_PC_PEDIDOS</a:t>
+            </a:r>
             <a:endParaRPr lang="en-US" sz="1100" dirty="0"/>
           </a:p>
           <a:p>
@@ -27723,7 +27734,7 @@
                             <a:srgbClr val="1D2D3E"/>
                           </a:solidFill>
                         </a:rPr>
-                        <a:t>Pacote</a:t>
+                        <a:t>Pacote (prefixo opcional)</a:t>
                       </a:r>
                       <a:endParaRPr lang="en-US" sz="1050" dirty="0"/>
                     </a:p>

--- a/docs/apresentacoes/05-apps-fiori.pptx
+++ b/docs/apresentacoes/05-apps-fiori.pptx
@@ -2888,7 +2888,7 @@
           <a:p>
             <a:r>
               <a:rPr lang="en-US" dirty="0"/>
-              <a:t>Cada pasta em ui5/ tem package.json, node_modules e configuração próprios. O ui5.yaml sobe o servidor local com proxy para o sistema ABAP (no BTP, login por reentranceTicket); o ui5-mock.yaml usa o metadata salvo em localService para rodar sem backend.</a:t>
+              <a:t>Cada app em ui5/apps-list-reports/ e ui5/apps-analiticos/ tem package.json, node_modules e configuração próprios. O ui5.yaml sobe o servidor local com proxy para o sistema ABAP (no BTP, login por reentranceTicket); o ui5-mock.yaml usa o metadata salvo em localService para rodar sem backend.</a:t>
             </a:r>
             <a:endParaRPr lang="en-US" dirty="0"/>
           </a:p>
@@ -4910,7 +4910,28 @@
                 <a:ea typeface="Courier New" pitchFamily="34" charset="-122"/>
                 <a:cs typeface="Courier New" pitchFamily="34" charset="-120"/>
               </a:rPr>
-              <a:t>ui5/gestao-clientes</a:t>
+              <a:t>ui5/apps-list-reports/</a:t>
+            </a:r>
+            <a:br>
+              <a:rPr lang="en-US" sz="1000" dirty="0">
+                <a:solidFill>
+                  <a:srgbClr val="0064D9"/>
+                </a:solidFill>
+                <a:latin typeface="Courier New" pitchFamily="34" charset="0"/>
+                <a:ea typeface="Courier New" pitchFamily="34" charset="-122"/>
+                <a:cs typeface="Courier New" pitchFamily="34" charset="-120"/>
+              </a:rPr>
+            </a:br>
+            <a:r>
+              <a:rPr lang="en-US" sz="1000" dirty="0">
+                <a:solidFill>
+                  <a:srgbClr val="0064D9"/>
+                </a:solidFill>
+                <a:latin typeface="Courier New" pitchFamily="34" charset="0"/>
+                <a:ea typeface="Courier New" pitchFamily="34" charset="-122"/>
+                <a:cs typeface="Courier New" pitchFamily="34" charset="-120"/>
+              </a:rPr>
+              <a:t>gestao-clientes</a:t>
             </a:r>
             <a:endParaRPr lang="en-US" sz="1000" dirty="0"/>
           </a:p>
@@ -8103,7 +8124,7 @@
                 <a:ea typeface="Courier New" pitchFamily="34" charset="-122"/>
                 <a:cs typeface="Courier New" pitchFamily="34" charset="-120"/>
               </a:rPr>
-              <a:t>ui5/gestao-estoque</a:t>
+              <a:t>ui5/apps-list-reports/gestao-estoque</a:t>
             </a:r>
             <a:pPr indent="0" marL="0">
               <a:buNone/>
@@ -8203,7 +8224,7 @@
                 <a:ea typeface="Courier New" pitchFamily="34" charset="-122"/>
                 <a:cs typeface="Courier New" pitchFamily="34" charset="-120"/>
               </a:rPr>
-              <a:t>ui5/analise-estoque</a:t>
+              <a:t>ui5/apps-analiticos/analise-estoque</a:t>
             </a:r>
             <a:pPr indent="0" marL="0">
               <a:buNone/>
@@ -8522,7 +8543,28 @@
                 <a:ea typeface="Courier New" pitchFamily="34" charset="-122"/>
                 <a:cs typeface="Courier New" pitchFamily="34" charset="-120"/>
               </a:rPr>
-              <a:t>ui5/gestao-estoque</a:t>
+              <a:t>ui5/apps-list-reports/</a:t>
+            </a:r>
+            <a:br>
+              <a:rPr lang="en-US" sz="1000" dirty="0">
+                <a:solidFill>
+                  <a:srgbClr val="0064D9"/>
+                </a:solidFill>
+                <a:latin typeface="Courier New" pitchFamily="34" charset="0"/>
+                <a:ea typeface="Courier New" pitchFamily="34" charset="-122"/>
+                <a:cs typeface="Courier New" pitchFamily="34" charset="-120"/>
+              </a:rPr>
+            </a:br>
+            <a:r>
+              <a:rPr lang="en-US" sz="1000" dirty="0">
+                <a:solidFill>
+                  <a:srgbClr val="0064D9"/>
+                </a:solidFill>
+                <a:latin typeface="Courier New" pitchFamily="34" charset="0"/>
+                <a:ea typeface="Courier New" pitchFamily="34" charset="-122"/>
+                <a:cs typeface="Courier New" pitchFamily="34" charset="-120"/>
+              </a:rPr>
+              <a:t>gestao-estoque</a:t>
             </a:r>
             <a:endParaRPr lang="en-US" sz="1000" dirty="0"/>
           </a:p>
@@ -11518,7 +11560,7 @@
                 <a:ea typeface="Courier New" pitchFamily="34" charset="-122"/>
                 <a:cs typeface="Courier New" pitchFamily="34" charset="-120"/>
               </a:rPr>
-              <a:t>ui5/pedidos-compras</a:t>
+              <a:t>ui5/apps-list-reports/pedidos-compras</a:t>
             </a:r>
             <a:pPr indent="0" marL="0">
               <a:buNone/>
@@ -11668,7 +11710,7 @@
                 <a:ea typeface="Courier New" pitchFamily="34" charset="-122"/>
                 <a:cs typeface="Courier New" pitchFamily="34" charset="-120"/>
               </a:rPr>
-              <a:t>ui5/analise-pedidos</a:t>
+              <a:t>ui5/apps-analiticos/analise-pedidos</a:t>
             </a:r>
             <a:pPr indent="0" marL="0">
               <a:buNone/>
@@ -21962,7 +22004,28 @@
                 <a:ea typeface="Courier New" pitchFamily="34" charset="-122"/>
                 <a:cs typeface="Courier New" pitchFamily="34" charset="-120"/>
               </a:rPr>
-              <a:t>ui5/gestao-reembolsos</a:t>
+              <a:t>ui5/apps-list-reports/</a:t>
+            </a:r>
+            <a:br>
+              <a:rPr lang="en-US" sz="1100" b="1" dirty="0">
+                <a:solidFill>
+                  <a:srgbClr val="FFFFFF"/>
+                </a:solidFill>
+                <a:latin typeface="Courier New" pitchFamily="34" charset="0"/>
+                <a:ea typeface="Courier New" pitchFamily="34" charset="-122"/>
+                <a:cs typeface="Courier New" pitchFamily="34" charset="-120"/>
+              </a:rPr>
+            </a:br>
+            <a:r>
+              <a:rPr lang="en-US" sz="1100" b="1" dirty="0">
+                <a:solidFill>
+                  <a:srgbClr val="FFFFFF"/>
+                </a:solidFill>
+                <a:latin typeface="Courier New" pitchFamily="34" charset="0"/>
+                <a:ea typeface="Courier New" pitchFamily="34" charset="-122"/>
+                <a:cs typeface="Courier New" pitchFamily="34" charset="-120"/>
+              </a:rPr>
+              <a:t>gestao-reembolsos</a:t>
             </a:r>
             <a:pPr indent="0" marL="0">
               <a:buNone/>
@@ -22062,7 +22125,28 @@
                 <a:ea typeface="Courier New" pitchFamily="34" charset="-122"/>
                 <a:cs typeface="Courier New" pitchFamily="34" charset="-120"/>
               </a:rPr>
-              <a:t>ui5/analise-reembolsos</a:t>
+              <a:t>ui5/apps-analiticos/</a:t>
+            </a:r>
+            <a:br>
+              <a:rPr lang="en-US" sz="1100" b="1" dirty="0">
+                <a:solidFill>
+                  <a:srgbClr val="FFFFFF"/>
+                </a:solidFill>
+                <a:latin typeface="Courier New" pitchFamily="34" charset="0"/>
+                <a:ea typeface="Courier New" pitchFamily="34" charset="-122"/>
+                <a:cs typeface="Courier New" pitchFamily="34" charset="-120"/>
+              </a:rPr>
+            </a:br>
+            <a:r>
+              <a:rPr lang="en-US" sz="1100" b="1" dirty="0">
+                <a:solidFill>
+                  <a:srgbClr val="FFFFFF"/>
+                </a:solidFill>
+                <a:latin typeface="Courier New" pitchFamily="34" charset="0"/>
+                <a:ea typeface="Courier New" pitchFamily="34" charset="-122"/>
+                <a:cs typeface="Courier New" pitchFamily="34" charset="-120"/>
+              </a:rPr>
+              <a:t>analise-reembolsos</a:t>
             </a:r>
             <a:pPr indent="0" marL="0">
               <a:buNone/>
@@ -22381,7 +22465,28 @@
                 <a:ea typeface="Courier New" pitchFamily="34" charset="-122"/>
                 <a:cs typeface="Courier New" pitchFamily="34" charset="-120"/>
               </a:rPr>
-              <a:t>ui5/gestao-reembolsos</a:t>
+              <a:t>ui5/apps-list-reports/</a:t>
+            </a:r>
+            <a:br>
+              <a:rPr lang="en-US" sz="1000" dirty="0">
+                <a:solidFill>
+                  <a:srgbClr val="0064D9"/>
+                </a:solidFill>
+                <a:latin typeface="Courier New" pitchFamily="34" charset="0"/>
+                <a:ea typeface="Courier New" pitchFamily="34" charset="-122"/>
+                <a:cs typeface="Courier New" pitchFamily="34" charset="-120"/>
+              </a:rPr>
+            </a:br>
+            <a:r>
+              <a:rPr lang="en-US" sz="1000" dirty="0">
+                <a:solidFill>
+                  <a:srgbClr val="0064D9"/>
+                </a:solidFill>
+                <a:latin typeface="Courier New" pitchFamily="34" charset="0"/>
+                <a:ea typeface="Courier New" pitchFamily="34" charset="-122"/>
+                <a:cs typeface="Courier New" pitchFamily="34" charset="-120"/>
+              </a:rPr>
+              <a:t>gestao-reembolsos</a:t>
             </a:r>
             <a:endParaRPr lang="en-US" sz="1000" dirty="0"/>
           </a:p>
@@ -26270,6 +26375,28 @@
                   <a:srgbClr val="A9A9A9"/>
                 </a:solidFill>
               </a:rPr>
+              <a:t>apps-list-reports</a:t>
+            </a:r>
+            <a:pPr indent="0" marL="0">
+              <a:buNone/>
+            </a:pPr>
+            <a:r>
+              <a:rPr lang="en-US" sz="900" dirty="0">
+                <a:solidFill>
+                  <a:srgbClr val="6E7681"/>
+                </a:solidFill>
+              </a:rPr>
+              <a:t>  ›  </a:t>
+            </a:r>
+            <a:pPr indent="0" marL="0">
+              <a:buNone/>
+            </a:pPr>
+            <a:r>
+              <a:rPr lang="en-US" sz="900" dirty="0">
+                <a:solidFill>
+                  <a:srgbClr val="A9A9A9"/>
+                </a:solidFill>
+              </a:rPr>
               <a:t>pedidos-compras</a:t>
             </a:r>
             <a:pPr indent="0" marL="0">
@@ -32473,6 +32600,28 @@
                   <a:srgbClr val="A9A9A9"/>
                 </a:solidFill>
               </a:rPr>
+              <a:t>apps-list-reports</a:t>
+            </a:r>
+            <a:pPr indent="0" marL="0">
+              <a:buNone/>
+            </a:pPr>
+            <a:r>
+              <a:rPr lang="en-US" sz="900" dirty="0">
+                <a:solidFill>
+                  <a:srgbClr val="6E7681"/>
+                </a:solidFill>
+              </a:rPr>
+              <a:t>  ›  </a:t>
+            </a:r>
+            <a:pPr indent="0" marL="0">
+              <a:buNone/>
+            </a:pPr>
+            <a:r>
+              <a:rPr lang="en-US" sz="900" dirty="0">
+                <a:solidFill>
+                  <a:srgbClr val="A9A9A9"/>
+                </a:solidFill>
+              </a:rPr>
               <a:t>pedidos-compras</a:t>
             </a:r>
             <a:pPr indent="0" marL="0">
@@ -35423,7 +35572,7 @@
                 <a:ea typeface="Courier New" pitchFamily="34" charset="-122"/>
                 <a:cs typeface="Courier New" pitchFamily="34" charset="-120"/>
               </a:rPr>
-              <a:t>ui5/&lt;app&gt;/</a:t>
+              <a:t>ui5/apps-*/&lt;app&gt;/</a:t>
             </a:r>
             <a:pPr indent="0" marL="0">
               <a:buNone/>
@@ -39607,7 +39756,7 @@
                   <a:srgbClr val="556B82"/>
                 </a:solidFill>
               </a:rPr>
-              <a:t>Nome, namespace, pasta ui5/pedidos-compras</a:t>
+              <a:t>Nome, namespace, pasta ui5/apps-list-reports/pedidos-compras</a:t>
             </a:r>
             <a:endParaRPr lang="en-US" sz="1150" dirty="0"/>
           </a:p>
@@ -39914,6 +40063,28 @@
                 </a:solidFill>
               </a:rPr>
               <a:t>ui5</a:t>
+            </a:r>
+            <a:pPr indent="0" marL="0">
+              <a:buNone/>
+            </a:pPr>
+            <a:r>
+              <a:rPr lang="en-US" sz="900" dirty="0">
+                <a:solidFill>
+                  <a:srgbClr val="6E7681"/>
+                </a:solidFill>
+              </a:rPr>
+              <a:t>  ›  </a:t>
+            </a:r>
+            <a:pPr indent="0" marL="0">
+              <a:buNone/>
+            </a:pPr>
+            <a:r>
+              <a:rPr lang="en-US" sz="900" dirty="0">
+                <a:solidFill>
+                  <a:srgbClr val="A9A9A9"/>
+                </a:solidFill>
+              </a:rPr>
+              <a:t>apps-list-reports</a:t>
             </a:r>
             <a:pPr indent="0" marL="0">
               <a:buNone/>
@@ -42331,6 +42502,28 @@
                   <a:srgbClr val="A9A9A9"/>
                 </a:solidFill>
               </a:rPr>
+              <a:t>apps-list-reports</a:t>
+            </a:r>
+            <a:pPr indent="0" marL="0">
+              <a:buNone/>
+            </a:pPr>
+            <a:r>
+              <a:rPr lang="en-US" sz="900" dirty="0">
+                <a:solidFill>
+                  <a:srgbClr val="6E7681"/>
+                </a:solidFill>
+              </a:rPr>
+              <a:t>  ›  </a:t>
+            </a:r>
+            <a:pPr indent="0" marL="0">
+              <a:buNone/>
+            </a:pPr>
+            <a:r>
+              <a:rPr lang="en-US" sz="900" dirty="0">
+                <a:solidFill>
+                  <a:srgbClr val="A9A9A9"/>
+                </a:solidFill>
+              </a:rPr>
               <a:t>gestao-clientes</a:t>
             </a:r>
             <a:endParaRPr lang="en-US" sz="900" dirty="0"/>
@@ -45210,6 +45403,28 @@
                 </a:solidFill>
               </a:rPr>
               <a:t>ui5</a:t>
+            </a:r>
+            <a:pPr indent="0" marL="0">
+              <a:buNone/>
+            </a:pPr>
+            <a:r>
+              <a:rPr lang="en-US" sz="900" dirty="0">
+                <a:solidFill>
+                  <a:srgbClr val="6E7681"/>
+                </a:solidFill>
+              </a:rPr>
+              <a:t>  ›  </a:t>
+            </a:r>
+            <a:pPr indent="0" marL="0">
+              <a:buNone/>
+            </a:pPr>
+            <a:r>
+              <a:rPr lang="en-US" sz="900" dirty="0">
+                <a:solidFill>
+                  <a:srgbClr val="A9A9A9"/>
+                </a:solidFill>
+              </a:rPr>
+              <a:t>apps-list-reports</a:t>
             </a:r>
             <a:pPr indent="0" marL="0">
               <a:buNone/>
@@ -47876,6 +48091,28 @@
                   <a:srgbClr val="A9A9A9"/>
                 </a:solidFill>
               </a:rPr>
+              <a:t>apps-analiticos</a:t>
+            </a:r>
+            <a:pPr indent="0" marL="0">
+              <a:buNone/>
+            </a:pPr>
+            <a:r>
+              <a:rPr lang="en-US" sz="900" dirty="0">
+                <a:solidFill>
+                  <a:srgbClr val="6E7681"/>
+                </a:solidFill>
+              </a:rPr>
+              <a:t>  ›  </a:t>
+            </a:r>
+            <a:pPr indent="0" marL="0">
+              <a:buNone/>
+            </a:pPr>
+            <a:r>
+              <a:rPr lang="en-US" sz="900" dirty="0">
+                <a:solidFill>
+                  <a:srgbClr val="A9A9A9"/>
+                </a:solidFill>
+              </a:rPr>
               <a:t>analise-clientes</a:t>
             </a:r>
             <a:pPr indent="0" marL="0">
@@ -54289,7 +54526,7 @@
                 <a:ea typeface="Courier New" pitchFamily="34" charset="-122"/>
                 <a:cs typeface="Courier New" pitchFamily="34" charset="-120"/>
               </a:rPr>
-              <a:t>ui5/gestao-clientes</a:t>
+              <a:t>ui5/apps-list-reports/gestao-clientes</a:t>
             </a:r>
             <a:pPr indent="0" marL="0">
               <a:buNone/>
@@ -54389,7 +54626,7 @@
                 <a:ea typeface="Courier New" pitchFamily="34" charset="-122"/>
                 <a:cs typeface="Courier New" pitchFamily="34" charset="-120"/>
               </a:rPr>
-              <a:t>ui5/analise-clientes</a:t>
+              <a:t>ui5/apps-analiticos/analise-clientes</a:t>
             </a:r>
             <a:pPr indent="0" marL="0">
               <a:buNone/>

--- a/docs/apresentacoes/05-apps-fiori.pptx
+++ b/docs/apresentacoes/05-apps-fiori.pptx
@@ -27,7 +27,10 @@
     <p:sldId id="275" r:id="rId21"/>
     <p:sldId id="276" r:id="rId22"/>
     <p:sldId id="277" r:id="rId23"/>
+    <p:sldId id="287" r:id="rId38"/>
     <p:sldId id="278" r:id="rId24"/>
+    <p:sldId id="288" r:id="rId39"/>
+    <p:sldId id="289" r:id="rId40"/>
     <p:sldId id="279" r:id="rId25"/>
     <p:sldId id="280" r:id="rId26"/>
     <p:sldId id="283" r:id="rId34"/>
@@ -2745,6 +2748,270 @@
     <p:extLst>
       <p:ext uri="{BB962C8B-B14F-4D97-AF65-F5344CB8AC3E}">
         <p14:creationId xmlns:p14="http://schemas.microsoft.com/office/powerpoint/2010/main" val="1024086991"/>
+      </p:ext>
+    </p:extLst>
+  </p:cSld>
+  <p:clrMapOvr>
+    <a:masterClrMapping/>
+  </p:clrMapOvr>
+</p:notes>
+</file>
+
+<file path=ppt/notesSlides/notesSlide32.xml><?xml version="1.0" encoding="utf-8"?>
+<p:notes xmlns:a="http://schemas.openxmlformats.org/drawingml/2006/main" xmlns:r="http://schemas.openxmlformats.org/officeDocument/2006/relationships" xmlns:p="http://schemas.openxmlformats.org/presentationml/2006/main">
+  <p:cSld>
+    <p:spTree>
+      <p:nvGrpSpPr>
+        <p:cNvPr id="1" name=""/>
+        <p:cNvGrpSpPr/>
+        <p:nvPr/>
+      </p:nvGrpSpPr>
+      <p:grpSpPr>
+        <a:xfrm>
+          <a:off x="0" y="0"/>
+          <a:ext cx="0" cy="0"/>
+          <a:chOff x="0" y="0"/>
+          <a:chExt cx="0" cy="0"/>
+        </a:xfrm>
+      </p:grpSpPr>
+      <p:sp>
+        <p:nvSpPr>
+          <p:cNvPr id="2" name="Slide Image Placeholder 1"/>
+          <p:cNvSpPr>
+            <a:spLocks noGrp="1" noRot="1" noChangeAspect="1"/>
+          </p:cNvSpPr>
+          <p:nvPr>
+            <p:ph type="sldImg"/>
+          </p:nvPr>
+        </p:nvSpPr>
+        <p:spPr/>
+      </p:sp>
+      <p:sp>
+        <p:nvSpPr>
+          <p:cNvPr id="3" name="Notes Placeholder 2"/>
+          <p:cNvSpPr>
+            <a:spLocks noGrp="1"/>
+          </p:cNvSpPr>
+          <p:nvPr>
+            <p:ph type="body" idx="1"/>
+          </p:nvPr>
+        </p:nvSpPr>
+        <p:spPr/>
+        <p:txBody>
+          <a:bodyPr/>
+          <a:lstStyle/>
+          <a:p>
+            <a:r>
+              <a:rPr lang="en-US" dirty="0"/>
+              <a:t>Antes de publicar, cada app passa por lint, build e testes na máquina de quem vai fazer o deploy. Esta seção mostra os comandos, o que cada um evita e de quem é a responsabilidade.</a:t>
+            </a:r>
+            <a:endParaRPr lang="en-US" dirty="0"/>
+          </a:p>
+        </p:txBody>
+      </p:sp>
+      <p:sp>
+        <p:nvSpPr>
+          <p:cNvPr id="4" name="Slide Number Placeholder 3"/>
+          <p:cNvSpPr>
+            <a:spLocks noGrp="1"/>
+          </p:cNvSpPr>
+          <p:nvPr>
+            <p:ph type="sldNum" sz="quarter" idx="10"/>
+          </p:nvPr>
+        </p:nvSpPr>
+        <p:spPr/>
+        <p:txBody>
+          <a:bodyPr/>
+          <a:lstStyle/>
+          <a:p>
+            <a:fld id="{F7021451-1387-4CA6-816F-3879F97B5CBC}" type="slidenum">
+              <a:rPr lang="en-US"/>
+              <a:t>23</a:t>
+            </a:fld>
+            <a:endParaRPr lang="en-US"/>
+          </a:p>
+        </p:txBody>
+      </p:sp>
+    </p:spTree>
+    <p:extLst>
+      <p:ext uri="{BB962C8B-B14F-4D97-AF65-F5344CB8AC3E}">
+        <p14:creationId xmlns:p14="http://schemas.microsoft.com/office/powerpoint/2010/main" val="1024087023"/>
+      </p:ext>
+    </p:extLst>
+  </p:cSld>
+  <p:clrMapOvr>
+    <a:masterClrMapping/>
+  </p:clrMapOvr>
+</p:notes>
+</file>
+
+<file path=ppt/notesSlides/notesSlide33.xml><?xml version="1.0" encoding="utf-8"?>
+<p:notes xmlns:a="http://schemas.openxmlformats.org/drawingml/2006/main" xmlns:r="http://schemas.openxmlformats.org/officeDocument/2006/relationships" xmlns:p="http://schemas.openxmlformats.org/presentationml/2006/main">
+  <p:cSld>
+    <p:spTree>
+      <p:nvGrpSpPr>
+        <p:cNvPr id="1" name=""/>
+        <p:cNvGrpSpPr/>
+        <p:nvPr/>
+      </p:nvGrpSpPr>
+      <p:grpSpPr>
+        <a:xfrm>
+          <a:off x="0" y="0"/>
+          <a:ext cx="0" cy="0"/>
+          <a:chOff x="0" y="0"/>
+          <a:chExt cx="0" cy="0"/>
+        </a:xfrm>
+      </p:grpSpPr>
+      <p:sp>
+        <p:nvSpPr>
+          <p:cNvPr id="2" name="Slide Image Placeholder 1"/>
+          <p:cNvSpPr>
+            <a:spLocks noGrp="1" noRot="1" noChangeAspect="1"/>
+          </p:cNvSpPr>
+          <p:nvPr>
+            <p:ph type="sldImg"/>
+          </p:nvPr>
+        </p:nvSpPr>
+        <p:spPr/>
+      </p:sp>
+      <p:sp>
+        <p:nvSpPr>
+          <p:cNvPr id="3" name="Notes Placeholder 2"/>
+          <p:cNvSpPr>
+            <a:spLocks noGrp="1"/>
+          </p:cNvSpPr>
+          <p:nvPr>
+            <p:ph type="body" idx="1"/>
+          </p:nvPr>
+        </p:nvSpPr>
+        <p:spPr/>
+        <p:txBody>
+          <a:bodyPr/>
+          <a:lstStyle/>
+          <a:p>
+            <a:r>
+              <a:rPr lang="en-US" dirty="0"/>
+              <a:t>Cada comando pega uma classe de erro mais cedo e mais barato do que no sistema. O npm run deploy já roda o build, mas um erro de build no meio do deploy se mistura com erros de conexão, pacote e transporte; rodando antes, cada problema aparece sozinho.</a:t>
+            </a:r>
+            <a:endParaRPr lang="en-US" dirty="0"/>
+          </a:p>
+        </p:txBody>
+      </p:sp>
+      <p:sp>
+        <p:nvSpPr>
+          <p:cNvPr id="4" name="Slide Number Placeholder 3"/>
+          <p:cNvSpPr>
+            <a:spLocks noGrp="1"/>
+          </p:cNvSpPr>
+          <p:nvPr>
+            <p:ph type="sldNum" sz="quarter" idx="10"/>
+          </p:nvPr>
+        </p:nvSpPr>
+        <p:spPr/>
+        <p:txBody>
+          <a:bodyPr/>
+          <a:lstStyle/>
+          <a:p>
+            <a:fld id="{F7021451-1387-4CA6-816F-3879F97B5CBC}" type="slidenum">
+              <a:rPr lang="en-US"/>
+              <a:t>23</a:t>
+            </a:fld>
+            <a:endParaRPr lang="en-US"/>
+          </a:p>
+        </p:txBody>
+      </p:sp>
+    </p:spTree>
+    <p:extLst>
+      <p:ext uri="{BB962C8B-B14F-4D97-AF65-F5344CB8AC3E}">
+        <p14:creationId xmlns:p14="http://schemas.microsoft.com/office/powerpoint/2010/main" val="1024087024"/>
+      </p:ext>
+    </p:extLst>
+  </p:cSld>
+  <p:clrMapOvr>
+    <a:masterClrMapping/>
+  </p:clrMapOvr>
+</p:notes>
+</file>
+
+<file path=ppt/notesSlides/notesSlide34.xml><?xml version="1.0" encoding="utf-8"?>
+<p:notes xmlns:a="http://schemas.openxmlformats.org/drawingml/2006/main" xmlns:r="http://schemas.openxmlformats.org/officeDocument/2006/relationships" xmlns:p="http://schemas.openxmlformats.org/presentationml/2006/main">
+  <p:cSld>
+    <p:spTree>
+      <p:nvGrpSpPr>
+        <p:cNvPr id="1" name=""/>
+        <p:cNvGrpSpPr/>
+        <p:nvPr/>
+      </p:nvGrpSpPr>
+      <p:grpSpPr>
+        <a:xfrm>
+          <a:off x="0" y="0"/>
+          <a:ext cx="0" cy="0"/>
+          <a:chOff x="0" y="0"/>
+          <a:chExt cx="0" cy="0"/>
+        </a:xfrm>
+      </p:grpSpPr>
+      <p:sp>
+        <p:nvSpPr>
+          <p:cNvPr id="2" name="Slide Image Placeholder 1"/>
+          <p:cNvSpPr>
+            <a:spLocks noGrp="1" noRot="1" noChangeAspect="1"/>
+          </p:cNvSpPr>
+          <p:nvPr>
+            <p:ph type="sldImg"/>
+          </p:nvPr>
+        </p:nvSpPr>
+        <p:spPr/>
+      </p:sp>
+      <p:sp>
+        <p:nvSpPr>
+          <p:cNvPr id="3" name="Notes Placeholder 2"/>
+          <p:cNvSpPr>
+            <a:spLocks noGrp="1"/>
+          </p:cNvSpPr>
+          <p:nvPr>
+            <p:ph type="body" idx="1"/>
+          </p:nvPr>
+        </p:nvSpPr>
+        <p:spPr/>
+        <p:txBody>
+          <a:bodyPr/>
+          <a:lstStyle/>
+          <a:p>
+            <a:r>
+              <a:rPr lang="en-US" dirty="0"/>
+              <a:t>Não há pipeline de CI no repositório: a sequência é manual e é responsabilidade de quem publica. Qualquer falha interrompe a sequência; corrija e recomece pelo lint. No BTP trial a versão publicada vale na hora para todos; no On-Premise a ordem de transporte leva o mesmo código para QAS e PRD.</a:t>
+            </a:r>
+            <a:endParaRPr lang="en-US" dirty="0"/>
+          </a:p>
+        </p:txBody>
+      </p:sp>
+      <p:sp>
+        <p:nvSpPr>
+          <p:cNvPr id="4" name="Slide Number Placeholder 3"/>
+          <p:cNvSpPr>
+            <a:spLocks noGrp="1"/>
+          </p:cNvSpPr>
+          <p:nvPr>
+            <p:ph type="sldNum" sz="quarter" idx="10"/>
+          </p:nvPr>
+        </p:nvSpPr>
+        <p:spPr/>
+        <p:txBody>
+          <a:bodyPr/>
+          <a:lstStyle/>
+          <a:p>
+            <a:fld id="{F7021451-1387-4CA6-816F-3879F97B5CBC}" type="slidenum">
+              <a:rPr lang="en-US"/>
+              <a:t>23</a:t>
+            </a:fld>
+            <a:endParaRPr lang="en-US"/>
+          </a:p>
+        </p:txBody>
+      </p:sp>
+    </p:spTree>
+    <p:extLst>
+      <p:ext uri="{BB962C8B-B14F-4D97-AF65-F5344CB8AC3E}">
+        <p14:creationId xmlns:p14="http://schemas.microsoft.com/office/powerpoint/2010/main" val="1024087025"/>
       </p:ext>
     </p:extLst>
   </p:cSld>
@@ -25073,7 +25340,7 @@
                   <a:schemeClr val="accent1"/>
                 </a:solidFill>
               </a:rPr>
-              <a:t>QUALIDADE</a:t>
+              <a:t>ANTES DO DEPLOY</a:t>
             </a:r>
             <a:endParaRPr lang="en-US" sz="1100" dirty="0"/>
           </a:p>
@@ -25111,7 +25378,7 @@
                   <a:schemeClr val="tx1"/>
                 </a:solidFill>
               </a:rPr>
-              <a:t>Lint, build e testes antes de cada deploy</a:t>
+              <a:t>Rode os comandos de lint, build e testes</a:t>
             </a:r>
             <a:endParaRPr lang="en-US" sz="3000" dirty="0"/>
           </a:p>
@@ -39108,6 +39375,3816 @@
 </p:sld>
 </file>
 
+<file path=ppt/slides/slide32.xml><?xml version="1.0" encoding="utf-8"?>
+<p:sld xmlns:a="http://schemas.openxmlformats.org/drawingml/2006/main" xmlns:r="http://schemas.openxmlformats.org/officeDocument/2006/relationships" xmlns:p="http://schemas.openxmlformats.org/presentationml/2006/main">
+  <p:cSld>
+    <p:spTree>
+      <p:nvGrpSpPr>
+        <p:cNvPr id="1" name=""/>
+        <p:cNvGrpSpPr/>
+        <p:nvPr/>
+      </p:nvGrpSpPr>
+      <p:grpSpPr>
+        <a:xfrm>
+          <a:off x="0" y="0"/>
+          <a:ext cx="0" cy="0"/>
+          <a:chOff x="0" y="0"/>
+          <a:chExt cx="0" cy="0"/>
+        </a:xfrm>
+      </p:grpSpPr>
+      <p:sp>
+        <p:nvSpPr>
+          <p:cNvPr id="3" name="Texto"/>
+          <p:cNvSpPr/>
+          <p:nvPr>
+            <p:ph idx="100" type="body" hasCustomPrompt="1"/>
+          </p:nvPr>
+        </p:nvSpPr>
+        <p:spPr>
+          <a:xfrm>
+            <a:off x="731520" y="1325880"/>
+            <a:ext cx="6949440" cy="365760"/>
+          </a:xfrm>
+          <a:prstGeom prst="rect">
+            <a:avLst/>
+          </a:prstGeom>
+          <a:noFill/>
+          <a:ln/>
+        </p:spPr>
+        <p:txBody>
+          <a:bodyPr wrap="square" lIns="0" tIns="0" rIns="0" bIns="0" rtlCol="0" anchor="ctr"/>
+          <a:lstStyle/>
+          <a:p>
+            <a:pPr algn="l" indent="0" marL="0">
+              <a:buNone/>
+            </a:pPr>
+            <a:r>
+              <a:rPr lang="pt-BR" sz="1400" b="1" spc="200" kern="0" dirty="0">
+                <a:solidFill>
+                  <a:srgbClr val="89D1FF"/>
+                </a:solidFill>
+              </a:rPr>
+              <a:t>ETAPA 5 · ANTES DO DEPLOY</a:t>
+            </a:r>
+            <a:endParaRPr lang="pt-BR" sz="1400" dirty="0"/>
+          </a:p>
+        </p:txBody>
+      </p:sp>
+      <p:sp>
+        <p:nvSpPr>
+          <p:cNvPr id="4" name="Texto"/>
+          <p:cNvSpPr/>
+          <p:nvPr>
+            <p:ph idx="101" type="title" hasCustomPrompt="1"/>
+          </p:nvPr>
+        </p:nvSpPr>
+        <p:spPr>
+          <a:xfrm>
+            <a:off x="731520" y="1737360"/>
+            <a:ext cx="6949440" cy="1600200"/>
+          </a:xfrm>
+          <a:prstGeom prst="rect">
+            <a:avLst/>
+          </a:prstGeom>
+          <a:noFill/>
+          <a:ln/>
+        </p:spPr>
+        <p:txBody>
+          <a:bodyPr wrap="square" lIns="0" tIns="0" rIns="0" bIns="0" rtlCol="0" anchor="t"/>
+          <a:lstStyle/>
+          <a:p>
+            <a:pPr algn="l" indent="0" marL="0">
+              <a:buNone/>
+            </a:pPr>
+            <a:r>
+              <a:rPr lang="pt-BR" sz="4400" b="1" dirty="0">
+                <a:solidFill>
+                  <a:schemeClr val="bg1"/>
+                </a:solidFill>
+              </a:rPr>
+              <a:t>Qualidade e testes antes de publicar</a:t>
+            </a:r>
+            <a:endParaRPr lang="pt-BR" sz="4400" dirty="0"/>
+          </a:p>
+        </p:txBody>
+      </p:sp>
+      <p:sp>
+        <p:nvSpPr>
+          <p:cNvPr id="5" name="Texto"/>
+          <p:cNvSpPr/>
+          <p:nvPr>
+            <p:ph idx="102" type="body" hasCustomPrompt="1"/>
+          </p:nvPr>
+        </p:nvSpPr>
+        <p:spPr>
+          <a:xfrm>
+            <a:off x="731520" y="3383280"/>
+            <a:ext cx="6949440" cy="914400"/>
+          </a:xfrm>
+          <a:prstGeom prst="rect">
+            <a:avLst/>
+          </a:prstGeom>
+          <a:noFill/>
+          <a:ln/>
+        </p:spPr>
+        <p:txBody>
+          <a:bodyPr wrap="square" lIns="0" tIns="0" rIns="0" bIns="0" rtlCol="0" anchor="t"/>
+          <a:lstStyle/>
+          <a:p>
+            <a:pPr algn="l" indent="0" marL="0">
+              <a:buNone/>
+            </a:pPr>
+            <a:r>
+              <a:rPr lang="pt-BR" sz="1800" dirty="0">
+                <a:solidFill>
+                  <a:schemeClr val="bg2"/>
+                </a:solidFill>
+              </a:rPr>
+              <a:t>Os comandos que quem publica roda na própria máquina, em cada app alterada, antes do npm run deploy.</a:t>
+            </a:r>
+            <a:endParaRPr lang="pt-BR" sz="1800" dirty="0"/>
+          </a:p>
+        </p:txBody>
+      </p:sp>
+      <p:sp>
+        <p:nvSpPr>
+          <p:cNvPr id="6" name="Ícone inspection"/>
+          <p:cNvSpPr/>
+          <p:nvPr/>
+        </p:nvSpPr>
+        <p:spPr>
+          <a:xfrm>
+            <a:off x="731520" y="411480"/>
+            <a:ext cx="731520" cy="731520"/>
+          </a:xfrm>
+          <a:prstGeom prst="roundRect">
+            <a:avLst>
+              <a:gd name="adj" fmla="val 22000"/>
+            </a:avLst>
+          </a:prstGeom>
+          <a:solidFill>
+            <a:srgbClr val="1B3A7A"/>
+          </a:solidFill>
+          <a:ln>
+            <a:noFill/>
+          </a:ln>
+        </p:spPr>
+      </p:sp>
+      <p:pic>
+        <p:nvPicPr>
+          <p:cNvPr id="7" name="Imagem" descr="inspection"/>
+          <p:cNvPicPr>
+            <a:picLocks noChangeAspect="1"/>
+          </p:cNvPicPr>
+          <p:nvPr/>
+        </p:nvPicPr>
+        <p:blipFill>
+          <a:blip r:embed="rId1"/>
+          <a:stretch>
+            <a:fillRect/>
+          </a:stretch>
+        </p:blipFill>
+        <p:spPr>
+          <a:xfrm>
+            <a:off x="905256" y="585216"/>
+            <a:ext cx="384048" cy="384048"/>
+          </a:xfrm>
+          <a:prstGeom prst="rect">
+            <a:avLst/>
+          </a:prstGeom>
+        </p:spPr>
+      </p:pic>
+      <p:sp>
+        <p:nvSpPr>
+          <p:cNvPr id="8" name="Objetos da seção"/>
+          <p:cNvSpPr/>
+          <p:nvPr/>
+        </p:nvSpPr>
+        <p:spPr>
+          <a:xfrm>
+            <a:off x="8001000" y="1325880"/>
+            <a:ext cx="3639312" cy="2980944"/>
+          </a:xfrm>
+          <a:prstGeom prst="roundRect">
+            <a:avLst>
+              <a:gd name="adj" fmla="val 3670"/>
+            </a:avLst>
+          </a:prstGeom>
+          <a:solidFill>
+            <a:srgbClr val="1B3A7A"/>
+          </a:solidFill>
+          <a:ln>
+            <a:noFill/>
+          </a:ln>
+        </p:spPr>
+      </p:sp>
+      <p:sp>
+        <p:nvSpPr>
+          <p:cNvPr id="9" name="Texto"/>
+          <p:cNvSpPr txBox="1"/>
+          <p:nvPr/>
+        </p:nvSpPr>
+        <p:spPr>
+          <a:xfrm>
+            <a:off x="8275320" y="1481328"/>
+            <a:ext cx="3090672" cy="274320"/>
+          </a:xfrm>
+          <a:prstGeom prst="roundRect">
+            <a:avLst/>
+          </a:prstGeom>
+          <a:noFill/>
+          <a:ln>
+            <a:noFill/>
+          </a:ln>
+        </p:spPr>
+        <p:txBody>
+          <a:bodyPr wrap="square" lIns="0" tIns="0" rIns="0" bIns="0" rtlCol="0" anchor="ctr"/>
+          <a:lstStyle/>
+          <a:p>
+            <a:pPr algn="l" indent="0" marL="0">
+              <a:buNone/>
+            </a:pPr>
+            <a:r>
+              <a:rPr lang="pt-BR" sz="1100" b="1" spc="150" kern="0" dirty="0">
+                <a:solidFill>
+                  <a:srgbClr val="89D1FF"/>
+                </a:solidFill>
+              </a:rPr>
+              <a:t>OBJETOS NESTA SEÇÃO</a:t>
+            </a:r>
+            <a:endParaRPr lang="pt-BR" sz="1100" dirty="0"/>
+          </a:p>
+        </p:txBody>
+      </p:sp>
+      <p:sp>
+        <p:nvSpPr>
+          <p:cNvPr id="10" name="Texto"/>
+          <p:cNvSpPr txBox="1"/>
+          <p:nvPr/>
+        </p:nvSpPr>
+        <p:spPr>
+          <a:xfrm>
+            <a:off x="8275320" y="1874520"/>
+            <a:ext cx="3246120" cy="384048"/>
+          </a:xfrm>
+          <a:prstGeom prst="roundRect">
+            <a:avLst/>
+          </a:prstGeom>
+          <a:noFill/>
+          <a:ln>
+            <a:noFill/>
+          </a:ln>
+        </p:spPr>
+        <p:txBody>
+          <a:bodyPr wrap="square" lIns="0" tIns="0" rIns="0" bIns="0" rtlCol="0" anchor="ctr"/>
+          <a:lstStyle/>
+          <a:p>
+            <a:pPr algn="l" indent="0" marL="0">
+              <a:buNone/>
+            </a:pPr>
+            <a:r>
+              <a:rPr lang="pt-BR" sz="1100" b="1" dirty="0">
+                <a:solidFill>
+                  <a:srgbClr val="FFFFFF"/>
+                </a:solidFill>
+                <a:latin typeface="Courier New" pitchFamily="34" charset="0"/>
+                <a:ea typeface="Courier New" pitchFamily="34" charset="-122"/>
+                <a:cs typeface="Courier New" pitchFamily="34" charset="-120"/>
+              </a:rPr>
+              <a:t>npm run lint</a:t>
+            </a:r>
+            <a:r>
+              <a:rPr lang="pt-BR" sz="1100" dirty="0">
+                <a:solidFill>
+                  <a:srgbClr val="D1EFFF"/>
+                </a:solidFill>
+              </a:rPr>
+              <a:t xml:space="preserve">  ESLint do Fiori tools</a:t>
+            </a:r>
+            <a:endParaRPr lang="pt-BR" sz="1100" dirty="0"/>
+          </a:p>
+        </p:txBody>
+      </p:sp>
+      <p:sp>
+        <p:nvSpPr>
+          <p:cNvPr id="11" name="Texto"/>
+          <p:cNvSpPr txBox="1"/>
+          <p:nvPr/>
+        </p:nvSpPr>
+        <p:spPr>
+          <a:xfrm>
+            <a:off x="8275320" y="2258568"/>
+            <a:ext cx="3246120" cy="384048"/>
+          </a:xfrm>
+          <a:prstGeom prst="roundRect">
+            <a:avLst/>
+          </a:prstGeom>
+          <a:noFill/>
+          <a:ln>
+            <a:noFill/>
+          </a:ln>
+        </p:spPr>
+        <p:txBody>
+          <a:bodyPr wrap="square" lIns="0" tIns="0" rIns="0" bIns="0" rtlCol="0" anchor="ctr"/>
+          <a:lstStyle/>
+          <a:p>
+            <a:pPr algn="l" indent="0" marL="0">
+              <a:buNone/>
+            </a:pPr>
+            <a:r>
+              <a:rPr lang="pt-BR" sz="1100" b="1" dirty="0">
+                <a:solidFill>
+                  <a:srgbClr val="FFFFFF"/>
+                </a:solidFill>
+                <a:latin typeface="Courier New" pitchFamily="34" charset="0"/>
+                <a:ea typeface="Courier New" pitchFamily="34" charset="-122"/>
+                <a:cs typeface="Courier New" pitchFamily="34" charset="-120"/>
+              </a:rPr>
+              <a:t>npm run build</a:t>
+            </a:r>
+            <a:r>
+              <a:rPr lang="pt-BR" sz="1100" dirty="0">
+                <a:solidFill>
+                  <a:srgbClr val="D1EFFF"/>
+                </a:solidFill>
+              </a:rPr>
+              <a:t xml:space="preserve">  dist/ do ui5 build</a:t>
+            </a:r>
+            <a:endParaRPr lang="pt-BR" sz="1100" dirty="0"/>
+          </a:p>
+        </p:txBody>
+      </p:sp>
+      <p:sp>
+        <p:nvSpPr>
+          <p:cNvPr id="12" name="Texto"/>
+          <p:cNvSpPr txBox="1"/>
+          <p:nvPr/>
+        </p:nvSpPr>
+        <p:spPr>
+          <a:xfrm>
+            <a:off x="8275320" y="2642616"/>
+            <a:ext cx="3246120" cy="384048"/>
+          </a:xfrm>
+          <a:prstGeom prst="roundRect">
+            <a:avLst/>
+          </a:prstGeom>
+          <a:noFill/>
+          <a:ln>
+            <a:noFill/>
+          </a:ln>
+        </p:spPr>
+        <p:txBody>
+          <a:bodyPr wrap="square" lIns="0" tIns="0" rIns="0" bIns="0" rtlCol="0" anchor="ctr"/>
+          <a:lstStyle/>
+          <a:p>
+            <a:pPr algn="l" indent="0" marL="0">
+              <a:buNone/>
+            </a:pPr>
+            <a:r>
+              <a:rPr lang="pt-BR" sz="1100" b="1" dirty="0">
+                <a:solidFill>
+                  <a:srgbClr val="FFFFFF"/>
+                </a:solidFill>
+                <a:latin typeface="Courier New" pitchFamily="34" charset="0"/>
+                <a:ea typeface="Courier New" pitchFamily="34" charset="-122"/>
+                <a:cs typeface="Courier New" pitchFamily="34" charset="-120"/>
+              </a:rPr>
+              <a:t>npm run int-test</a:t>
+            </a:r>
+            <a:r>
+              <a:rPr lang="pt-BR" sz="1100" dirty="0">
+                <a:solidFill>
+                  <a:srgbClr val="D1EFFF"/>
+                </a:solidFill>
+              </a:rPr>
+              <a:t xml:space="preserve">  OPA5, apps de gestão</a:t>
+            </a:r>
+            <a:endParaRPr lang="pt-BR" sz="1100" dirty="0"/>
+          </a:p>
+        </p:txBody>
+      </p:sp>
+      <p:sp>
+        <p:nvSpPr>
+          <p:cNvPr id="13" name="Texto"/>
+          <p:cNvSpPr txBox="1"/>
+          <p:nvPr/>
+        </p:nvSpPr>
+        <p:spPr>
+          <a:xfrm>
+            <a:off x="8275320" y="3026664"/>
+            <a:ext cx="3246120" cy="384048"/>
+          </a:xfrm>
+          <a:prstGeom prst="roundRect">
+            <a:avLst/>
+          </a:prstGeom>
+          <a:noFill/>
+          <a:ln>
+            <a:noFill/>
+          </a:ln>
+        </p:spPr>
+        <p:txBody>
+          <a:bodyPr wrap="square" lIns="0" tIns="0" rIns="0" bIns="0" rtlCol="0" anchor="ctr"/>
+          <a:lstStyle/>
+          <a:p>
+            <a:pPr algn="l" indent="0" marL="0">
+              <a:buNone/>
+            </a:pPr>
+            <a:r>
+              <a:rPr lang="pt-BR" sz="1100" b="1" dirty="0">
+                <a:solidFill>
+                  <a:srgbClr val="FFFFFF"/>
+                </a:solidFill>
+                <a:latin typeface="Courier New" pitchFamily="34" charset="0"/>
+                <a:ea typeface="Courier New" pitchFamily="34" charset="-122"/>
+                <a:cs typeface="Courier New" pitchFamily="34" charset="-120"/>
+              </a:rPr>
+              <a:t>npm run unit-test</a:t>
+            </a:r>
+            <a:r>
+              <a:rPr lang="pt-BR" sz="1100" dirty="0">
+                <a:solidFill>
+                  <a:srgbClr val="D1EFFF"/>
+                </a:solidFill>
+              </a:rPr>
+              <a:t xml:space="preserve">  QUnit, análises</a:t>
+            </a:r>
+            <a:endParaRPr lang="pt-BR" sz="1100" dirty="0"/>
+          </a:p>
+        </p:txBody>
+      </p:sp>
+      <p:sp>
+        <p:nvSpPr>
+          <p:cNvPr id="14" name="Texto"/>
+          <p:cNvSpPr txBox="1"/>
+          <p:nvPr/>
+        </p:nvSpPr>
+        <p:spPr>
+          <a:xfrm>
+            <a:off x="8275320" y="3410712"/>
+            <a:ext cx="3246120" cy="384048"/>
+          </a:xfrm>
+          <a:prstGeom prst="roundRect">
+            <a:avLst/>
+          </a:prstGeom>
+          <a:noFill/>
+          <a:ln>
+            <a:noFill/>
+          </a:ln>
+        </p:spPr>
+        <p:txBody>
+          <a:bodyPr wrap="square" lIns="0" tIns="0" rIns="0" bIns="0" rtlCol="0" anchor="ctr"/>
+          <a:lstStyle/>
+          <a:p>
+            <a:pPr algn="l" indent="0" marL="0">
+              <a:buNone/>
+            </a:pPr>
+            <a:r>
+              <a:rPr lang="pt-BR" sz="1100" b="1" dirty="0">
+                <a:solidFill>
+                  <a:srgbClr val="FFFFFF"/>
+                </a:solidFill>
+                <a:latin typeface="Courier New" pitchFamily="34" charset="0"/>
+                <a:ea typeface="Courier New" pitchFamily="34" charset="-122"/>
+                <a:cs typeface="Courier New" pitchFamily="34" charset="-120"/>
+              </a:rPr>
+              <a:t>npx @ui5/linter</a:t>
+            </a:r>
+            <a:r>
+              <a:rPr lang="pt-BR" sz="1100" dirty="0">
+                <a:solidFill>
+                  <a:srgbClr val="D1EFFF"/>
+                </a:solidFill>
+              </a:rPr>
+              <a:t xml:space="preserve">  UI5 linter</a:t>
+            </a:r>
+            <a:endParaRPr lang="pt-BR" sz="1100" dirty="0"/>
+          </a:p>
+        </p:txBody>
+      </p:sp>
+      <p:sp>
+        <p:nvSpPr>
+          <p:cNvPr id="15" name="Texto"/>
+          <p:cNvSpPr txBox="1"/>
+          <p:nvPr/>
+        </p:nvSpPr>
+        <p:spPr>
+          <a:xfrm>
+            <a:off x="8275320" y="3794760"/>
+            <a:ext cx="3246120" cy="384048"/>
+          </a:xfrm>
+          <a:prstGeom prst="roundRect">
+            <a:avLst/>
+          </a:prstGeom>
+          <a:noFill/>
+          <a:ln>
+            <a:noFill/>
+          </a:ln>
+        </p:spPr>
+        <p:txBody>
+          <a:bodyPr wrap="square" lIns="0" tIns="0" rIns="0" bIns="0" rtlCol="0" anchor="ctr"/>
+          <a:lstStyle/>
+          <a:p>
+            <a:pPr algn="l" indent="0" marL="0">
+              <a:buNone/>
+            </a:pPr>
+            <a:r>
+              <a:rPr lang="pt-BR" sz="1100" b="1" dirty="0">
+                <a:solidFill>
+                  <a:srgbClr val="FFFFFF"/>
+                </a:solidFill>
+                <a:latin typeface="Courier New" pitchFamily="34" charset="0"/>
+                <a:ea typeface="Courier New" pitchFamily="34" charset="-122"/>
+                <a:cs typeface="Courier New" pitchFamily="34" charset="-120"/>
+              </a:rPr>
+              <a:t>npm run deploy-test</a:t>
+            </a:r>
+            <a:r>
+              <a:rPr lang="pt-BR" sz="1100" dirty="0">
+                <a:solidFill>
+                  <a:srgbClr val="D1EFFF"/>
+                </a:solidFill>
+              </a:rPr>
+              <a:t xml:space="preserve">  deploy simulado</a:t>
+            </a:r>
+            <a:endParaRPr lang="pt-BR" sz="1100" dirty="0"/>
+          </a:p>
+        </p:txBody>
+      </p:sp>
+    </p:spTree>
+  </p:cSld>
+  <p:clrMapOvr>
+    <a:masterClrMapping/>
+  </p:clrMapOvr>
+</p:sld>
+</file>
+
+<file path=ppt/slides/slide33.xml><?xml version="1.0" encoding="utf-8"?>
+<p:sld xmlns:a="http://schemas.openxmlformats.org/drawingml/2006/main" xmlns:r="http://schemas.openxmlformats.org/officeDocument/2006/relationships" xmlns:p="http://schemas.openxmlformats.org/presentationml/2006/main">
+  <p:cSld>
+    <p:spTree>
+      <p:nvGrpSpPr>
+        <p:cNvPr id="1" name=""/>
+        <p:cNvGrpSpPr/>
+        <p:nvPr/>
+      </p:nvGrpSpPr>
+      <p:grpSpPr>
+        <a:xfrm>
+          <a:off x="0" y="0"/>
+          <a:ext cx="0" cy="0"/>
+          <a:chOff x="0" y="0"/>
+          <a:chExt cx="0" cy="0"/>
+        </a:xfrm>
+      </p:grpSpPr>
+      <p:sp>
+        <p:nvSpPr>
+          <p:cNvPr id="3" name="Rótulo"/>
+          <p:cNvSpPr/>
+          <p:nvPr>
+            <p:ph idx="100" type="body" hasCustomPrompt="1"/>
+          </p:nvPr>
+        </p:nvSpPr>
+        <p:spPr>
+          <a:xfrm>
+            <a:off x="548640" y="384048"/>
+            <a:ext cx="9144000" cy="274320"/>
+          </a:xfrm>
+          <a:prstGeom prst="rect">
+            <a:avLst/>
+          </a:prstGeom>
+          <a:noFill/>
+          <a:ln/>
+        </p:spPr>
+        <p:txBody>
+          <a:bodyPr wrap="square" lIns="0" tIns="0" rIns="0" bIns="0" rtlCol="0" anchor="ctr"/>
+          <a:lstStyle/>
+          <a:p>
+            <a:pPr algn="l" indent="0" marL="0">
+              <a:buNone/>
+            </a:pPr>
+            <a:r>
+              <a:rPr lang="pt-BR" sz="1100" b="1" spc="150" kern="0" dirty="0">
+                <a:solidFill>
+                  <a:schemeClr val="accent1"/>
+                </a:solidFill>
+              </a:rPr>
+              <a:t>ANTES DO DEPLOY · IMPORTÂNCIA</a:t>
+            </a:r>
+            <a:endParaRPr lang="pt-BR" sz="1100" dirty="0"/>
+          </a:p>
+        </p:txBody>
+      </p:sp>
+      <p:sp>
+        <p:nvSpPr>
+          <p:cNvPr id="4" name="Título"/>
+          <p:cNvSpPr/>
+          <p:nvPr>
+            <p:ph idx="101" type="title" hasCustomPrompt="1"/>
+          </p:nvPr>
+        </p:nvSpPr>
+        <p:spPr>
+          <a:xfrm>
+            <a:off x="548640" y="676656"/>
+            <a:ext cx="11094415" cy="658368"/>
+          </a:xfrm>
+          <a:prstGeom prst="rect">
+            <a:avLst/>
+          </a:prstGeom>
+          <a:noFill/>
+          <a:ln/>
+        </p:spPr>
+        <p:txBody>
+          <a:bodyPr wrap="square" lIns="0" tIns="0" rIns="0" bIns="0" rtlCol="0" anchor="ctr"/>
+          <a:lstStyle/>
+          <a:p>
+            <a:pPr algn="l" indent="0" marL="0">
+              <a:buNone/>
+            </a:pPr>
+            <a:r>
+              <a:rPr lang="pt-BR" sz="3000" b="1" dirty="0">
+                <a:solidFill>
+                  <a:schemeClr val="tx1"/>
+                </a:solidFill>
+              </a:rPr>
+              <a:t>O que cada comando impede de chegar ao sistema</a:t>
+            </a:r>
+            <a:endParaRPr lang="pt-BR" sz="3000" dirty="0"/>
+          </a:p>
+        </p:txBody>
+      </p:sp>
+      <p:sp>
+        <p:nvSpPr>
+          <p:cNvPr id="5" name="Texto"/>
+          <p:cNvSpPr txBox="1"/>
+          <p:nvPr/>
+        </p:nvSpPr>
+        <p:spPr>
+          <a:xfrm>
+            <a:off x="3108960" y="1463040"/>
+            <a:ext cx="3840480" cy="256032"/>
+          </a:xfrm>
+          <a:prstGeom prst="roundRect">
+            <a:avLst/>
+          </a:prstGeom>
+          <a:noFill/>
+          <a:ln>
+            <a:noFill/>
+          </a:ln>
+        </p:spPr>
+        <p:txBody>
+          <a:bodyPr wrap="square" lIns="0" tIns="0" rIns="0" bIns="0" rtlCol="0" anchor="ctr"/>
+          <a:lstStyle/>
+          <a:p>
+            <a:pPr algn="l" indent="0" marL="0">
+              <a:buNone/>
+            </a:pPr>
+            <a:r>
+              <a:rPr lang="pt-BR" sz="1000" b="1" spc="120" kern="0" dirty="0">
+                <a:solidFill>
+                  <a:srgbClr val="556B82"/>
+                </a:solidFill>
+              </a:rPr>
+              <a:t>O QUE VERIFICA</a:t>
+            </a:r>
+            <a:endParaRPr lang="pt-BR" sz="1000" dirty="0"/>
+          </a:p>
+        </p:txBody>
+      </p:sp>
+      <p:sp>
+        <p:nvSpPr>
+          <p:cNvPr id="6" name="Texto"/>
+          <p:cNvSpPr txBox="1"/>
+          <p:nvPr/>
+        </p:nvSpPr>
+        <p:spPr>
+          <a:xfrm>
+            <a:off x="7315200" y="1463040"/>
+            <a:ext cx="4206240" cy="256032"/>
+          </a:xfrm>
+          <a:prstGeom prst="roundRect">
+            <a:avLst/>
+          </a:prstGeom>
+          <a:noFill/>
+          <a:ln>
+            <a:noFill/>
+          </a:ln>
+        </p:spPr>
+        <p:txBody>
+          <a:bodyPr wrap="square" lIns="0" tIns="0" rIns="0" bIns="0" rtlCol="0" anchor="ctr"/>
+          <a:lstStyle/>
+          <a:p>
+            <a:pPr algn="l" indent="0" marL="0">
+              <a:buNone/>
+            </a:pPr>
+            <a:r>
+              <a:rPr lang="pt-BR" sz="1000" b="1" spc="120" kern="0" dirty="0">
+                <a:solidFill>
+                  <a:srgbClr val="AA0808"/>
+                </a:solidFill>
+              </a:rPr>
+              <a:t>SE PULAR, APARECE…</a:t>
+            </a:r>
+            <a:endParaRPr lang="pt-BR" sz="1000" dirty="0"/>
+          </a:p>
+        </p:txBody>
+      </p:sp>
+      <p:sp>
+        <p:nvSpPr>
+          <p:cNvPr id="7" name="Cartão"/>
+          <p:cNvSpPr/>
+          <p:nvPr/>
+        </p:nvSpPr>
+        <p:spPr>
+          <a:xfrm>
+            <a:off x="548640" y="1783080"/>
+            <a:ext cx="11091672" cy="630936"/>
+          </a:xfrm>
+          <a:prstGeom prst="roundRect">
+            <a:avLst>
+              <a:gd name="adj" fmla="val 5217"/>
+            </a:avLst>
+          </a:prstGeom>
+          <a:solidFill>
+            <a:srgbClr val="FFFFFF"/>
+          </a:solidFill>
+          <a:ln>
+            <a:noFill/>
+          </a:ln>
+          <a:effectLst>
+            <a:outerShdw sx="100000" sy="100000" kx="0" ky="0" algn="bl" rotWithShape="0" blurRad="101600" dist="25400" dir="5400000">
+              <a:srgbClr val="223548">
+                <a:alpha val="16000"/>
+              </a:srgbClr>
+            </a:outerShdw>
+          </a:effectLst>
+        </p:spPr>
+      </p:sp>
+      <p:sp>
+        <p:nvSpPr>
+          <p:cNvPr id="8" name="Ícone inspection"/>
+          <p:cNvSpPr/>
+          <p:nvPr/>
+        </p:nvSpPr>
+        <p:spPr>
+          <a:xfrm>
+            <a:off x="713232" y="1892808"/>
+            <a:ext cx="411480" cy="411480"/>
+          </a:xfrm>
+          <a:prstGeom prst="roundRect">
+            <a:avLst>
+              <a:gd name="adj" fmla="val 22000"/>
+            </a:avLst>
+          </a:prstGeom>
+          <a:solidFill>
+            <a:srgbClr val="E1F4FF"/>
+          </a:solidFill>
+          <a:ln>
+            <a:noFill/>
+          </a:ln>
+        </p:spPr>
+      </p:sp>
+      <p:pic>
+        <p:nvPicPr>
+          <p:cNvPr id="9" name="Imagem" descr="inspection"/>
+          <p:cNvPicPr>
+            <a:picLocks noChangeAspect="1"/>
+          </p:cNvPicPr>
+          <p:nvPr/>
+        </p:nvPicPr>
+        <p:blipFill>
+          <a:blip r:embed="rId1"/>
+          <a:stretch>
+            <a:fillRect/>
+          </a:stretch>
+        </p:blipFill>
+        <p:spPr>
+          <a:xfrm>
+            <a:off x="811987" y="1991563"/>
+            <a:ext cx="213970" cy="213970"/>
+          </a:xfrm>
+          <a:prstGeom prst="rect">
+            <a:avLst/>
+          </a:prstGeom>
+        </p:spPr>
+      </p:pic>
+      <p:sp>
+        <p:nvSpPr>
+          <p:cNvPr id="10" name="Texto"/>
+          <p:cNvSpPr txBox="1"/>
+          <p:nvPr/>
+        </p:nvSpPr>
+        <p:spPr>
+          <a:xfrm>
+            <a:off x="1261872" y="1783080"/>
+            <a:ext cx="1783080" cy="630936"/>
+          </a:xfrm>
+          <a:prstGeom prst="roundRect">
+            <a:avLst/>
+          </a:prstGeom>
+          <a:noFill/>
+          <a:ln>
+            <a:noFill/>
+          </a:ln>
+        </p:spPr>
+        <p:txBody>
+          <a:bodyPr wrap="square" lIns="0" tIns="0" rIns="0" bIns="0" rtlCol="0" anchor="ctr"/>
+          <a:lstStyle/>
+          <a:p>
+            <a:pPr algn="l" indent="0" marL="0">
+              <a:buNone/>
+            </a:pPr>
+            <a:r>
+              <a:rPr lang="pt-BR" sz="1100" b="1" dirty="0">
+                <a:solidFill>
+                  <a:srgbClr val="1D2D3E"/>
+                </a:solidFill>
+                <a:latin typeface="Courier New" pitchFamily="34" charset="0"/>
+                <a:ea typeface="Courier New" pitchFamily="34" charset="-122"/>
+                <a:cs typeface="Courier New" pitchFamily="34" charset="-120"/>
+              </a:rPr>
+              <a:t>npm run lint</a:t>
+            </a:r>
+            <a:endParaRPr lang="pt-BR" sz="1100" dirty="0"/>
+          </a:p>
+        </p:txBody>
+      </p:sp>
+      <p:sp>
+        <p:nvSpPr>
+          <p:cNvPr id="11" name="Texto"/>
+          <p:cNvSpPr txBox="1"/>
+          <p:nvPr/>
+        </p:nvSpPr>
+        <p:spPr>
+          <a:xfrm>
+            <a:off x="3108960" y="1783080"/>
+            <a:ext cx="3840480" cy="630936"/>
+          </a:xfrm>
+          <a:prstGeom prst="roundRect">
+            <a:avLst/>
+          </a:prstGeom>
+          <a:noFill/>
+          <a:ln>
+            <a:noFill/>
+          </a:ln>
+        </p:spPr>
+        <p:txBody>
+          <a:bodyPr wrap="square" lIns="0" tIns="0" rIns="0" bIns="0" rtlCol="0" anchor="ctr"/>
+          <a:lstStyle/>
+          <a:p>
+            <a:pPr algn="l" indent="0" marL="0">
+              <a:buNone/>
+            </a:pPr>
+            <a:r>
+              <a:rPr lang="pt-BR" sz="1150" dirty="0">
+                <a:solidFill>
+                  <a:srgbClr val="1D2D3E"/>
+                </a:solidFill>
+              </a:rPr>
+              <a:t>Erros de JavaScript e as regras do plugin Fiori tools do ESLint</a:t>
+            </a:r>
+            <a:endParaRPr lang="pt-BR" sz="1150" dirty="0"/>
+          </a:p>
+        </p:txBody>
+      </p:sp>
+      <p:cxnSp>
+        <p:nvCxnSpPr>
+          <p:cNvPr id="12" name="Conector"/>
+          <p:cNvCxnSpPr/>
+          <p:nvPr/>
+        </p:nvCxnSpPr>
+        <p:spPr>
+          <a:xfrm>
+            <a:off x="7178040" y="1920240"/>
+            <a:ext cx="0" cy="356616"/>
+          </a:xfrm>
+          <a:prstGeom prst="line">
+            <a:avLst/>
+          </a:prstGeom>
+          <a:noFill/>
+          <a:ln w="12700">
+            <a:solidFill>
+              <a:srgbClr val="E5E5E5"/>
+            </a:solidFill>
+            <a:prstDash val="solid"/>
+            <a:round/>
+          </a:ln>
+        </p:spPr>
+      </p:cxnSp>
+      <p:sp>
+        <p:nvSpPr>
+          <p:cNvPr id="13" name="Texto"/>
+          <p:cNvSpPr txBox="1"/>
+          <p:nvPr/>
+        </p:nvSpPr>
+        <p:spPr>
+          <a:xfrm>
+            <a:off x="7315200" y="1783080"/>
+            <a:ext cx="4206240" cy="630936"/>
+          </a:xfrm>
+          <a:prstGeom prst="roundRect">
+            <a:avLst/>
+          </a:prstGeom>
+          <a:noFill/>
+          <a:ln>
+            <a:noFill/>
+          </a:ln>
+        </p:spPr>
+        <p:txBody>
+          <a:bodyPr wrap="square" lIns="0" tIns="0" rIns="0" bIns="0" rtlCol="0" anchor="ctr"/>
+          <a:lstStyle/>
+          <a:p>
+            <a:pPr algn="l" indent="0" marL="0">
+              <a:buNone/>
+            </a:pPr>
+            <a:r>
+              <a:rPr lang="pt-BR" sz="1150" dirty="0">
+                <a:solidFill>
+                  <a:srgbClr val="556B82"/>
+                </a:solidFill>
+              </a:rPr>
+              <a:t>…no navegador de quem abre a app publicada</a:t>
+            </a:r>
+            <a:endParaRPr lang="pt-BR" sz="1150" dirty="0"/>
+          </a:p>
+        </p:txBody>
+      </p:sp>
+      <p:sp>
+        <p:nvSpPr>
+          <p:cNvPr id="14" name="Cartão"/>
+          <p:cNvSpPr/>
+          <p:nvPr/>
+        </p:nvSpPr>
+        <p:spPr>
+          <a:xfrm>
+            <a:off x="548640" y="2505456"/>
+            <a:ext cx="11091672" cy="630936"/>
+          </a:xfrm>
+          <a:prstGeom prst="roundRect">
+            <a:avLst>
+              <a:gd name="adj" fmla="val 5217"/>
+            </a:avLst>
+          </a:prstGeom>
+          <a:solidFill>
+            <a:srgbClr val="FFFFFF"/>
+          </a:solidFill>
+          <a:ln>
+            <a:noFill/>
+          </a:ln>
+          <a:effectLst>
+            <a:outerShdw sx="100000" sy="100000" kx="0" ky="0" algn="bl" rotWithShape="0" blurRad="101600" dist="25400" dir="5400000">
+              <a:srgbClr val="223548">
+                <a:alpha val="16000"/>
+              </a:srgbClr>
+            </a:outerShdw>
+          </a:effectLst>
+        </p:spPr>
+      </p:sp>
+      <p:sp>
+        <p:nvSpPr>
+          <p:cNvPr id="15" name="Ícone sap-box"/>
+          <p:cNvSpPr/>
+          <p:nvPr/>
+        </p:nvSpPr>
+        <p:spPr>
+          <a:xfrm>
+            <a:off x="713232" y="2615184"/>
+            <a:ext cx="411480" cy="411480"/>
+          </a:xfrm>
+          <a:prstGeom prst="roundRect">
+            <a:avLst>
+              <a:gd name="adj" fmla="val 22000"/>
+            </a:avLst>
+          </a:prstGeom>
+          <a:solidFill>
+            <a:srgbClr val="E3F7F6"/>
+          </a:solidFill>
+          <a:ln>
+            <a:noFill/>
+          </a:ln>
+        </p:spPr>
+      </p:sp>
+      <p:pic>
+        <p:nvPicPr>
+          <p:cNvPr id="16" name="Imagem" descr="sap-box"/>
+          <p:cNvPicPr>
+            <a:picLocks noChangeAspect="1"/>
+          </p:cNvPicPr>
+          <p:nvPr/>
+        </p:nvPicPr>
+        <p:blipFill>
+          <a:blip r:embed="rId2"/>
+          <a:stretch>
+            <a:fillRect/>
+          </a:stretch>
+        </p:blipFill>
+        <p:spPr>
+          <a:xfrm>
+            <a:off x="811987" y="2713939"/>
+            <a:ext cx="213970" cy="213970"/>
+          </a:xfrm>
+          <a:prstGeom prst="rect">
+            <a:avLst/>
+          </a:prstGeom>
+        </p:spPr>
+      </p:pic>
+      <p:sp>
+        <p:nvSpPr>
+          <p:cNvPr id="17" name="Texto"/>
+          <p:cNvSpPr txBox="1"/>
+          <p:nvPr/>
+        </p:nvSpPr>
+        <p:spPr>
+          <a:xfrm>
+            <a:off x="1261872" y="2505456"/>
+            <a:ext cx="1783080" cy="630936"/>
+          </a:xfrm>
+          <a:prstGeom prst="roundRect">
+            <a:avLst/>
+          </a:prstGeom>
+          <a:noFill/>
+          <a:ln>
+            <a:noFill/>
+          </a:ln>
+        </p:spPr>
+        <p:txBody>
+          <a:bodyPr wrap="square" lIns="0" tIns="0" rIns="0" bIns="0" rtlCol="0" anchor="ctr"/>
+          <a:lstStyle/>
+          <a:p>
+            <a:pPr algn="l" indent="0" marL="0">
+              <a:buNone/>
+            </a:pPr>
+            <a:r>
+              <a:rPr lang="pt-BR" sz="1100" b="1" dirty="0">
+                <a:solidFill>
+                  <a:srgbClr val="1D2D3E"/>
+                </a:solidFill>
+                <a:latin typeface="Courier New" pitchFamily="34" charset="0"/>
+                <a:ea typeface="Courier New" pitchFamily="34" charset="-122"/>
+                <a:cs typeface="Courier New" pitchFamily="34" charset="-120"/>
+              </a:rPr>
+              <a:t>npm run build</a:t>
+            </a:r>
+            <a:endParaRPr lang="pt-BR" sz="1100" dirty="0"/>
+          </a:p>
+        </p:txBody>
+      </p:sp>
+      <p:sp>
+        <p:nvSpPr>
+          <p:cNvPr id="18" name="Texto"/>
+          <p:cNvSpPr txBox="1"/>
+          <p:nvPr/>
+        </p:nvSpPr>
+        <p:spPr>
+          <a:xfrm>
+            <a:off x="3108960" y="2505456"/>
+            <a:ext cx="3840480" cy="630936"/>
+          </a:xfrm>
+          <a:prstGeom prst="roundRect">
+            <a:avLst/>
+          </a:prstGeom>
+          <a:noFill/>
+          <a:ln>
+            <a:noFill/>
+          </a:ln>
+        </p:spPr>
+        <p:txBody>
+          <a:bodyPr wrap="square" lIns="0" tIns="0" rIns="0" bIns="0" rtlCol="0" anchor="ctr"/>
+          <a:lstStyle/>
+          <a:p>
+            <a:pPr algn="l" indent="0" marL="0">
+              <a:buNone/>
+            </a:pPr>
+            <a:r>
+              <a:rPr lang="pt-BR" sz="1150" dirty="0">
+                <a:solidFill>
+                  <a:srgbClr val="1D2D3E"/>
+                </a:solidFill>
+              </a:rPr>
+              <a:t>Que o projeto gera o dist/ com preload e cachebuster</a:t>
+            </a:r>
+            <a:endParaRPr lang="pt-BR" sz="1150" dirty="0"/>
+          </a:p>
+        </p:txBody>
+      </p:sp>
+      <p:cxnSp>
+        <p:nvCxnSpPr>
+          <p:cNvPr id="19" name="Conector"/>
+          <p:cNvCxnSpPr/>
+          <p:nvPr/>
+        </p:nvCxnSpPr>
+        <p:spPr>
+          <a:xfrm>
+            <a:off x="7178040" y="2642616"/>
+            <a:ext cx="0" cy="356616"/>
+          </a:xfrm>
+          <a:prstGeom prst="line">
+            <a:avLst/>
+          </a:prstGeom>
+          <a:noFill/>
+          <a:ln w="12700">
+            <a:solidFill>
+              <a:srgbClr val="E5E5E5"/>
+            </a:solidFill>
+            <a:prstDash val="solid"/>
+            <a:round/>
+          </a:ln>
+        </p:spPr>
+      </p:cxnSp>
+      <p:sp>
+        <p:nvSpPr>
+          <p:cNvPr id="20" name="Texto"/>
+          <p:cNvSpPr txBox="1"/>
+          <p:nvPr/>
+        </p:nvSpPr>
+        <p:spPr>
+          <a:xfrm>
+            <a:off x="7315200" y="2505456"/>
+            <a:ext cx="4206240" cy="630936"/>
+          </a:xfrm>
+          <a:prstGeom prst="roundRect">
+            <a:avLst/>
+          </a:prstGeom>
+          <a:noFill/>
+          <a:ln>
+            <a:noFill/>
+          </a:ln>
+        </p:spPr>
+        <p:txBody>
+          <a:bodyPr wrap="square" lIns="0" tIns="0" rIns="0" bIns="0" rtlCol="0" anchor="ctr"/>
+          <a:lstStyle/>
+          <a:p>
+            <a:pPr algn="l" indent="0" marL="0">
+              <a:buNone/>
+            </a:pPr>
+            <a:r>
+              <a:rPr lang="pt-BR" sz="1150" dirty="0">
+                <a:solidFill>
+                  <a:srgbClr val="556B82"/>
+                </a:solidFill>
+              </a:rPr>
+              <a:t>…no meio do deploy, junto com erros de conexão e pacote</a:t>
+            </a:r>
+            <a:endParaRPr lang="pt-BR" sz="1150" dirty="0"/>
+          </a:p>
+        </p:txBody>
+      </p:sp>
+      <p:sp>
+        <p:nvSpPr>
+          <p:cNvPr id="21" name="Cartão"/>
+          <p:cNvSpPr/>
+          <p:nvPr/>
+        </p:nvSpPr>
+        <p:spPr>
+          <a:xfrm>
+            <a:off x="548640" y="3227832"/>
+            <a:ext cx="11091672" cy="630936"/>
+          </a:xfrm>
+          <a:prstGeom prst="roundRect">
+            <a:avLst>
+              <a:gd name="adj" fmla="val 5217"/>
+            </a:avLst>
+          </a:prstGeom>
+          <a:solidFill>
+            <a:srgbClr val="FFFFFF"/>
+          </a:solidFill>
+          <a:ln>
+            <a:noFill/>
+          </a:ln>
+          <a:effectLst>
+            <a:outerShdw sx="100000" sy="100000" kx="0" ky="0" algn="bl" rotWithShape="0" blurRad="101600" dist="25400" dir="5400000">
+              <a:srgbClr val="223548">
+                <a:alpha val="16000"/>
+              </a:srgbClr>
+            </a:outerShdw>
+          </a:effectLst>
+        </p:spPr>
+      </p:sp>
+      <p:sp>
+        <p:nvSpPr>
+          <p:cNvPr id="22" name="Ícone validate"/>
+          <p:cNvSpPr/>
+          <p:nvPr/>
+        </p:nvSpPr>
+        <p:spPr>
+          <a:xfrm>
+            <a:off x="713232" y="3337560"/>
+            <a:ext cx="411480" cy="411480"/>
+          </a:xfrm>
+          <a:prstGeom prst="roundRect">
+            <a:avLst>
+              <a:gd name="adj" fmla="val 22000"/>
+            </a:avLst>
+          </a:prstGeom>
+          <a:solidFill>
+            <a:srgbClr val="F5FAE5"/>
+          </a:solidFill>
+          <a:ln>
+            <a:noFill/>
+          </a:ln>
+        </p:spPr>
+      </p:sp>
+      <p:pic>
+        <p:nvPicPr>
+          <p:cNvPr id="23" name="Imagem" descr="validate"/>
+          <p:cNvPicPr>
+            <a:picLocks noChangeAspect="1"/>
+          </p:cNvPicPr>
+          <p:nvPr/>
+        </p:nvPicPr>
+        <p:blipFill>
+          <a:blip r:embed="rId3"/>
+          <a:stretch>
+            <a:fillRect/>
+          </a:stretch>
+        </p:blipFill>
+        <p:spPr>
+          <a:xfrm>
+            <a:off x="811987" y="3436315"/>
+            <a:ext cx="213970" cy="213970"/>
+          </a:xfrm>
+          <a:prstGeom prst="rect">
+            <a:avLst/>
+          </a:prstGeom>
+        </p:spPr>
+      </p:pic>
+      <p:sp>
+        <p:nvSpPr>
+          <p:cNvPr id="24" name="Texto"/>
+          <p:cNvSpPr txBox="1"/>
+          <p:nvPr/>
+        </p:nvSpPr>
+        <p:spPr>
+          <a:xfrm>
+            <a:off x="1261872" y="3227832"/>
+            <a:ext cx="1783080" cy="630936"/>
+          </a:xfrm>
+          <a:prstGeom prst="roundRect">
+            <a:avLst/>
+          </a:prstGeom>
+          <a:noFill/>
+          <a:ln>
+            <a:noFill/>
+          </a:ln>
+        </p:spPr>
+        <p:txBody>
+          <a:bodyPr wrap="square" lIns="0" tIns="0" rIns="0" bIns="0" rtlCol="0" anchor="ctr"/>
+          <a:lstStyle/>
+          <a:p>
+            <a:pPr algn="l" indent="0" marL="0">
+              <a:buNone/>
+            </a:pPr>
+            <a:r>
+              <a:rPr lang="pt-BR" sz="1100" b="1" dirty="0">
+                <a:solidFill>
+                  <a:srgbClr val="1D2D3E"/>
+                </a:solidFill>
+                <a:latin typeface="Courier New" pitchFamily="34" charset="0"/>
+                <a:ea typeface="Courier New" pitchFamily="34" charset="-122"/>
+                <a:cs typeface="Courier New" pitchFamily="34" charset="-120"/>
+              </a:rPr>
+              <a:t>npm run int-test</a:t>
+            </a:r>
+            <a:endParaRPr lang="pt-BR" sz="1100" dirty="0"/>
+          </a:p>
+        </p:txBody>
+      </p:sp>
+      <p:sp>
+        <p:nvSpPr>
+          <p:cNvPr id="25" name="Texto"/>
+          <p:cNvSpPr txBox="1"/>
+          <p:nvPr/>
+        </p:nvSpPr>
+        <p:spPr>
+          <a:xfrm>
+            <a:off x="3108960" y="3227832"/>
+            <a:ext cx="3840480" cy="630936"/>
+          </a:xfrm>
+          <a:prstGeom prst="roundRect">
+            <a:avLst/>
+          </a:prstGeom>
+          <a:noFill/>
+          <a:ln>
+            <a:noFill/>
+          </a:ln>
+        </p:spPr>
+        <p:txBody>
+          <a:bodyPr wrap="square" lIns="0" tIns="0" rIns="0" bIns="0" rtlCol="0" anchor="ctr"/>
+          <a:lstStyle/>
+          <a:p>
+            <a:pPr algn="l" indent="0" marL="0">
+              <a:buNone/>
+            </a:pPr>
+            <a:r>
+              <a:rPr lang="pt-BR" sz="1150" dirty="0">
+                <a:solidFill>
+                  <a:srgbClr val="1D2D3E"/>
+                </a:solidFill>
+              </a:rPr>
+              <a:t>List Report e Object Page abrem e navegam com o mock</a:t>
+            </a:r>
+            <a:endParaRPr lang="pt-BR" sz="1150" dirty="0"/>
+          </a:p>
+        </p:txBody>
+      </p:sp>
+      <p:cxnSp>
+        <p:nvCxnSpPr>
+          <p:cNvPr id="26" name="Conector"/>
+          <p:cNvCxnSpPr/>
+          <p:nvPr/>
+        </p:nvCxnSpPr>
+        <p:spPr>
+          <a:xfrm>
+            <a:off x="7178040" y="3364992"/>
+            <a:ext cx="0" cy="356616"/>
+          </a:xfrm>
+          <a:prstGeom prst="line">
+            <a:avLst/>
+          </a:prstGeom>
+          <a:noFill/>
+          <a:ln w="12700">
+            <a:solidFill>
+              <a:srgbClr val="E5E5E5"/>
+            </a:solidFill>
+            <a:prstDash val="solid"/>
+            <a:round/>
+          </a:ln>
+        </p:spPr>
+      </p:cxnSp>
+      <p:sp>
+        <p:nvSpPr>
+          <p:cNvPr id="27" name="Texto"/>
+          <p:cNvSpPr txBox="1"/>
+          <p:nvPr/>
+        </p:nvSpPr>
+        <p:spPr>
+          <a:xfrm>
+            <a:off x="7315200" y="3227832"/>
+            <a:ext cx="4206240" cy="630936"/>
+          </a:xfrm>
+          <a:prstGeom prst="roundRect">
+            <a:avLst/>
+          </a:prstGeom>
+          <a:noFill/>
+          <a:ln>
+            <a:noFill/>
+          </a:ln>
+        </p:spPr>
+        <p:txBody>
+          <a:bodyPr wrap="square" lIns="0" tIns="0" rIns="0" bIns="0" rtlCol="0" anchor="ctr"/>
+          <a:lstStyle/>
+          <a:p>
+            <a:pPr algn="l" indent="0" marL="0">
+              <a:buNone/>
+            </a:pPr>
+            <a:r>
+              <a:rPr lang="pt-BR" sz="1150" dirty="0">
+                <a:solidFill>
+                  <a:srgbClr val="556B82"/>
+                </a:solidFill>
+              </a:rPr>
+              <a:t>…como tela quebrada após mudar manifest ou anotações</a:t>
+            </a:r>
+            <a:endParaRPr lang="pt-BR" sz="1150" dirty="0"/>
+          </a:p>
+        </p:txBody>
+      </p:sp>
+      <p:sp>
+        <p:nvSpPr>
+          <p:cNvPr id="28" name="Cartão"/>
+          <p:cNvSpPr/>
+          <p:nvPr/>
+        </p:nvSpPr>
+        <p:spPr>
+          <a:xfrm>
+            <a:off x="548640" y="3950208"/>
+            <a:ext cx="11091672" cy="630936"/>
+          </a:xfrm>
+          <a:prstGeom prst="roundRect">
+            <a:avLst>
+              <a:gd name="adj" fmla="val 5217"/>
+            </a:avLst>
+          </a:prstGeom>
+          <a:solidFill>
+            <a:srgbClr val="FFFFFF"/>
+          </a:solidFill>
+          <a:ln>
+            <a:noFill/>
+          </a:ln>
+          <a:effectLst>
+            <a:outerShdw sx="100000" sy="100000" kx="0" ky="0" algn="bl" rotWithShape="0" blurRad="101600" dist="25400" dir="5400000">
+              <a:srgbClr val="223548">
+                <a:alpha val="16000"/>
+              </a:srgbClr>
+            </a:outerShdw>
+          </a:effectLst>
+        </p:spPr>
+      </p:sp>
+      <p:sp>
+        <p:nvSpPr>
+          <p:cNvPr id="29" name="Ícone e-learning"/>
+          <p:cNvSpPr/>
+          <p:nvPr/>
+        </p:nvSpPr>
+        <p:spPr>
+          <a:xfrm>
+            <a:off x="713232" y="4059936"/>
+            <a:ext cx="411480" cy="411480"/>
+          </a:xfrm>
+          <a:prstGeom prst="roundRect">
+            <a:avLst>
+              <a:gd name="adj" fmla="val 22000"/>
+            </a:avLst>
+          </a:prstGeom>
+          <a:solidFill>
+            <a:srgbClr val="F3ECFB"/>
+          </a:solidFill>
+          <a:ln>
+            <a:noFill/>
+          </a:ln>
+        </p:spPr>
+      </p:sp>
+      <p:pic>
+        <p:nvPicPr>
+          <p:cNvPr id="30" name="Imagem" descr="e-learning"/>
+          <p:cNvPicPr>
+            <a:picLocks noChangeAspect="1"/>
+          </p:cNvPicPr>
+          <p:nvPr/>
+        </p:nvPicPr>
+        <p:blipFill>
+          <a:blip r:embed="rId4"/>
+          <a:stretch>
+            <a:fillRect/>
+          </a:stretch>
+        </p:blipFill>
+        <p:spPr>
+          <a:xfrm>
+            <a:off x="811987" y="4158691"/>
+            <a:ext cx="213970" cy="213970"/>
+          </a:xfrm>
+          <a:prstGeom prst="rect">
+            <a:avLst/>
+          </a:prstGeom>
+        </p:spPr>
+      </p:pic>
+      <p:sp>
+        <p:nvSpPr>
+          <p:cNvPr id="31" name="Texto"/>
+          <p:cNvSpPr txBox="1"/>
+          <p:nvPr/>
+        </p:nvSpPr>
+        <p:spPr>
+          <a:xfrm>
+            <a:off x="1261872" y="3950208"/>
+            <a:ext cx="1783080" cy="630936"/>
+          </a:xfrm>
+          <a:prstGeom prst="roundRect">
+            <a:avLst/>
+          </a:prstGeom>
+          <a:noFill/>
+          <a:ln>
+            <a:noFill/>
+          </a:ln>
+        </p:spPr>
+        <p:txBody>
+          <a:bodyPr wrap="square" lIns="0" tIns="0" rIns="0" bIns="0" rtlCol="0" anchor="ctr"/>
+          <a:lstStyle/>
+          <a:p>
+            <a:pPr algn="l" indent="0" marL="0">
+              <a:buNone/>
+            </a:pPr>
+            <a:r>
+              <a:rPr lang="pt-BR" sz="1100" b="1" dirty="0">
+                <a:solidFill>
+                  <a:srgbClr val="1D2D3E"/>
+                </a:solidFill>
+                <a:latin typeface="Courier New" pitchFamily="34" charset="0"/>
+                <a:ea typeface="Courier New" pitchFamily="34" charset="-122"/>
+                <a:cs typeface="Courier New" pitchFamily="34" charset="-120"/>
+              </a:rPr>
+              <a:t>npm run unit-test</a:t>
+            </a:r>
+            <a:endParaRPr lang="pt-BR" sz="1100" dirty="0"/>
+          </a:p>
+        </p:txBody>
+      </p:sp>
+      <p:sp>
+        <p:nvSpPr>
+          <p:cNvPr id="32" name="Texto"/>
+          <p:cNvSpPr txBox="1"/>
+          <p:nvPr/>
+        </p:nvSpPr>
+        <p:spPr>
+          <a:xfrm>
+            <a:off x="3108960" y="3950208"/>
+            <a:ext cx="3840480" cy="630936"/>
+          </a:xfrm>
+          <a:prstGeom prst="roundRect">
+            <a:avLst/>
+          </a:prstGeom>
+          <a:noFill/>
+          <a:ln>
+            <a:noFill/>
+          </a:ln>
+        </p:spPr>
+        <p:txBody>
+          <a:bodyPr wrap="square" lIns="0" tIns="0" rIns="0" bIns="0" rtlCol="0" anchor="ctr"/>
+          <a:lstStyle/>
+          <a:p>
+            <a:pPr algn="l" indent="0" marL="0">
+              <a:buNone/>
+            </a:pPr>
+            <a:r>
+              <a:rPr lang="pt-BR" sz="1150" dirty="0">
+                <a:solidFill>
+                  <a:srgbClr val="1D2D3E"/>
+                </a:solidFill>
+              </a:rPr>
+              <a:t>Catálogo de cenários, textos i18n e o $apply das consultas</a:t>
+            </a:r>
+            <a:endParaRPr lang="pt-BR" sz="1150" dirty="0"/>
+          </a:p>
+        </p:txBody>
+      </p:sp>
+      <p:cxnSp>
+        <p:nvCxnSpPr>
+          <p:cNvPr id="33" name="Conector"/>
+          <p:cNvCxnSpPr/>
+          <p:nvPr/>
+        </p:nvCxnSpPr>
+        <p:spPr>
+          <a:xfrm>
+            <a:off x="7178040" y="4087368"/>
+            <a:ext cx="0" cy="356616"/>
+          </a:xfrm>
+          <a:prstGeom prst="line">
+            <a:avLst/>
+          </a:prstGeom>
+          <a:noFill/>
+          <a:ln w="12700">
+            <a:solidFill>
+              <a:srgbClr val="E5E5E5"/>
+            </a:solidFill>
+            <a:prstDash val="solid"/>
+            <a:round/>
+          </a:ln>
+        </p:spPr>
+      </p:cxnSp>
+      <p:sp>
+        <p:nvSpPr>
+          <p:cNvPr id="34" name="Texto"/>
+          <p:cNvSpPr txBox="1"/>
+          <p:nvPr/>
+        </p:nvSpPr>
+        <p:spPr>
+          <a:xfrm>
+            <a:off x="7315200" y="3950208"/>
+            <a:ext cx="4206240" cy="630936"/>
+          </a:xfrm>
+          <a:prstGeom prst="roundRect">
+            <a:avLst/>
+          </a:prstGeom>
+          <a:noFill/>
+          <a:ln>
+            <a:noFill/>
+          </a:ln>
+        </p:spPr>
+        <p:txBody>
+          <a:bodyPr wrap="square" lIns="0" tIns="0" rIns="0" bIns="0" rtlCol="0" anchor="ctr"/>
+          <a:lstStyle/>
+          <a:p>
+            <a:pPr algn="l" indent="0" marL="0">
+              <a:buNone/>
+            </a:pPr>
+            <a:r>
+              <a:rPr lang="pt-BR" sz="1150" dirty="0">
+                <a:solidFill>
+                  <a:srgbClr val="556B82"/>
+                </a:solidFill>
+              </a:rPr>
+              <a:t>…como gráfico vazio ou erro de groupby na análise</a:t>
+            </a:r>
+            <a:endParaRPr lang="pt-BR" sz="1150" dirty="0"/>
+          </a:p>
+        </p:txBody>
+      </p:sp>
+      <p:sp>
+        <p:nvSpPr>
+          <p:cNvPr id="35" name="Cartão"/>
+          <p:cNvSpPr/>
+          <p:nvPr/>
+        </p:nvSpPr>
+        <p:spPr>
+          <a:xfrm>
+            <a:off x="548640" y="4672584"/>
+            <a:ext cx="11091672" cy="630936"/>
+          </a:xfrm>
+          <a:prstGeom prst="roundRect">
+            <a:avLst>
+              <a:gd name="adj" fmla="val 5217"/>
+            </a:avLst>
+          </a:prstGeom>
+          <a:solidFill>
+            <a:srgbClr val="FFFFFF"/>
+          </a:solidFill>
+          <a:ln>
+            <a:noFill/>
+          </a:ln>
+          <a:effectLst>
+            <a:outerShdw sx="100000" sy="100000" kx="0" ky="0" algn="bl" rotWithShape="0" blurRad="101600" dist="25400" dir="5400000">
+              <a:srgbClr val="223548">
+                <a:alpha val="16000"/>
+              </a:srgbClr>
+            </a:outerShdw>
+          </a:effectLst>
+        </p:spPr>
+      </p:sp>
+      <p:sp>
+        <p:nvSpPr>
+          <p:cNvPr id="36" name="Ícone syntax"/>
+          <p:cNvSpPr/>
+          <p:nvPr/>
+        </p:nvSpPr>
+        <p:spPr>
+          <a:xfrm>
+            <a:off x="713232" y="4782312"/>
+            <a:ext cx="411480" cy="411480"/>
+          </a:xfrm>
+          <a:prstGeom prst="roundRect">
+            <a:avLst>
+              <a:gd name="adj" fmla="val 22000"/>
+            </a:avLst>
+          </a:prstGeom>
+          <a:solidFill>
+            <a:srgbClr val="FFF3E0"/>
+          </a:solidFill>
+          <a:ln>
+            <a:noFill/>
+          </a:ln>
+        </p:spPr>
+      </p:sp>
+      <p:pic>
+        <p:nvPicPr>
+          <p:cNvPr id="37" name="Imagem" descr="syntax"/>
+          <p:cNvPicPr>
+            <a:picLocks noChangeAspect="1"/>
+          </p:cNvPicPr>
+          <p:nvPr/>
+        </p:nvPicPr>
+        <p:blipFill>
+          <a:blip r:embed="rId5"/>
+          <a:stretch>
+            <a:fillRect/>
+          </a:stretch>
+        </p:blipFill>
+        <p:spPr>
+          <a:xfrm>
+            <a:off x="811987" y="4881067"/>
+            <a:ext cx="213970" cy="213970"/>
+          </a:xfrm>
+          <a:prstGeom prst="rect">
+            <a:avLst/>
+          </a:prstGeom>
+        </p:spPr>
+      </p:pic>
+      <p:sp>
+        <p:nvSpPr>
+          <p:cNvPr id="38" name="Texto"/>
+          <p:cNvSpPr txBox="1"/>
+          <p:nvPr/>
+        </p:nvSpPr>
+        <p:spPr>
+          <a:xfrm>
+            <a:off x="1261872" y="4672584"/>
+            <a:ext cx="1783080" cy="630936"/>
+          </a:xfrm>
+          <a:prstGeom prst="roundRect">
+            <a:avLst/>
+          </a:prstGeom>
+          <a:noFill/>
+          <a:ln>
+            <a:noFill/>
+          </a:ln>
+        </p:spPr>
+        <p:txBody>
+          <a:bodyPr wrap="square" lIns="0" tIns="0" rIns="0" bIns="0" rtlCol="0" anchor="ctr"/>
+          <a:lstStyle/>
+          <a:p>
+            <a:pPr algn="l" indent="0" marL="0">
+              <a:buNone/>
+            </a:pPr>
+            <a:r>
+              <a:rPr lang="pt-BR" sz="1100" b="1" dirty="0">
+                <a:solidFill>
+                  <a:srgbClr val="1D2D3E"/>
+                </a:solidFill>
+                <a:latin typeface="Courier New" pitchFamily="34" charset="0"/>
+                <a:ea typeface="Courier New" pitchFamily="34" charset="-122"/>
+                <a:cs typeface="Courier New" pitchFamily="34" charset="-120"/>
+              </a:rPr>
+              <a:t>npx @ui5/linter</a:t>
+            </a:r>
+            <a:endParaRPr lang="pt-BR" sz="1100" dirty="0"/>
+          </a:p>
+        </p:txBody>
+      </p:sp>
+      <p:sp>
+        <p:nvSpPr>
+          <p:cNvPr id="39" name="Texto"/>
+          <p:cNvSpPr txBox="1"/>
+          <p:nvPr/>
+        </p:nvSpPr>
+        <p:spPr>
+          <a:xfrm>
+            <a:off x="3108960" y="4672584"/>
+            <a:ext cx="3840480" cy="630936"/>
+          </a:xfrm>
+          <a:prstGeom prst="roundRect">
+            <a:avLst/>
+          </a:prstGeom>
+          <a:noFill/>
+          <a:ln>
+            <a:noFill/>
+          </a:ln>
+        </p:spPr>
+        <p:txBody>
+          <a:bodyPr wrap="square" lIns="0" tIns="0" rIns="0" bIns="0" rtlCol="0" anchor="ctr"/>
+          <a:lstStyle/>
+          <a:p>
+            <a:pPr algn="l" indent="0" marL="0">
+              <a:buNone/>
+            </a:pPr>
+            <a:r>
+              <a:rPr lang="pt-BR" sz="1150" dirty="0">
+                <a:solidFill>
+                  <a:srgbClr val="1D2D3E"/>
+                </a:solidFill>
+              </a:rPr>
+              <a:t>APIs depreciadas e práticas fora do padrão SAPUI5</a:t>
+            </a:r>
+            <a:endParaRPr lang="pt-BR" sz="1150" dirty="0"/>
+          </a:p>
+        </p:txBody>
+      </p:sp>
+      <p:cxnSp>
+        <p:nvCxnSpPr>
+          <p:cNvPr id="40" name="Conector"/>
+          <p:cNvCxnSpPr/>
+          <p:nvPr/>
+        </p:nvCxnSpPr>
+        <p:spPr>
+          <a:xfrm>
+            <a:off x="7178040" y="4809744"/>
+            <a:ext cx="0" cy="356616"/>
+          </a:xfrm>
+          <a:prstGeom prst="line">
+            <a:avLst/>
+          </a:prstGeom>
+          <a:noFill/>
+          <a:ln w="12700">
+            <a:solidFill>
+              <a:srgbClr val="E5E5E5"/>
+            </a:solidFill>
+            <a:prstDash val="solid"/>
+            <a:round/>
+          </a:ln>
+        </p:spPr>
+      </p:cxnSp>
+      <p:sp>
+        <p:nvSpPr>
+          <p:cNvPr id="41" name="Texto"/>
+          <p:cNvSpPr txBox="1"/>
+          <p:nvPr/>
+        </p:nvSpPr>
+        <p:spPr>
+          <a:xfrm>
+            <a:off x="7315200" y="4672584"/>
+            <a:ext cx="4206240" cy="630936"/>
+          </a:xfrm>
+          <a:prstGeom prst="roundRect">
+            <a:avLst/>
+          </a:prstGeom>
+          <a:noFill/>
+          <a:ln>
+            <a:noFill/>
+          </a:ln>
+        </p:spPr>
+        <p:txBody>
+          <a:bodyPr wrap="square" lIns="0" tIns="0" rIns="0" bIns="0" rtlCol="0" anchor="ctr"/>
+          <a:lstStyle/>
+          <a:p>
+            <a:pPr algn="l" indent="0" marL="0">
+              <a:buNone/>
+            </a:pPr>
+            <a:r>
+              <a:rPr lang="pt-BR" sz="1150" dirty="0">
+                <a:solidFill>
+                  <a:srgbClr val="556B82"/>
+                </a:solidFill>
+              </a:rPr>
+              <a:t>…no próximo upgrade do SAPUI5 do BTP ou do FES</a:t>
+            </a:r>
+            <a:endParaRPr lang="pt-BR" sz="1150" dirty="0"/>
+          </a:p>
+        </p:txBody>
+      </p:sp>
+      <p:sp>
+        <p:nvSpPr>
+          <p:cNvPr id="42" name="Cartão"/>
+          <p:cNvSpPr/>
+          <p:nvPr/>
+        </p:nvSpPr>
+        <p:spPr>
+          <a:xfrm>
+            <a:off x="548640" y="5394960"/>
+            <a:ext cx="11091672" cy="630936"/>
+          </a:xfrm>
+          <a:prstGeom prst="roundRect">
+            <a:avLst>
+              <a:gd name="adj" fmla="val 5217"/>
+            </a:avLst>
+          </a:prstGeom>
+          <a:solidFill>
+            <a:srgbClr val="FFFFFF"/>
+          </a:solidFill>
+          <a:ln>
+            <a:noFill/>
+          </a:ln>
+          <a:effectLst>
+            <a:outerShdw sx="100000" sy="100000" kx="0" ky="0" algn="bl" rotWithShape="0" blurRad="101600" dist="25400" dir="5400000">
+              <a:srgbClr val="223548">
+                <a:alpha val="16000"/>
+              </a:srgbClr>
+            </a:outerShdw>
+          </a:effectLst>
+        </p:spPr>
+      </p:sp>
+      <p:sp>
+        <p:nvSpPr>
+          <p:cNvPr id="43" name="Ícone upload-to-cloud"/>
+          <p:cNvSpPr/>
+          <p:nvPr/>
+        </p:nvSpPr>
+        <p:spPr>
+          <a:xfrm>
+            <a:off x="713232" y="5504688"/>
+            <a:ext cx="411480" cy="411480"/>
+          </a:xfrm>
+          <a:prstGeom prst="roundRect">
+            <a:avLst>
+              <a:gd name="adj" fmla="val 22000"/>
+            </a:avLst>
+          </a:prstGeom>
+          <a:solidFill>
+            <a:srgbClr val="FDE8F1"/>
+          </a:solidFill>
+          <a:ln>
+            <a:noFill/>
+          </a:ln>
+        </p:spPr>
+      </p:sp>
+      <p:pic>
+        <p:nvPicPr>
+          <p:cNvPr id="44" name="Imagem" descr="upload-to-cloud"/>
+          <p:cNvPicPr>
+            <a:picLocks noChangeAspect="1"/>
+          </p:cNvPicPr>
+          <p:nvPr/>
+        </p:nvPicPr>
+        <p:blipFill>
+          <a:blip r:embed="rId6"/>
+          <a:stretch>
+            <a:fillRect/>
+          </a:stretch>
+        </p:blipFill>
+        <p:spPr>
+          <a:xfrm>
+            <a:off x="811987" y="5603443"/>
+            <a:ext cx="213970" cy="213970"/>
+          </a:xfrm>
+          <a:prstGeom prst="rect">
+            <a:avLst/>
+          </a:prstGeom>
+        </p:spPr>
+      </p:pic>
+      <p:sp>
+        <p:nvSpPr>
+          <p:cNvPr id="45" name="Texto"/>
+          <p:cNvSpPr txBox="1"/>
+          <p:nvPr/>
+        </p:nvSpPr>
+        <p:spPr>
+          <a:xfrm>
+            <a:off x="1261872" y="5394960"/>
+            <a:ext cx="1783080" cy="630936"/>
+          </a:xfrm>
+          <a:prstGeom prst="roundRect">
+            <a:avLst/>
+          </a:prstGeom>
+          <a:noFill/>
+          <a:ln>
+            <a:noFill/>
+          </a:ln>
+        </p:spPr>
+        <p:txBody>
+          <a:bodyPr wrap="square" lIns="0" tIns="0" rIns="0" bIns="0" rtlCol="0" anchor="ctr"/>
+          <a:lstStyle/>
+          <a:p>
+            <a:pPr algn="l" indent="0" marL="0">
+              <a:buNone/>
+            </a:pPr>
+            <a:r>
+              <a:rPr lang="pt-BR" sz="1100" b="1" dirty="0">
+                <a:solidFill>
+                  <a:srgbClr val="1D2D3E"/>
+                </a:solidFill>
+                <a:latin typeface="Courier New" pitchFamily="34" charset="0"/>
+                <a:ea typeface="Courier New" pitchFamily="34" charset="-122"/>
+                <a:cs typeface="Courier New" pitchFamily="34" charset="-120"/>
+              </a:rPr>
+              <a:t>npm run deploy-test</a:t>
+            </a:r>
+            <a:endParaRPr lang="pt-BR" sz="1100" dirty="0"/>
+          </a:p>
+        </p:txBody>
+      </p:sp>
+      <p:sp>
+        <p:nvSpPr>
+          <p:cNvPr id="46" name="Texto"/>
+          <p:cNvSpPr txBox="1"/>
+          <p:nvPr/>
+        </p:nvSpPr>
+        <p:spPr>
+          <a:xfrm>
+            <a:off x="3108960" y="5394960"/>
+            <a:ext cx="3840480" cy="630936"/>
+          </a:xfrm>
+          <a:prstGeom prst="roundRect">
+            <a:avLst/>
+          </a:prstGeom>
+          <a:noFill/>
+          <a:ln>
+            <a:noFill/>
+          </a:ln>
+        </p:spPr>
+        <p:txBody>
+          <a:bodyPr wrap="square" lIns="0" tIns="0" rIns="0" bIns="0" rtlCol="0" anchor="ctr"/>
+          <a:lstStyle/>
+          <a:p>
+            <a:pPr algn="l" indent="0" marL="0">
+              <a:buNone/>
+            </a:pPr>
+            <a:r>
+              <a:rPr lang="pt-BR" sz="1150" dirty="0">
+                <a:solidFill>
+                  <a:srgbClr val="1D2D3E"/>
+                </a:solidFill>
+              </a:rPr>
+              <a:t>URL, cliente, login, pacote e transporte, sem gravar</a:t>
+            </a:r>
+            <a:endParaRPr lang="pt-BR" sz="1150" dirty="0"/>
+          </a:p>
+        </p:txBody>
+      </p:sp>
+      <p:cxnSp>
+        <p:nvCxnSpPr>
+          <p:cNvPr id="47" name="Conector"/>
+          <p:cNvCxnSpPr/>
+          <p:nvPr/>
+        </p:nvCxnSpPr>
+        <p:spPr>
+          <a:xfrm>
+            <a:off x="7178040" y="5532120"/>
+            <a:ext cx="0" cy="356616"/>
+          </a:xfrm>
+          <a:prstGeom prst="line">
+            <a:avLst/>
+          </a:prstGeom>
+          <a:noFill/>
+          <a:ln w="12700">
+            <a:solidFill>
+              <a:srgbClr val="E5E5E5"/>
+            </a:solidFill>
+            <a:prstDash val="solid"/>
+            <a:round/>
+          </a:ln>
+        </p:spPr>
+      </p:cxnSp>
+      <p:sp>
+        <p:nvSpPr>
+          <p:cNvPr id="48" name="Texto"/>
+          <p:cNvSpPr txBox="1"/>
+          <p:nvPr/>
+        </p:nvSpPr>
+        <p:spPr>
+          <a:xfrm>
+            <a:off x="7315200" y="5394960"/>
+            <a:ext cx="4206240" cy="630936"/>
+          </a:xfrm>
+          <a:prstGeom prst="roundRect">
+            <a:avLst/>
+          </a:prstGeom>
+          <a:noFill/>
+          <a:ln>
+            <a:noFill/>
+          </a:ln>
+        </p:spPr>
+        <p:txBody>
+          <a:bodyPr wrap="square" lIns="0" tIns="0" rIns="0" bIns="0" rtlCol="0" anchor="ctr"/>
+          <a:lstStyle/>
+          <a:p>
+            <a:pPr algn="l" indent="0" marL="0">
+              <a:buNone/>
+            </a:pPr>
+            <a:r>
+              <a:rPr lang="pt-BR" sz="1150" dirty="0">
+                <a:solidFill>
+                  <a:srgbClr val="556B82"/>
+                </a:solidFill>
+              </a:rPr>
+              <a:t>…já gravando no ABAP Repository do sistema</a:t>
+            </a:r>
+            <a:endParaRPr lang="pt-BR" sz="1150" dirty="0"/>
+          </a:p>
+        </p:txBody>
+      </p:sp>
+      <p:sp>
+        <p:nvSpPr>
+          <p:cNvPr id="49" name="Slide Number Placeholder 0"/>
+          <p:cNvSpPr>
+            <a:spLocks noGrp="1"/>
+          </p:cNvSpPr>
+          <p:nvPr>
+            <p:ph type="sldNum" sz="quarter" idx="4294967295"/>
+          </p:nvPr>
+        </p:nvSpPr>
+        <p:spPr>
+          <a:xfrm>
+            <a:off x="11183112" y="6419088"/>
+            <a:ext cx="457200" cy="274320"/>
+          </a:xfrm>
+          <a:prstGeom prst="rect">
+            <a:avLst/>
+          </a:prstGeom>
+        </p:spPr>
+        <p:txBody>
+          <a:bodyPr lIns="0" tIns="0" rIns="0" bIns="0" anchor="ctr"/>
+          <a:lstStyle>
+            <a:lvl1pPr>
+              <a:defRPr sz="900">
+                <a:solidFill>
+                  <a:srgbClr val="556B82"/>
+                </a:solidFill>
+              </a:defRPr>
+            </a:lvl1pPr>
+          </a:lstStyle>
+          <a:p>
+            <a:pPr algn="r"/>
+            <a:fld id="{F7021451-1387-4CA6-816F-3879F97B5CBC}" type="slidenum">
+              <a:rPr b="0" lang="en-US"/>
+              <a:t>1</a:t>
+            </a:fld>
+            <a:endParaRPr lang="en-US"/>
+          </a:p>
+        </p:txBody>
+      </p:sp>
+    </p:spTree>
+  </p:cSld>
+  <p:clrMapOvr>
+    <a:masterClrMapping/>
+  </p:clrMapOvr>
+</p:sld>
+</file>
+
+<file path=ppt/slides/slide34.xml><?xml version="1.0" encoding="utf-8"?>
+<p:sld xmlns:a="http://schemas.openxmlformats.org/drawingml/2006/main" xmlns:r="http://schemas.openxmlformats.org/officeDocument/2006/relationships" xmlns:p="http://schemas.openxmlformats.org/presentationml/2006/main">
+  <p:cSld>
+    <p:spTree>
+      <p:nvGrpSpPr>
+        <p:cNvPr id="1" name=""/>
+        <p:cNvGrpSpPr/>
+        <p:nvPr/>
+      </p:nvGrpSpPr>
+      <p:grpSpPr>
+        <a:xfrm>
+          <a:off x="0" y="0"/>
+          <a:ext cx="0" cy="0"/>
+          <a:chOff x="0" y="0"/>
+          <a:chExt cx="0" cy="0"/>
+        </a:xfrm>
+      </p:grpSpPr>
+      <p:sp>
+        <p:nvSpPr>
+          <p:cNvPr id="3" name="Rótulo"/>
+          <p:cNvSpPr/>
+          <p:nvPr>
+            <p:ph idx="100" type="body" hasCustomPrompt="1"/>
+          </p:nvPr>
+        </p:nvSpPr>
+        <p:spPr>
+          <a:xfrm>
+            <a:off x="548640" y="384048"/>
+            <a:ext cx="9144000" cy="274320"/>
+          </a:xfrm>
+          <a:prstGeom prst="rect">
+            <a:avLst/>
+          </a:prstGeom>
+          <a:noFill/>
+          <a:ln/>
+        </p:spPr>
+        <p:txBody>
+          <a:bodyPr wrap="square" lIns="0" tIns="0" rIns="0" bIns="0" rtlCol="0" anchor="ctr"/>
+          <a:lstStyle/>
+          <a:p>
+            <a:pPr algn="l" indent="0" marL="0">
+              <a:buNone/>
+            </a:pPr>
+            <a:r>
+              <a:rPr lang="pt-BR" sz="1100" b="1" spc="150" kern="0" dirty="0">
+                <a:solidFill>
+                  <a:schemeClr val="accent1"/>
+                </a:solidFill>
+              </a:rPr>
+              <a:t>ANTES DO DEPLOY · RESPONSABILIDADE</a:t>
+            </a:r>
+            <a:endParaRPr lang="pt-BR" sz="1100" dirty="0"/>
+          </a:p>
+        </p:txBody>
+      </p:sp>
+      <p:sp>
+        <p:nvSpPr>
+          <p:cNvPr id="4" name="Título"/>
+          <p:cNvSpPr/>
+          <p:nvPr>
+            <p:ph idx="101" type="title" hasCustomPrompt="1"/>
+          </p:nvPr>
+        </p:nvSpPr>
+        <p:spPr>
+          <a:xfrm>
+            <a:off x="548640" y="676656"/>
+            <a:ext cx="11094415" cy="658368"/>
+          </a:xfrm>
+          <a:prstGeom prst="rect">
+            <a:avLst/>
+          </a:prstGeom>
+          <a:noFill/>
+          <a:ln/>
+        </p:spPr>
+        <p:txBody>
+          <a:bodyPr wrap="square" lIns="0" tIns="0" rIns="0" bIns="0" rtlCol="0" anchor="ctr"/>
+          <a:lstStyle/>
+          <a:p>
+            <a:pPr algn="l" indent="0" marL="0">
+              <a:buNone/>
+            </a:pPr>
+            <a:r>
+              <a:rPr lang="pt-BR" sz="3000" b="1" dirty="0">
+                <a:solidFill>
+                  <a:schemeClr val="tx1"/>
+                </a:solidFill>
+              </a:rPr>
+              <a:t>Quem roda o deploy responde pelo que publica</a:t>
+            </a:r>
+            <a:endParaRPr lang="pt-BR" sz="3000" dirty="0"/>
+          </a:p>
+        </p:txBody>
+      </p:sp>
+      <p:sp>
+        <p:nvSpPr>
+          <p:cNvPr id="5" name="Etapa lint"/>
+          <p:cNvSpPr/>
+          <p:nvPr/>
+        </p:nvSpPr>
+        <p:spPr>
+          <a:xfrm>
+            <a:off x="548640" y="1645920"/>
+            <a:ext cx="1658112" cy="868680"/>
+          </a:xfrm>
+          <a:prstGeom prst="roundRect">
+            <a:avLst>
+              <a:gd name="adj" fmla="val 5217"/>
+            </a:avLst>
+          </a:prstGeom>
+          <a:solidFill>
+            <a:srgbClr val="FFFFFF"/>
+          </a:solidFill>
+          <a:ln>
+            <a:noFill/>
+          </a:ln>
+          <a:effectLst>
+            <a:outerShdw sx="100000" sy="100000" kx="0" ky="0" algn="bl" rotWithShape="0" blurRad="101600" dist="25400" dir="5400000">
+              <a:srgbClr val="223548">
+                <a:alpha val="16000"/>
+              </a:srgbClr>
+            </a:outerShdw>
+          </a:effectLst>
+        </p:spPr>
+      </p:sp>
+      <p:sp>
+        <p:nvSpPr>
+          <p:cNvPr id="6" name="Ícone inspection"/>
+          <p:cNvSpPr/>
+          <p:nvPr/>
+        </p:nvSpPr>
+        <p:spPr>
+          <a:xfrm>
+            <a:off x="685800" y="1865376"/>
+            <a:ext cx="438912" cy="438912"/>
+          </a:xfrm>
+          <a:prstGeom prst="roundRect">
+            <a:avLst>
+              <a:gd name="adj" fmla="val 22000"/>
+            </a:avLst>
+          </a:prstGeom>
+          <a:solidFill>
+            <a:srgbClr val="E1F4FF"/>
+          </a:solidFill>
+          <a:ln>
+            <a:noFill/>
+          </a:ln>
+        </p:spPr>
+      </p:sp>
+      <p:pic>
+        <p:nvPicPr>
+          <p:cNvPr id="7" name="Imagem" descr="inspection"/>
+          <p:cNvPicPr>
+            <a:picLocks noChangeAspect="1"/>
+          </p:cNvPicPr>
+          <p:nvPr/>
+        </p:nvPicPr>
+        <p:blipFill>
+          <a:blip r:embed="rId1"/>
+          <a:stretch>
+            <a:fillRect/>
+          </a:stretch>
+        </p:blipFill>
+        <p:spPr>
+          <a:xfrm>
+            <a:off x="791139" y="1970715"/>
+            <a:ext cx="228234" cy="228234"/>
+          </a:xfrm>
+          <a:prstGeom prst="rect">
+            <a:avLst/>
+          </a:prstGeom>
+        </p:spPr>
+      </p:pic>
+      <p:sp>
+        <p:nvSpPr>
+          <p:cNvPr id="8" name="Texto"/>
+          <p:cNvSpPr txBox="1"/>
+          <p:nvPr/>
+        </p:nvSpPr>
+        <p:spPr>
+          <a:xfrm>
+            <a:off x="1234440" y="1645920"/>
+            <a:ext cx="880872" cy="868680"/>
+          </a:xfrm>
+          <a:prstGeom prst="roundRect">
+            <a:avLst/>
+          </a:prstGeom>
+          <a:noFill/>
+          <a:ln>
+            <a:noFill/>
+          </a:ln>
+        </p:spPr>
+        <p:txBody>
+          <a:bodyPr wrap="square" lIns="0" tIns="0" rIns="0" bIns="0" rtlCol="0" anchor="ctr"/>
+          <a:lstStyle/>
+          <a:p>
+            <a:pPr algn="l" indent="0" marL="0">
+              <a:buNone/>
+            </a:pPr>
+            <a:r>
+              <a:rPr lang="pt-BR" sz="1250" b="1" dirty="0">
+                <a:solidFill>
+                  <a:srgbClr val="1D2D3E"/>
+                </a:solidFill>
+              </a:rPr>
+              <a:t>1. lint</a:t>
+            </a:r>
+            <a:endParaRPr lang="pt-BR" sz="1250" dirty="0"/>
+          </a:p>
+        </p:txBody>
+      </p:sp>
+      <p:cxnSp>
+        <p:nvCxnSpPr>
+          <p:cNvPr id="9" name="Conector"/>
+          <p:cNvCxnSpPr/>
+          <p:nvPr/>
+        </p:nvCxnSpPr>
+        <p:spPr>
+          <a:xfrm>
+            <a:off x="2234184" y="2080260"/>
+            <a:ext cx="173736" cy="0"/>
+          </a:xfrm>
+          <a:prstGeom prst="line">
+            <a:avLst/>
+          </a:prstGeom>
+          <a:noFill/>
+          <a:ln w="19050">
+            <a:solidFill>
+              <a:srgbClr val="556B82"/>
+            </a:solidFill>
+            <a:prstDash val="solid"/>
+            <a:round/>
+            <a:tailEnd type="triangle"/>
+          </a:ln>
+        </p:spPr>
+      </p:cxnSp>
+      <p:sp>
+        <p:nvSpPr>
+          <p:cNvPr id="10" name="Etapa testes"/>
+          <p:cNvSpPr/>
+          <p:nvPr/>
+        </p:nvSpPr>
+        <p:spPr>
+          <a:xfrm>
+            <a:off x="2435352" y="1645920"/>
+            <a:ext cx="1658112" cy="868680"/>
+          </a:xfrm>
+          <a:prstGeom prst="roundRect">
+            <a:avLst>
+              <a:gd name="adj" fmla="val 5217"/>
+            </a:avLst>
+          </a:prstGeom>
+          <a:solidFill>
+            <a:srgbClr val="FFFFFF"/>
+          </a:solidFill>
+          <a:ln>
+            <a:noFill/>
+          </a:ln>
+          <a:effectLst>
+            <a:outerShdw sx="100000" sy="100000" kx="0" ky="0" algn="bl" rotWithShape="0" blurRad="101600" dist="25400" dir="5400000">
+              <a:srgbClr val="223548">
+                <a:alpha val="16000"/>
+              </a:srgbClr>
+            </a:outerShdw>
+          </a:effectLst>
+        </p:spPr>
+      </p:sp>
+      <p:sp>
+        <p:nvSpPr>
+          <p:cNvPr id="11" name="Ícone validate"/>
+          <p:cNvSpPr/>
+          <p:nvPr/>
+        </p:nvSpPr>
+        <p:spPr>
+          <a:xfrm>
+            <a:off x="2572512" y="1865376"/>
+            <a:ext cx="438912" cy="438912"/>
+          </a:xfrm>
+          <a:prstGeom prst="roundRect">
+            <a:avLst>
+              <a:gd name="adj" fmla="val 22000"/>
+            </a:avLst>
+          </a:prstGeom>
+          <a:solidFill>
+            <a:srgbClr val="F5FAE5"/>
+          </a:solidFill>
+          <a:ln>
+            <a:noFill/>
+          </a:ln>
+        </p:spPr>
+      </p:sp>
+      <p:pic>
+        <p:nvPicPr>
+          <p:cNvPr id="12" name="Imagem" descr="validate"/>
+          <p:cNvPicPr>
+            <a:picLocks noChangeAspect="1"/>
+          </p:cNvPicPr>
+          <p:nvPr/>
+        </p:nvPicPr>
+        <p:blipFill>
+          <a:blip r:embed="rId2"/>
+          <a:stretch>
+            <a:fillRect/>
+          </a:stretch>
+        </p:blipFill>
+        <p:spPr>
+          <a:xfrm>
+            <a:off x="2677851" y="1970715"/>
+            <a:ext cx="228234" cy="228234"/>
+          </a:xfrm>
+          <a:prstGeom prst="rect">
+            <a:avLst/>
+          </a:prstGeom>
+        </p:spPr>
+      </p:pic>
+      <p:sp>
+        <p:nvSpPr>
+          <p:cNvPr id="13" name="Texto"/>
+          <p:cNvSpPr txBox="1"/>
+          <p:nvPr/>
+        </p:nvSpPr>
+        <p:spPr>
+          <a:xfrm>
+            <a:off x="3121152" y="1645920"/>
+            <a:ext cx="880872" cy="868680"/>
+          </a:xfrm>
+          <a:prstGeom prst="roundRect">
+            <a:avLst/>
+          </a:prstGeom>
+          <a:noFill/>
+          <a:ln>
+            <a:noFill/>
+          </a:ln>
+        </p:spPr>
+        <p:txBody>
+          <a:bodyPr wrap="square" lIns="0" tIns="0" rIns="0" bIns="0" rtlCol="0" anchor="ctr"/>
+          <a:lstStyle/>
+          <a:p>
+            <a:pPr algn="l" indent="0" marL="0">
+              <a:buNone/>
+            </a:pPr>
+            <a:r>
+              <a:rPr lang="pt-BR" sz="1250" b="1" dirty="0">
+                <a:solidFill>
+                  <a:srgbClr val="1D2D3E"/>
+                </a:solidFill>
+              </a:rPr>
+              <a:t>2. testes</a:t>
+            </a:r>
+            <a:endParaRPr lang="pt-BR" sz="1250" dirty="0"/>
+          </a:p>
+        </p:txBody>
+      </p:sp>
+      <p:cxnSp>
+        <p:nvCxnSpPr>
+          <p:cNvPr id="14" name="Conector"/>
+          <p:cNvCxnSpPr/>
+          <p:nvPr/>
+        </p:nvCxnSpPr>
+        <p:spPr>
+          <a:xfrm>
+            <a:off x="4120896" y="2080260"/>
+            <a:ext cx="173736" cy="0"/>
+          </a:xfrm>
+          <a:prstGeom prst="line">
+            <a:avLst/>
+          </a:prstGeom>
+          <a:noFill/>
+          <a:ln w="19050">
+            <a:solidFill>
+              <a:srgbClr val="556B82"/>
+            </a:solidFill>
+            <a:prstDash val="solid"/>
+            <a:round/>
+            <a:tailEnd type="triangle"/>
+          </a:ln>
+        </p:spPr>
+      </p:cxnSp>
+      <p:sp>
+        <p:nvSpPr>
+          <p:cNvPr id="15" name="Etapa UI5 linter"/>
+          <p:cNvSpPr/>
+          <p:nvPr/>
+        </p:nvSpPr>
+        <p:spPr>
+          <a:xfrm>
+            <a:off x="4322064" y="1645920"/>
+            <a:ext cx="1658112" cy="868680"/>
+          </a:xfrm>
+          <a:prstGeom prst="roundRect">
+            <a:avLst>
+              <a:gd name="adj" fmla="val 5217"/>
+            </a:avLst>
+          </a:prstGeom>
+          <a:solidFill>
+            <a:srgbClr val="FFFFFF"/>
+          </a:solidFill>
+          <a:ln>
+            <a:noFill/>
+          </a:ln>
+          <a:effectLst>
+            <a:outerShdw sx="100000" sy="100000" kx="0" ky="0" algn="bl" rotWithShape="0" blurRad="101600" dist="25400" dir="5400000">
+              <a:srgbClr val="223548">
+                <a:alpha val="16000"/>
+              </a:srgbClr>
+            </a:outerShdw>
+          </a:effectLst>
+        </p:spPr>
+      </p:sp>
+      <p:sp>
+        <p:nvSpPr>
+          <p:cNvPr id="16" name="Ícone syntax"/>
+          <p:cNvSpPr/>
+          <p:nvPr/>
+        </p:nvSpPr>
+        <p:spPr>
+          <a:xfrm>
+            <a:off x="4459224" y="1865376"/>
+            <a:ext cx="438912" cy="438912"/>
+          </a:xfrm>
+          <a:prstGeom prst="roundRect">
+            <a:avLst>
+              <a:gd name="adj" fmla="val 22000"/>
+            </a:avLst>
+          </a:prstGeom>
+          <a:solidFill>
+            <a:srgbClr val="FFF3E0"/>
+          </a:solidFill>
+          <a:ln>
+            <a:noFill/>
+          </a:ln>
+        </p:spPr>
+      </p:sp>
+      <p:pic>
+        <p:nvPicPr>
+          <p:cNvPr id="17" name="Imagem" descr="syntax"/>
+          <p:cNvPicPr>
+            <a:picLocks noChangeAspect="1"/>
+          </p:cNvPicPr>
+          <p:nvPr/>
+        </p:nvPicPr>
+        <p:blipFill>
+          <a:blip r:embed="rId3"/>
+          <a:stretch>
+            <a:fillRect/>
+          </a:stretch>
+        </p:blipFill>
+        <p:spPr>
+          <a:xfrm>
+            <a:off x="4564563" y="1970715"/>
+            <a:ext cx="228234" cy="228234"/>
+          </a:xfrm>
+          <a:prstGeom prst="rect">
+            <a:avLst/>
+          </a:prstGeom>
+        </p:spPr>
+      </p:pic>
+      <p:sp>
+        <p:nvSpPr>
+          <p:cNvPr id="18" name="Texto"/>
+          <p:cNvSpPr txBox="1"/>
+          <p:nvPr/>
+        </p:nvSpPr>
+        <p:spPr>
+          <a:xfrm>
+            <a:off x="5007864" y="1645920"/>
+            <a:ext cx="880872" cy="868680"/>
+          </a:xfrm>
+          <a:prstGeom prst="roundRect">
+            <a:avLst/>
+          </a:prstGeom>
+          <a:noFill/>
+          <a:ln>
+            <a:noFill/>
+          </a:ln>
+        </p:spPr>
+        <p:txBody>
+          <a:bodyPr wrap="square" lIns="0" tIns="0" rIns="0" bIns="0" rtlCol="0" anchor="ctr"/>
+          <a:lstStyle/>
+          <a:p>
+            <a:pPr algn="l" indent="0" marL="0">
+              <a:buNone/>
+            </a:pPr>
+            <a:r>
+              <a:rPr lang="pt-BR" sz="1250" b="1" dirty="0">
+                <a:solidFill>
+                  <a:srgbClr val="1D2D3E"/>
+                </a:solidFill>
+              </a:rPr>
+              <a:t>3. UI5 linter</a:t>
+            </a:r>
+            <a:endParaRPr lang="pt-BR" sz="1250" dirty="0"/>
+          </a:p>
+        </p:txBody>
+      </p:sp>
+      <p:cxnSp>
+        <p:nvCxnSpPr>
+          <p:cNvPr id="19" name="Conector"/>
+          <p:cNvCxnSpPr/>
+          <p:nvPr/>
+        </p:nvCxnSpPr>
+        <p:spPr>
+          <a:xfrm>
+            <a:off x="6007608" y="2080260"/>
+            <a:ext cx="173736" cy="0"/>
+          </a:xfrm>
+          <a:prstGeom prst="line">
+            <a:avLst/>
+          </a:prstGeom>
+          <a:noFill/>
+          <a:ln w="19050">
+            <a:solidFill>
+              <a:srgbClr val="556B82"/>
+            </a:solidFill>
+            <a:prstDash val="solid"/>
+            <a:round/>
+            <a:tailEnd type="triangle"/>
+          </a:ln>
+        </p:spPr>
+      </p:cxnSp>
+      <p:sp>
+        <p:nvSpPr>
+          <p:cNvPr id="20" name="Etapa build"/>
+          <p:cNvSpPr/>
+          <p:nvPr/>
+        </p:nvSpPr>
+        <p:spPr>
+          <a:xfrm>
+            <a:off x="6208776" y="1645920"/>
+            <a:ext cx="1658112" cy="868680"/>
+          </a:xfrm>
+          <a:prstGeom prst="roundRect">
+            <a:avLst>
+              <a:gd name="adj" fmla="val 5217"/>
+            </a:avLst>
+          </a:prstGeom>
+          <a:solidFill>
+            <a:srgbClr val="FFFFFF"/>
+          </a:solidFill>
+          <a:ln>
+            <a:noFill/>
+          </a:ln>
+          <a:effectLst>
+            <a:outerShdw sx="100000" sy="100000" kx="0" ky="0" algn="bl" rotWithShape="0" blurRad="101600" dist="25400" dir="5400000">
+              <a:srgbClr val="223548">
+                <a:alpha val="16000"/>
+              </a:srgbClr>
+            </a:outerShdw>
+          </a:effectLst>
+        </p:spPr>
+      </p:sp>
+      <p:sp>
+        <p:nvSpPr>
+          <p:cNvPr id="21" name="Ícone sap-box"/>
+          <p:cNvSpPr/>
+          <p:nvPr/>
+        </p:nvSpPr>
+        <p:spPr>
+          <a:xfrm>
+            <a:off x="6345936" y="1865376"/>
+            <a:ext cx="438912" cy="438912"/>
+          </a:xfrm>
+          <a:prstGeom prst="roundRect">
+            <a:avLst>
+              <a:gd name="adj" fmla="val 22000"/>
+            </a:avLst>
+          </a:prstGeom>
+          <a:solidFill>
+            <a:srgbClr val="E3F7F6"/>
+          </a:solidFill>
+          <a:ln>
+            <a:noFill/>
+          </a:ln>
+        </p:spPr>
+      </p:sp>
+      <p:pic>
+        <p:nvPicPr>
+          <p:cNvPr id="22" name="Imagem" descr="sap-box"/>
+          <p:cNvPicPr>
+            <a:picLocks noChangeAspect="1"/>
+          </p:cNvPicPr>
+          <p:nvPr/>
+        </p:nvPicPr>
+        <p:blipFill>
+          <a:blip r:embed="rId4"/>
+          <a:stretch>
+            <a:fillRect/>
+          </a:stretch>
+        </p:blipFill>
+        <p:spPr>
+          <a:xfrm>
+            <a:off x="6451275" y="1970715"/>
+            <a:ext cx="228234" cy="228234"/>
+          </a:xfrm>
+          <a:prstGeom prst="rect">
+            <a:avLst/>
+          </a:prstGeom>
+        </p:spPr>
+      </p:pic>
+      <p:sp>
+        <p:nvSpPr>
+          <p:cNvPr id="23" name="Texto"/>
+          <p:cNvSpPr txBox="1"/>
+          <p:nvPr/>
+        </p:nvSpPr>
+        <p:spPr>
+          <a:xfrm>
+            <a:off x="6894576" y="1645920"/>
+            <a:ext cx="880872" cy="868680"/>
+          </a:xfrm>
+          <a:prstGeom prst="roundRect">
+            <a:avLst/>
+          </a:prstGeom>
+          <a:noFill/>
+          <a:ln>
+            <a:noFill/>
+          </a:ln>
+        </p:spPr>
+        <p:txBody>
+          <a:bodyPr wrap="square" lIns="0" tIns="0" rIns="0" bIns="0" rtlCol="0" anchor="ctr"/>
+          <a:lstStyle/>
+          <a:p>
+            <a:pPr algn="l" indent="0" marL="0">
+              <a:buNone/>
+            </a:pPr>
+            <a:r>
+              <a:rPr lang="pt-BR" sz="1250" b="1" dirty="0">
+                <a:solidFill>
+                  <a:srgbClr val="1D2D3E"/>
+                </a:solidFill>
+              </a:rPr>
+              <a:t>4. build</a:t>
+            </a:r>
+            <a:endParaRPr lang="pt-BR" sz="1250" dirty="0"/>
+          </a:p>
+        </p:txBody>
+      </p:sp>
+      <p:cxnSp>
+        <p:nvCxnSpPr>
+          <p:cNvPr id="24" name="Conector"/>
+          <p:cNvCxnSpPr/>
+          <p:nvPr/>
+        </p:nvCxnSpPr>
+        <p:spPr>
+          <a:xfrm>
+            <a:off x="7894320" y="2080260"/>
+            <a:ext cx="173736" cy="0"/>
+          </a:xfrm>
+          <a:prstGeom prst="line">
+            <a:avLst/>
+          </a:prstGeom>
+          <a:noFill/>
+          <a:ln w="19050">
+            <a:solidFill>
+              <a:srgbClr val="556B82"/>
+            </a:solidFill>
+            <a:prstDash val="solid"/>
+            <a:round/>
+            <a:tailEnd type="triangle"/>
+          </a:ln>
+        </p:spPr>
+      </p:cxnSp>
+      <p:sp>
+        <p:nvSpPr>
+          <p:cNvPr id="25" name="Etapa deploy-test"/>
+          <p:cNvSpPr/>
+          <p:nvPr/>
+        </p:nvSpPr>
+        <p:spPr>
+          <a:xfrm>
+            <a:off x="8095488" y="1645920"/>
+            <a:ext cx="1658112" cy="868680"/>
+          </a:xfrm>
+          <a:prstGeom prst="roundRect">
+            <a:avLst>
+              <a:gd name="adj" fmla="val 5217"/>
+            </a:avLst>
+          </a:prstGeom>
+          <a:solidFill>
+            <a:srgbClr val="FFFFFF"/>
+          </a:solidFill>
+          <a:ln>
+            <a:noFill/>
+          </a:ln>
+          <a:effectLst>
+            <a:outerShdw sx="100000" sy="100000" kx="0" ky="0" algn="bl" rotWithShape="0" blurRad="101600" dist="25400" dir="5400000">
+              <a:srgbClr val="223548">
+                <a:alpha val="16000"/>
+              </a:srgbClr>
+            </a:outerShdw>
+          </a:effectLst>
+        </p:spPr>
+      </p:sp>
+      <p:sp>
+        <p:nvSpPr>
+          <p:cNvPr id="26" name="Ícone upload-to-cloud"/>
+          <p:cNvSpPr/>
+          <p:nvPr/>
+        </p:nvSpPr>
+        <p:spPr>
+          <a:xfrm>
+            <a:off x="8232648" y="1865376"/>
+            <a:ext cx="438912" cy="438912"/>
+          </a:xfrm>
+          <a:prstGeom prst="roundRect">
+            <a:avLst>
+              <a:gd name="adj" fmla="val 22000"/>
+            </a:avLst>
+          </a:prstGeom>
+          <a:solidFill>
+            <a:srgbClr val="FDE8F1"/>
+          </a:solidFill>
+          <a:ln>
+            <a:noFill/>
+          </a:ln>
+        </p:spPr>
+      </p:sp>
+      <p:pic>
+        <p:nvPicPr>
+          <p:cNvPr id="27" name="Imagem" descr="upload-to-cloud"/>
+          <p:cNvPicPr>
+            <a:picLocks noChangeAspect="1"/>
+          </p:cNvPicPr>
+          <p:nvPr/>
+        </p:nvPicPr>
+        <p:blipFill>
+          <a:blip r:embed="rId5"/>
+          <a:stretch>
+            <a:fillRect/>
+          </a:stretch>
+        </p:blipFill>
+        <p:spPr>
+          <a:xfrm>
+            <a:off x="8337987" y="1970715"/>
+            <a:ext cx="228234" cy="228234"/>
+          </a:xfrm>
+          <a:prstGeom prst="rect">
+            <a:avLst/>
+          </a:prstGeom>
+        </p:spPr>
+      </p:pic>
+      <p:sp>
+        <p:nvSpPr>
+          <p:cNvPr id="28" name="Texto"/>
+          <p:cNvSpPr txBox="1"/>
+          <p:nvPr/>
+        </p:nvSpPr>
+        <p:spPr>
+          <a:xfrm>
+            <a:off x="8781288" y="1645920"/>
+            <a:ext cx="880872" cy="868680"/>
+          </a:xfrm>
+          <a:prstGeom prst="roundRect">
+            <a:avLst/>
+          </a:prstGeom>
+          <a:noFill/>
+          <a:ln>
+            <a:noFill/>
+          </a:ln>
+        </p:spPr>
+        <p:txBody>
+          <a:bodyPr wrap="square" lIns="0" tIns="0" rIns="0" bIns="0" rtlCol="0" anchor="ctr"/>
+          <a:lstStyle/>
+          <a:p>
+            <a:pPr algn="l" indent="0" marL="0">
+              <a:buNone/>
+            </a:pPr>
+            <a:r>
+              <a:rPr lang="pt-BR" sz="1250" b="1" dirty="0">
+                <a:solidFill>
+                  <a:srgbClr val="1D2D3E"/>
+                </a:solidFill>
+              </a:rPr>
+              <a:t>5. deploy-test</a:t>
+            </a:r>
+            <a:endParaRPr lang="pt-BR" sz="1250" dirty="0"/>
+          </a:p>
+        </p:txBody>
+      </p:sp>
+      <p:cxnSp>
+        <p:nvCxnSpPr>
+          <p:cNvPr id="29" name="Conector"/>
+          <p:cNvCxnSpPr/>
+          <p:nvPr/>
+        </p:nvCxnSpPr>
+        <p:spPr>
+          <a:xfrm>
+            <a:off x="9781032" y="2080260"/>
+            <a:ext cx="173736" cy="0"/>
+          </a:xfrm>
+          <a:prstGeom prst="line">
+            <a:avLst/>
+          </a:prstGeom>
+          <a:noFill/>
+          <a:ln w="19050">
+            <a:solidFill>
+              <a:srgbClr val="556B82"/>
+            </a:solidFill>
+            <a:prstDash val="solid"/>
+            <a:round/>
+            <a:tailEnd type="triangle"/>
+          </a:ln>
+        </p:spPr>
+      </p:cxnSp>
+      <p:sp>
+        <p:nvSpPr>
+          <p:cNvPr id="30" name="Etapa deploy"/>
+          <p:cNvSpPr/>
+          <p:nvPr/>
+        </p:nvSpPr>
+        <p:spPr>
+          <a:xfrm>
+            <a:off x="9982200" y="1645920"/>
+            <a:ext cx="1658112" cy="868680"/>
+          </a:xfrm>
+          <a:prstGeom prst="roundRect">
+            <a:avLst>
+              <a:gd name="adj" fmla="val 5217"/>
+            </a:avLst>
+          </a:prstGeom>
+          <a:solidFill>
+            <a:srgbClr val="0070F2"/>
+          </a:solidFill>
+          <a:ln>
+            <a:noFill/>
+          </a:ln>
+        </p:spPr>
+      </p:sp>
+      <p:sp>
+        <p:nvSpPr>
+          <p:cNvPr id="31" name="Ícone upload-to-cloud"/>
+          <p:cNvSpPr/>
+          <p:nvPr/>
+        </p:nvSpPr>
+        <p:spPr>
+          <a:xfrm>
+            <a:off x="10119360" y="1865376"/>
+            <a:ext cx="438912" cy="438912"/>
+          </a:xfrm>
+          <a:prstGeom prst="roundRect">
+            <a:avLst>
+              <a:gd name="adj" fmla="val 22000"/>
+            </a:avLst>
+          </a:prstGeom>
+          <a:solidFill>
+            <a:srgbClr val="FFFFFF"/>
+          </a:solidFill>
+          <a:ln>
+            <a:noFill/>
+          </a:ln>
+        </p:spPr>
+      </p:sp>
+      <p:pic>
+        <p:nvPicPr>
+          <p:cNvPr id="32" name="Imagem" descr="upload-to-cloud"/>
+          <p:cNvPicPr>
+            <a:picLocks noChangeAspect="1"/>
+          </p:cNvPicPr>
+          <p:nvPr/>
+        </p:nvPicPr>
+        <p:blipFill>
+          <a:blip r:embed="rId6"/>
+          <a:stretch>
+            <a:fillRect/>
+          </a:stretch>
+        </p:blipFill>
+        <p:spPr>
+          <a:xfrm>
+            <a:off x="10224699" y="1970715"/>
+            <a:ext cx="228234" cy="228234"/>
+          </a:xfrm>
+          <a:prstGeom prst="rect">
+            <a:avLst/>
+          </a:prstGeom>
+        </p:spPr>
+      </p:pic>
+      <p:sp>
+        <p:nvSpPr>
+          <p:cNvPr id="33" name="Texto"/>
+          <p:cNvSpPr txBox="1"/>
+          <p:nvPr/>
+        </p:nvSpPr>
+        <p:spPr>
+          <a:xfrm>
+            <a:off x="10668000" y="1645920"/>
+            <a:ext cx="880872" cy="868680"/>
+          </a:xfrm>
+          <a:prstGeom prst="roundRect">
+            <a:avLst/>
+          </a:prstGeom>
+          <a:noFill/>
+          <a:ln>
+            <a:noFill/>
+          </a:ln>
+        </p:spPr>
+        <p:txBody>
+          <a:bodyPr wrap="square" lIns="0" tIns="0" rIns="0" bIns="0" rtlCol="0" anchor="ctr"/>
+          <a:lstStyle/>
+          <a:p>
+            <a:pPr algn="l" indent="0" marL="0">
+              <a:buNone/>
+            </a:pPr>
+            <a:r>
+              <a:rPr lang="pt-BR" sz="1250" b="1" dirty="0">
+                <a:solidFill>
+                  <a:srgbClr val="FFFFFF"/>
+                </a:solidFill>
+              </a:rPr>
+              <a:t>6. deploy</a:t>
+            </a:r>
+            <a:endParaRPr lang="pt-BR" sz="1250" dirty="0"/>
+          </a:p>
+        </p:txBody>
+      </p:sp>
+      <p:sp>
+        <p:nvSpPr>
+          <p:cNvPr id="34" name="Regra"/>
+          <p:cNvSpPr/>
+          <p:nvPr/>
+        </p:nvSpPr>
+        <p:spPr>
+          <a:xfrm>
+            <a:off x="548640" y="2697480"/>
+            <a:ext cx="11091672" cy="640080"/>
+          </a:xfrm>
+          <a:prstGeom prst="roundRect">
+            <a:avLst>
+              <a:gd name="adj" fmla="val 9000"/>
+            </a:avLst>
+          </a:prstGeom>
+          <a:solidFill>
+            <a:srgbClr val="FFEAF4"/>
+          </a:solidFill>
+          <a:ln>
+            <a:noFill/>
+          </a:ln>
+        </p:spPr>
+      </p:sp>
+      <p:sp>
+        <p:nvSpPr>
+          <p:cNvPr id="35" name="Ícone alert"/>
+          <p:cNvSpPr/>
+          <p:nvPr/>
+        </p:nvSpPr>
+        <p:spPr>
+          <a:xfrm>
+            <a:off x="713232" y="2798064"/>
+            <a:ext cx="438912" cy="438912"/>
+          </a:xfrm>
+          <a:prstGeom prst="roundRect">
+            <a:avLst>
+              <a:gd name="adj" fmla="val 22000"/>
+            </a:avLst>
+          </a:prstGeom>
+          <a:solidFill>
+            <a:srgbClr val="FFFFFF"/>
+          </a:solidFill>
+          <a:ln>
+            <a:noFill/>
+          </a:ln>
+        </p:spPr>
+      </p:sp>
+      <p:pic>
+        <p:nvPicPr>
+          <p:cNvPr id="36" name="Imagem" descr="alert"/>
+          <p:cNvPicPr>
+            <a:picLocks noChangeAspect="1"/>
+          </p:cNvPicPr>
+          <p:nvPr/>
+        </p:nvPicPr>
+        <p:blipFill>
+          <a:blip r:embed="rId7"/>
+          <a:stretch>
+            <a:fillRect/>
+          </a:stretch>
+        </p:blipFill>
+        <p:spPr>
+          <a:xfrm>
+            <a:off x="818571" y="2903403"/>
+            <a:ext cx="228234" cy="228234"/>
+          </a:xfrm>
+          <a:prstGeom prst="rect">
+            <a:avLst/>
+          </a:prstGeom>
+        </p:spPr>
+      </p:pic>
+      <p:sp>
+        <p:nvSpPr>
+          <p:cNvPr id="37" name="Texto"/>
+          <p:cNvSpPr txBox="1"/>
+          <p:nvPr/>
+        </p:nvSpPr>
+        <p:spPr>
+          <a:xfrm>
+            <a:off x="1325880" y="2697480"/>
+            <a:ext cx="10149840" cy="640080"/>
+          </a:xfrm>
+          <a:prstGeom prst="roundRect">
+            <a:avLst/>
+          </a:prstGeom>
+          <a:noFill/>
+          <a:ln>
+            <a:noFill/>
+          </a:ln>
+        </p:spPr>
+        <p:txBody>
+          <a:bodyPr wrap="square" lIns="0" tIns="0" rIns="0" bIns="0" rtlCol="0" anchor="ctr"/>
+          <a:lstStyle/>
+          <a:p>
+            <a:pPr algn="l" indent="0" marL="0">
+              <a:buNone/>
+            </a:pPr>
+            <a:r>
+              <a:rPr lang="pt-BR" sz="1250" b="1" dirty="0">
+                <a:solidFill>
+                  <a:srgbClr val="AA0808"/>
+                </a:solidFill>
+              </a:rPr>
+              <a:t xml:space="preserve">Regra: </a:t>
+            </a:r>
+            <a:r>
+              <a:rPr lang="pt-BR" sz="1250" dirty="0">
+                <a:solidFill>
+                  <a:srgbClr val="1D2D3E"/>
+                </a:solidFill>
+              </a:rPr>
+              <a:t>qualquer falha interrompe a sequência. Corrija, rode de novo desde o lint e só então siga para o deploy.</a:t>
+            </a:r>
+            <a:endParaRPr lang="pt-BR" sz="1250" dirty="0"/>
+          </a:p>
+        </p:txBody>
+      </p:sp>
+      <p:sp>
+        <p:nvSpPr>
+          <p:cNvPr id="38" name="Cartão"/>
+          <p:cNvSpPr/>
+          <p:nvPr/>
+        </p:nvSpPr>
+        <p:spPr>
+          <a:xfrm>
+            <a:off x="548640" y="3520440"/>
+            <a:ext cx="3511296" cy="2651760"/>
+          </a:xfrm>
+          <a:prstGeom prst="roundRect">
+            <a:avLst>
+              <a:gd name="adj" fmla="val 5217"/>
+            </a:avLst>
+          </a:prstGeom>
+          <a:solidFill>
+            <a:srgbClr val="FFFFFF"/>
+          </a:solidFill>
+          <a:ln>
+            <a:noFill/>
+          </a:ln>
+          <a:effectLst>
+            <a:outerShdw sx="100000" sy="100000" kx="0" ky="0" algn="bl" rotWithShape="0" blurRad="101600" dist="25400" dir="5400000">
+              <a:srgbClr val="223548">
+                <a:alpha val="16000"/>
+              </a:srgbClr>
+            </a:outerShdw>
+          </a:effectLst>
+        </p:spPr>
+      </p:sp>
+      <p:sp>
+        <p:nvSpPr>
+          <p:cNvPr id="39" name="Ícone person-placeholder"/>
+          <p:cNvSpPr/>
+          <p:nvPr/>
+        </p:nvSpPr>
+        <p:spPr>
+          <a:xfrm>
+            <a:off x="777240" y="3721608"/>
+            <a:ext cx="475488" cy="475488"/>
+          </a:xfrm>
+          <a:prstGeom prst="roundRect">
+            <a:avLst>
+              <a:gd name="adj" fmla="val 22000"/>
+            </a:avLst>
+          </a:prstGeom>
+          <a:solidFill>
+            <a:srgbClr val="E1F4FF"/>
+          </a:solidFill>
+          <a:ln>
+            <a:noFill/>
+          </a:ln>
+        </p:spPr>
+      </p:sp>
+      <p:pic>
+        <p:nvPicPr>
+          <p:cNvPr id="40" name="Imagem" descr="person-placeholder"/>
+          <p:cNvPicPr>
+            <a:picLocks noChangeAspect="1"/>
+          </p:cNvPicPr>
+          <p:nvPr/>
+        </p:nvPicPr>
+        <p:blipFill>
+          <a:blip r:embed="rId8"/>
+          <a:stretch>
+            <a:fillRect/>
+          </a:stretch>
+        </p:blipFill>
+        <p:spPr>
+          <a:xfrm>
+            <a:off x="891357" y="3835725"/>
+            <a:ext cx="247254" cy="247254"/>
+          </a:xfrm>
+          <a:prstGeom prst="rect">
+            <a:avLst/>
+          </a:prstGeom>
+        </p:spPr>
+      </p:pic>
+      <p:sp>
+        <p:nvSpPr>
+          <p:cNvPr id="41" name="Texto"/>
+          <p:cNvSpPr txBox="1"/>
+          <p:nvPr/>
+        </p:nvSpPr>
+        <p:spPr>
+          <a:xfrm>
+            <a:off x="1371600" y="3721608"/>
+            <a:ext cx="2560320" cy="475488"/>
+          </a:xfrm>
+          <a:prstGeom prst="roundRect">
+            <a:avLst/>
+          </a:prstGeom>
+          <a:noFill/>
+          <a:ln>
+            <a:noFill/>
+          </a:ln>
+        </p:spPr>
+        <p:txBody>
+          <a:bodyPr wrap="square" lIns="0" tIns="0" rIns="0" bIns="0" rtlCol="0" anchor="ctr"/>
+          <a:lstStyle/>
+          <a:p>
+            <a:pPr algn="l" indent="0" marL="0">
+              <a:buNone/>
+            </a:pPr>
+            <a:r>
+              <a:rPr lang="pt-BR" sz="1400" b="1" dirty="0">
+                <a:solidFill>
+                  <a:srgbClr val="1D2D3E"/>
+                </a:solidFill>
+              </a:rPr>
+              <a:t>Sem CI no repositório</a:t>
+            </a:r>
+            <a:endParaRPr lang="pt-BR" sz="1400" dirty="0"/>
+          </a:p>
+        </p:txBody>
+      </p:sp>
+      <p:sp>
+        <p:nvSpPr>
+          <p:cNvPr id="42" name="Texto"/>
+          <p:cNvSpPr txBox="1"/>
+          <p:nvPr/>
+        </p:nvSpPr>
+        <p:spPr>
+          <a:xfrm>
+            <a:off x="777240" y="4343400"/>
+            <a:ext cx="3063240" cy="1234440"/>
+          </a:xfrm>
+          <a:prstGeom prst="roundRect">
+            <a:avLst/>
+          </a:prstGeom>
+          <a:noFill/>
+          <a:ln>
+            <a:noFill/>
+          </a:ln>
+        </p:spPr>
+        <p:txBody>
+          <a:bodyPr wrap="square" lIns="0" tIns="0" rIns="0" bIns="0" rtlCol="0" anchor="t"/>
+          <a:lstStyle/>
+          <a:p>
+            <a:pPr algn="l" indent="0" marL="0">
+              <a:buNone/>
+            </a:pPr>
+            <a:r>
+              <a:rPr lang="pt-BR" sz="1200" dirty="0">
+                <a:solidFill>
+                  <a:srgbClr val="1D2D3E"/>
+                </a:solidFill>
+              </a:rPr>
+              <a:t>Nenhum pipeline roda os testes por você: a única barreira entre o código e o sistema é quem executa o npm run deploy.</a:t>
+            </a:r>
+            <a:endParaRPr lang="pt-BR" sz="1200" dirty="0"/>
+          </a:p>
+        </p:txBody>
+      </p:sp>
+      <p:cxnSp>
+        <p:nvCxnSpPr>
+          <p:cNvPr id="43" name="Conector"/>
+          <p:cNvCxnSpPr/>
+          <p:nvPr/>
+        </p:nvCxnSpPr>
+        <p:spPr>
+          <a:xfrm>
+            <a:off x="777240" y="5623560"/>
+            <a:ext cx="3054096" cy="0"/>
+          </a:xfrm>
+          <a:prstGeom prst="line">
+            <a:avLst/>
+          </a:prstGeom>
+          <a:noFill/>
+          <a:ln w="12700">
+            <a:solidFill>
+              <a:srgbClr val="E5E5E5"/>
+            </a:solidFill>
+            <a:prstDash val="solid"/>
+            <a:round/>
+          </a:ln>
+        </p:spPr>
+      </p:cxnSp>
+      <p:sp>
+        <p:nvSpPr>
+          <p:cNvPr id="44" name="Texto"/>
+          <p:cNvSpPr txBox="1"/>
+          <p:nvPr/>
+        </p:nvSpPr>
+        <p:spPr>
+          <a:xfrm>
+            <a:off x="777240" y="5687568"/>
+            <a:ext cx="3063240" cy="365760"/>
+          </a:xfrm>
+          <a:prstGeom prst="roundRect">
+            <a:avLst/>
+          </a:prstGeom>
+          <a:noFill/>
+          <a:ln>
+            <a:noFill/>
+          </a:ln>
+        </p:spPr>
+        <p:txBody>
+          <a:bodyPr wrap="square" lIns="0" tIns="0" rIns="0" bIns="0" rtlCol="0" anchor="ctr"/>
+          <a:lstStyle/>
+          <a:p>
+            <a:pPr algn="l" indent="0" marL="0">
+              <a:buNone/>
+            </a:pPr>
+            <a:r>
+              <a:rPr lang="pt-BR" sz="1100" b="1" dirty="0">
+                <a:solidFill>
+                  <a:srgbClr val="0070F2"/>
+                </a:solidFill>
+              </a:rPr>
+              <a:t>Responsável: quem publica</a:t>
+            </a:r>
+            <a:endParaRPr lang="pt-BR" sz="1100" dirty="0"/>
+          </a:p>
+        </p:txBody>
+      </p:sp>
+      <p:sp>
+        <p:nvSpPr>
+          <p:cNvPr id="45" name="Cartão"/>
+          <p:cNvSpPr/>
+          <p:nvPr/>
+        </p:nvSpPr>
+        <p:spPr>
+          <a:xfrm>
+            <a:off x="4338828" y="3520440"/>
+            <a:ext cx="3511296" cy="2651760"/>
+          </a:xfrm>
+          <a:prstGeom prst="roundRect">
+            <a:avLst>
+              <a:gd name="adj" fmla="val 5217"/>
+            </a:avLst>
+          </a:prstGeom>
+          <a:solidFill>
+            <a:srgbClr val="FFFFFF"/>
+          </a:solidFill>
+          <a:ln>
+            <a:noFill/>
+          </a:ln>
+          <a:effectLst>
+            <a:outerShdw sx="100000" sy="100000" kx="0" ky="0" algn="bl" rotWithShape="0" blurRad="101600" dist="25400" dir="5400000">
+              <a:srgbClr val="223548">
+                <a:alpha val="16000"/>
+              </a:srgbClr>
+            </a:outerShdw>
+          </a:effectLst>
+        </p:spPr>
+      </p:sp>
+      <p:sp>
+        <p:nvSpPr>
+          <p:cNvPr id="46" name="Ícone list"/>
+          <p:cNvSpPr/>
+          <p:nvPr/>
+        </p:nvSpPr>
+        <p:spPr>
+          <a:xfrm>
+            <a:off x="4567428" y="3721608"/>
+            <a:ext cx="475488" cy="475488"/>
+          </a:xfrm>
+          <a:prstGeom prst="roundRect">
+            <a:avLst>
+              <a:gd name="adj" fmla="val 22000"/>
+            </a:avLst>
+          </a:prstGeom>
+          <a:solidFill>
+            <a:srgbClr val="E3F7F6"/>
+          </a:solidFill>
+          <a:ln>
+            <a:noFill/>
+          </a:ln>
+        </p:spPr>
+      </p:sp>
+      <p:pic>
+        <p:nvPicPr>
+          <p:cNvPr id="47" name="Imagem" descr="list"/>
+          <p:cNvPicPr>
+            <a:picLocks noChangeAspect="1"/>
+          </p:cNvPicPr>
+          <p:nvPr/>
+        </p:nvPicPr>
+        <p:blipFill>
+          <a:blip r:embed="rId9"/>
+          <a:stretch>
+            <a:fillRect/>
+          </a:stretch>
+        </p:blipFill>
+        <p:spPr>
+          <a:xfrm>
+            <a:off x="4681545" y="3835725"/>
+            <a:ext cx="247254" cy="247254"/>
+          </a:xfrm>
+          <a:prstGeom prst="rect">
+            <a:avLst/>
+          </a:prstGeom>
+        </p:spPr>
+      </p:pic>
+      <p:sp>
+        <p:nvSpPr>
+          <p:cNvPr id="48" name="Texto"/>
+          <p:cNvSpPr txBox="1"/>
+          <p:nvPr/>
+        </p:nvSpPr>
+        <p:spPr>
+          <a:xfrm>
+            <a:off x="5161788" y="3721608"/>
+            <a:ext cx="2560320" cy="475488"/>
+          </a:xfrm>
+          <a:prstGeom prst="roundRect">
+            <a:avLst/>
+          </a:prstGeom>
+          <a:noFill/>
+          <a:ln>
+            <a:noFill/>
+          </a:ln>
+        </p:spPr>
+        <p:txBody>
+          <a:bodyPr wrap="square" lIns="0" tIns="0" rIns="0" bIns="0" rtlCol="0" anchor="ctr"/>
+          <a:lstStyle/>
+          <a:p>
+            <a:pPr algn="l" indent="0" marL="0">
+              <a:buNone/>
+            </a:pPr>
+            <a:r>
+              <a:rPr lang="pt-BR" sz="1400" b="1" dirty="0">
+                <a:solidFill>
+                  <a:srgbClr val="1D2D3E"/>
+                </a:solidFill>
+              </a:rPr>
+              <a:t>Cada app é um projeto</a:t>
+            </a:r>
+            <a:endParaRPr lang="pt-BR" sz="1400" dirty="0"/>
+          </a:p>
+        </p:txBody>
+      </p:sp>
+      <p:sp>
+        <p:nvSpPr>
+          <p:cNvPr id="49" name="Texto"/>
+          <p:cNvSpPr txBox="1"/>
+          <p:nvPr/>
+        </p:nvSpPr>
+        <p:spPr>
+          <a:xfrm>
+            <a:off x="4567428" y="4343400"/>
+            <a:ext cx="3063240" cy="1234440"/>
+          </a:xfrm>
+          <a:prstGeom prst="roundRect">
+            <a:avLst/>
+          </a:prstGeom>
+          <a:noFill/>
+          <a:ln>
+            <a:noFill/>
+          </a:ln>
+        </p:spPr>
+        <p:txBody>
+          <a:bodyPr wrap="square" lIns="0" tIns="0" rIns="0" bIns="0" rtlCol="0" anchor="t"/>
+          <a:lstStyle/>
+          <a:p>
+            <a:pPr algn="l" indent="0" marL="0">
+              <a:buNone/>
+            </a:pPr>
+            <a:r>
+              <a:rPr lang="pt-BR" sz="1200" dirty="0">
+                <a:solidFill>
+                  <a:srgbClr val="1D2D3E"/>
+                </a:solidFill>
+              </a:rPr>
+              <a:t>Os comandos rodam na pasta de cada app alterada. Uma correção no motor das análises vale para as quatro e exige rodar as quatro.</a:t>
+            </a:r>
+            <a:endParaRPr lang="pt-BR" sz="1200" dirty="0"/>
+          </a:p>
+        </p:txBody>
+      </p:sp>
+      <p:cxnSp>
+        <p:nvCxnSpPr>
+          <p:cNvPr id="50" name="Conector"/>
+          <p:cNvCxnSpPr/>
+          <p:nvPr/>
+        </p:nvCxnSpPr>
+        <p:spPr>
+          <a:xfrm>
+            <a:off x="4567428" y="5623560"/>
+            <a:ext cx="3054096" cy="0"/>
+          </a:xfrm>
+          <a:prstGeom prst="line">
+            <a:avLst/>
+          </a:prstGeom>
+          <a:noFill/>
+          <a:ln w="12700">
+            <a:solidFill>
+              <a:srgbClr val="E5E5E5"/>
+            </a:solidFill>
+            <a:prstDash val="solid"/>
+            <a:round/>
+          </a:ln>
+        </p:spPr>
+      </p:cxnSp>
+      <p:sp>
+        <p:nvSpPr>
+          <p:cNvPr id="51" name="Texto"/>
+          <p:cNvSpPr txBox="1"/>
+          <p:nvPr/>
+        </p:nvSpPr>
+        <p:spPr>
+          <a:xfrm>
+            <a:off x="4567428" y="5687568"/>
+            <a:ext cx="3063240" cy="365760"/>
+          </a:xfrm>
+          <a:prstGeom prst="roundRect">
+            <a:avLst/>
+          </a:prstGeom>
+          <a:noFill/>
+          <a:ln>
+            <a:noFill/>
+          </a:ln>
+        </p:spPr>
+        <p:txBody>
+          <a:bodyPr wrap="square" lIns="0" tIns="0" rIns="0" bIns="0" rtlCol="0" anchor="ctr"/>
+          <a:lstStyle/>
+          <a:p>
+            <a:pPr algn="l" indent="0" marL="0">
+              <a:buNone/>
+            </a:pPr>
+            <a:r>
+              <a:rPr lang="pt-BR" sz="1100" b="1" dirty="0">
+                <a:solidFill>
+                  <a:srgbClr val="049F9A"/>
+                </a:solidFill>
+              </a:rPr>
+              <a:t>Escopo: todas as apps tocadas</a:t>
+            </a:r>
+            <a:endParaRPr lang="pt-BR" sz="1100" dirty="0"/>
+          </a:p>
+        </p:txBody>
+      </p:sp>
+      <p:sp>
+        <p:nvSpPr>
+          <p:cNvPr id="52" name="Cartão"/>
+          <p:cNvSpPr/>
+          <p:nvPr/>
+        </p:nvSpPr>
+        <p:spPr>
+          <a:xfrm>
+            <a:off x="8129016" y="3520440"/>
+            <a:ext cx="3511296" cy="2651760"/>
+          </a:xfrm>
+          <a:prstGeom prst="roundRect">
+            <a:avLst>
+              <a:gd name="adj" fmla="val 5217"/>
+            </a:avLst>
+          </a:prstGeom>
+          <a:solidFill>
+            <a:srgbClr val="FFFFFF"/>
+          </a:solidFill>
+          <a:ln>
+            <a:noFill/>
+          </a:ln>
+          <a:effectLst>
+            <a:outerShdw sx="100000" sy="100000" kx="0" ky="0" algn="bl" rotWithShape="0" blurRad="101600" dist="25400" dir="5400000">
+              <a:srgbClr val="223548">
+                <a:alpha val="16000"/>
+              </a:srgbClr>
+            </a:outerShdw>
+          </a:effectLst>
+        </p:spPr>
+      </p:sp>
+      <p:sp>
+        <p:nvSpPr>
+          <p:cNvPr id="53" name="Ícone it-system"/>
+          <p:cNvSpPr/>
+          <p:nvPr/>
+        </p:nvSpPr>
+        <p:spPr>
+          <a:xfrm>
+            <a:off x="8357616" y="3721608"/>
+            <a:ext cx="475488" cy="475488"/>
+          </a:xfrm>
+          <a:prstGeom prst="roundRect">
+            <a:avLst>
+              <a:gd name="adj" fmla="val 22000"/>
+            </a:avLst>
+          </a:prstGeom>
+          <a:solidFill>
+            <a:srgbClr val="F3ECFB"/>
+          </a:solidFill>
+          <a:ln>
+            <a:noFill/>
+          </a:ln>
+        </p:spPr>
+      </p:sp>
+      <p:pic>
+        <p:nvPicPr>
+          <p:cNvPr id="54" name="Imagem" descr="it-system"/>
+          <p:cNvPicPr>
+            <a:picLocks noChangeAspect="1"/>
+          </p:cNvPicPr>
+          <p:nvPr/>
+        </p:nvPicPr>
+        <p:blipFill>
+          <a:blip r:embed="rId10"/>
+          <a:stretch>
+            <a:fillRect/>
+          </a:stretch>
+        </p:blipFill>
+        <p:spPr>
+          <a:xfrm>
+            <a:off x="8471733" y="3835725"/>
+            <a:ext cx="247254" cy="247254"/>
+          </a:xfrm>
+          <a:prstGeom prst="rect">
+            <a:avLst/>
+          </a:prstGeom>
+        </p:spPr>
+      </p:pic>
+      <p:sp>
+        <p:nvSpPr>
+          <p:cNvPr id="55" name="Texto"/>
+          <p:cNvSpPr txBox="1"/>
+          <p:nvPr/>
+        </p:nvSpPr>
+        <p:spPr>
+          <a:xfrm>
+            <a:off x="8951976" y="3721608"/>
+            <a:ext cx="2560320" cy="475488"/>
+          </a:xfrm>
+          <a:prstGeom prst="roundRect">
+            <a:avLst/>
+          </a:prstGeom>
+          <a:noFill/>
+          <a:ln>
+            <a:noFill/>
+          </a:ln>
+        </p:spPr>
+        <p:txBody>
+          <a:bodyPr wrap="square" lIns="0" tIns="0" rIns="0" bIns="0" rtlCol="0" anchor="ctr"/>
+          <a:lstStyle/>
+          <a:p>
+            <a:pPr algn="l" indent="0" marL="0">
+              <a:buNone/>
+            </a:pPr>
+            <a:r>
+              <a:rPr lang="pt-BR" sz="1400" b="1" dirty="0">
+                <a:solidFill>
+                  <a:srgbClr val="1D2D3E"/>
+                </a:solidFill>
+              </a:rPr>
+              <a:t>O sistema é compartilhado</a:t>
+            </a:r>
+            <a:endParaRPr lang="pt-BR" sz="1400" dirty="0"/>
+          </a:p>
+        </p:txBody>
+      </p:sp>
+      <p:sp>
+        <p:nvSpPr>
+          <p:cNvPr id="56" name="Texto"/>
+          <p:cNvSpPr txBox="1"/>
+          <p:nvPr/>
+        </p:nvSpPr>
+        <p:spPr>
+          <a:xfrm>
+            <a:off x="8357616" y="4343400"/>
+            <a:ext cx="3063240" cy="1234440"/>
+          </a:xfrm>
+          <a:prstGeom prst="roundRect">
+            <a:avLst/>
+          </a:prstGeom>
+          <a:noFill/>
+          <a:ln>
+            <a:noFill/>
+          </a:ln>
+        </p:spPr>
+        <p:txBody>
+          <a:bodyPr wrap="square" lIns="0" tIns="0" rIns="0" bIns="0" rtlCol="0" anchor="t"/>
+          <a:lstStyle/>
+          <a:p>
+            <a:pPr algn="l" indent="0" marL="0">
+              <a:buNone/>
+            </a:pPr>
+            <a:r>
+              <a:rPr lang="pt-BR" sz="1200" dirty="0">
+                <a:solidFill>
+                  <a:srgbClr val="1D2D3E"/>
+                </a:solidFill>
+              </a:rPr>
+              <a:t>No BTP trial o pacote ZLOCAL não tem transporte: a versão vale na hora. No On-Premise a ordem leva o mesmo código a QAS e PRD.</a:t>
+            </a:r>
+            <a:endParaRPr lang="pt-BR" sz="1200" dirty="0"/>
+          </a:p>
+        </p:txBody>
+      </p:sp>
+      <p:cxnSp>
+        <p:nvCxnSpPr>
+          <p:cNvPr id="57" name="Conector"/>
+          <p:cNvCxnSpPr/>
+          <p:nvPr/>
+        </p:nvCxnSpPr>
+        <p:spPr>
+          <a:xfrm>
+            <a:off x="8357616" y="5623560"/>
+            <a:ext cx="3054096" cy="0"/>
+          </a:xfrm>
+          <a:prstGeom prst="line">
+            <a:avLst/>
+          </a:prstGeom>
+          <a:noFill/>
+          <a:ln w="12700">
+            <a:solidFill>
+              <a:srgbClr val="E5E5E5"/>
+            </a:solidFill>
+            <a:prstDash val="solid"/>
+            <a:round/>
+          </a:ln>
+        </p:spPr>
+      </p:cxnSp>
+      <p:sp>
+        <p:nvSpPr>
+          <p:cNvPr id="58" name="Texto"/>
+          <p:cNvSpPr txBox="1"/>
+          <p:nvPr/>
+        </p:nvSpPr>
+        <p:spPr>
+          <a:xfrm>
+            <a:off x="8357616" y="5687568"/>
+            <a:ext cx="3063240" cy="365760"/>
+          </a:xfrm>
+          <a:prstGeom prst="roundRect">
+            <a:avLst/>
+          </a:prstGeom>
+          <a:noFill/>
+          <a:ln>
+            <a:noFill/>
+          </a:ln>
+        </p:spPr>
+        <p:txBody>
+          <a:bodyPr wrap="square" lIns="0" tIns="0" rIns="0" bIns="0" rtlCol="0" anchor="ctr"/>
+          <a:lstStyle/>
+          <a:p>
+            <a:pPr algn="l" indent="0" marL="0">
+              <a:buNone/>
+            </a:pPr>
+            <a:r>
+              <a:rPr lang="pt-BR" sz="1100" b="1" dirty="0">
+                <a:solidFill>
+                  <a:srgbClr val="8B47D7"/>
+                </a:solidFill>
+              </a:rPr>
+              <a:t>Impacto: todos os usuários</a:t>
+            </a:r>
+            <a:endParaRPr lang="pt-BR" sz="1100" dirty="0"/>
+          </a:p>
+        </p:txBody>
+      </p:sp>
+      <p:sp>
+        <p:nvSpPr>
+          <p:cNvPr id="59" name="Slide Number Placeholder 0"/>
+          <p:cNvSpPr>
+            <a:spLocks noGrp="1"/>
+          </p:cNvSpPr>
+          <p:nvPr>
+            <p:ph type="sldNum" sz="quarter" idx="4294967295"/>
+          </p:nvPr>
+        </p:nvSpPr>
+        <p:spPr>
+          <a:xfrm>
+            <a:off x="11183112" y="6419088"/>
+            <a:ext cx="457200" cy="274320"/>
+          </a:xfrm>
+          <a:prstGeom prst="rect">
+            <a:avLst/>
+          </a:prstGeom>
+        </p:spPr>
+        <p:txBody>
+          <a:bodyPr lIns="0" tIns="0" rIns="0" bIns="0" anchor="ctr"/>
+          <a:lstStyle>
+            <a:lvl1pPr>
+              <a:defRPr sz="900">
+                <a:solidFill>
+                  <a:srgbClr val="556B82"/>
+                </a:solidFill>
+              </a:defRPr>
+            </a:lvl1pPr>
+          </a:lstStyle>
+          <a:p>
+            <a:pPr algn="r"/>
+            <a:fld id="{F7021451-1387-4CA6-816F-3879F97B5CBC}" type="slidenum">
+              <a:rPr b="0" lang="en-US"/>
+              <a:t>1</a:t>
+            </a:fld>
+            <a:endParaRPr lang="en-US"/>
+          </a:p>
+        </p:txBody>
+      </p:sp>
+    </p:spTree>
+  </p:cSld>
+  <p:clrMapOvr>
+    <a:masterClrMapping/>
+  </p:clrMapOvr>
+</p:sld>
+</file>
+
 <file path=ppt/slides/slide4.xml><?xml version="1.0" encoding="utf-8"?>
 <p:sld xmlns:a="http://schemas.openxmlformats.org/drawingml/2006/main" xmlns:r="http://schemas.openxmlformats.org/officeDocument/2006/relationships" xmlns:p="http://schemas.openxmlformats.org/presentationml/2006/main">
   <p:cSld name="Slide 4">
